--- a/athr-aja-submission.pptx
+++ b/athr-aja-submission.pptx
@@ -2476,7 +2476,7 @@
           <a:bodyPr wrap="square" lIns="0" tIns="0" rIns="0" bIns="0" rtlCol="0" anchor="t"/>
           <a:lstStyle/>
           <a:p>
-            <a:pPr algn="r" indent="0" marL="0">
+            <a:pPr rtl="1" algn="r" indent="0" marL="0">
               <a:lnSpc>
                 <a:spcPts val="2800"/>
               </a:lnSpc>
@@ -2494,12 +2494,12 @@
                 <a:ea typeface="Tajawal" pitchFamily="34" charset="-122"/>
                 <a:cs typeface="Tajawal" pitchFamily="34" charset="-120"/>
               </a:rPr>
-              <a:t>‏·  تطبيقٌ يعمل الآن على الويب، ويُفتح من الرابط بلا تنزيل: w-electro.github.io/athr</a:t>
+              <a:t>·  تطبيقٌ يعمل الآن على الويب، ويُفتح من الرابط بلا تنزيل: w-electro.github.io/athr</a:t>
             </a:r>
             <a:endParaRPr lang="en-US" sz="1600" dirty="0"/>
           </a:p>
           <a:p>
-            <a:pPr algn="r" indent="0" marL="0">
+            <a:pPr rtl="1" algn="r" indent="0" marL="0">
               <a:lnSpc>
                 <a:spcPts val="2800"/>
               </a:lnSpc>
@@ -2517,12 +2517,12 @@
                 <a:ea typeface="Tajawal" pitchFamily="34" charset="-122"/>
                 <a:cs typeface="Tajawal" pitchFamily="34" charset="-120"/>
               </a:rPr>
-              <a:t>‏·  ستّة مواقع وعشر لوحات موثّقة، وتسع وعشرون لغة، ومئةٌ وأربعةٌ وسبعون مقطعًا صوتيًّا.</a:t>
+              <a:t>·  ستّة مواقع، وعشر لوحات موثّقة، وتسع وعشرون لغة، و١٧٤ مقطعًا صوتيًّا.</a:t>
             </a:r>
             <a:endParaRPr lang="en-US" sz="1600" dirty="0"/>
           </a:p>
           <a:p>
-            <a:pPr algn="r" indent="0" marL="0">
+            <a:pPr rtl="1" algn="r" indent="0" marL="0">
               <a:lnSpc>
                 <a:spcPts val="2800"/>
               </a:lnSpc>
@@ -2540,12 +2540,12 @@
                 <a:ea typeface="Tajawal" pitchFamily="34" charset="-122"/>
                 <a:cs typeface="Tajawal" pitchFamily="34" charset="-120"/>
               </a:rPr>
-              <a:t>‏·  ستّمئة وثلاثة وستّون اختبارًا آليًّا تعمل مع كلّ تعديل.</a:t>
+              <a:t>·  ٦٦٣ اختبارًا آليًّا تعمل مع كلّ تعديل.</a:t>
             </a:r>
             <a:endParaRPr lang="en-US" sz="1600" dirty="0"/>
           </a:p>
           <a:p>
-            <a:pPr algn="r" indent="0" marL="0">
+            <a:pPr rtl="1" algn="r" indent="0" marL="0">
               <a:lnSpc>
                 <a:spcPts val="2800"/>
               </a:lnSpc>
@@ -2563,7 +2563,7 @@
                 <a:ea typeface="Tajawal" pitchFamily="34" charset="-122"/>
                 <a:cs typeface="Tajawal" pitchFamily="34" charset="-120"/>
               </a:rPr>
-              <a:t>‏·  الدقّة على صورةٍ جديدة من يومٍ وجهازٍ آخرين: ٧٩٫٣٪ — وصفر إجابة خاطئة على ٥٣ صورة رملٍ وسماء.</a:t>
+              <a:t>·  الدقّة على صورةٍ جديدة من يومٍ وجهازٍ آخرين: ٧٩٫٣٪ — وصفر إجابة خاطئة على ٥٣ صورة رملٍ وسماء.</a:t>
             </a:r>
             <a:endParaRPr lang="en-US" sz="1600" dirty="0"/>
           </a:p>
@@ -2844,7 +2844,7 @@
           <a:bodyPr wrap="square" lIns="0" tIns="0" rIns="0" bIns="0" rtlCol="0" anchor="t"/>
           <a:lstStyle/>
           <a:p>
-            <a:pPr algn="r" indent="0" marL="0">
+            <a:pPr rtl="1" algn="r" indent="0" marL="0">
               <a:lnSpc>
                 <a:spcPts val="2800"/>
               </a:lnSpc>
@@ -2862,12 +2862,12 @@
                 <a:ea typeface="Tajawal" pitchFamily="34" charset="-122"/>
                 <a:cs typeface="Tajawal" pitchFamily="34" charset="-120"/>
               </a:rPr>
-              <a:t>‏·  التطبيق مجّانيّ للزائر دائمًا، ووجهته التالية متجرا آبل وجوجل بلاي.</a:t>
+              <a:t>·  التطبيق مجّانيّ للزائر دائمًا، ووجهته التالية متجرا آبل وجوجل بلاي.</a:t>
             </a:r>
             <a:endParaRPr lang="en-US" sz="1600" dirty="0"/>
           </a:p>
           <a:p>
-            <a:pPr algn="r" indent="0" marL="0">
+            <a:pPr rtl="1" algn="r" indent="0" marL="0">
               <a:lnSpc>
                 <a:spcPts val="2800"/>
               </a:lnSpc>
@@ -2885,12 +2885,12 @@
                 <a:ea typeface="Tajawal" pitchFamily="34" charset="-122"/>
                 <a:cs typeface="Tajawal" pitchFamily="34" charset="-120"/>
               </a:rPr>
-              <a:t>‏·  شركاء محلّيّون: مطاعم ومقاهٍ وفنادق في حائل تُدرَج مواقعها في «رحلتي» برسمٍ سنويّ — الزائر جائعٌ بعد ساعتين في الموقع، والمطعم يريد أن يعرف به.</a:t>
+              <a:t>·  شركاء محلّيّون: مطاعم ومقاهٍ وفنادق في حائل تُدرَج مواقعها في «رحلتي» برسمٍ سنويّ — الزائر جائعٌ بعد ساعتين في الموقع، والمطعم يريد أن يصل إليه.</a:t>
             </a:r>
             <a:endParaRPr lang="en-US" sz="1600" dirty="0"/>
           </a:p>
           <a:p>
-            <a:pPr algn="r" indent="0" marL="0">
+            <a:pPr rtl="1" algn="r" indent="0" marL="0">
               <a:lnSpc>
                 <a:spcPts val="2800"/>
               </a:lnSpc>
@@ -2908,12 +2908,12 @@
                 <a:ea typeface="Tajawal" pitchFamily="34" charset="-122"/>
                 <a:cs typeface="Tajawal" pitchFamily="34" charset="-120"/>
               </a:rPr>
-              <a:t>‏·  وترخيصٌ سنويّ للجهة المشغّلة عن كلّ موقع، ورسوم إعدادٍ لكلّ موقعٍ جديد، ونسخةٌ بيضاء لمتاحف أخرى.</a:t>
+              <a:t>·  وترخيصٌ سنويّ للجهة المشغّلة عن كلّ موقع، ورسوم إعدادٍ لكلّ موقعٍ جديد، ونسخةٌ بيضاء لمتاحف أخرى.</a:t>
             </a:r>
             <a:endParaRPr lang="en-US" sz="1600" dirty="0"/>
           </a:p>
           <a:p>
-            <a:pPr algn="r" indent="0" marL="0">
+            <a:pPr rtl="1" algn="r" indent="0" marL="0">
               <a:lnSpc>
                 <a:spcPts val="2800"/>
               </a:lnSpc>
@@ -2931,7 +2931,7 @@
                 <a:ea typeface="Tajawal" pitchFamily="34" charset="-122"/>
                 <a:cs typeface="Tajawal" pitchFamily="34" charset="-120"/>
               </a:rPr>
-              <a:t>‏·  والتكلفة الحدّية للزائر الإضافي صفر: لا خوادم ولا واجهات مدفوعة — فزائرٌ واحد وزائرٌ مليون سواءٌ في الكلفة.</a:t>
+              <a:t>·  والتكلفة الحدّية للزائر الإضافي صفر: لا خوادم ولا واجهات مدفوعة — فزائرٌ واحد وزائرٌ مليون سواءٌ في الكلفة.</a:t>
             </a:r>
             <a:endParaRPr lang="en-US" sz="1600" dirty="0"/>
           </a:p>
@@ -3212,7 +3212,7 @@
           <a:bodyPr wrap="square" lIns="0" tIns="0" rIns="0" bIns="0" rtlCol="0" anchor="t"/>
           <a:lstStyle/>
           <a:p>
-            <a:pPr algn="r" indent="0" marL="0">
+            <a:pPr rtl="1" algn="r" indent="0" marL="0">
               <a:lnSpc>
                 <a:spcPts val="2800"/>
               </a:lnSpc>
@@ -3230,12 +3230,12 @@
                 <a:ea typeface="Tajawal" pitchFamily="34" charset="-122"/>
                 <a:cs typeface="Tajawal" pitchFamily="34" charset="-120"/>
               </a:rPr>
-              <a:t>‏·  إضافة موقعٍ جديد = تصويرٌ ومحتوًى وترجمة. لا إعادة تدريب، ولا بنية تحتية تُبنى.</a:t>
+              <a:t>·  إضافة موقعٍ جديد = تصويرٌ ومحتوًى وترجمة. لا إعادة تدريب، ولا بنية تحتية تُبنى.</a:t>
             </a:r>
             <a:endParaRPr lang="en-US" sz="1600" dirty="0"/>
           </a:p>
           <a:p>
-            <a:pPr algn="r" indent="0" marL="0">
+            <a:pPr rtl="1" algn="r" indent="0" marL="0">
               <a:lnSpc>
                 <a:spcPts val="2800"/>
               </a:lnSpc>
@@ -3253,12 +3253,12 @@
                 <a:ea typeface="Tajawal" pitchFamily="34" charset="-122"/>
                 <a:cs typeface="Tajawal" pitchFamily="34" charset="-120"/>
               </a:rPr>
-              <a:t>‏·  والفهرس يتوسّع بلا حدّ: النموذج لم يُدرَّب على جبة أصلًا، فهو لا يعرفها أكثر ممّا سيعرف غيرها.</a:t>
+              <a:t>·  والفهرس يتوسّع بلا حدّ: النموذج لم يُدرَّب على جبة أصلًا، فهو لا يعرفها أكثر ممّا سيعرف غيرها.</a:t>
             </a:r>
             <a:endParaRPr lang="en-US" sz="1600" dirty="0"/>
           </a:p>
           <a:p>
-            <a:pPr algn="r" indent="0" marL="0">
+            <a:pPr rtl="1" algn="r" indent="0" marL="0">
               <a:lnSpc>
                 <a:spcPts val="2800"/>
               </a:lnSpc>
@@ -3276,12 +3276,12 @@
                 <a:ea typeface="Tajawal" pitchFamily="34" charset="-122"/>
                 <a:cs typeface="Tajawal" pitchFamily="34" charset="-120"/>
               </a:rPr>
-              <a:t>‏·  قابلٌ للنقل إلى أيّ موقعٍ تراثي في المملكة — العُلا، والأحساء، وبقيّة مواقع حائل.</a:t>
+              <a:t>·  قابلٌ للنقل إلى أيّ موقعٍ تراثي في المملكة — العُلا، والأحساء، وبقيّة مواقع حائل.</a:t>
             </a:r>
             <a:endParaRPr lang="en-US" sz="1600" dirty="0"/>
           </a:p>
           <a:p>
-            <a:pPr algn="r" indent="0" marL="0">
+            <a:pPr rtl="1" algn="r" indent="0" marL="0">
               <a:lnSpc>
                 <a:spcPts val="2800"/>
               </a:lnSpc>
@@ -3299,7 +3299,7 @@
                 <a:ea typeface="Tajawal" pitchFamily="34" charset="-122"/>
                 <a:cs typeface="Tajawal" pitchFamily="34" charset="-120"/>
               </a:rPr>
-              <a:t>‏·  ويتحسّن من نفسه: كلّ زائرٍ يصحّح يزيد دقّة الفهرس لمن بعده.</a:t>
+              <a:t>·  ويتحسّن من تلقاء نفسه: كلّ زائرٍ يصحّح يزيد دقّة الفهرس لمن بعده.</a:t>
             </a:r>
             <a:endParaRPr lang="en-US" sz="1600" dirty="0"/>
           </a:p>
@@ -3653,7 +3653,7 @@
           <a:bodyPr wrap="square" lIns="0" tIns="0" rIns="0" bIns="0" rtlCol="0" anchor="ctr"/>
           <a:lstStyle/>
           <a:p>
-            <a:pPr algn="r" indent="0" marL="0">
+            <a:pPr rtl="1" algn="r" indent="0" marL="0">
               <a:lnSpc>
                 <a:spcPts val="3400"/>
               </a:lnSpc>
@@ -3673,7 +3673,7 @@
             <a:endParaRPr lang="en-US" sz="1800" dirty="0"/>
           </a:p>
           <a:p>
-            <a:pPr algn="r" indent="0" marL="0">
+            <a:pPr rtl="1" algn="r" indent="0" marL="0">
               <a:lnSpc>
                 <a:spcPts val="3400"/>
               </a:lnSpc>
@@ -3682,7 +3682,7 @@
             <a:endParaRPr lang="en-US" sz="1800" dirty="0"/>
           </a:p>
           <a:p>
-            <a:pPr algn="r" indent="0" marL="0">
+            <a:pPr rtl="1" algn="r" indent="0" marL="0">
               <a:lnSpc>
                 <a:spcPts val="3400"/>
               </a:lnSpc>
@@ -3702,7 +3702,7 @@
             <a:endParaRPr lang="en-US" sz="1800" dirty="0"/>
           </a:p>
           <a:p>
-            <a:pPr algn="r" indent="0" marL="0">
+            <a:pPr rtl="1" algn="r" indent="0" marL="0">
               <a:lnSpc>
                 <a:spcPts val="3400"/>
               </a:lnSpc>
@@ -3711,7 +3711,7 @@
             <a:endParaRPr lang="en-US" sz="1800" dirty="0"/>
           </a:p>
           <a:p>
-            <a:pPr algn="r" indent="0" marL="0">
+            <a:pPr rtl="1" algn="r" indent="0" marL="0">
               <a:lnSpc>
                 <a:spcPts val="3400"/>
               </a:lnSpc>
@@ -4046,7 +4046,7 @@
           <a:bodyPr wrap="square" lIns="0" tIns="0" rIns="0" bIns="0" rtlCol="0" anchor="t"/>
           <a:lstStyle/>
           <a:p>
-            <a:pPr algn="r" indent="0" marL="0">
+            <a:pPr rtl="1" algn="r" indent="0" marL="0">
               <a:lnSpc>
                 <a:spcPts val="2800"/>
               </a:lnSpc>
@@ -4064,12 +4064,12 @@
                 <a:ea typeface="Tajawal" pitchFamily="34" charset="-122"/>
                 <a:cs typeface="Tajawal" pitchFamily="34" charset="-120"/>
               </a:rPr>
-              <a:t>‏·  التعرّف على مستوى اللوحة لا الموقع: عشر لوحات موثّقة في جبل أُمّ سِنمان، لكلّ واحدة اسمٌ وقصّةٌ وزمن.</a:t>
+              <a:t>·  التعرّف على مستوى اللوحة لا الموقع: عشر لوحات موثّقة في جبل أُمّ سِنمان، لكلّ واحدة اسمٌ وقصّةٌ وزمن.</a:t>
             </a:r>
             <a:endParaRPr lang="en-US" sz="1600" dirty="0"/>
           </a:p>
           <a:p>
-            <a:pPr algn="r" indent="0" marL="0">
+            <a:pPr rtl="1" algn="r" indent="0" marL="0">
               <a:lnSpc>
                 <a:spcPts val="2800"/>
               </a:lnSpc>
@@ -4087,12 +4087,12 @@
                 <a:ea typeface="Tajawal" pitchFamily="34" charset="-122"/>
                 <a:cs typeface="Tajawal" pitchFamily="34" charset="-120"/>
               </a:rPr>
-              <a:t>‏·  يعمل بلا إنترنت بالكامل — النموذج نفسه، اثنان وعشرون ميغابايت، داخل المتصفّح لا على خادم.</a:t>
+              <a:t>·  يعمل بلا إنترنت بالكامل — النموذج نفسه، اثنان وعشرون ميغابايت، داخل المتصفّح لا على خادم.</a:t>
             </a:r>
             <a:endParaRPr lang="en-US" sz="1600" dirty="0"/>
           </a:p>
           <a:p>
-            <a:pPr algn="r" indent="0" marL="0">
+            <a:pPr rtl="1" algn="r" indent="0" marL="0">
               <a:lnSpc>
                 <a:spcPts val="2800"/>
               </a:lnSpc>
@@ -4110,12 +4110,12 @@
                 <a:ea typeface="Tajawal" pitchFamily="34" charset="-122"/>
                 <a:cs typeface="Tajawal" pitchFamily="34" charset="-120"/>
               </a:rPr>
-              <a:t>‏·  يتعلّم من الزائر على جهازه: تصحيحه يدخل الفهرس فورًا فيصيب في المسح التالي، ويتعلّم الرفض أيضًا.</a:t>
+              <a:t>·  يتعلّم من الزائر على جهازه: تصحيحه يدخل الفهرس فورًا فيصيب في المسح التالي، ويتعلّم الرفض أيضًا.</a:t>
             </a:r>
             <a:endParaRPr lang="en-US" sz="1600" dirty="0"/>
           </a:p>
           <a:p>
-            <a:pPr algn="r" indent="0" marL="0">
+            <a:pPr rtl="1" algn="r" indent="0" marL="0">
               <a:lnSpc>
                 <a:spcPts val="2800"/>
               </a:lnSpc>
@@ -4133,7 +4133,7 @@
                 <a:ea typeface="Tajawal" pitchFamily="34" charset="-122"/>
                 <a:cs typeface="Tajawal" pitchFamily="34" charset="-120"/>
               </a:rPr>
-              <a:t>‏·  دليلٌ يقرأ النقش نفسه، لا لافتةً عند المدخل.</a:t>
+              <a:t>·  دليلٌ يقرأ النقش نفسه، لا لافتةً عند المدخل.</a:t>
             </a:r>
             <a:endParaRPr lang="en-US" sz="1600" dirty="0"/>
           </a:p>
@@ -4414,7 +4414,7 @@
           <a:bodyPr wrap="square" lIns="0" tIns="0" rIns="0" bIns="0" rtlCol="0" anchor="t"/>
           <a:lstStyle/>
           <a:p>
-            <a:pPr algn="r" indent="0" marL="0">
+            <a:pPr rtl="1" algn="r" indent="0" marL="0">
               <a:lnSpc>
                 <a:spcPts val="2800"/>
               </a:lnSpc>
@@ -4432,12 +4432,12 @@
                 <a:ea typeface="Tajawal" pitchFamily="34" charset="-122"/>
                 <a:cs typeface="Tajawal" pitchFamily="34" charset="-120"/>
               </a:rPr>
-              <a:t>‏·  نموذج الرؤية DINOv3 من Meta، مفتوح المصدر — تعلّمَ أشكال الأشياء من ملايين الصور بلا وسمٍ بشري.</a:t>
+              <a:t>·  نموذج الرؤية DINOv3 من Meta، مفتوح المصدر — تعلّمَ أشكال الأشياء من ملايين الصور بلا وسمٍ بشري.</a:t>
             </a:r>
             <a:endParaRPr lang="en-US" sz="1600" dirty="0"/>
           </a:p>
           <a:p>
-            <a:pPr algn="r" indent="0" marL="0">
+            <a:pPr rtl="1" algn="r" indent="0" marL="0">
               <a:lnSpc>
                 <a:spcPts val="2800"/>
               </a:lnSpc>
@@ -4455,12 +4455,12 @@
                 <a:ea typeface="Tajawal" pitchFamily="34" charset="-122"/>
                 <a:cs typeface="Tajawal" pitchFamily="34" charset="-120"/>
               </a:rPr>
-              <a:t>‏·  وبنينا فوقه طبقة التعرّف: فهرس بصمات ٢٠١ صورة ميدانية، وسلّم قصٍّ يعالج اختلاف الإطار، وطبقة قرار تقول «لا أعرف» بدل أن تخمّن، وجمعُ أدلّة عدّة لقطات.</a:t>
+              <a:t>·  وبنينا فوقه طبقة التعرّف: فهرس بصمات ٢٠١ صورة ميدانية، وسلّم قصٍّ يعالج اختلاف الإطار، وطبقة قرار تقول «لا أعرف» بدل أن تخمّن، وجمع أدلّة من عدّة لقطات.</a:t>
             </a:r>
             <a:endParaRPr lang="en-US" sz="1600" dirty="0"/>
           </a:p>
           <a:p>
-            <a:pPr algn="r" indent="0" marL="0">
+            <a:pPr rtl="1" algn="r" indent="0" marL="0">
               <a:lnSpc>
                 <a:spcPts val="2800"/>
               </a:lnSpc>
@@ -4478,12 +4478,12 @@
                 <a:ea typeface="Tajawal" pitchFamily="34" charset="-122"/>
                 <a:cs typeface="Tajawal" pitchFamily="34" charset="-120"/>
               </a:rPr>
-              <a:t>‏·  تعلّمٌ انتقاليّ بالأمثلة على الجهاز — لا ضبط لأوزان الشبكة.</a:t>
+              <a:t>·  تعلّمٌ انتقاليّ بالأمثلة على الجهاز — لا ضبط لأوزان الشبكة.</a:t>
             </a:r>
             <a:endParaRPr lang="en-US" sz="1600" dirty="0"/>
           </a:p>
           <a:p>
-            <a:pPr algn="r" indent="0" marL="0">
+            <a:pPr rtl="1" algn="r" indent="0" marL="0">
               <a:lnSpc>
                 <a:spcPts val="2800"/>
               </a:lnSpc>
@@ -4501,7 +4501,7 @@
                 <a:ea typeface="Tajawal" pitchFamily="34" charset="-122"/>
                 <a:cs typeface="Tajawal" pitchFamily="34" charset="-120"/>
               </a:rPr>
-              <a:t>‏·  وذكاءٌ اصطناعي ثانٍ: توليد الرواية الصوتية بتسع وعشرين لغة بنماذج نطق مفتوحة.</a:t>
+              <a:t>·  وتوظيفٌ ثانٍ للذكاء الاصطناعي: توليد الرواية الصوتية بتسع وعشرين لغة بنماذج نطق مفتوحة المصدر.</a:t>
             </a:r>
             <a:endParaRPr lang="en-US" sz="1600" dirty="0"/>
           </a:p>
@@ -4782,7 +4782,7 @@
           <a:bodyPr wrap="square" lIns="0" tIns="0" rIns="0" bIns="0" rtlCol="0" anchor="t"/>
           <a:lstStyle/>
           <a:p>
-            <a:pPr algn="r" indent="0" marL="0">
+            <a:pPr rtl="1" algn="r" indent="0" marL="0">
               <a:lnSpc>
                 <a:spcPts val="2800"/>
               </a:lnSpc>
@@ -4800,12 +4800,12 @@
                 <a:ea typeface="Tajawal" pitchFamily="34" charset="-122"/>
                 <a:cs typeface="Tajawal" pitchFamily="34" charset="-120"/>
               </a:rPr>
-              <a:t>‏·  جبة موقع تراث عالمي لليونسكو، وفيه مئات اللوحات — والزائر يقف أمام الصخرة ولا يعرف ما أمامه.</a:t>
+              <a:t>·  جبة مسجَّلة في قائمة التراث العالمي لليونسكو، وفيها مئات اللوحات — والزائر يقف أمام الصخرة ولا يعرف ما أمامه.</a:t>
             </a:r>
             <a:endParaRPr lang="en-US" sz="1600" dirty="0"/>
           </a:p>
           <a:p>
-            <a:pPr algn="r" indent="0" marL="0">
+            <a:pPr rtl="1" algn="r" indent="0" marL="0">
               <a:lnSpc>
                 <a:spcPts val="2800"/>
               </a:lnSpc>
@@ -4823,12 +4823,12 @@
                 <a:ea typeface="Tajawal" pitchFamily="34" charset="-122"/>
                 <a:cs typeface="Tajawal" pitchFamily="34" charset="-120"/>
               </a:rPr>
-              <a:t>‏·  ولا تغطية شبكة في الموقع، فكلّ حلٍّ يعتمد على السحابة يسقط هناك.</a:t>
+              <a:t>·  ولا تغطية شبكة في الموقع، فكلّ حلٍّ يعتمد على السحابة يسقط هناك.</a:t>
             </a:r>
             <a:endParaRPr lang="en-US" sz="1600" dirty="0"/>
           </a:p>
           <a:p>
-            <a:pPr algn="r" indent="0" marL="0">
+            <a:pPr rtl="1" algn="r" indent="0" marL="0">
               <a:lnSpc>
                 <a:spcPts val="2800"/>
               </a:lnSpc>
@@ -4846,12 +4846,12 @@
                 <a:ea typeface="Tajawal" pitchFamily="34" charset="-122"/>
                 <a:cs typeface="Tajawal" pitchFamily="34" charset="-120"/>
               </a:rPr>
-              <a:t>‏·  وزوّاره من كلّ مكان: تسع وعشرون لغة، ولكلّ لغة رواية مسموعة.</a:t>
+              <a:t>·  وزوّاره من كلّ مكان: تسع وعشرون لغة، ولكلّ لغة رواية مسموعة.</a:t>
             </a:r>
             <a:endParaRPr lang="en-US" sz="1600" dirty="0"/>
           </a:p>
           <a:p>
-            <a:pPr algn="r" indent="0" marL="0">
+            <a:pPr rtl="1" algn="r" indent="0" marL="0">
               <a:lnSpc>
                 <a:spcPts val="2800"/>
               </a:lnSpc>
@@ -4869,7 +4869,7 @@
                 <a:ea typeface="Tajawal" pitchFamily="34" charset="-122"/>
                 <a:cs typeface="Tajawal" pitchFamily="34" charset="-120"/>
               </a:rPr>
-              <a:t>‏·  والقيمة للجهة المشغّلة: تجربة زائرٍ أفضل بصفر تكلفة تشغيل.</a:t>
+              <a:t>·  والقيمة للجهة المشغّلة: تجربة زائرٍ أفضل بصفر تكلفة تشغيل.</a:t>
             </a:r>
             <a:endParaRPr lang="en-US" sz="1600" dirty="0"/>
           </a:p>

--- a/athr-aja-submission.pptx
+++ b/athr-aja-submission.pptx
@@ -516,7 +516,7 @@
           <a:p>
             <a:r>
               <a:rPr lang="en-US" dirty="0"/>
-              <a:t>اكتب أسماء أعضاء الفريق هنا إن طلبها المحكّمون.</a:t>
+              <a:t>اكتب أسماء أعضاء الفريق هنا إن طلبها المحكمون.</a:t>
             </a:r>
             <a:endParaRPr lang="en-US" dirty="0"/>
           </a:p>
@@ -2329,7 +2329,7 @@
                 <a:ea typeface="Tajawal" pitchFamily="34" charset="-122"/>
                 <a:cs typeface="Tajawal" pitchFamily="34" charset="-120"/>
               </a:rPr>
-              <a:t>فريق أَثَر</a:t>
+              <a:t>فريق أثر</a:t>
             </a:r>
             <a:endParaRPr lang="en-US" sz="2100" dirty="0"/>
           </a:p>
@@ -2424,7 +2424,7 @@
                 <a:ea typeface="Tajawal" pitchFamily="34" charset="-122"/>
                 <a:cs typeface="Tajawal" pitchFamily="34" charset="-120"/>
               </a:rPr>
-              <a:t>جودة الحلّ والنموذج الأولي MVP</a:t>
+              <a:t>جودة الحل والنموذج الأولي MVP</a:t>
             </a:r>
             <a:endParaRPr lang="en-US" sz="2600" dirty="0"/>
           </a:p>
@@ -2481,7 +2481,7 @@
                 <a:spcPts val="2800"/>
               </a:lnSpc>
               <a:spcAft>
-                <a:spcPts val="1400"/>
+                <a:spcPts val="2000"/>
               </a:spcAft>
               <a:buNone/>
             </a:pPr>
@@ -2494,7 +2494,7 @@
                 <a:ea typeface="Tajawal" pitchFamily="34" charset="-122"/>
                 <a:cs typeface="Tajawal" pitchFamily="34" charset="-120"/>
               </a:rPr>
-              <a:t>·  تطبيقٌ يعمل الآن على الويب، ويُفتح من الرابط بلا تنزيل: w-electro.github.io/athr</a:t>
+              <a:t>تطبيق يعمل الآن على الويب، ويفتح من الرابط بلا تنزيل: w-electro.github.io/athr</a:t>
             </a:r>
             <a:endParaRPr lang="en-US" sz="1600" dirty="0"/>
           </a:p>
@@ -2504,7 +2504,7 @@
                 <a:spcPts val="2800"/>
               </a:lnSpc>
               <a:spcAft>
-                <a:spcPts val="1400"/>
+                <a:spcPts val="2000"/>
               </a:spcAft>
               <a:buNone/>
             </a:pPr>
@@ -2517,7 +2517,7 @@
                 <a:ea typeface="Tajawal" pitchFamily="34" charset="-122"/>
                 <a:cs typeface="Tajawal" pitchFamily="34" charset="-120"/>
               </a:rPr>
-              <a:t>·  ستّة مواقع، وعشر لوحات موثّقة، وتسع وعشرون لغة، و١٧٤ مقطعًا صوتيًّا.</a:t>
+              <a:t>ستة مواقع، وعشر لوحات موثقة، وتسع وعشرون لغة، و174 مقطعا صوتيا.</a:t>
             </a:r>
             <a:endParaRPr lang="en-US" sz="1600" dirty="0"/>
           </a:p>
@@ -2527,7 +2527,7 @@
                 <a:spcPts val="2800"/>
               </a:lnSpc>
               <a:spcAft>
-                <a:spcPts val="1400"/>
+                <a:spcPts val="2000"/>
               </a:spcAft>
               <a:buNone/>
             </a:pPr>
@@ -2540,7 +2540,7 @@
                 <a:ea typeface="Tajawal" pitchFamily="34" charset="-122"/>
                 <a:cs typeface="Tajawal" pitchFamily="34" charset="-120"/>
               </a:rPr>
-              <a:t>·  ٦٦٣ اختبارًا آليًّا تعمل مع كلّ تعديل.</a:t>
+              <a:t>663 اختبارا آليا تعمل مع كل تعديل.</a:t>
             </a:r>
             <a:endParaRPr lang="en-US" sz="1600" dirty="0"/>
           </a:p>
@@ -2550,7 +2550,7 @@
                 <a:spcPts val="2800"/>
               </a:lnSpc>
               <a:spcAft>
-                <a:spcPts val="1400"/>
+                <a:spcPts val="2000"/>
               </a:spcAft>
               <a:buNone/>
             </a:pPr>
@@ -2563,7 +2563,30 @@
                 <a:ea typeface="Tajawal" pitchFamily="34" charset="-122"/>
                 <a:cs typeface="Tajawal" pitchFamily="34" charset="-120"/>
               </a:rPr>
-              <a:t>·  الدقّة على صورةٍ جديدة من يومٍ وجهازٍ آخرين: ٧٩٫٣٪ — وصفر إجابة خاطئة على ٥٣ صورة رملٍ وسماء.</a:t>
+              <a:t>الدقة على صورة جديدة من يوم وجهاز آخرين: 79.3% — وصفر إجابة خاطئة على 53 صورة رمل وسماء.</a:t>
+            </a:r>
+            <a:endParaRPr lang="en-US" sz="1600" dirty="0"/>
+          </a:p>
+          <a:p>
+            <a:pPr rtl="1" algn="r" indent="0" marL="0">
+              <a:lnSpc>
+                <a:spcPts val="2800"/>
+              </a:lnSpc>
+              <a:spcAft>
+                <a:spcPts val="2000"/>
+              </a:spcAft>
+              <a:buNone/>
+            </a:pPr>
+            <a:r>
+              <a:rPr lang="en-US" sz="1600" dirty="0">
+                <a:solidFill>
+                  <a:srgbClr val="3C4C60"/>
+                </a:solidFill>
+                <a:latin typeface="Tajawal" pitchFamily="34" charset="0"/>
+                <a:ea typeface="Tajawal" pitchFamily="34" charset="-122"/>
+                <a:cs typeface="Tajawal" pitchFamily="34" charset="-120"/>
+              </a:rPr>
+              <a:t>ولا نخترع ترجمة لنقش ثمودي لا نملك قراءته الموثقة: نعرض جدول الحروف ليطابق الزائر بنفسه. وترجمة مخترعة لنقش عمره ألفا سنة أسوأ من الصمت.</a:t>
             </a:r>
             <a:endParaRPr lang="en-US" sz="1600" dirty="0"/>
           </a:p>
@@ -2849,7 +2872,7 @@
                 <a:spcPts val="2800"/>
               </a:lnSpc>
               <a:spcAft>
-                <a:spcPts val="1400"/>
+                <a:spcPts val="2000"/>
               </a:spcAft>
               <a:buNone/>
             </a:pPr>
@@ -2862,7 +2885,7 @@
                 <a:ea typeface="Tajawal" pitchFamily="34" charset="-122"/>
                 <a:cs typeface="Tajawal" pitchFamily="34" charset="-120"/>
               </a:rPr>
-              <a:t>·  التطبيق مجّانيّ للزائر دائمًا، ووجهته التالية متجرا آبل وجوجل بلاي.</a:t>
+              <a:t>التطبيق مجاني للزائر دائما، ووجهته التالية متجرا آبل وجوجل بلاي.</a:t>
             </a:r>
             <a:endParaRPr lang="en-US" sz="1600" dirty="0"/>
           </a:p>
@@ -2872,7 +2895,7 @@
                 <a:spcPts val="2800"/>
               </a:lnSpc>
               <a:spcAft>
-                <a:spcPts val="1400"/>
+                <a:spcPts val="2000"/>
               </a:spcAft>
               <a:buNone/>
             </a:pPr>
@@ -2885,7 +2908,7 @@
                 <a:ea typeface="Tajawal" pitchFamily="34" charset="-122"/>
                 <a:cs typeface="Tajawal" pitchFamily="34" charset="-120"/>
               </a:rPr>
-              <a:t>·  شركاء محلّيّون: مطاعم ومقاهٍ وفنادق في حائل تُدرَج مواقعها في «رحلتي» برسمٍ سنويّ — الزائر جائعٌ بعد ساعتين في الموقع، والمطعم يريد أن يصل إليه.</a:t>
+              <a:t>شركاء محليون: مطاعم ومقاه وفنادق في حائل ندرج مواقعها في مسار رحلتي برسم سنوي — الزائر جائع بعد ساعتين في الموقع، والمطعم يريد أن يصل إليه.</a:t>
             </a:r>
             <a:endParaRPr lang="en-US" sz="1600" dirty="0"/>
           </a:p>
@@ -2895,7 +2918,7 @@
                 <a:spcPts val="2800"/>
               </a:lnSpc>
               <a:spcAft>
-                <a:spcPts val="1400"/>
+                <a:spcPts val="2000"/>
               </a:spcAft>
               <a:buNone/>
             </a:pPr>
@@ -2908,7 +2931,7 @@
                 <a:ea typeface="Tajawal" pitchFamily="34" charset="-122"/>
                 <a:cs typeface="Tajawal" pitchFamily="34" charset="-120"/>
               </a:rPr>
-              <a:t>·  وترخيصٌ سنويّ للجهة المشغّلة عن كلّ موقع، ورسوم إعدادٍ لكلّ موقعٍ جديد، ونسخةٌ بيضاء لمتاحف أخرى.</a:t>
+              <a:t>وترخيص سنوي للجهة المشغلة عن كل موقع، ورسوم إعداد لكل موقع جديد، ونسخة بيضاء لمتاحف أخرى.</a:t>
             </a:r>
             <a:endParaRPr lang="en-US" sz="1600" dirty="0"/>
           </a:p>
@@ -2918,7 +2941,7 @@
                 <a:spcPts val="2800"/>
               </a:lnSpc>
               <a:spcAft>
-                <a:spcPts val="1400"/>
+                <a:spcPts val="2000"/>
               </a:spcAft>
               <a:buNone/>
             </a:pPr>
@@ -2931,7 +2954,7 @@
                 <a:ea typeface="Tajawal" pitchFamily="34" charset="-122"/>
                 <a:cs typeface="Tajawal" pitchFamily="34" charset="-120"/>
               </a:rPr>
-              <a:t>·  والتكلفة الحدّية للزائر الإضافي صفر: لا خوادم ولا واجهات مدفوعة — فزائرٌ واحد وزائرٌ مليون سواءٌ في الكلفة.</a:t>
+              <a:t>والتكلفة الحدية للزائر الإضافي صفر: لا خوادم ولا واجهات مدفوعة — فزائر واحد وزائر مليون سواء في الكلفة.</a:t>
             </a:r>
             <a:endParaRPr lang="en-US" sz="1600" dirty="0"/>
           </a:p>
@@ -3217,7 +3240,7 @@
                 <a:spcPts val="2800"/>
               </a:lnSpc>
               <a:spcAft>
-                <a:spcPts val="1400"/>
+                <a:spcPts val="2000"/>
               </a:spcAft>
               <a:buNone/>
             </a:pPr>
@@ -3230,7 +3253,7 @@
                 <a:ea typeface="Tajawal" pitchFamily="34" charset="-122"/>
                 <a:cs typeface="Tajawal" pitchFamily="34" charset="-120"/>
               </a:rPr>
-              <a:t>·  إضافة موقعٍ جديد = تصويرٌ ومحتوًى وترجمة. لا إعادة تدريب، ولا بنية تحتية تُبنى.</a:t>
+              <a:t>إضافة موقع جديد = تصوير ومحتوى وترجمة. لا إعادة تدريب، ولا بنية تحتية تبنى.</a:t>
             </a:r>
             <a:endParaRPr lang="en-US" sz="1600" dirty="0"/>
           </a:p>
@@ -3240,7 +3263,7 @@
                 <a:spcPts val="2800"/>
               </a:lnSpc>
               <a:spcAft>
-                <a:spcPts val="1400"/>
+                <a:spcPts val="2000"/>
               </a:spcAft>
               <a:buNone/>
             </a:pPr>
@@ -3253,7 +3276,7 @@
                 <a:ea typeface="Tajawal" pitchFamily="34" charset="-122"/>
                 <a:cs typeface="Tajawal" pitchFamily="34" charset="-120"/>
               </a:rPr>
-              <a:t>·  والفهرس يتوسّع بلا حدّ: النموذج لم يُدرَّب على جبة أصلًا، فهو لا يعرفها أكثر ممّا سيعرف غيرها.</a:t>
+              <a:t>والفهرس يتوسع بلا حد: النموذج لم ندربه على جبة، فهو لا يعرفها أكثر مما سيعرف غيرها.</a:t>
             </a:r>
             <a:endParaRPr lang="en-US" sz="1600" dirty="0"/>
           </a:p>
@@ -3263,7 +3286,7 @@
                 <a:spcPts val="2800"/>
               </a:lnSpc>
               <a:spcAft>
-                <a:spcPts val="1400"/>
+                <a:spcPts val="2000"/>
               </a:spcAft>
               <a:buNone/>
             </a:pPr>
@@ -3276,7 +3299,7 @@
                 <a:ea typeface="Tajawal" pitchFamily="34" charset="-122"/>
                 <a:cs typeface="Tajawal" pitchFamily="34" charset="-120"/>
               </a:rPr>
-              <a:t>·  قابلٌ للنقل إلى أيّ موقعٍ تراثي في المملكة — العُلا، والأحساء، وبقيّة مواقع حائل.</a:t>
+              <a:t>قابل للنقل إلى أي موقع تراثي في المملكة — العلا، والأحساء، وبقية مواقع حائل.</a:t>
             </a:r>
             <a:endParaRPr lang="en-US" sz="1600" dirty="0"/>
           </a:p>
@@ -3286,7 +3309,7 @@
                 <a:spcPts val="2800"/>
               </a:lnSpc>
               <a:spcAft>
-                <a:spcPts val="1400"/>
+                <a:spcPts val="2000"/>
               </a:spcAft>
               <a:buNone/>
             </a:pPr>
@@ -3299,7 +3322,7 @@
                 <a:ea typeface="Tajawal" pitchFamily="34" charset="-122"/>
                 <a:cs typeface="Tajawal" pitchFamily="34" charset="-120"/>
               </a:rPr>
-              <a:t>·  ويتحسّن من تلقاء نفسه: كلّ زائرٍ يصحّح يزيد دقّة الفهرس لمن بعده.</a:t>
+              <a:t>ويتحسن من تلقاء نفسه: كل زائر يصحح يزيد دقة الفهرس لمن بعده.</a:t>
             </a:r>
             <a:endParaRPr lang="en-US" sz="1600" dirty="0"/>
           </a:p>
@@ -3442,7 +3465,7 @@
                 <a:ea typeface="Tajawal" pitchFamily="34" charset="-122"/>
                 <a:cs typeface="Tajawal" pitchFamily="34" charset="-120"/>
               </a:rPr>
-              <a:t>شكرًا لكم</a:t>
+              <a:t>شكرا لكم</a:t>
             </a:r>
             <a:endParaRPr lang="en-US" sz="3800" dirty="0"/>
           </a:p>
@@ -3601,7 +3624,7 @@
                 <a:ea typeface="Tajawal" pitchFamily="34" charset="-122"/>
                 <a:cs typeface="Tajawal" pitchFamily="34" charset="-120"/>
               </a:rPr>
-              <a:t>نبذة عنّا</a:t>
+              <a:t>نبذة عنا</a:t>
             </a:r>
             <a:endParaRPr lang="en-US" sz="3000" dirty="0"/>
           </a:p>
@@ -3697,7 +3720,7 @@
                 <a:ea typeface="Tajawal" pitchFamily="34" charset="-122"/>
                 <a:cs typeface="Tajawal" pitchFamily="34" charset="-120"/>
               </a:rPr>
-              <a:t>يوجّه الزائر كاميرا جوّاله على النقش الصخري، فيتعرّف التطبيق على اللوحة بعينها، ويروي قصّتها مسموعةً بلغته — تسع وعشرون لغة.</a:t>
+              <a:t>يوجه الزائر كاميرا جواله على النقش الصخري، فيتعرف التطبيق على اللوحة بعينها، ويروي قصتها مسموعة بلغته — تسع وعشرون لغة.</a:t>
             </a:r>
             <a:endParaRPr lang="en-US" sz="1800" dirty="0"/>
           </a:p>
@@ -3726,48 +3749,9 @@
                 <a:ea typeface="Tajawal" pitchFamily="34" charset="-122"/>
                 <a:cs typeface="Tajawal" pitchFamily="34" charset="-120"/>
               </a:rPr>
-              <a:t>وكلّ شيء داخل الجوّال: لا خادم، ولا اشتراك، ولا إنترنت بعد أوّل تحميل.</a:t>
+              <a:t>وكل شيء داخل الجوال: لا خادم، ولا اشتراك، ولا إنترنت بعد أول تحميل.</a:t>
             </a:r>
             <a:endParaRPr lang="en-US" sz="1800" dirty="0"/>
-          </a:p>
-        </p:txBody>
-      </p:sp>
-      <p:sp>
-        <p:nvSpPr>
-          <p:cNvPr id="6" name="Text 3"/>
-          <p:cNvSpPr/>
-          <p:nvPr/>
-        </p:nvSpPr>
-        <p:spPr>
-          <a:xfrm>
-            <a:off x="868680" y="4572000"/>
-            <a:ext cx="10454335" cy="457200"/>
-          </a:xfrm>
-          <a:prstGeom prst="rect">
-            <a:avLst/>
-          </a:prstGeom>
-          <a:noFill/>
-          <a:ln/>
-        </p:spPr>
-        <p:txBody>
-          <a:bodyPr wrap="square" lIns="0" tIns="0" rIns="0" bIns="0" rtlCol="0" anchor="ctr"/>
-          <a:lstStyle/>
-          <a:p>
-            <a:pPr rtl="1" algn="r" indent="0" marL="0">
-              <a:buNone/>
-            </a:pPr>
-            <a:r>
-              <a:rPr lang="en-US" sz="1500" i="1" dirty="0">
-                <a:solidFill>
-                  <a:srgbClr val="8794A6"/>
-                </a:solidFill>
-                <a:latin typeface="Tajawal" pitchFamily="34" charset="0"/>
-                <a:ea typeface="Tajawal" pitchFamily="34" charset="-122"/>
-                <a:cs typeface="Tajawal" pitchFamily="34" charset="-120"/>
-              </a:rPr>
-              <a:t>الفريق:  [تُكتب أسماء الأعضاء وأدوارهم]</a:t>
-            </a:r>
-            <a:endParaRPr lang="en-US" sz="1500" dirty="0"/>
           </a:p>
         </p:txBody>
       </p:sp>
@@ -4051,7 +4035,7 @@
                 <a:spcPts val="2800"/>
               </a:lnSpc>
               <a:spcAft>
-                <a:spcPts val="1400"/>
+                <a:spcPts val="2000"/>
               </a:spcAft>
               <a:buNone/>
             </a:pPr>
@@ -4064,7 +4048,7 @@
                 <a:ea typeface="Tajawal" pitchFamily="34" charset="-122"/>
                 <a:cs typeface="Tajawal" pitchFamily="34" charset="-120"/>
               </a:rPr>
-              <a:t>·  التعرّف على مستوى اللوحة لا الموقع: عشر لوحات موثّقة في جبل أُمّ سِنمان، لكلّ واحدة اسمٌ وقصّةٌ وزمن.</a:t>
+              <a:t>التعرف على مستوى اللوحة لا الموقع: عشر لوحات موثقة في جبل أم سنمان، لكل واحدة اسم وقصة وزمن.</a:t>
             </a:r>
             <a:endParaRPr lang="en-US" sz="1600" dirty="0"/>
           </a:p>
@@ -4074,7 +4058,7 @@
                 <a:spcPts val="2800"/>
               </a:lnSpc>
               <a:spcAft>
-                <a:spcPts val="1400"/>
+                <a:spcPts val="2000"/>
               </a:spcAft>
               <a:buNone/>
             </a:pPr>
@@ -4087,7 +4071,7 @@
                 <a:ea typeface="Tajawal" pitchFamily="34" charset="-122"/>
                 <a:cs typeface="Tajawal" pitchFamily="34" charset="-120"/>
               </a:rPr>
-              <a:t>·  يعمل بلا إنترنت بالكامل — النموذج نفسه، اثنان وعشرون ميغابايت، داخل المتصفّح لا على خادم.</a:t>
+              <a:t>يعمل بلا إنترنت بالكامل — النموذج نفسه، اثنان وعشرون ميغابايت، داخل المتصفح لا على خادم.</a:t>
             </a:r>
             <a:endParaRPr lang="en-US" sz="1600" dirty="0"/>
           </a:p>
@@ -4097,7 +4081,7 @@
                 <a:spcPts val="2800"/>
               </a:lnSpc>
               <a:spcAft>
-                <a:spcPts val="1400"/>
+                <a:spcPts val="2000"/>
               </a:spcAft>
               <a:buNone/>
             </a:pPr>
@@ -4110,7 +4094,7 @@
                 <a:ea typeface="Tajawal" pitchFamily="34" charset="-122"/>
                 <a:cs typeface="Tajawal" pitchFamily="34" charset="-120"/>
               </a:rPr>
-              <a:t>·  يتعلّم من الزائر على جهازه: تصحيحه يدخل الفهرس فورًا فيصيب في المسح التالي، ويتعلّم الرفض أيضًا.</a:t>
+              <a:t>يتعلم من الزائر على جهازه: تصحيحه يدخل الفهرس فورا فيصيب في المسح التالي، ويتعلم الرفض أيضا.</a:t>
             </a:r>
             <a:endParaRPr lang="en-US" sz="1600" dirty="0"/>
           </a:p>
@@ -4120,7 +4104,7 @@
                 <a:spcPts val="2800"/>
               </a:lnSpc>
               <a:spcAft>
-                <a:spcPts val="1400"/>
+                <a:spcPts val="2000"/>
               </a:spcAft>
               <a:buNone/>
             </a:pPr>
@@ -4133,7 +4117,30 @@
                 <a:ea typeface="Tajawal" pitchFamily="34" charset="-122"/>
                 <a:cs typeface="Tajawal" pitchFamily="34" charset="-120"/>
               </a:rPr>
-              <a:t>·  دليلٌ يقرأ النقش نفسه، لا لافتةً عند المدخل.</a:t>
+              <a:t>دليل يقرأ النقش نفسه، لا لافتة عند المدخل.</a:t>
+            </a:r>
+            <a:endParaRPr lang="en-US" sz="1600" dirty="0"/>
+          </a:p>
+          <a:p>
+            <a:pPr rtl="1" algn="r" indent="0" marL="0">
+              <a:lnSpc>
+                <a:spcPts val="2800"/>
+              </a:lnSpc>
+              <a:spcAft>
+                <a:spcPts val="2000"/>
+              </a:spcAft>
+              <a:buNone/>
+            </a:pPr>
+            <a:r>
+              <a:rPr lang="en-US" sz="1600" dirty="0">
+                <a:solidFill>
+                  <a:srgbClr val="3C4C60"/>
+                </a:solidFill>
+                <a:latin typeface="Tajawal" pitchFamily="34" charset="0"/>
+                <a:ea typeface="Tajawal" pitchFamily="34" charset="-122"/>
+                <a:cs typeface="Tajawal" pitchFamily="34" charset="-120"/>
+              </a:rPr>
+              <a:t>وطبقة للخط الثمودي: جدول الحروف الرسمي من هيئة تطوير منطقة حائل، وحقائق الخط التي تفسر حيرة الزائر — أنه بلا حركات، واتجاهه متقلب، وبلا فواصل بين الكلمات.</a:t>
             </a:r>
             <a:endParaRPr lang="en-US" sz="1600" dirty="0"/>
           </a:p>
@@ -4419,7 +4426,7 @@
                 <a:spcPts val="2800"/>
               </a:lnSpc>
               <a:spcAft>
-                <a:spcPts val="1400"/>
+                <a:spcPts val="2000"/>
               </a:spcAft>
               <a:buNone/>
             </a:pPr>
@@ -4432,7 +4439,7 @@
                 <a:ea typeface="Tajawal" pitchFamily="34" charset="-122"/>
                 <a:cs typeface="Tajawal" pitchFamily="34" charset="-120"/>
               </a:rPr>
-              <a:t>·  نموذج الرؤية DINOv3 من Meta، مفتوح المصدر — تعلّمَ أشكال الأشياء من ملايين الصور بلا وسمٍ بشري.</a:t>
+              <a:t>نموذج الرؤية DINOv3 من Meta، مفتوح المصدر — تعلم أشكال الأشياء من ملايين الصور بلا وسم بشري.</a:t>
             </a:r>
             <a:endParaRPr lang="en-US" sz="1600" dirty="0"/>
           </a:p>
@@ -4442,7 +4449,7 @@
                 <a:spcPts val="2800"/>
               </a:lnSpc>
               <a:spcAft>
-                <a:spcPts val="1400"/>
+                <a:spcPts val="2000"/>
               </a:spcAft>
               <a:buNone/>
             </a:pPr>
@@ -4455,7 +4462,7 @@
                 <a:ea typeface="Tajawal" pitchFamily="34" charset="-122"/>
                 <a:cs typeface="Tajawal" pitchFamily="34" charset="-120"/>
               </a:rPr>
-              <a:t>·  وبنينا فوقه طبقة التعرّف: فهرس بصمات ٢٠١ صورة ميدانية، وسلّم قصٍّ يعالج اختلاف الإطار، وطبقة قرار تقول «لا أعرف» بدل أن تخمّن، وجمع أدلّة من عدّة لقطات.</a:t>
+              <a:t>وبنينا فوقه طبقة التعرف: فهرس بصمات 201 صورة ميدانية، وسلم قص يعالج اختلاف الإطار، وطبقة قرار تقول: لا أعرف — بدل أن تخمن، وجمع أدلة من عدة لقطات.</a:t>
             </a:r>
             <a:endParaRPr lang="en-US" sz="1600" dirty="0"/>
           </a:p>
@@ -4465,7 +4472,7 @@
                 <a:spcPts val="2800"/>
               </a:lnSpc>
               <a:spcAft>
-                <a:spcPts val="1400"/>
+                <a:spcPts val="2000"/>
               </a:spcAft>
               <a:buNone/>
             </a:pPr>
@@ -4478,7 +4485,7 @@
                 <a:ea typeface="Tajawal" pitchFamily="34" charset="-122"/>
                 <a:cs typeface="Tajawal" pitchFamily="34" charset="-120"/>
               </a:rPr>
-              <a:t>·  تعلّمٌ انتقاليّ بالأمثلة على الجهاز — لا ضبط لأوزان الشبكة.</a:t>
+              <a:t>تعلم انتقالي بالأمثلة على الجهاز — لا ضبط لأوزان الشبكة.</a:t>
             </a:r>
             <a:endParaRPr lang="en-US" sz="1600" dirty="0"/>
           </a:p>
@@ -4488,7 +4495,7 @@
                 <a:spcPts val="2800"/>
               </a:lnSpc>
               <a:spcAft>
-                <a:spcPts val="1400"/>
+                <a:spcPts val="2000"/>
               </a:spcAft>
               <a:buNone/>
             </a:pPr>
@@ -4501,7 +4508,7 @@
                 <a:ea typeface="Tajawal" pitchFamily="34" charset="-122"/>
                 <a:cs typeface="Tajawal" pitchFamily="34" charset="-120"/>
               </a:rPr>
-              <a:t>·  وتوظيفٌ ثانٍ للذكاء الاصطناعي: توليد الرواية الصوتية بتسع وعشرين لغة بنماذج نطق مفتوحة المصدر.</a:t>
+              <a:t>وتوظيف ثان للذكاء الاصطناعي: توليد الرواية الصوتية بتسع وعشرين لغة بنماذج نطق مفتوحة المصدر.</a:t>
             </a:r>
             <a:endParaRPr lang="en-US" sz="1600" dirty="0"/>
           </a:p>
@@ -4635,7 +4642,7 @@
                 <a:ea typeface="Tajawal" pitchFamily="34" charset="-122"/>
                 <a:cs typeface="Tajawal" pitchFamily="34" charset="-120"/>
               </a:rPr>
-              <a:t>حاجة السوق والقيمة المقدَّمة</a:t>
+              <a:t>حاجة السوق والقيمة المقدمة</a:t>
             </a:r>
             <a:endParaRPr lang="en-US" sz="3800" dirty="0"/>
           </a:p>
@@ -4730,7 +4737,7 @@
                 <a:ea typeface="Tajawal" pitchFamily="34" charset="-122"/>
                 <a:cs typeface="Tajawal" pitchFamily="34" charset="-120"/>
               </a:rPr>
-              <a:t>حاجة السوق والقيمة المقدَّمة</a:t>
+              <a:t>حاجة السوق والقيمة المقدمة</a:t>
             </a:r>
             <a:endParaRPr lang="en-US" sz="2600" dirty="0"/>
           </a:p>
@@ -4787,7 +4794,7 @@
                 <a:spcPts val="2800"/>
               </a:lnSpc>
               <a:spcAft>
-                <a:spcPts val="1400"/>
+                <a:spcPts val="2000"/>
               </a:spcAft>
               <a:buNone/>
             </a:pPr>
@@ -4800,7 +4807,7 @@
                 <a:ea typeface="Tajawal" pitchFamily="34" charset="-122"/>
                 <a:cs typeface="Tajawal" pitchFamily="34" charset="-120"/>
               </a:rPr>
-              <a:t>·  جبة مسجَّلة في قائمة التراث العالمي لليونسكو، وفيها مئات اللوحات — والزائر يقف أمام الصخرة ولا يعرف ما أمامه.</a:t>
+              <a:t>جبة مسجلة في قائمة التراث العالمي لليونسكو، وفيها مئات اللوحات — والزائر يقف أمام الصخرة ولا يعرف ما أمامه.</a:t>
             </a:r>
             <a:endParaRPr lang="en-US" sz="1600" dirty="0"/>
           </a:p>
@@ -4810,7 +4817,7 @@
                 <a:spcPts val="2800"/>
               </a:lnSpc>
               <a:spcAft>
-                <a:spcPts val="1400"/>
+                <a:spcPts val="2000"/>
               </a:spcAft>
               <a:buNone/>
             </a:pPr>
@@ -4823,7 +4830,7 @@
                 <a:ea typeface="Tajawal" pitchFamily="34" charset="-122"/>
                 <a:cs typeface="Tajawal" pitchFamily="34" charset="-120"/>
               </a:rPr>
-              <a:t>·  ولا تغطية شبكة في الموقع، فكلّ حلٍّ يعتمد على السحابة يسقط هناك.</a:t>
+              <a:t>ولا تغطية شبكة في الموقع، فكل حل يعتمد على السحابة يسقط هناك.</a:t>
             </a:r>
             <a:endParaRPr lang="en-US" sz="1600" dirty="0"/>
           </a:p>
@@ -4833,7 +4840,7 @@
                 <a:spcPts val="2800"/>
               </a:lnSpc>
               <a:spcAft>
-                <a:spcPts val="1400"/>
+                <a:spcPts val="2000"/>
               </a:spcAft>
               <a:buNone/>
             </a:pPr>
@@ -4846,7 +4853,7 @@
                 <a:ea typeface="Tajawal" pitchFamily="34" charset="-122"/>
                 <a:cs typeface="Tajawal" pitchFamily="34" charset="-120"/>
               </a:rPr>
-              <a:t>·  وزوّاره من كلّ مكان: تسع وعشرون لغة، ولكلّ لغة رواية مسموعة.</a:t>
+              <a:t>وزواره من كل مكان: تسع وعشرون لغة، ولكل لغة رواية مسموعة.</a:t>
             </a:r>
             <a:endParaRPr lang="en-US" sz="1600" dirty="0"/>
           </a:p>
@@ -4856,7 +4863,7 @@
                 <a:spcPts val="2800"/>
               </a:lnSpc>
               <a:spcAft>
-                <a:spcPts val="1400"/>
+                <a:spcPts val="2000"/>
               </a:spcAft>
               <a:buNone/>
             </a:pPr>
@@ -4869,7 +4876,7 @@
                 <a:ea typeface="Tajawal" pitchFamily="34" charset="-122"/>
                 <a:cs typeface="Tajawal" pitchFamily="34" charset="-120"/>
               </a:rPr>
-              <a:t>·  والقيمة للجهة المشغّلة: تجربة زائرٍ أفضل بصفر تكلفة تشغيل.</a:t>
+              <a:t>والقيمة للجهة المشغلة: تجربة زائر أفضل بصفر تكلفة تشغيل.</a:t>
             </a:r>
             <a:endParaRPr lang="en-US" sz="1600" dirty="0"/>
           </a:p>
@@ -5003,7 +5010,7 @@
                 <a:ea typeface="Tajawal" pitchFamily="34" charset="-122"/>
                 <a:cs typeface="Tajawal" pitchFamily="34" charset="-120"/>
               </a:rPr>
-              <a:t>جودة الحلّ والنموذج الأولي MVP</a:t>
+              <a:t>جودة الحل والنموذج الأولي MVP</a:t>
             </a:r>
             <a:endParaRPr lang="en-US" sz="3800" dirty="0"/>
           </a:p>

--- a/athr-aja-submission.pptx
+++ b/athr-aja-submission.pptx
@@ -516,7 +516,7 @@
           <a:p>
             <a:r>
               <a:rPr lang="en-US" dirty="0"/>
-              <a:t>اكتب أسماء أعضاء الفريق هنا إن طلبها المحكمون.</a:t>
+              <a:t/>
             </a:r>
             <a:endParaRPr lang="en-US" dirty="0"/>
           </a:p>
@@ -2162,7 +2162,7 @@
         <p:spPr>
           <a:xfrm>
             <a:off x="457200" y="384048"/>
-            <a:ext cx="1371600" cy="914400"/>
+            <a:ext cx="1371600" cy="512064"/>
           </a:xfrm>
           <a:prstGeom prst="rect">
             <a:avLst/>
@@ -2399,8 +2399,8 @@
         </p:nvSpPr>
         <p:spPr>
           <a:xfrm>
-            <a:off x="868680" y="658368"/>
-            <a:ext cx="10454335" cy="502920"/>
+            <a:off x="777240" y="548640"/>
+            <a:ext cx="10637215" cy="502920"/>
           </a:xfrm>
           <a:prstGeom prst="rect">
             <a:avLst/>
@@ -2432,24 +2432,380 @@
       </p:sp>
       <p:sp>
         <p:nvSpPr>
-          <p:cNvPr id="4" name="Shape 1"/>
-          <p:cNvSpPr/>
-          <p:nvPr/>
-        </p:nvSpPr>
-        <p:spPr>
-          <a:xfrm>
-            <a:off x="9768535" y="1243584"/>
-            <a:ext cx="1554480" cy="54864"/>
-          </a:xfrm>
-          <a:prstGeom prst="rect">
-            <a:avLst/>
+          <p:cNvPr id="4" name="Text 1"/>
+          <p:cNvSpPr/>
+          <p:nvPr/>
+        </p:nvSpPr>
+        <p:spPr>
+          <a:xfrm>
+            <a:off x="777240" y="1115568"/>
+            <a:ext cx="10637215" cy="310896"/>
+          </a:xfrm>
+          <a:prstGeom prst="rect">
+            <a:avLst/>
+          </a:prstGeom>
+          <a:noFill/>
+          <a:ln/>
+        </p:spPr>
+        <p:txBody>
+          <a:bodyPr wrap="square" lIns="0" tIns="0" rIns="0" bIns="0" rtlCol="0" anchor="ctr"/>
+          <a:lstStyle/>
+          <a:p>
+            <a:pPr rtl="1" algn="r" indent="0" marL="0">
+              <a:buNone/>
+            </a:pPr>
+            <a:r>
+              <a:rPr lang="en-US" sz="1300" dirty="0">
+                <a:solidFill>
+                  <a:srgbClr val="4B5B6E"/>
+                </a:solidFill>
+                <a:latin typeface="Tajawal" pitchFamily="34" charset="0"/>
+                <a:ea typeface="Tajawal" pitchFamily="34" charset="-122"/>
+                <a:cs typeface="Tajawal" pitchFamily="34" charset="-120"/>
+              </a:rPr>
+              <a:t>تطبيق يعمل الآن على الويب، يفتح من الرابط بلا تنزيل:   w-electro.github.io/athr</a:t>
+            </a:r>
+            <a:endParaRPr lang="en-US" sz="1300" dirty="0"/>
+          </a:p>
+        </p:txBody>
+      </p:sp>
+      <p:pic>
+        <p:nvPicPr>
+          <p:cNvPr id="5" name="Image 1" descr="preencoded.png">    </p:cNvPr>
+          <p:cNvPicPr>
+            <a:picLocks noChangeAspect="1"/>
+          </p:cNvPicPr>
+          <p:nvPr/>
+        </p:nvPicPr>
+        <p:blipFill>
+          <a:blip r:embed="rId2"/>
+          <a:stretch>
+            <a:fillRect/>
+          </a:stretch>
+        </p:blipFill>
+        <p:spPr>
+          <a:xfrm>
+            <a:off x="10297399" y="1536192"/>
+            <a:ext cx="1117057" cy="2331720"/>
+          </a:xfrm>
+          <a:prstGeom prst="rect">
+            <a:avLst/>
+          </a:prstGeom>
+        </p:spPr>
+      </p:pic>
+      <p:sp>
+        <p:nvSpPr>
+          <p:cNvPr id="6" name="Text 2"/>
+          <p:cNvSpPr/>
+          <p:nvPr/>
+        </p:nvSpPr>
+        <p:spPr>
+          <a:xfrm>
+            <a:off x="10187671" y="3941064"/>
+            <a:ext cx="1336513" cy="256032"/>
+          </a:xfrm>
+          <a:prstGeom prst="rect">
+            <a:avLst/>
+          </a:prstGeom>
+          <a:noFill/>
+          <a:ln/>
+        </p:spPr>
+        <p:txBody>
+          <a:bodyPr wrap="square" lIns="0" tIns="0" rIns="0" bIns="0" rtlCol="0" anchor="ctr"/>
+          <a:lstStyle/>
+          <a:p>
+            <a:pPr rtl="1" algn="ctr" indent="0" marL="0">
+              <a:buNone/>
+            </a:pPr>
+            <a:r>
+              <a:rPr lang="en-US" sz="1050" dirty="0">
+                <a:solidFill>
+                  <a:srgbClr val="4B5B6E"/>
+                </a:solidFill>
+                <a:latin typeface="Tajawal" pitchFamily="34" charset="0"/>
+                <a:ea typeface="Tajawal" pitchFamily="34" charset="-122"/>
+                <a:cs typeface="Tajawal" pitchFamily="34" charset="-120"/>
+              </a:rPr>
+              <a:t>اختيار اللغة</a:t>
+            </a:r>
+            <a:endParaRPr lang="en-US" sz="1050" dirty="0"/>
+          </a:p>
+        </p:txBody>
+      </p:sp>
+      <p:pic>
+        <p:nvPicPr>
+          <p:cNvPr id="7" name="Image 2" descr="preencoded.png">    </p:cNvPr>
+          <p:cNvPicPr>
+            <a:picLocks noChangeAspect="1"/>
+          </p:cNvPicPr>
+          <p:nvPr/>
+        </p:nvPicPr>
+        <p:blipFill>
+          <a:blip r:embed="rId3"/>
+          <a:stretch>
+            <a:fillRect/>
+          </a:stretch>
+        </p:blipFill>
+        <p:spPr>
+          <a:xfrm>
+            <a:off x="7917359" y="1536192"/>
+            <a:ext cx="1117057" cy="2331720"/>
+          </a:xfrm>
+          <a:prstGeom prst="rect">
+            <a:avLst/>
+          </a:prstGeom>
+        </p:spPr>
+      </p:pic>
+      <p:sp>
+        <p:nvSpPr>
+          <p:cNvPr id="8" name="Text 3"/>
+          <p:cNvSpPr/>
+          <p:nvPr/>
+        </p:nvSpPr>
+        <p:spPr>
+          <a:xfrm>
+            <a:off x="7807631" y="3941064"/>
+            <a:ext cx="1336513" cy="256032"/>
+          </a:xfrm>
+          <a:prstGeom prst="rect">
+            <a:avLst/>
+          </a:prstGeom>
+          <a:noFill/>
+          <a:ln/>
+        </p:spPr>
+        <p:txBody>
+          <a:bodyPr wrap="square" lIns="0" tIns="0" rIns="0" bIns="0" rtlCol="0" anchor="ctr"/>
+          <a:lstStyle/>
+          <a:p>
+            <a:pPr rtl="1" algn="ctr" indent="0" marL="0">
+              <a:buNone/>
+            </a:pPr>
+            <a:r>
+              <a:rPr lang="en-US" sz="1050" dirty="0">
+                <a:solidFill>
+                  <a:srgbClr val="4B5B6E"/>
+                </a:solidFill>
+                <a:latin typeface="Tajawal" pitchFamily="34" charset="0"/>
+                <a:ea typeface="Tajawal" pitchFamily="34" charset="-122"/>
+                <a:cs typeface="Tajawal" pitchFamily="34" charset="-120"/>
+              </a:rPr>
+              <a:t>الاستكشاف</a:t>
+            </a:r>
+            <a:endParaRPr lang="en-US" sz="1050" dirty="0"/>
+          </a:p>
+        </p:txBody>
+      </p:sp>
+      <p:pic>
+        <p:nvPicPr>
+          <p:cNvPr id="9" name="Image 3" descr="preencoded.png">    </p:cNvPr>
+          <p:cNvPicPr>
+            <a:picLocks noChangeAspect="1"/>
+          </p:cNvPicPr>
+          <p:nvPr/>
+        </p:nvPicPr>
+        <p:blipFill>
+          <a:blip r:embed="rId4"/>
+          <a:stretch>
+            <a:fillRect/>
+          </a:stretch>
+        </p:blipFill>
+        <p:spPr>
+          <a:xfrm>
+            <a:off x="5537319" y="1536192"/>
+            <a:ext cx="1117057" cy="2331720"/>
+          </a:xfrm>
+          <a:prstGeom prst="rect">
+            <a:avLst/>
+          </a:prstGeom>
+        </p:spPr>
+      </p:pic>
+      <p:sp>
+        <p:nvSpPr>
+          <p:cNvPr id="10" name="Text 4"/>
+          <p:cNvSpPr/>
+          <p:nvPr/>
+        </p:nvSpPr>
+        <p:spPr>
+          <a:xfrm>
+            <a:off x="5427591" y="3941064"/>
+            <a:ext cx="1336513" cy="256032"/>
+          </a:xfrm>
+          <a:prstGeom prst="rect">
+            <a:avLst/>
+          </a:prstGeom>
+          <a:noFill/>
+          <a:ln/>
+        </p:spPr>
+        <p:txBody>
+          <a:bodyPr wrap="square" lIns="0" tIns="0" rIns="0" bIns="0" rtlCol="0" anchor="ctr"/>
+          <a:lstStyle/>
+          <a:p>
+            <a:pPr rtl="1" algn="ctr" indent="0" marL="0">
+              <a:buNone/>
+            </a:pPr>
+            <a:r>
+              <a:rPr lang="en-US" sz="1050" dirty="0">
+                <a:solidFill>
+                  <a:srgbClr val="4B5B6E"/>
+                </a:solidFill>
+                <a:latin typeface="Tajawal" pitchFamily="34" charset="0"/>
+                <a:ea typeface="Tajawal" pitchFamily="34" charset="-122"/>
+                <a:cs typeface="Tajawal" pitchFamily="34" charset="-120"/>
+              </a:rPr>
+              <a:t>القصة والصوت</a:t>
+            </a:r>
+            <a:endParaRPr lang="en-US" sz="1050" dirty="0"/>
+          </a:p>
+        </p:txBody>
+      </p:sp>
+      <p:pic>
+        <p:nvPicPr>
+          <p:cNvPr id="11" name="Image 4" descr="preencoded.png">    </p:cNvPr>
+          <p:cNvPicPr>
+            <a:picLocks noChangeAspect="1"/>
+          </p:cNvPicPr>
+          <p:nvPr/>
+        </p:nvPicPr>
+        <p:blipFill>
+          <a:blip r:embed="rId5"/>
+          <a:stretch>
+            <a:fillRect/>
+          </a:stretch>
+        </p:blipFill>
+        <p:spPr>
+          <a:xfrm>
+            <a:off x="3157280" y="1536192"/>
+            <a:ext cx="1117057" cy="2331720"/>
+          </a:xfrm>
+          <a:prstGeom prst="rect">
+            <a:avLst/>
+          </a:prstGeom>
+        </p:spPr>
+      </p:pic>
+      <p:sp>
+        <p:nvSpPr>
+          <p:cNvPr id="12" name="Text 5"/>
+          <p:cNvSpPr/>
+          <p:nvPr/>
+        </p:nvSpPr>
+        <p:spPr>
+          <a:xfrm>
+            <a:off x="3047552" y="3941064"/>
+            <a:ext cx="1336513" cy="256032"/>
+          </a:xfrm>
+          <a:prstGeom prst="rect">
+            <a:avLst/>
+          </a:prstGeom>
+          <a:noFill/>
+          <a:ln/>
+        </p:spPr>
+        <p:txBody>
+          <a:bodyPr wrap="square" lIns="0" tIns="0" rIns="0" bIns="0" rtlCol="0" anchor="ctr"/>
+          <a:lstStyle/>
+          <a:p>
+            <a:pPr rtl="1" algn="ctr" indent="0" marL="0">
+              <a:buNone/>
+            </a:pPr>
+            <a:r>
+              <a:rPr lang="en-US" sz="1050" dirty="0">
+                <a:solidFill>
+                  <a:srgbClr val="4B5B6E"/>
+                </a:solidFill>
+                <a:latin typeface="Tajawal" pitchFamily="34" charset="0"/>
+                <a:ea typeface="Tajawal" pitchFamily="34" charset="-122"/>
+                <a:cs typeface="Tajawal" pitchFamily="34" charset="-120"/>
+              </a:rPr>
+              <a:t>المسح</a:t>
+            </a:r>
+            <a:endParaRPr lang="en-US" sz="1050" dirty="0"/>
+          </a:p>
+        </p:txBody>
+      </p:sp>
+      <p:pic>
+        <p:nvPicPr>
+          <p:cNvPr id="13" name="Image 5" descr="preencoded.png">    </p:cNvPr>
+          <p:cNvPicPr>
+            <a:picLocks noChangeAspect="1"/>
+          </p:cNvPicPr>
+          <p:nvPr/>
+        </p:nvPicPr>
+        <p:blipFill>
+          <a:blip r:embed="rId6"/>
+          <a:stretch>
+            <a:fillRect/>
+          </a:stretch>
+        </p:blipFill>
+        <p:spPr>
+          <a:xfrm>
+            <a:off x="777240" y="1536192"/>
+            <a:ext cx="1117057" cy="2331720"/>
+          </a:xfrm>
+          <a:prstGeom prst="rect">
+            <a:avLst/>
+          </a:prstGeom>
+        </p:spPr>
+      </p:pic>
+      <p:sp>
+        <p:nvSpPr>
+          <p:cNvPr id="14" name="Text 6"/>
+          <p:cNvSpPr/>
+          <p:nvPr/>
+        </p:nvSpPr>
+        <p:spPr>
+          <a:xfrm>
+            <a:off x="667512" y="3941064"/>
+            <a:ext cx="1336513" cy="256032"/>
+          </a:xfrm>
+          <a:prstGeom prst="rect">
+            <a:avLst/>
+          </a:prstGeom>
+          <a:noFill/>
+          <a:ln/>
+        </p:spPr>
+        <p:txBody>
+          <a:bodyPr wrap="square" lIns="0" tIns="0" rIns="0" bIns="0" rtlCol="0" anchor="ctr"/>
+          <a:lstStyle/>
+          <a:p>
+            <a:pPr rtl="1" algn="ctr" indent="0" marL="0">
+              <a:buNone/>
+            </a:pPr>
+            <a:r>
+              <a:rPr lang="en-US" sz="1050" dirty="0">
+                <a:solidFill>
+                  <a:srgbClr val="4B5B6E"/>
+                </a:solidFill>
+                <a:latin typeface="Tajawal" pitchFamily="34" charset="0"/>
+                <a:ea typeface="Tajawal" pitchFamily="34" charset="-122"/>
+                <a:cs typeface="Tajawal" pitchFamily="34" charset="-120"/>
+              </a:rPr>
+              <a:t>بناء الرحلة</a:t>
+            </a:r>
+            <a:endParaRPr lang="en-US" sz="1050" dirty="0"/>
+          </a:p>
+        </p:txBody>
+      </p:sp>
+      <p:sp>
+        <p:nvSpPr>
+          <p:cNvPr id="15" name="Shape 7"/>
+          <p:cNvSpPr/>
+          <p:nvPr/>
+        </p:nvSpPr>
+        <p:spPr>
+          <a:xfrm>
+            <a:off x="8933459" y="4498848"/>
+            <a:ext cx="2480996" cy="1225296"/>
+          </a:xfrm>
+          <a:prstGeom prst="roundRect">
+            <a:avLst>
+              <a:gd name="adj" fmla="val 5970"/>
+            </a:avLst>
           </a:prstGeom>
           <a:solidFill>
-            <a:srgbClr val="8357F6"/>
+            <a:srgbClr val="EEF3F9"/>
           </a:solidFill>
-          <a:ln w="12700">
+          <a:ln w="9525">
             <a:solidFill>
-              <a:srgbClr val="333333"/>
+              <a:srgbClr val="D9E2EC"/>
             </a:solidFill>
             <a:prstDash val="solid"/>
           </a:ln>
@@ -2457,138 +2813,525 @@
       </p:sp>
       <p:sp>
         <p:nvSpPr>
-          <p:cNvPr id="5" name="Text 2"/>
-          <p:cNvSpPr/>
-          <p:nvPr/>
-        </p:nvSpPr>
-        <p:spPr>
-          <a:xfrm>
-            <a:off x="868680" y="1691640"/>
-            <a:ext cx="10454335" cy="4206240"/>
-          </a:xfrm>
-          <a:prstGeom prst="rect">
-            <a:avLst/>
-          </a:prstGeom>
-          <a:noFill/>
-          <a:ln/>
-        </p:spPr>
-        <p:txBody>
-          <a:bodyPr wrap="square" lIns="0" tIns="0" rIns="0" bIns="0" rtlCol="0" anchor="t"/>
-          <a:lstStyle/>
-          <a:p>
-            <a:pPr rtl="1" algn="r" indent="0" marL="0">
+          <p:cNvPr id="16" name="Text 8"/>
+          <p:cNvSpPr/>
+          <p:nvPr/>
+        </p:nvSpPr>
+        <p:spPr>
+          <a:xfrm>
+            <a:off x="8933459" y="4645152"/>
+            <a:ext cx="2480996" cy="548640"/>
+          </a:xfrm>
+          <a:prstGeom prst="rect">
+            <a:avLst/>
+          </a:prstGeom>
+          <a:noFill/>
+          <a:ln/>
+        </p:spPr>
+        <p:txBody>
+          <a:bodyPr wrap="square" lIns="0" tIns="0" rIns="0" bIns="0" rtlCol="0" anchor="ctr"/>
+          <a:lstStyle/>
+          <a:p>
+            <a:pPr algn="ctr" indent="0" marL="0">
+              <a:buNone/>
+            </a:pPr>
+            <a:r>
+              <a:rPr lang="en-US" sz="2800" b="1" dirty="0">
+                <a:solidFill>
+                  <a:srgbClr val="255174"/>
+                </a:solidFill>
+                <a:latin typeface="Calibri" pitchFamily="34" charset="0"/>
+                <a:ea typeface="Calibri" pitchFamily="34" charset="-122"/>
+                <a:cs typeface="Calibri" pitchFamily="34" charset="-120"/>
+              </a:rPr>
+              <a:t>663</a:t>
+            </a:r>
+            <a:endParaRPr lang="en-US" sz="2800" dirty="0"/>
+          </a:p>
+        </p:txBody>
+      </p:sp>
+      <p:sp>
+        <p:nvSpPr>
+          <p:cNvPr id="17" name="Text 9"/>
+          <p:cNvSpPr/>
+          <p:nvPr/>
+        </p:nvSpPr>
+        <p:spPr>
+          <a:xfrm>
+            <a:off x="9043187" y="5230368"/>
+            <a:ext cx="2261540" cy="402336"/>
+          </a:xfrm>
+          <a:prstGeom prst="rect">
+            <a:avLst/>
+          </a:prstGeom>
+          <a:noFill/>
+          <a:ln/>
+        </p:spPr>
+        <p:txBody>
+          <a:bodyPr wrap="square" lIns="0" tIns="0" rIns="0" bIns="0" rtlCol="0" anchor="ctr"/>
+          <a:lstStyle/>
+          <a:p>
+            <a:pPr rtl="1" algn="ctr" indent="0" marL="0">
               <a:lnSpc>
-                <a:spcPts val="2800"/>
+                <a:spcPts val="1500"/>
               </a:lnSpc>
-              <a:spcAft>
-                <a:spcPts val="2000"/>
-              </a:spcAft>
-              <a:buNone/>
-            </a:pPr>
-            <a:r>
-              <a:rPr lang="en-US" sz="1600" dirty="0">
-                <a:solidFill>
-                  <a:srgbClr val="3C4C60"/>
-                </a:solidFill>
-                <a:latin typeface="Tajawal" pitchFamily="34" charset="0"/>
-                <a:ea typeface="Tajawal" pitchFamily="34" charset="-122"/>
-                <a:cs typeface="Tajawal" pitchFamily="34" charset="-120"/>
-              </a:rPr>
-              <a:t>تطبيق يعمل الآن على الويب، ويفتح من الرابط بلا تنزيل: w-electro.github.io/athr</a:t>
-            </a:r>
-            <a:endParaRPr lang="en-US" sz="1600" dirty="0"/>
-          </a:p>
-          <a:p>
-            <a:pPr rtl="1" algn="r" indent="0" marL="0">
+              <a:buNone/>
+            </a:pPr>
+            <a:r>
+              <a:rPr lang="en-US" sz="1100" dirty="0">
+                <a:solidFill>
+                  <a:srgbClr val="4B5B6E"/>
+                </a:solidFill>
+                <a:latin typeface="Tajawal" pitchFamily="34" charset="0"/>
+                <a:ea typeface="Tajawal" pitchFamily="34" charset="-122"/>
+                <a:cs typeface="Tajawal" pitchFamily="34" charset="-120"/>
+              </a:rPr>
+              <a:t>اختبارا آليا يعمل</a:t>
+            </a:r>
+            <a:endParaRPr lang="en-US" sz="1100" dirty="0"/>
+          </a:p>
+          <a:p>
+            <a:pPr rtl="1" algn="ctr" indent="0" marL="0">
               <a:lnSpc>
-                <a:spcPts val="2800"/>
+                <a:spcPts val="1500"/>
               </a:lnSpc>
-              <a:spcAft>
-                <a:spcPts val="2000"/>
-              </a:spcAft>
-              <a:buNone/>
-            </a:pPr>
-            <a:r>
-              <a:rPr lang="en-US" sz="1600" dirty="0">
-                <a:solidFill>
-                  <a:srgbClr val="3C4C60"/>
-                </a:solidFill>
-                <a:latin typeface="Tajawal" pitchFamily="34" charset="0"/>
-                <a:ea typeface="Tajawal" pitchFamily="34" charset="-122"/>
-                <a:cs typeface="Tajawal" pitchFamily="34" charset="-120"/>
-              </a:rPr>
-              <a:t>ستة مواقع، وعشر لوحات موثقة، وتسع وعشرون لغة، و174 مقطعا صوتيا.</a:t>
-            </a:r>
-            <a:endParaRPr lang="en-US" sz="1600" dirty="0"/>
-          </a:p>
-          <a:p>
-            <a:pPr rtl="1" algn="r" indent="0" marL="0">
+              <a:buNone/>
+            </a:pPr>
+            <a:r>
+              <a:rPr lang="en-US" sz="1100" dirty="0">
+                <a:solidFill>
+                  <a:srgbClr val="4B5B6E"/>
+                </a:solidFill>
+                <a:latin typeface="Tajawal" pitchFamily="34" charset="0"/>
+                <a:ea typeface="Tajawal" pitchFamily="34" charset="-122"/>
+                <a:cs typeface="Tajawal" pitchFamily="34" charset="-120"/>
+              </a:rPr>
+              <a:t>مع كل تعديل</a:t>
+            </a:r>
+            <a:endParaRPr lang="en-US" sz="1100" dirty="0"/>
+          </a:p>
+        </p:txBody>
+      </p:sp>
+      <p:sp>
+        <p:nvSpPr>
+          <p:cNvPr id="18" name="Shape 10"/>
+          <p:cNvSpPr/>
+          <p:nvPr/>
+        </p:nvSpPr>
+        <p:spPr>
+          <a:xfrm>
+            <a:off x="6214720" y="4498848"/>
+            <a:ext cx="2480996" cy="1225296"/>
+          </a:xfrm>
+          <a:prstGeom prst="roundRect">
+            <a:avLst>
+              <a:gd name="adj" fmla="val 5970"/>
+            </a:avLst>
+          </a:prstGeom>
+          <a:solidFill>
+            <a:srgbClr val="EEF3F9"/>
+          </a:solidFill>
+          <a:ln w="9525">
+            <a:solidFill>
+              <a:srgbClr val="D9E2EC"/>
+            </a:solidFill>
+            <a:prstDash val="solid"/>
+          </a:ln>
+        </p:spPr>
+      </p:sp>
+      <p:sp>
+        <p:nvSpPr>
+          <p:cNvPr id="19" name="Text 11"/>
+          <p:cNvSpPr/>
+          <p:nvPr/>
+        </p:nvSpPr>
+        <p:spPr>
+          <a:xfrm>
+            <a:off x="6214720" y="4645152"/>
+            <a:ext cx="2480996" cy="548640"/>
+          </a:xfrm>
+          <a:prstGeom prst="rect">
+            <a:avLst/>
+          </a:prstGeom>
+          <a:noFill/>
+          <a:ln/>
+        </p:spPr>
+        <p:txBody>
+          <a:bodyPr wrap="square" lIns="0" tIns="0" rIns="0" bIns="0" rtlCol="0" anchor="ctr"/>
+          <a:lstStyle/>
+          <a:p>
+            <a:pPr algn="ctr" indent="0" marL="0">
+              <a:buNone/>
+            </a:pPr>
+            <a:r>
+              <a:rPr lang="en-US" sz="2800" b="1" dirty="0">
+                <a:solidFill>
+                  <a:srgbClr val="255174"/>
+                </a:solidFill>
+                <a:latin typeface="Calibri" pitchFamily="34" charset="0"/>
+                <a:ea typeface="Calibri" pitchFamily="34" charset="-122"/>
+                <a:cs typeface="Calibri" pitchFamily="34" charset="-120"/>
+              </a:rPr>
+              <a:t>79.3%</a:t>
+            </a:r>
+            <a:endParaRPr lang="en-US" sz="2800" dirty="0"/>
+          </a:p>
+        </p:txBody>
+      </p:sp>
+      <p:sp>
+        <p:nvSpPr>
+          <p:cNvPr id="20" name="Text 12"/>
+          <p:cNvSpPr/>
+          <p:nvPr/>
+        </p:nvSpPr>
+        <p:spPr>
+          <a:xfrm>
+            <a:off x="6324448" y="5230368"/>
+            <a:ext cx="2261540" cy="402336"/>
+          </a:xfrm>
+          <a:prstGeom prst="rect">
+            <a:avLst/>
+          </a:prstGeom>
+          <a:noFill/>
+          <a:ln/>
+        </p:spPr>
+        <p:txBody>
+          <a:bodyPr wrap="square" lIns="0" tIns="0" rIns="0" bIns="0" rtlCol="0" anchor="ctr"/>
+          <a:lstStyle/>
+          <a:p>
+            <a:pPr rtl="1" algn="ctr" indent="0" marL="0">
               <a:lnSpc>
-                <a:spcPts val="2800"/>
+                <a:spcPts val="1500"/>
               </a:lnSpc>
-              <a:spcAft>
-                <a:spcPts val="2000"/>
-              </a:spcAft>
-              <a:buNone/>
-            </a:pPr>
-            <a:r>
-              <a:rPr lang="en-US" sz="1600" dirty="0">
-                <a:solidFill>
-                  <a:srgbClr val="3C4C60"/>
-                </a:solidFill>
-                <a:latin typeface="Tajawal" pitchFamily="34" charset="0"/>
-                <a:ea typeface="Tajawal" pitchFamily="34" charset="-122"/>
-                <a:cs typeface="Tajawal" pitchFamily="34" charset="-120"/>
-              </a:rPr>
-              <a:t>663 اختبارا آليا تعمل مع كل تعديل.</a:t>
-            </a:r>
-            <a:endParaRPr lang="en-US" sz="1600" dirty="0"/>
-          </a:p>
-          <a:p>
-            <a:pPr rtl="1" algn="r" indent="0" marL="0">
+              <a:buNone/>
+            </a:pPr>
+            <a:r>
+              <a:rPr lang="en-US" sz="1100" dirty="0">
+                <a:solidFill>
+                  <a:srgbClr val="4B5B6E"/>
+                </a:solidFill>
+                <a:latin typeface="Tajawal" pitchFamily="34" charset="0"/>
+                <a:ea typeface="Tajawal" pitchFamily="34" charset="-122"/>
+                <a:cs typeface="Tajawal" pitchFamily="34" charset="-120"/>
+              </a:rPr>
+              <a:t>دقة على صورة جديدة</a:t>
+            </a:r>
+            <a:endParaRPr lang="en-US" sz="1100" dirty="0"/>
+          </a:p>
+          <a:p>
+            <a:pPr rtl="1" algn="ctr" indent="0" marL="0">
               <a:lnSpc>
-                <a:spcPts val="2800"/>
+                <a:spcPts val="1500"/>
               </a:lnSpc>
-              <a:spcAft>
-                <a:spcPts val="2000"/>
-              </a:spcAft>
-              <a:buNone/>
-            </a:pPr>
-            <a:r>
-              <a:rPr lang="en-US" sz="1600" dirty="0">
-                <a:solidFill>
-                  <a:srgbClr val="3C4C60"/>
-                </a:solidFill>
-                <a:latin typeface="Tajawal" pitchFamily="34" charset="0"/>
-                <a:ea typeface="Tajawal" pitchFamily="34" charset="-122"/>
-                <a:cs typeface="Tajawal" pitchFamily="34" charset="-120"/>
-              </a:rPr>
-              <a:t>الدقة على صورة جديدة من يوم وجهاز آخرين: 79.3% — وصفر إجابة خاطئة على 53 صورة رمل وسماء.</a:t>
-            </a:r>
-            <a:endParaRPr lang="en-US" sz="1600" dirty="0"/>
-          </a:p>
-          <a:p>
-            <a:pPr rtl="1" algn="r" indent="0" marL="0">
+              <a:buNone/>
+            </a:pPr>
+            <a:r>
+              <a:rPr lang="en-US" sz="1100" dirty="0">
+                <a:solidFill>
+                  <a:srgbClr val="4B5B6E"/>
+                </a:solidFill>
+                <a:latin typeface="Tajawal" pitchFamily="34" charset="0"/>
+                <a:ea typeface="Tajawal" pitchFamily="34" charset="-122"/>
+                <a:cs typeface="Tajawal" pitchFamily="34" charset="-120"/>
+              </a:rPr>
+              <a:t>من يوم وجهاز آخرين</a:t>
+            </a:r>
+            <a:endParaRPr lang="en-US" sz="1100" dirty="0"/>
+          </a:p>
+        </p:txBody>
+      </p:sp>
+      <p:sp>
+        <p:nvSpPr>
+          <p:cNvPr id="21" name="Shape 13"/>
+          <p:cNvSpPr/>
+          <p:nvPr/>
+        </p:nvSpPr>
+        <p:spPr>
+          <a:xfrm>
+            <a:off x="3495980" y="4498848"/>
+            <a:ext cx="2480996" cy="1225296"/>
+          </a:xfrm>
+          <a:prstGeom prst="roundRect">
+            <a:avLst>
+              <a:gd name="adj" fmla="val 5970"/>
+            </a:avLst>
+          </a:prstGeom>
+          <a:solidFill>
+            <a:srgbClr val="EEF3F9"/>
+          </a:solidFill>
+          <a:ln w="9525">
+            <a:solidFill>
+              <a:srgbClr val="D9E2EC"/>
+            </a:solidFill>
+            <a:prstDash val="solid"/>
+          </a:ln>
+        </p:spPr>
+      </p:sp>
+      <p:sp>
+        <p:nvSpPr>
+          <p:cNvPr id="22" name="Text 14"/>
+          <p:cNvSpPr/>
+          <p:nvPr/>
+        </p:nvSpPr>
+        <p:spPr>
+          <a:xfrm>
+            <a:off x="3495980" y="4645152"/>
+            <a:ext cx="2480996" cy="548640"/>
+          </a:xfrm>
+          <a:prstGeom prst="rect">
+            <a:avLst/>
+          </a:prstGeom>
+          <a:noFill/>
+          <a:ln/>
+        </p:spPr>
+        <p:txBody>
+          <a:bodyPr wrap="square" lIns="0" tIns="0" rIns="0" bIns="0" rtlCol="0" anchor="ctr"/>
+          <a:lstStyle/>
+          <a:p>
+            <a:pPr algn="ctr" indent="0" marL="0">
+              <a:buNone/>
+            </a:pPr>
+            <a:r>
+              <a:rPr lang="en-US" sz="2800" b="1" dirty="0">
+                <a:solidFill>
+                  <a:srgbClr val="8357F6"/>
+                </a:solidFill>
+                <a:latin typeface="Calibri" pitchFamily="34" charset="0"/>
+                <a:ea typeface="Calibri" pitchFamily="34" charset="-122"/>
+                <a:cs typeface="Calibri" pitchFamily="34" charset="-120"/>
+              </a:rPr>
+              <a:t>0</a:t>
+            </a:r>
+            <a:endParaRPr lang="en-US" sz="2800" dirty="0"/>
+          </a:p>
+        </p:txBody>
+      </p:sp>
+      <p:sp>
+        <p:nvSpPr>
+          <p:cNvPr id="23" name="Text 15"/>
+          <p:cNvSpPr/>
+          <p:nvPr/>
+        </p:nvSpPr>
+        <p:spPr>
+          <a:xfrm>
+            <a:off x="3605708" y="5230368"/>
+            <a:ext cx="2261540" cy="402336"/>
+          </a:xfrm>
+          <a:prstGeom prst="rect">
+            <a:avLst/>
+          </a:prstGeom>
+          <a:noFill/>
+          <a:ln/>
+        </p:spPr>
+        <p:txBody>
+          <a:bodyPr wrap="square" lIns="0" tIns="0" rIns="0" bIns="0" rtlCol="0" anchor="ctr"/>
+          <a:lstStyle/>
+          <a:p>
+            <a:pPr rtl="1" algn="ctr" indent="0" marL="0">
               <a:lnSpc>
-                <a:spcPts val="2800"/>
+                <a:spcPts val="1500"/>
               </a:lnSpc>
-              <a:spcAft>
-                <a:spcPts val="2000"/>
-              </a:spcAft>
-              <a:buNone/>
-            </a:pPr>
-            <a:r>
-              <a:rPr lang="en-US" sz="1600" dirty="0">
-                <a:solidFill>
-                  <a:srgbClr val="3C4C60"/>
-                </a:solidFill>
-                <a:latin typeface="Tajawal" pitchFamily="34" charset="0"/>
-                <a:ea typeface="Tajawal" pitchFamily="34" charset="-122"/>
-                <a:cs typeface="Tajawal" pitchFamily="34" charset="-120"/>
-              </a:rPr>
-              <a:t>ولا نخترع ترجمة لنقش ثمودي لا نملك قراءته الموثقة: نعرض جدول الحروف ليطابق الزائر بنفسه. وترجمة مخترعة لنقش عمره ألفا سنة أسوأ من الصمت.</a:t>
-            </a:r>
-            <a:endParaRPr lang="en-US" sz="1600" dirty="0"/>
+              <a:buNone/>
+            </a:pPr>
+            <a:r>
+              <a:rPr lang="en-US" sz="1100" dirty="0">
+                <a:solidFill>
+                  <a:srgbClr val="4B5B6E"/>
+                </a:solidFill>
+                <a:latin typeface="Tajawal" pitchFamily="34" charset="0"/>
+                <a:ea typeface="Tajawal" pitchFamily="34" charset="-122"/>
+                <a:cs typeface="Tajawal" pitchFamily="34" charset="-120"/>
+              </a:rPr>
+              <a:t>إجابة خاطئة على</a:t>
+            </a:r>
+            <a:endParaRPr lang="en-US" sz="1100" dirty="0"/>
+          </a:p>
+          <a:p>
+            <a:pPr rtl="1" algn="ctr" indent="0" marL="0">
+              <a:lnSpc>
+                <a:spcPts val="1500"/>
+              </a:lnSpc>
+              <a:buNone/>
+            </a:pPr>
+            <a:r>
+              <a:rPr lang="en-US" sz="1100" dirty="0">
+                <a:solidFill>
+                  <a:srgbClr val="4B5B6E"/>
+                </a:solidFill>
+                <a:latin typeface="Tajawal" pitchFamily="34" charset="0"/>
+                <a:ea typeface="Tajawal" pitchFamily="34" charset="-122"/>
+                <a:cs typeface="Tajawal" pitchFamily="34" charset="-120"/>
+              </a:rPr>
+              <a:t>53 صورة رمل وسماء</a:t>
+            </a:r>
+            <a:endParaRPr lang="en-US" sz="1100" dirty="0"/>
+          </a:p>
+        </p:txBody>
+      </p:sp>
+      <p:sp>
+        <p:nvSpPr>
+          <p:cNvPr id="24" name="Shape 16"/>
+          <p:cNvSpPr/>
+          <p:nvPr/>
+        </p:nvSpPr>
+        <p:spPr>
+          <a:xfrm>
+            <a:off x="777240" y="4498848"/>
+            <a:ext cx="2480996" cy="1225296"/>
+          </a:xfrm>
+          <a:prstGeom prst="roundRect">
+            <a:avLst>
+              <a:gd name="adj" fmla="val 5970"/>
+            </a:avLst>
+          </a:prstGeom>
+          <a:solidFill>
+            <a:srgbClr val="EEF3F9"/>
+          </a:solidFill>
+          <a:ln w="9525">
+            <a:solidFill>
+              <a:srgbClr val="D9E2EC"/>
+            </a:solidFill>
+            <a:prstDash val="solid"/>
+          </a:ln>
+        </p:spPr>
+      </p:sp>
+      <p:sp>
+        <p:nvSpPr>
+          <p:cNvPr id="25" name="Text 17"/>
+          <p:cNvSpPr/>
+          <p:nvPr/>
+        </p:nvSpPr>
+        <p:spPr>
+          <a:xfrm>
+            <a:off x="777240" y="4645152"/>
+            <a:ext cx="2480996" cy="548640"/>
+          </a:xfrm>
+          <a:prstGeom prst="rect">
+            <a:avLst/>
+          </a:prstGeom>
+          <a:noFill/>
+          <a:ln/>
+        </p:spPr>
+        <p:txBody>
+          <a:bodyPr wrap="square" lIns="0" tIns="0" rIns="0" bIns="0" rtlCol="0" anchor="ctr"/>
+          <a:lstStyle/>
+          <a:p>
+            <a:pPr algn="ctr" indent="0" marL="0">
+              <a:buNone/>
+            </a:pPr>
+            <a:r>
+              <a:rPr lang="en-US" sz="2800" b="1" dirty="0">
+                <a:solidFill>
+                  <a:srgbClr val="255174"/>
+                </a:solidFill>
+                <a:latin typeface="Calibri" pitchFamily="34" charset="0"/>
+                <a:ea typeface="Calibri" pitchFamily="34" charset="-122"/>
+                <a:cs typeface="Calibri" pitchFamily="34" charset="-120"/>
+              </a:rPr>
+              <a:t>174</a:t>
+            </a:r>
+            <a:endParaRPr lang="en-US" sz="2800" dirty="0"/>
+          </a:p>
+        </p:txBody>
+      </p:sp>
+      <p:sp>
+        <p:nvSpPr>
+          <p:cNvPr id="26" name="Text 18"/>
+          <p:cNvSpPr/>
+          <p:nvPr/>
+        </p:nvSpPr>
+        <p:spPr>
+          <a:xfrm>
+            <a:off x="886968" y="5230368"/>
+            <a:ext cx="2261540" cy="402336"/>
+          </a:xfrm>
+          <a:prstGeom prst="rect">
+            <a:avLst/>
+          </a:prstGeom>
+          <a:noFill/>
+          <a:ln/>
+        </p:spPr>
+        <p:txBody>
+          <a:bodyPr wrap="square" lIns="0" tIns="0" rIns="0" bIns="0" rtlCol="0" anchor="ctr"/>
+          <a:lstStyle/>
+          <a:p>
+            <a:pPr rtl="1" algn="ctr" indent="0" marL="0">
+              <a:lnSpc>
+                <a:spcPts val="1500"/>
+              </a:lnSpc>
+              <a:buNone/>
+            </a:pPr>
+            <a:r>
+              <a:rPr lang="en-US" sz="1100" dirty="0">
+                <a:solidFill>
+                  <a:srgbClr val="4B5B6E"/>
+                </a:solidFill>
+                <a:latin typeface="Tajawal" pitchFamily="34" charset="0"/>
+                <a:ea typeface="Tajawal" pitchFamily="34" charset="-122"/>
+                <a:cs typeface="Tajawal" pitchFamily="34" charset="-120"/>
+              </a:rPr>
+              <a:t>مقطعا صوتيا</a:t>
+            </a:r>
+            <a:endParaRPr lang="en-US" sz="1100" dirty="0"/>
+          </a:p>
+          <a:p>
+            <a:pPr rtl="1" algn="ctr" indent="0" marL="0">
+              <a:lnSpc>
+                <a:spcPts val="1500"/>
+              </a:lnSpc>
+              <a:buNone/>
+            </a:pPr>
+            <a:r>
+              <a:rPr lang="en-US" sz="1100" dirty="0">
+                <a:solidFill>
+                  <a:srgbClr val="4B5B6E"/>
+                </a:solidFill>
+                <a:latin typeface="Tajawal" pitchFamily="34" charset="0"/>
+                <a:ea typeface="Tajawal" pitchFamily="34" charset="-122"/>
+                <a:cs typeface="Tajawal" pitchFamily="34" charset="-120"/>
+              </a:rPr>
+              <a:t>في 29 لغة</a:t>
+            </a:r>
+            <a:endParaRPr lang="en-US" sz="1100" dirty="0"/>
+          </a:p>
+        </p:txBody>
+      </p:sp>
+      <p:sp>
+        <p:nvSpPr>
+          <p:cNvPr id="27" name="Text 19"/>
+          <p:cNvSpPr/>
+          <p:nvPr/>
+        </p:nvSpPr>
+        <p:spPr>
+          <a:xfrm>
+            <a:off x="777240" y="5888736"/>
+            <a:ext cx="10637215" cy="329184"/>
+          </a:xfrm>
+          <a:prstGeom prst="rect">
+            <a:avLst/>
+          </a:prstGeom>
+          <a:noFill/>
+          <a:ln/>
+        </p:spPr>
+        <p:txBody>
+          <a:bodyPr wrap="square" lIns="0" tIns="0" rIns="0" bIns="0" rtlCol="0" anchor="ctr"/>
+          <a:lstStyle/>
+          <a:p>
+            <a:pPr rtl="1" algn="ctr" indent="0" marL="0">
+              <a:buNone/>
+            </a:pPr>
+            <a:r>
+              <a:rPr lang="en-US" sz="1200" i="1" dirty="0">
+                <a:solidFill>
+                  <a:srgbClr val="4B5B6E"/>
+                </a:solidFill>
+                <a:latin typeface="Tajawal" pitchFamily="34" charset="0"/>
+                <a:ea typeface="Tajawal" pitchFamily="34" charset="-122"/>
+                <a:cs typeface="Tajawal" pitchFamily="34" charset="-120"/>
+              </a:rPr>
+              <a:t>ولا نخترع ترجمة لنقش ثمودي لا نملك قراءته الموثقة: نعرض جدول الحروف الرسمي ليطابق الزائر بنفسه.</a:t>
+            </a:r>
+            <a:endParaRPr lang="en-US" sz="1200" dirty="0"/>
           </a:p>
         </p:txBody>
       </p:sp>
@@ -2696,7 +3439,7 @@
         <p:spPr>
           <a:xfrm>
             <a:off x="5120640" y="2788920"/>
-            <a:ext cx="6202375" cy="1280160"/>
+            <a:ext cx="6293815" cy="1280160"/>
           </a:xfrm>
           <a:prstGeom prst="rect">
             <a:avLst/>
@@ -2712,7 +3455,7 @@
               <a:buNone/>
             </a:pPr>
             <a:r>
-              <a:rPr lang="en-US" sz="3800" b="1" dirty="0">
+              <a:rPr lang="en-US" sz="3600" b="1" dirty="0">
                 <a:solidFill>
                   <a:srgbClr val="255174"/>
                 </a:solidFill>
@@ -2722,7 +3465,7 @@
               </a:rPr>
               <a:t>نموذج العمل والجدوى</a:t>
             </a:r>
-            <a:endParaRPr lang="en-US" sz="3800" dirty="0"/>
+            <a:endParaRPr lang="en-US" sz="3600" dirty="0"/>
           </a:p>
         </p:txBody>
       </p:sp>
@@ -2790,8 +3533,8 @@
         </p:nvSpPr>
         <p:spPr>
           <a:xfrm>
-            <a:off x="868680" y="658368"/>
-            <a:ext cx="10454335" cy="502920"/>
+            <a:off x="777240" y="548640"/>
+            <a:ext cx="10637215" cy="502920"/>
           </a:xfrm>
           <a:prstGeom prst="rect">
             <a:avLst/>
@@ -2829,18 +3572,20 @@
         </p:nvSpPr>
         <p:spPr>
           <a:xfrm>
-            <a:off x="9768535" y="1243584"/>
-            <a:ext cx="1554480" cy="54864"/>
-          </a:xfrm>
-          <a:prstGeom prst="rect">
-            <a:avLst/>
+            <a:off x="8027213" y="1234440"/>
+            <a:ext cx="3387242" cy="2487168"/>
+          </a:xfrm>
+          <a:prstGeom prst="roundRect">
+            <a:avLst>
+              <a:gd name="adj" fmla="val 2941"/>
+            </a:avLst>
           </a:prstGeom>
           <a:solidFill>
-            <a:srgbClr val="8357F6"/>
+            <a:srgbClr val="EEF3F9"/>
           </a:solidFill>
-          <a:ln w="12700">
+          <a:ln w="9525">
             <a:solidFill>
-              <a:srgbClr val="333333"/>
+              <a:srgbClr val="D9E2EC"/>
             </a:solidFill>
             <a:prstDash val="solid"/>
           </a:ln>
@@ -2854,8 +3599,47 @@
         </p:nvSpPr>
         <p:spPr>
           <a:xfrm>
-            <a:off x="868680" y="1691640"/>
-            <a:ext cx="10454335" cy="4206240"/>
+            <a:off x="8264957" y="1417320"/>
+            <a:ext cx="2911754" cy="310896"/>
+          </a:xfrm>
+          <a:prstGeom prst="rect">
+            <a:avLst/>
+          </a:prstGeom>
+          <a:noFill/>
+          <a:ln/>
+        </p:spPr>
+        <p:txBody>
+          <a:bodyPr wrap="square" lIns="0" tIns="0" rIns="0" bIns="0" rtlCol="0" anchor="ctr"/>
+          <a:lstStyle/>
+          <a:p>
+            <a:pPr rtl="1" algn="r" indent="0" marL="0">
+              <a:buNone/>
+            </a:pPr>
+            <a:r>
+              <a:rPr lang="en-US" sz="1400" b="1" dirty="0">
+                <a:solidFill>
+                  <a:srgbClr val="8357F6"/>
+                </a:solidFill>
+                <a:latin typeface="Tajawal" pitchFamily="34" charset="0"/>
+                <a:ea typeface="Tajawal" pitchFamily="34" charset="-122"/>
+                <a:cs typeface="Tajawal" pitchFamily="34" charset="-120"/>
+              </a:rPr>
+              <a:t>العملاء</a:t>
+            </a:r>
+            <a:endParaRPr lang="en-US" sz="1400" dirty="0"/>
+          </a:p>
+        </p:txBody>
+      </p:sp>
+      <p:sp>
+        <p:nvSpPr>
+          <p:cNvPr id="6" name="Text 3"/>
+          <p:cNvSpPr/>
+          <p:nvPr/>
+        </p:nvSpPr>
+        <p:spPr>
+          <a:xfrm>
+            <a:off x="8264957" y="1801368"/>
+            <a:ext cx="2911754" cy="1737360"/>
           </a:xfrm>
           <a:prstGeom prst="rect">
             <a:avLst/>
@@ -2869,94 +3653,789 @@
           <a:p>
             <a:pPr rtl="1" algn="r" indent="0" marL="0">
               <a:lnSpc>
-                <a:spcPts val="2800"/>
+                <a:spcPts val="2000"/>
               </a:lnSpc>
               <a:spcAft>
-                <a:spcPts val="2000"/>
+                <a:spcPts val="1200"/>
               </a:spcAft>
               <a:buNone/>
             </a:pPr>
             <a:r>
-              <a:rPr lang="en-US" sz="1600" dirty="0">
-                <a:solidFill>
-                  <a:srgbClr val="3C4C60"/>
-                </a:solidFill>
-                <a:latin typeface="Tajawal" pitchFamily="34" charset="0"/>
-                <a:ea typeface="Tajawal" pitchFamily="34" charset="-122"/>
-                <a:cs typeface="Tajawal" pitchFamily="34" charset="-120"/>
-              </a:rPr>
-              <a:t>التطبيق مجاني للزائر دائما، ووجهته التالية متجرا آبل وجوجل بلاي.</a:t>
-            </a:r>
-            <a:endParaRPr lang="en-US" sz="1600" dirty="0"/>
+              <a:rPr lang="en-US" sz="1250" dirty="0">
+                <a:solidFill>
+                  <a:srgbClr val="4B5B6E"/>
+                </a:solidFill>
+                <a:latin typeface="Tajawal" pitchFamily="34" charset="0"/>
+                <a:ea typeface="Tajawal" pitchFamily="34" charset="-122"/>
+                <a:cs typeface="Tajawal" pitchFamily="34" charset="-120"/>
+              </a:rPr>
+              <a:t>الجهة المشغلة: هيئة التراث ومركز الزوار.</a:t>
+            </a:r>
+            <a:endParaRPr lang="en-US" sz="1250" dirty="0"/>
           </a:p>
           <a:p>
             <a:pPr rtl="1" algn="r" indent="0" marL="0">
               <a:lnSpc>
-                <a:spcPts val="2800"/>
+                <a:spcPts val="2000"/>
               </a:lnSpc>
               <a:spcAft>
-                <a:spcPts val="2000"/>
+                <a:spcPts val="1200"/>
               </a:spcAft>
               <a:buNone/>
             </a:pPr>
             <a:r>
-              <a:rPr lang="en-US" sz="1600" dirty="0">
-                <a:solidFill>
-                  <a:srgbClr val="3C4C60"/>
-                </a:solidFill>
-                <a:latin typeface="Tajawal" pitchFamily="34" charset="0"/>
-                <a:ea typeface="Tajawal" pitchFamily="34" charset="-122"/>
-                <a:cs typeface="Tajawal" pitchFamily="34" charset="-120"/>
-              </a:rPr>
-              <a:t>شركاء محليون: مطاعم ومقاه وفنادق في حائل ندرج مواقعها في مسار رحلتي برسم سنوي — الزائر جائع بعد ساعتين في الموقع، والمطعم يريد أن يصل إليه.</a:t>
-            </a:r>
-            <a:endParaRPr lang="en-US" sz="1600" dirty="0"/>
+              <a:rPr lang="en-US" sz="1250" dirty="0">
+                <a:solidFill>
+                  <a:srgbClr val="4B5B6E"/>
+                </a:solidFill>
+                <a:latin typeface="Tajawal" pitchFamily="34" charset="0"/>
+                <a:ea typeface="Tajawal" pitchFamily="34" charset="-122"/>
+                <a:cs typeface="Tajawal" pitchFamily="34" charset="-120"/>
+              </a:rPr>
+              <a:t>والمنشآت المحلية: مطاعم ومقاه وفنادق حائل تريد الوصول إلى الزائر.</a:t>
+            </a:r>
+            <a:endParaRPr lang="en-US" sz="1250" dirty="0"/>
           </a:p>
           <a:p>
             <a:pPr rtl="1" algn="r" indent="0" marL="0">
               <a:lnSpc>
-                <a:spcPts val="2800"/>
+                <a:spcPts val="2000"/>
               </a:lnSpc>
               <a:spcAft>
-                <a:spcPts val="2000"/>
+                <a:spcPts val="1200"/>
               </a:spcAft>
               <a:buNone/>
             </a:pPr>
             <a:r>
-              <a:rPr lang="en-US" sz="1600" dirty="0">
-                <a:solidFill>
-                  <a:srgbClr val="3C4C60"/>
-                </a:solidFill>
-                <a:latin typeface="Tajawal" pitchFamily="34" charset="0"/>
-                <a:ea typeface="Tajawal" pitchFamily="34" charset="-122"/>
-                <a:cs typeface="Tajawal" pitchFamily="34" charset="-120"/>
-              </a:rPr>
-              <a:t>وترخيص سنوي للجهة المشغلة عن كل موقع، ورسوم إعداد لكل موقع جديد، ونسخة بيضاء لمتاحف أخرى.</a:t>
-            </a:r>
-            <a:endParaRPr lang="en-US" sz="1600" dirty="0"/>
-          </a:p>
+              <a:rPr lang="en-US" sz="1250" dirty="0">
+                <a:solidFill>
+                  <a:srgbClr val="4B5B6E"/>
+                </a:solidFill>
+                <a:latin typeface="Tajawal" pitchFamily="34" charset="0"/>
+                <a:ea typeface="Tajawal" pitchFamily="34" charset="-122"/>
+                <a:cs typeface="Tajawal" pitchFamily="34" charset="-120"/>
+              </a:rPr>
+              <a:t>والزائر نفسه، والتطبيق مجاني له دائما.</a:t>
+            </a:r>
+            <a:endParaRPr lang="en-US" sz="1250" dirty="0"/>
+          </a:p>
+        </p:txBody>
+      </p:sp>
+      <p:sp>
+        <p:nvSpPr>
+          <p:cNvPr id="7" name="Shape 4"/>
+          <p:cNvSpPr/>
+          <p:nvPr/>
+        </p:nvSpPr>
+        <p:spPr>
+          <a:xfrm>
+            <a:off x="4402226" y="1234440"/>
+            <a:ext cx="3387242" cy="2487168"/>
+          </a:xfrm>
+          <a:prstGeom prst="roundRect">
+            <a:avLst>
+              <a:gd name="adj" fmla="val 2941"/>
+            </a:avLst>
+          </a:prstGeom>
+          <a:solidFill>
+            <a:srgbClr val="EEF3F9"/>
+          </a:solidFill>
+          <a:ln w="9525">
+            <a:solidFill>
+              <a:srgbClr val="D9E2EC"/>
+            </a:solidFill>
+            <a:prstDash val="solid"/>
+          </a:ln>
+        </p:spPr>
+      </p:sp>
+      <p:sp>
+        <p:nvSpPr>
+          <p:cNvPr id="8" name="Text 5"/>
+          <p:cNvSpPr/>
+          <p:nvPr/>
+        </p:nvSpPr>
+        <p:spPr>
+          <a:xfrm>
+            <a:off x="4639970" y="1417320"/>
+            <a:ext cx="2911754" cy="310896"/>
+          </a:xfrm>
+          <a:prstGeom prst="rect">
+            <a:avLst/>
+          </a:prstGeom>
+          <a:noFill/>
+          <a:ln/>
+        </p:spPr>
+        <p:txBody>
+          <a:bodyPr wrap="square" lIns="0" tIns="0" rIns="0" bIns="0" rtlCol="0" anchor="ctr"/>
+          <a:lstStyle/>
+          <a:p>
+            <a:pPr rtl="1" algn="r" indent="0" marL="0">
+              <a:buNone/>
+            </a:pPr>
+            <a:r>
+              <a:rPr lang="en-US" sz="1400" b="1" dirty="0">
+                <a:solidFill>
+                  <a:srgbClr val="8357F6"/>
+                </a:solidFill>
+                <a:latin typeface="Tajawal" pitchFamily="34" charset="0"/>
+                <a:ea typeface="Tajawal" pitchFamily="34" charset="-122"/>
+                <a:cs typeface="Tajawal" pitchFamily="34" charset="-120"/>
+              </a:rPr>
+              <a:t>مصادر الإيرادات</a:t>
+            </a:r>
+            <a:endParaRPr lang="en-US" sz="1400" dirty="0"/>
+          </a:p>
+        </p:txBody>
+      </p:sp>
+      <p:sp>
+        <p:nvSpPr>
+          <p:cNvPr id="9" name="Text 6"/>
+          <p:cNvSpPr/>
+          <p:nvPr/>
+        </p:nvSpPr>
+        <p:spPr>
+          <a:xfrm>
+            <a:off x="4639970" y="1801368"/>
+            <a:ext cx="2911754" cy="1737360"/>
+          </a:xfrm>
+          <a:prstGeom prst="rect">
+            <a:avLst/>
+          </a:prstGeom>
+          <a:noFill/>
+          <a:ln/>
+        </p:spPr>
+        <p:txBody>
+          <a:bodyPr wrap="square" lIns="0" tIns="0" rIns="0" bIns="0" rtlCol="0" anchor="t"/>
+          <a:lstStyle/>
           <a:p>
             <a:pPr rtl="1" algn="r" indent="0" marL="0">
               <a:lnSpc>
-                <a:spcPts val="2800"/>
+                <a:spcPts val="2000"/>
               </a:lnSpc>
               <a:spcAft>
+                <a:spcPts val="1200"/>
+              </a:spcAft>
+              <a:buNone/>
+            </a:pPr>
+            <a:r>
+              <a:rPr lang="en-US" sz="1250" dirty="0">
+                <a:solidFill>
+                  <a:srgbClr val="4B5B6E"/>
+                </a:solidFill>
+                <a:latin typeface="Tajawal" pitchFamily="34" charset="0"/>
+                <a:ea typeface="Tajawal" pitchFamily="34" charset="-122"/>
+                <a:cs typeface="Tajawal" pitchFamily="34" charset="-120"/>
+              </a:rPr>
+              <a:t>شركاء محليون: ندرج مواقعهم في مسار رحلتي برسم سنوي. الزائر جائع بعد ساعتين في الموقع، والمطعم يريد أن يصل إليه.</a:t>
+            </a:r>
+            <a:endParaRPr lang="en-US" sz="1250" dirty="0"/>
+          </a:p>
+          <a:p>
+            <a:pPr rtl="1" algn="r" indent="0" marL="0">
+              <a:lnSpc>
                 <a:spcPts val="2000"/>
+              </a:lnSpc>
+              <a:spcAft>
+                <a:spcPts val="1200"/>
               </a:spcAft>
               <a:buNone/>
             </a:pPr>
             <a:r>
-              <a:rPr lang="en-US" sz="1600" dirty="0">
-                <a:solidFill>
-                  <a:srgbClr val="3C4C60"/>
-                </a:solidFill>
-                <a:latin typeface="Tajawal" pitchFamily="34" charset="0"/>
-                <a:ea typeface="Tajawal" pitchFamily="34" charset="-122"/>
-                <a:cs typeface="Tajawal" pitchFamily="34" charset="-120"/>
-              </a:rPr>
-              <a:t>والتكلفة الحدية للزائر الإضافي صفر: لا خوادم ولا واجهات مدفوعة — فزائر واحد وزائر مليون سواء في الكلفة.</a:t>
-            </a:r>
-            <a:endParaRPr lang="en-US" sz="1600" dirty="0"/>
+              <a:rPr lang="en-US" sz="1250" dirty="0">
+                <a:solidFill>
+                  <a:srgbClr val="4B5B6E"/>
+                </a:solidFill>
+                <a:latin typeface="Tajawal" pitchFamily="34" charset="0"/>
+                <a:ea typeface="Tajawal" pitchFamily="34" charset="-122"/>
+                <a:cs typeface="Tajawal" pitchFamily="34" charset="-120"/>
+              </a:rPr>
+              <a:t>وترخيص سنوي للجهة المشغلة عن كل موقع، ورسوم إعداد لكل موقع جديد، ونسخة بيضاء لمتاحف أخرى.</a:t>
+            </a:r>
+            <a:endParaRPr lang="en-US" sz="1250" dirty="0"/>
+          </a:p>
+        </p:txBody>
+      </p:sp>
+      <p:sp>
+        <p:nvSpPr>
+          <p:cNvPr id="10" name="Shape 7"/>
+          <p:cNvSpPr/>
+          <p:nvPr/>
+        </p:nvSpPr>
+        <p:spPr>
+          <a:xfrm>
+            <a:off x="777240" y="1234440"/>
+            <a:ext cx="3387242" cy="2487168"/>
+          </a:xfrm>
+          <a:prstGeom prst="roundRect">
+            <a:avLst>
+              <a:gd name="adj" fmla="val 2941"/>
+            </a:avLst>
+          </a:prstGeom>
+          <a:solidFill>
+            <a:srgbClr val="EEF3F9"/>
+          </a:solidFill>
+          <a:ln w="9525">
+            <a:solidFill>
+              <a:srgbClr val="D9E2EC"/>
+            </a:solidFill>
+            <a:prstDash val="solid"/>
+          </a:ln>
+        </p:spPr>
+      </p:sp>
+      <p:sp>
+        <p:nvSpPr>
+          <p:cNvPr id="11" name="Text 8"/>
+          <p:cNvSpPr/>
+          <p:nvPr/>
+        </p:nvSpPr>
+        <p:spPr>
+          <a:xfrm>
+            <a:off x="1014984" y="1417320"/>
+            <a:ext cx="2911754" cy="310896"/>
+          </a:xfrm>
+          <a:prstGeom prst="rect">
+            <a:avLst/>
+          </a:prstGeom>
+          <a:noFill/>
+          <a:ln/>
+        </p:spPr>
+        <p:txBody>
+          <a:bodyPr wrap="square" lIns="0" tIns="0" rIns="0" bIns="0" rtlCol="0" anchor="ctr"/>
+          <a:lstStyle/>
+          <a:p>
+            <a:pPr rtl="1" algn="r" indent="0" marL="0">
+              <a:buNone/>
+            </a:pPr>
+            <a:r>
+              <a:rPr lang="en-US" sz="1400" b="1" dirty="0">
+                <a:solidFill>
+                  <a:srgbClr val="8357F6"/>
+                </a:solidFill>
+                <a:latin typeface="Tajawal" pitchFamily="34" charset="0"/>
+                <a:ea typeface="Tajawal" pitchFamily="34" charset="-122"/>
+                <a:cs typeface="Tajawal" pitchFamily="34" charset="-120"/>
+              </a:rPr>
+              <a:t>الاستدامة</a:t>
+            </a:r>
+            <a:endParaRPr lang="en-US" sz="1400" dirty="0"/>
+          </a:p>
+        </p:txBody>
+      </p:sp>
+      <p:sp>
+        <p:nvSpPr>
+          <p:cNvPr id="12" name="Text 9"/>
+          <p:cNvSpPr/>
+          <p:nvPr/>
+        </p:nvSpPr>
+        <p:spPr>
+          <a:xfrm>
+            <a:off x="1014984" y="1801368"/>
+            <a:ext cx="2911754" cy="1737360"/>
+          </a:xfrm>
+          <a:prstGeom prst="rect">
+            <a:avLst/>
+          </a:prstGeom>
+          <a:noFill/>
+          <a:ln/>
+        </p:spPr>
+        <p:txBody>
+          <a:bodyPr wrap="square" lIns="0" tIns="0" rIns="0" bIns="0" rtlCol="0" anchor="t"/>
+          <a:lstStyle/>
+          <a:p>
+            <a:pPr rtl="1" algn="r" indent="0" marL="0">
+              <a:lnSpc>
+                <a:spcPts val="2000"/>
+              </a:lnSpc>
+              <a:spcAft>
+                <a:spcPts val="1200"/>
+              </a:spcAft>
+              <a:buNone/>
+            </a:pPr>
+            <a:r>
+              <a:rPr lang="en-US" sz="1250" dirty="0">
+                <a:solidFill>
+                  <a:srgbClr val="4B5B6E"/>
+                </a:solidFill>
+                <a:latin typeface="Tajawal" pitchFamily="34" charset="0"/>
+                <a:ea typeface="Tajawal" pitchFamily="34" charset="-122"/>
+                <a:cs typeface="Tajawal" pitchFamily="34" charset="-120"/>
+              </a:rPr>
+              <a:t>التكلفة الحدية للزائر الإضافي صفر: لا خوادم ولا واجهات مدفوعة.</a:t>
+            </a:r>
+            <a:endParaRPr lang="en-US" sz="1250" dirty="0"/>
+          </a:p>
+          <a:p>
+            <a:pPr rtl="1" algn="r" indent="0" marL="0">
+              <a:lnSpc>
+                <a:spcPts val="2000"/>
+              </a:lnSpc>
+              <a:spcAft>
+                <a:spcPts val="1200"/>
+              </a:spcAft>
+              <a:buNone/>
+            </a:pPr>
+            <a:r>
+              <a:rPr lang="en-US" sz="1250" dirty="0">
+                <a:solidFill>
+                  <a:srgbClr val="4B5B6E"/>
+                </a:solidFill>
+                <a:latin typeface="Tajawal" pitchFamily="34" charset="0"/>
+                <a:ea typeface="Tajawal" pitchFamily="34" charset="-122"/>
+                <a:cs typeface="Tajawal" pitchFamily="34" charset="-120"/>
+              </a:rPr>
+              <a:t>والتكلفة كلها إعداد لمرة واحدة عن كل موقع: تصوير وفهرسة ومحتوى وترجمة.</a:t>
+            </a:r>
+            <a:endParaRPr lang="en-US" sz="1250" dirty="0"/>
+          </a:p>
+        </p:txBody>
+      </p:sp>
+      <p:sp>
+        <p:nvSpPr>
+          <p:cNvPr id="13" name="Shape 10"/>
+          <p:cNvSpPr/>
+          <p:nvPr/>
+        </p:nvSpPr>
+        <p:spPr>
+          <a:xfrm>
+            <a:off x="777240" y="3950208"/>
+            <a:ext cx="10637215" cy="841248"/>
+          </a:xfrm>
+          <a:prstGeom prst="roundRect">
+            <a:avLst>
+              <a:gd name="adj" fmla="val 8696"/>
+            </a:avLst>
+          </a:prstGeom>
+          <a:solidFill>
+            <a:srgbClr val="E9E2FB"/>
+          </a:solidFill>
+          <a:ln w="9525">
+            <a:solidFill>
+              <a:srgbClr val="D9E2EC"/>
+            </a:solidFill>
+            <a:prstDash val="solid"/>
+          </a:ln>
+        </p:spPr>
+      </p:sp>
+      <p:sp>
+        <p:nvSpPr>
+          <p:cNvPr id="14" name="Text 11"/>
+          <p:cNvSpPr/>
+          <p:nvPr/>
+        </p:nvSpPr>
+        <p:spPr>
+          <a:xfrm>
+            <a:off x="1088136" y="4169664"/>
+            <a:ext cx="10015423" cy="420624"/>
+          </a:xfrm>
+          <a:prstGeom prst="rect">
+            <a:avLst/>
+          </a:prstGeom>
+          <a:noFill/>
+          <a:ln/>
+        </p:spPr>
+        <p:txBody>
+          <a:bodyPr wrap="square" lIns="0" tIns="0" rIns="0" bIns="0" rtlCol="0" anchor="ctr"/>
+          <a:lstStyle/>
+          <a:p>
+            <a:pPr rtl="1" algn="ctr" indent="0" marL="0">
+              <a:buNone/>
+            </a:pPr>
+            <a:r>
+              <a:rPr lang="en-US" sz="1450" b="1" dirty="0">
+                <a:solidFill>
+                  <a:srgbClr val="4B2E9E"/>
+                </a:solidFill>
+                <a:latin typeface="Tajawal" pitchFamily="34" charset="0"/>
+                <a:ea typeface="Tajawal" pitchFamily="34" charset="-122"/>
+                <a:cs typeface="Tajawal" pitchFamily="34" charset="-120"/>
+              </a:rPr>
+              <a:t>فزائر واحد وزائر مليون سواء في الكلفة — لأن التعرف والصوت والمحتوى كلها داخل جهاز الزائر، لا على خادم نملكه.</a:t>
+            </a:r>
+            <a:endParaRPr lang="en-US" sz="1450" dirty="0"/>
+          </a:p>
+        </p:txBody>
+      </p:sp>
+      <p:sp>
+        <p:nvSpPr>
+          <p:cNvPr id="15" name="Shape 12"/>
+          <p:cNvSpPr/>
+          <p:nvPr/>
+        </p:nvSpPr>
+        <p:spPr>
+          <a:xfrm>
+            <a:off x="8027213" y="4992624"/>
+            <a:ext cx="3387242" cy="1225296"/>
+          </a:xfrm>
+          <a:prstGeom prst="roundRect">
+            <a:avLst>
+              <a:gd name="adj" fmla="val 5970"/>
+            </a:avLst>
+          </a:prstGeom>
+          <a:solidFill>
+            <a:srgbClr val="EEF3F9"/>
+          </a:solidFill>
+          <a:ln w="9525">
+            <a:solidFill>
+              <a:srgbClr val="D9E2EC"/>
+            </a:solidFill>
+            <a:prstDash val="solid"/>
+          </a:ln>
+        </p:spPr>
+      </p:sp>
+      <p:sp>
+        <p:nvSpPr>
+          <p:cNvPr id="16" name="Text 13"/>
+          <p:cNvSpPr/>
+          <p:nvPr/>
+        </p:nvSpPr>
+        <p:spPr>
+          <a:xfrm>
+            <a:off x="8027213" y="5138928"/>
+            <a:ext cx="3387242" cy="548640"/>
+          </a:xfrm>
+          <a:prstGeom prst="rect">
+            <a:avLst/>
+          </a:prstGeom>
+          <a:noFill/>
+          <a:ln/>
+        </p:spPr>
+        <p:txBody>
+          <a:bodyPr wrap="square" lIns="0" tIns="0" rIns="0" bIns="0" rtlCol="0" anchor="ctr"/>
+          <a:lstStyle/>
+          <a:p>
+            <a:pPr algn="ctr" indent="0" marL="0">
+              <a:buNone/>
+            </a:pPr>
+            <a:r>
+              <a:rPr lang="en-US" sz="2800" b="1" dirty="0">
+                <a:solidFill>
+                  <a:srgbClr val="255174"/>
+                </a:solidFill>
+                <a:latin typeface="Calibri" pitchFamily="34" charset="0"/>
+                <a:ea typeface="Calibri" pitchFamily="34" charset="-122"/>
+                <a:cs typeface="Calibri" pitchFamily="34" charset="-120"/>
+              </a:rPr>
+              <a:t>99$</a:t>
+            </a:r>
+            <a:endParaRPr lang="en-US" sz="2800" dirty="0"/>
+          </a:p>
+        </p:txBody>
+      </p:sp>
+      <p:sp>
+        <p:nvSpPr>
+          <p:cNvPr id="17" name="Text 14"/>
+          <p:cNvSpPr/>
+          <p:nvPr/>
+        </p:nvSpPr>
+        <p:spPr>
+          <a:xfrm>
+            <a:off x="8136941" y="5724144"/>
+            <a:ext cx="3167786" cy="402336"/>
+          </a:xfrm>
+          <a:prstGeom prst="rect">
+            <a:avLst/>
+          </a:prstGeom>
+          <a:noFill/>
+          <a:ln/>
+        </p:spPr>
+        <p:txBody>
+          <a:bodyPr wrap="square" lIns="0" tIns="0" rIns="0" bIns="0" rtlCol="0" anchor="ctr"/>
+          <a:lstStyle/>
+          <a:p>
+            <a:pPr rtl="1" algn="ctr" indent="0" marL="0">
+              <a:lnSpc>
+                <a:spcPts val="1500"/>
+              </a:lnSpc>
+              <a:buNone/>
+            </a:pPr>
+            <a:r>
+              <a:rPr lang="en-US" sz="1100" dirty="0">
+                <a:solidFill>
+                  <a:srgbClr val="4B5B6E"/>
+                </a:solidFill>
+                <a:latin typeface="Tajawal" pitchFamily="34" charset="0"/>
+                <a:ea typeface="Tajawal" pitchFamily="34" charset="-122"/>
+                <a:cs typeface="Tajawal" pitchFamily="34" charset="-120"/>
+              </a:rPr>
+              <a:t>حساب مطور آبل</a:t>
+            </a:r>
+            <a:endParaRPr lang="en-US" sz="1100" dirty="0"/>
+          </a:p>
+          <a:p>
+            <a:pPr rtl="1" algn="ctr" indent="0" marL="0">
+              <a:lnSpc>
+                <a:spcPts val="1500"/>
+              </a:lnSpc>
+              <a:buNone/>
+            </a:pPr>
+            <a:r>
+              <a:rPr lang="en-US" sz="1100" dirty="0">
+                <a:solidFill>
+                  <a:srgbClr val="4B5B6E"/>
+                </a:solidFill>
+                <a:latin typeface="Tajawal" pitchFamily="34" charset="0"/>
+                <a:ea typeface="Tajawal" pitchFamily="34" charset="-122"/>
+                <a:cs typeface="Tajawal" pitchFamily="34" charset="-120"/>
+              </a:rPr>
+              <a:t>سنويا</a:t>
+            </a:r>
+            <a:endParaRPr lang="en-US" sz="1100" dirty="0"/>
+          </a:p>
+        </p:txBody>
+      </p:sp>
+      <p:sp>
+        <p:nvSpPr>
+          <p:cNvPr id="18" name="Shape 15"/>
+          <p:cNvSpPr/>
+          <p:nvPr/>
+        </p:nvSpPr>
+        <p:spPr>
+          <a:xfrm>
+            <a:off x="4402226" y="4992624"/>
+            <a:ext cx="3387242" cy="1225296"/>
+          </a:xfrm>
+          <a:prstGeom prst="roundRect">
+            <a:avLst>
+              <a:gd name="adj" fmla="val 5970"/>
+            </a:avLst>
+          </a:prstGeom>
+          <a:solidFill>
+            <a:srgbClr val="EEF3F9"/>
+          </a:solidFill>
+          <a:ln w="9525">
+            <a:solidFill>
+              <a:srgbClr val="D9E2EC"/>
+            </a:solidFill>
+            <a:prstDash val="solid"/>
+          </a:ln>
+        </p:spPr>
+      </p:sp>
+      <p:sp>
+        <p:nvSpPr>
+          <p:cNvPr id="19" name="Text 16"/>
+          <p:cNvSpPr/>
+          <p:nvPr/>
+        </p:nvSpPr>
+        <p:spPr>
+          <a:xfrm>
+            <a:off x="4402226" y="5138928"/>
+            <a:ext cx="3387242" cy="548640"/>
+          </a:xfrm>
+          <a:prstGeom prst="rect">
+            <a:avLst/>
+          </a:prstGeom>
+          <a:noFill/>
+          <a:ln/>
+        </p:spPr>
+        <p:txBody>
+          <a:bodyPr wrap="square" lIns="0" tIns="0" rIns="0" bIns="0" rtlCol="0" anchor="ctr"/>
+          <a:lstStyle/>
+          <a:p>
+            <a:pPr algn="ctr" indent="0" marL="0">
+              <a:buNone/>
+            </a:pPr>
+            <a:r>
+              <a:rPr lang="en-US" sz="2800" b="1" dirty="0">
+                <a:solidFill>
+                  <a:srgbClr val="255174"/>
+                </a:solidFill>
+                <a:latin typeface="Calibri" pitchFamily="34" charset="0"/>
+                <a:ea typeface="Calibri" pitchFamily="34" charset="-122"/>
+                <a:cs typeface="Calibri" pitchFamily="34" charset="-120"/>
+              </a:rPr>
+              <a:t>25$</a:t>
+            </a:r>
+            <a:endParaRPr lang="en-US" sz="2800" dirty="0"/>
+          </a:p>
+        </p:txBody>
+      </p:sp>
+      <p:sp>
+        <p:nvSpPr>
+          <p:cNvPr id="20" name="Text 17"/>
+          <p:cNvSpPr/>
+          <p:nvPr/>
+        </p:nvSpPr>
+        <p:spPr>
+          <a:xfrm>
+            <a:off x="4511954" y="5724144"/>
+            <a:ext cx="3167786" cy="402336"/>
+          </a:xfrm>
+          <a:prstGeom prst="rect">
+            <a:avLst/>
+          </a:prstGeom>
+          <a:noFill/>
+          <a:ln/>
+        </p:spPr>
+        <p:txBody>
+          <a:bodyPr wrap="square" lIns="0" tIns="0" rIns="0" bIns="0" rtlCol="0" anchor="ctr"/>
+          <a:lstStyle/>
+          <a:p>
+            <a:pPr rtl="1" algn="ctr" indent="0" marL="0">
+              <a:lnSpc>
+                <a:spcPts val="1500"/>
+              </a:lnSpc>
+              <a:buNone/>
+            </a:pPr>
+            <a:r>
+              <a:rPr lang="en-US" sz="1100" dirty="0">
+                <a:solidFill>
+                  <a:srgbClr val="4B5B6E"/>
+                </a:solidFill>
+                <a:latin typeface="Tajawal" pitchFamily="34" charset="0"/>
+                <a:ea typeface="Tajawal" pitchFamily="34" charset="-122"/>
+                <a:cs typeface="Tajawal" pitchFamily="34" charset="-120"/>
+              </a:rPr>
+              <a:t>حساب مطور جوجل</a:t>
+            </a:r>
+            <a:endParaRPr lang="en-US" sz="1100" dirty="0"/>
+          </a:p>
+          <a:p>
+            <a:pPr rtl="1" algn="ctr" indent="0" marL="0">
+              <a:lnSpc>
+                <a:spcPts val="1500"/>
+              </a:lnSpc>
+              <a:buNone/>
+            </a:pPr>
+            <a:r>
+              <a:rPr lang="en-US" sz="1100" dirty="0">
+                <a:solidFill>
+                  <a:srgbClr val="4B5B6E"/>
+                </a:solidFill>
+                <a:latin typeface="Tajawal" pitchFamily="34" charset="0"/>
+                <a:ea typeface="Tajawal" pitchFamily="34" charset="-122"/>
+                <a:cs typeface="Tajawal" pitchFamily="34" charset="-120"/>
+              </a:rPr>
+              <a:t>مرة واحدة</a:t>
+            </a:r>
+            <a:endParaRPr lang="en-US" sz="1100" dirty="0"/>
+          </a:p>
+        </p:txBody>
+      </p:sp>
+      <p:sp>
+        <p:nvSpPr>
+          <p:cNvPr id="21" name="Shape 18"/>
+          <p:cNvSpPr/>
+          <p:nvPr/>
+        </p:nvSpPr>
+        <p:spPr>
+          <a:xfrm>
+            <a:off x="777240" y="4992624"/>
+            <a:ext cx="3387242" cy="1225296"/>
+          </a:xfrm>
+          <a:prstGeom prst="roundRect">
+            <a:avLst>
+              <a:gd name="adj" fmla="val 5970"/>
+            </a:avLst>
+          </a:prstGeom>
+          <a:solidFill>
+            <a:srgbClr val="EEF3F9"/>
+          </a:solidFill>
+          <a:ln w="9525">
+            <a:solidFill>
+              <a:srgbClr val="D9E2EC"/>
+            </a:solidFill>
+            <a:prstDash val="solid"/>
+          </a:ln>
+        </p:spPr>
+      </p:sp>
+      <p:sp>
+        <p:nvSpPr>
+          <p:cNvPr id="22" name="Text 19"/>
+          <p:cNvSpPr/>
+          <p:nvPr/>
+        </p:nvSpPr>
+        <p:spPr>
+          <a:xfrm>
+            <a:off x="777240" y="5138928"/>
+            <a:ext cx="3387242" cy="548640"/>
+          </a:xfrm>
+          <a:prstGeom prst="rect">
+            <a:avLst/>
+          </a:prstGeom>
+          <a:noFill/>
+          <a:ln/>
+        </p:spPr>
+        <p:txBody>
+          <a:bodyPr wrap="square" lIns="0" tIns="0" rIns="0" bIns="0" rtlCol="0" anchor="ctr"/>
+          <a:lstStyle/>
+          <a:p>
+            <a:pPr algn="ctr" indent="0" marL="0">
+              <a:buNone/>
+            </a:pPr>
+            <a:r>
+              <a:rPr lang="en-US" sz="2800" b="1" dirty="0">
+                <a:solidFill>
+                  <a:srgbClr val="8357F6"/>
+                </a:solidFill>
+                <a:latin typeface="Calibri" pitchFamily="34" charset="0"/>
+                <a:ea typeface="Calibri" pitchFamily="34" charset="-122"/>
+                <a:cs typeface="Calibri" pitchFamily="34" charset="-120"/>
+              </a:rPr>
+              <a:t>0$</a:t>
+            </a:r>
+            <a:endParaRPr lang="en-US" sz="2800" dirty="0"/>
+          </a:p>
+        </p:txBody>
+      </p:sp>
+      <p:sp>
+        <p:nvSpPr>
+          <p:cNvPr id="23" name="Text 20"/>
+          <p:cNvSpPr/>
+          <p:nvPr/>
+        </p:nvSpPr>
+        <p:spPr>
+          <a:xfrm>
+            <a:off x="886968" y="5724144"/>
+            <a:ext cx="3167786" cy="402336"/>
+          </a:xfrm>
+          <a:prstGeom prst="rect">
+            <a:avLst/>
+          </a:prstGeom>
+          <a:noFill/>
+          <a:ln/>
+        </p:spPr>
+        <p:txBody>
+          <a:bodyPr wrap="square" lIns="0" tIns="0" rIns="0" bIns="0" rtlCol="0" anchor="ctr"/>
+          <a:lstStyle/>
+          <a:p>
+            <a:pPr rtl="1" algn="ctr" indent="0" marL="0">
+              <a:lnSpc>
+                <a:spcPts val="1500"/>
+              </a:lnSpc>
+              <a:buNone/>
+            </a:pPr>
+            <a:r>
+              <a:rPr lang="en-US" sz="1100" dirty="0">
+                <a:solidFill>
+                  <a:srgbClr val="4B5B6E"/>
+                </a:solidFill>
+                <a:latin typeface="Tajawal" pitchFamily="34" charset="0"/>
+                <a:ea typeface="Tajawal" pitchFamily="34" charset="-122"/>
+                <a:cs typeface="Tajawal" pitchFamily="34" charset="-120"/>
+              </a:rPr>
+              <a:t>تكلفة تشغيل</a:t>
+            </a:r>
+            <a:endParaRPr lang="en-US" sz="1100" dirty="0"/>
+          </a:p>
+          <a:p>
+            <a:pPr rtl="1" algn="ctr" indent="0" marL="0">
+              <a:lnSpc>
+                <a:spcPts val="1500"/>
+              </a:lnSpc>
+              <a:buNone/>
+            </a:pPr>
+            <a:r>
+              <a:rPr lang="en-US" sz="1100" dirty="0">
+                <a:solidFill>
+                  <a:srgbClr val="4B5B6E"/>
+                </a:solidFill>
+                <a:latin typeface="Tajawal" pitchFamily="34" charset="0"/>
+                <a:ea typeface="Tajawal" pitchFamily="34" charset="-122"/>
+                <a:cs typeface="Tajawal" pitchFamily="34" charset="-120"/>
+              </a:rPr>
+              <a:t>شهرية</a:t>
+            </a:r>
+            <a:endParaRPr lang="en-US" sz="1100" dirty="0"/>
           </a:p>
         </p:txBody>
       </p:sp>
@@ -3064,7 +4543,7 @@
         <p:spPr>
           <a:xfrm>
             <a:off x="5120640" y="2788920"/>
-            <a:ext cx="6202375" cy="1280160"/>
+            <a:ext cx="6293815" cy="1280160"/>
           </a:xfrm>
           <a:prstGeom prst="rect">
             <a:avLst/>
@@ -3080,7 +4559,7 @@
               <a:buNone/>
             </a:pPr>
             <a:r>
-              <a:rPr lang="en-US" sz="3800" b="1" dirty="0">
+              <a:rPr lang="en-US" sz="3600" b="1" dirty="0">
                 <a:solidFill>
                   <a:srgbClr val="255174"/>
                 </a:solidFill>
@@ -3090,7 +4569,7 @@
               </a:rPr>
               <a:t>قابلية النمو</a:t>
             </a:r>
-            <a:endParaRPr lang="en-US" sz="3800" dirty="0"/>
+            <a:endParaRPr lang="en-US" sz="3600" dirty="0"/>
           </a:p>
         </p:txBody>
       </p:sp>
@@ -3158,8 +4637,8 @@
         </p:nvSpPr>
         <p:spPr>
           <a:xfrm>
-            <a:off x="868680" y="658368"/>
-            <a:ext cx="10454335" cy="502920"/>
+            <a:off x="777240" y="548640"/>
+            <a:ext cx="10637215" cy="502920"/>
           </a:xfrm>
           <a:prstGeom prst="rect">
             <a:avLst/>
@@ -3197,18 +4676,20 @@
         </p:nvSpPr>
         <p:spPr>
           <a:xfrm>
-            <a:off x="9768535" y="1243584"/>
-            <a:ext cx="1554480" cy="54864"/>
-          </a:xfrm>
-          <a:prstGeom prst="rect">
-            <a:avLst/>
+            <a:off x="8933459" y="1234440"/>
+            <a:ext cx="2480996" cy="1298448"/>
+          </a:xfrm>
+          <a:prstGeom prst="roundRect">
+            <a:avLst>
+              <a:gd name="adj" fmla="val 5634"/>
+            </a:avLst>
           </a:prstGeom>
           <a:solidFill>
-            <a:srgbClr val="8357F6"/>
+            <a:srgbClr val="EEF3F9"/>
           </a:solidFill>
-          <a:ln w="12700">
+          <a:ln w="9525">
             <a:solidFill>
-              <a:srgbClr val="333333"/>
+              <a:srgbClr val="D9E2EC"/>
             </a:solidFill>
             <a:prstDash val="solid"/>
           </a:ln>
@@ -3222,109 +4703,1122 @@
         </p:nvSpPr>
         <p:spPr>
           <a:xfrm>
-            <a:off x="868680" y="1691640"/>
-            <a:ext cx="10454335" cy="4206240"/>
-          </a:xfrm>
-          <a:prstGeom prst="rect">
-            <a:avLst/>
-          </a:prstGeom>
-          <a:noFill/>
-          <a:ln/>
-        </p:spPr>
-        <p:txBody>
-          <a:bodyPr wrap="square" lIns="0" tIns="0" rIns="0" bIns="0" rtlCol="0" anchor="t"/>
+            <a:off x="9134627" y="1353312"/>
+            <a:ext cx="365760" cy="310896"/>
+          </a:xfrm>
+          <a:prstGeom prst="rect">
+            <a:avLst/>
+          </a:prstGeom>
+          <a:noFill/>
+          <a:ln/>
+        </p:spPr>
+        <p:txBody>
+          <a:bodyPr wrap="square" lIns="0" tIns="0" rIns="0" bIns="0" rtlCol="0" anchor="ctr"/>
+          <a:lstStyle/>
+          <a:p>
+            <a:pPr algn="l" indent="0" marL="0">
+              <a:buNone/>
+            </a:pPr>
+            <a:r>
+              <a:rPr lang="en-US" sz="1300" b="1" dirty="0">
+                <a:solidFill>
+                  <a:srgbClr val="AFC0D4"/>
+                </a:solidFill>
+                <a:latin typeface="Calibri" pitchFamily="34" charset="0"/>
+                <a:ea typeface="Calibri" pitchFamily="34" charset="-122"/>
+                <a:cs typeface="Calibri" pitchFamily="34" charset="-120"/>
+              </a:rPr>
+              <a:t>1</a:t>
+            </a:r>
+            <a:endParaRPr lang="en-US" sz="1300" dirty="0"/>
+          </a:p>
+        </p:txBody>
+      </p:sp>
+      <p:sp>
+        <p:nvSpPr>
+          <p:cNvPr id="6" name="Text 3"/>
+          <p:cNvSpPr/>
+          <p:nvPr/>
+        </p:nvSpPr>
+        <p:spPr>
+          <a:xfrm>
+            <a:off x="9171203" y="1371600"/>
+            <a:ext cx="1658036" cy="310896"/>
+          </a:xfrm>
+          <a:prstGeom prst="rect">
+            <a:avLst/>
+          </a:prstGeom>
+          <a:noFill/>
+          <a:ln/>
+        </p:spPr>
+        <p:txBody>
+          <a:bodyPr wrap="square" lIns="0" tIns="0" rIns="0" bIns="0" rtlCol="0" anchor="ctr"/>
+          <a:lstStyle/>
+          <a:p>
+            <a:pPr rtl="1" algn="r" indent="0" marL="0">
+              <a:buNone/>
+            </a:pPr>
+            <a:r>
+              <a:rPr lang="en-US" sz="1500" b="1" dirty="0">
+                <a:solidFill>
+                  <a:srgbClr val="255174"/>
+                </a:solidFill>
+                <a:latin typeface="Tajawal" pitchFamily="34" charset="0"/>
+                <a:ea typeface="Tajawal" pitchFamily="34" charset="-122"/>
+                <a:cs typeface="Tajawal" pitchFamily="34" charset="-120"/>
+              </a:rPr>
+              <a:t>تصوير</a:t>
+            </a:r>
+            <a:endParaRPr lang="en-US" sz="1500" dirty="0"/>
+          </a:p>
+        </p:txBody>
+      </p:sp>
+      <p:sp>
+        <p:nvSpPr>
+          <p:cNvPr id="7" name="Text 4"/>
+          <p:cNvSpPr/>
+          <p:nvPr/>
+        </p:nvSpPr>
+        <p:spPr>
+          <a:xfrm>
+            <a:off x="9171203" y="1773936"/>
+            <a:ext cx="2005508" cy="603504"/>
+          </a:xfrm>
+          <a:prstGeom prst="rect">
+            <a:avLst/>
+          </a:prstGeom>
+          <a:noFill/>
+          <a:ln/>
+        </p:spPr>
+        <p:txBody>
+          <a:bodyPr wrap="square" lIns="0" tIns="0" rIns="0" bIns="0" rtlCol="0" anchor="ctr"/>
           <a:lstStyle/>
           <a:p>
             <a:pPr rtl="1" algn="r" indent="0" marL="0">
               <a:lnSpc>
-                <a:spcPts val="2800"/>
+                <a:spcPts val="1700"/>
+              </a:lnSpc>
+              <a:buNone/>
+            </a:pPr>
+            <a:r>
+              <a:rPr lang="en-US" sz="1150" dirty="0">
+                <a:solidFill>
+                  <a:srgbClr val="4B5B6E"/>
+                </a:solidFill>
+                <a:latin typeface="Tajawal" pitchFamily="34" charset="0"/>
+                <a:ea typeface="Tajawal" pitchFamily="34" charset="-122"/>
+                <a:cs typeface="Tajawal" pitchFamily="34" charset="-120"/>
+              </a:rPr>
+              <a:t>زيارة ميدانية واحدة للموقع الجديد</a:t>
+            </a:r>
+            <a:endParaRPr lang="en-US" sz="1150" dirty="0"/>
+          </a:p>
+        </p:txBody>
+      </p:sp>
+      <p:sp>
+        <p:nvSpPr>
+          <p:cNvPr id="8" name="Shape 5"/>
+          <p:cNvSpPr/>
+          <p:nvPr/>
+        </p:nvSpPr>
+        <p:spPr>
+          <a:xfrm>
+            <a:off x="6214720" y="1234440"/>
+            <a:ext cx="2480996" cy="1298448"/>
+          </a:xfrm>
+          <a:prstGeom prst="roundRect">
+            <a:avLst>
+              <a:gd name="adj" fmla="val 5634"/>
+            </a:avLst>
+          </a:prstGeom>
+          <a:solidFill>
+            <a:srgbClr val="EEF3F9"/>
+          </a:solidFill>
+          <a:ln w="9525">
+            <a:solidFill>
+              <a:srgbClr val="D9E2EC"/>
+            </a:solidFill>
+            <a:prstDash val="solid"/>
+          </a:ln>
+        </p:spPr>
+      </p:sp>
+      <p:sp>
+        <p:nvSpPr>
+          <p:cNvPr id="9" name="Text 6"/>
+          <p:cNvSpPr/>
+          <p:nvPr/>
+        </p:nvSpPr>
+        <p:spPr>
+          <a:xfrm>
+            <a:off x="6415888" y="1353312"/>
+            <a:ext cx="365760" cy="310896"/>
+          </a:xfrm>
+          <a:prstGeom prst="rect">
+            <a:avLst/>
+          </a:prstGeom>
+          <a:noFill/>
+          <a:ln/>
+        </p:spPr>
+        <p:txBody>
+          <a:bodyPr wrap="square" lIns="0" tIns="0" rIns="0" bIns="0" rtlCol="0" anchor="ctr"/>
+          <a:lstStyle/>
+          <a:p>
+            <a:pPr algn="l" indent="0" marL="0">
+              <a:buNone/>
+            </a:pPr>
+            <a:r>
+              <a:rPr lang="en-US" sz="1300" b="1" dirty="0">
+                <a:solidFill>
+                  <a:srgbClr val="AFC0D4"/>
+                </a:solidFill>
+                <a:latin typeface="Calibri" pitchFamily="34" charset="0"/>
+                <a:ea typeface="Calibri" pitchFamily="34" charset="-122"/>
+                <a:cs typeface="Calibri" pitchFamily="34" charset="-120"/>
+              </a:rPr>
+              <a:t>2</a:t>
+            </a:r>
+            <a:endParaRPr lang="en-US" sz="1300" dirty="0"/>
+          </a:p>
+        </p:txBody>
+      </p:sp>
+      <p:sp>
+        <p:nvSpPr>
+          <p:cNvPr id="10" name="Text 7"/>
+          <p:cNvSpPr/>
+          <p:nvPr/>
+        </p:nvSpPr>
+        <p:spPr>
+          <a:xfrm>
+            <a:off x="6452464" y="1371600"/>
+            <a:ext cx="1658036" cy="310896"/>
+          </a:xfrm>
+          <a:prstGeom prst="rect">
+            <a:avLst/>
+          </a:prstGeom>
+          <a:noFill/>
+          <a:ln/>
+        </p:spPr>
+        <p:txBody>
+          <a:bodyPr wrap="square" lIns="0" tIns="0" rIns="0" bIns="0" rtlCol="0" anchor="ctr"/>
+          <a:lstStyle/>
+          <a:p>
+            <a:pPr rtl="1" algn="r" indent="0" marL="0">
+              <a:buNone/>
+            </a:pPr>
+            <a:r>
+              <a:rPr lang="en-US" sz="1500" b="1" dirty="0">
+                <a:solidFill>
+                  <a:srgbClr val="255174"/>
+                </a:solidFill>
+                <a:latin typeface="Tajawal" pitchFamily="34" charset="0"/>
+                <a:ea typeface="Tajawal" pitchFamily="34" charset="-122"/>
+                <a:cs typeface="Tajawal" pitchFamily="34" charset="-120"/>
+              </a:rPr>
+              <a:t>فهرسة</a:t>
+            </a:r>
+            <a:endParaRPr lang="en-US" sz="1500" dirty="0"/>
+          </a:p>
+        </p:txBody>
+      </p:sp>
+      <p:sp>
+        <p:nvSpPr>
+          <p:cNvPr id="11" name="Text 8"/>
+          <p:cNvSpPr/>
+          <p:nvPr/>
+        </p:nvSpPr>
+        <p:spPr>
+          <a:xfrm>
+            <a:off x="6452464" y="1773936"/>
+            <a:ext cx="2005508" cy="603504"/>
+          </a:xfrm>
+          <a:prstGeom prst="rect">
+            <a:avLst/>
+          </a:prstGeom>
+          <a:noFill/>
+          <a:ln/>
+        </p:spPr>
+        <p:txBody>
+          <a:bodyPr wrap="square" lIns="0" tIns="0" rIns="0" bIns="0" rtlCol="0" anchor="ctr"/>
+          <a:lstStyle/>
+          <a:p>
+            <a:pPr rtl="1" algn="r" indent="0" marL="0">
+              <a:lnSpc>
+                <a:spcPts val="1700"/>
+              </a:lnSpc>
+              <a:buNone/>
+            </a:pPr>
+            <a:r>
+              <a:rPr lang="en-US" sz="1150" dirty="0">
+                <a:solidFill>
+                  <a:srgbClr val="4B5B6E"/>
+                </a:solidFill>
+                <a:latin typeface="Tajawal" pitchFamily="34" charset="0"/>
+                <a:ea typeface="Tajawal" pitchFamily="34" charset="-122"/>
+                <a:cs typeface="Tajawal" pitchFamily="34" charset="-120"/>
+              </a:rPr>
+              <a:t>تحويل الصور إلى بصمات — دقائق</a:t>
+            </a:r>
+            <a:endParaRPr lang="en-US" sz="1150" dirty="0"/>
+          </a:p>
+        </p:txBody>
+      </p:sp>
+      <p:sp>
+        <p:nvSpPr>
+          <p:cNvPr id="12" name="Shape 9"/>
+          <p:cNvSpPr/>
+          <p:nvPr/>
+        </p:nvSpPr>
+        <p:spPr>
+          <a:xfrm>
+            <a:off x="3495980" y="1234440"/>
+            <a:ext cx="2480996" cy="1298448"/>
+          </a:xfrm>
+          <a:prstGeom prst="roundRect">
+            <a:avLst>
+              <a:gd name="adj" fmla="val 5634"/>
+            </a:avLst>
+          </a:prstGeom>
+          <a:solidFill>
+            <a:srgbClr val="EEF3F9"/>
+          </a:solidFill>
+          <a:ln w="9525">
+            <a:solidFill>
+              <a:srgbClr val="D9E2EC"/>
+            </a:solidFill>
+            <a:prstDash val="solid"/>
+          </a:ln>
+        </p:spPr>
+      </p:sp>
+      <p:sp>
+        <p:nvSpPr>
+          <p:cNvPr id="13" name="Text 10"/>
+          <p:cNvSpPr/>
+          <p:nvPr/>
+        </p:nvSpPr>
+        <p:spPr>
+          <a:xfrm>
+            <a:off x="3697148" y="1353312"/>
+            <a:ext cx="365760" cy="310896"/>
+          </a:xfrm>
+          <a:prstGeom prst="rect">
+            <a:avLst/>
+          </a:prstGeom>
+          <a:noFill/>
+          <a:ln/>
+        </p:spPr>
+        <p:txBody>
+          <a:bodyPr wrap="square" lIns="0" tIns="0" rIns="0" bIns="0" rtlCol="0" anchor="ctr"/>
+          <a:lstStyle/>
+          <a:p>
+            <a:pPr algn="l" indent="0" marL="0">
+              <a:buNone/>
+            </a:pPr>
+            <a:r>
+              <a:rPr lang="en-US" sz="1300" b="1" dirty="0">
+                <a:solidFill>
+                  <a:srgbClr val="AFC0D4"/>
+                </a:solidFill>
+                <a:latin typeface="Calibri" pitchFamily="34" charset="0"/>
+                <a:ea typeface="Calibri" pitchFamily="34" charset="-122"/>
+                <a:cs typeface="Calibri" pitchFamily="34" charset="-120"/>
+              </a:rPr>
+              <a:t>3</a:t>
+            </a:r>
+            <a:endParaRPr lang="en-US" sz="1300" dirty="0"/>
+          </a:p>
+        </p:txBody>
+      </p:sp>
+      <p:sp>
+        <p:nvSpPr>
+          <p:cNvPr id="14" name="Text 11"/>
+          <p:cNvSpPr/>
+          <p:nvPr/>
+        </p:nvSpPr>
+        <p:spPr>
+          <a:xfrm>
+            <a:off x="3733724" y="1371600"/>
+            <a:ext cx="1658036" cy="310896"/>
+          </a:xfrm>
+          <a:prstGeom prst="rect">
+            <a:avLst/>
+          </a:prstGeom>
+          <a:noFill/>
+          <a:ln/>
+        </p:spPr>
+        <p:txBody>
+          <a:bodyPr wrap="square" lIns="0" tIns="0" rIns="0" bIns="0" rtlCol="0" anchor="ctr"/>
+          <a:lstStyle/>
+          <a:p>
+            <a:pPr rtl="1" algn="r" indent="0" marL="0">
+              <a:buNone/>
+            </a:pPr>
+            <a:r>
+              <a:rPr lang="en-US" sz="1500" b="1" dirty="0">
+                <a:solidFill>
+                  <a:srgbClr val="255174"/>
+                </a:solidFill>
+                <a:latin typeface="Tajawal" pitchFamily="34" charset="0"/>
+                <a:ea typeface="Tajawal" pitchFamily="34" charset="-122"/>
+                <a:cs typeface="Tajawal" pitchFamily="34" charset="-120"/>
+              </a:rPr>
+              <a:t>محتوى</a:t>
+            </a:r>
+            <a:endParaRPr lang="en-US" sz="1500" dirty="0"/>
+          </a:p>
+        </p:txBody>
+      </p:sp>
+      <p:sp>
+        <p:nvSpPr>
+          <p:cNvPr id="15" name="Text 12"/>
+          <p:cNvSpPr/>
+          <p:nvPr/>
+        </p:nvSpPr>
+        <p:spPr>
+          <a:xfrm>
+            <a:off x="3733724" y="1773936"/>
+            <a:ext cx="2005508" cy="603504"/>
+          </a:xfrm>
+          <a:prstGeom prst="rect">
+            <a:avLst/>
+          </a:prstGeom>
+          <a:noFill/>
+          <a:ln/>
+        </p:spPr>
+        <p:txBody>
+          <a:bodyPr wrap="square" lIns="0" tIns="0" rIns="0" bIns="0" rtlCol="0" anchor="ctr"/>
+          <a:lstStyle/>
+          <a:p>
+            <a:pPr rtl="1" algn="r" indent="0" marL="0">
+              <a:lnSpc>
+                <a:spcPts val="1700"/>
+              </a:lnSpc>
+              <a:buNone/>
+            </a:pPr>
+            <a:r>
+              <a:rPr lang="en-US" sz="1150" dirty="0">
+                <a:solidFill>
+                  <a:srgbClr val="4B5B6E"/>
+                </a:solidFill>
+                <a:latin typeface="Tajawal" pitchFamily="34" charset="0"/>
+                <a:ea typeface="Tajawal" pitchFamily="34" charset="-122"/>
+                <a:cs typeface="Tajawal" pitchFamily="34" charset="-120"/>
+              </a:rPr>
+              <a:t>كتابة القصص وترجمتها</a:t>
+            </a:r>
+            <a:endParaRPr lang="en-US" sz="1150" dirty="0"/>
+          </a:p>
+        </p:txBody>
+      </p:sp>
+      <p:sp>
+        <p:nvSpPr>
+          <p:cNvPr id="16" name="Shape 13"/>
+          <p:cNvSpPr/>
+          <p:nvPr/>
+        </p:nvSpPr>
+        <p:spPr>
+          <a:xfrm>
+            <a:off x="777240" y="1234440"/>
+            <a:ext cx="2480996" cy="1298448"/>
+          </a:xfrm>
+          <a:prstGeom prst="roundRect">
+            <a:avLst>
+              <a:gd name="adj" fmla="val 5634"/>
+            </a:avLst>
+          </a:prstGeom>
+          <a:solidFill>
+            <a:srgbClr val="EEF3F9"/>
+          </a:solidFill>
+          <a:ln w="9525">
+            <a:solidFill>
+              <a:srgbClr val="D9E2EC"/>
+            </a:solidFill>
+            <a:prstDash val="solid"/>
+          </a:ln>
+        </p:spPr>
+      </p:sp>
+      <p:sp>
+        <p:nvSpPr>
+          <p:cNvPr id="17" name="Text 14"/>
+          <p:cNvSpPr/>
+          <p:nvPr/>
+        </p:nvSpPr>
+        <p:spPr>
+          <a:xfrm>
+            <a:off x="978408" y="1353312"/>
+            <a:ext cx="365760" cy="310896"/>
+          </a:xfrm>
+          <a:prstGeom prst="rect">
+            <a:avLst/>
+          </a:prstGeom>
+          <a:noFill/>
+          <a:ln/>
+        </p:spPr>
+        <p:txBody>
+          <a:bodyPr wrap="square" lIns="0" tIns="0" rIns="0" bIns="0" rtlCol="0" anchor="ctr"/>
+          <a:lstStyle/>
+          <a:p>
+            <a:pPr algn="l" indent="0" marL="0">
+              <a:buNone/>
+            </a:pPr>
+            <a:r>
+              <a:rPr lang="en-US" sz="1300" b="1" dirty="0">
+                <a:solidFill>
+                  <a:srgbClr val="AFC0D4"/>
+                </a:solidFill>
+                <a:latin typeface="Calibri" pitchFamily="34" charset="0"/>
+                <a:ea typeface="Calibri" pitchFamily="34" charset="-122"/>
+                <a:cs typeface="Calibri" pitchFamily="34" charset="-120"/>
+              </a:rPr>
+              <a:t>4</a:t>
+            </a:r>
+            <a:endParaRPr lang="en-US" sz="1300" dirty="0"/>
+          </a:p>
+        </p:txBody>
+      </p:sp>
+      <p:sp>
+        <p:nvSpPr>
+          <p:cNvPr id="18" name="Text 15"/>
+          <p:cNvSpPr/>
+          <p:nvPr/>
+        </p:nvSpPr>
+        <p:spPr>
+          <a:xfrm>
+            <a:off x="1014984" y="1371600"/>
+            <a:ext cx="1658036" cy="310896"/>
+          </a:xfrm>
+          <a:prstGeom prst="rect">
+            <a:avLst/>
+          </a:prstGeom>
+          <a:noFill/>
+          <a:ln/>
+        </p:spPr>
+        <p:txBody>
+          <a:bodyPr wrap="square" lIns="0" tIns="0" rIns="0" bIns="0" rtlCol="0" anchor="ctr"/>
+          <a:lstStyle/>
+          <a:p>
+            <a:pPr rtl="1" algn="r" indent="0" marL="0">
+              <a:buNone/>
+            </a:pPr>
+            <a:r>
+              <a:rPr lang="en-US" sz="1500" b="1" dirty="0">
+                <a:solidFill>
+                  <a:srgbClr val="255174"/>
+                </a:solidFill>
+                <a:latin typeface="Tajawal" pitchFamily="34" charset="0"/>
+                <a:ea typeface="Tajawal" pitchFamily="34" charset="-122"/>
+                <a:cs typeface="Tajawal" pitchFamily="34" charset="-120"/>
+              </a:rPr>
+              <a:t>صوت</a:t>
+            </a:r>
+            <a:endParaRPr lang="en-US" sz="1500" dirty="0"/>
+          </a:p>
+        </p:txBody>
+      </p:sp>
+      <p:sp>
+        <p:nvSpPr>
+          <p:cNvPr id="19" name="Text 16"/>
+          <p:cNvSpPr/>
+          <p:nvPr/>
+        </p:nvSpPr>
+        <p:spPr>
+          <a:xfrm>
+            <a:off x="1014984" y="1773936"/>
+            <a:ext cx="2005508" cy="603504"/>
+          </a:xfrm>
+          <a:prstGeom prst="rect">
+            <a:avLst/>
+          </a:prstGeom>
+          <a:noFill/>
+          <a:ln/>
+        </p:spPr>
+        <p:txBody>
+          <a:bodyPr wrap="square" lIns="0" tIns="0" rIns="0" bIns="0" rtlCol="0" anchor="ctr"/>
+          <a:lstStyle/>
+          <a:p>
+            <a:pPr rtl="1" algn="r" indent="0" marL="0">
+              <a:lnSpc>
+                <a:spcPts val="1700"/>
+              </a:lnSpc>
+              <a:buNone/>
+            </a:pPr>
+            <a:r>
+              <a:rPr lang="en-US" sz="1150" dirty="0">
+                <a:solidFill>
+                  <a:srgbClr val="4B5B6E"/>
+                </a:solidFill>
+                <a:latin typeface="Tajawal" pitchFamily="34" charset="0"/>
+                <a:ea typeface="Tajawal" pitchFamily="34" charset="-122"/>
+                <a:cs typeface="Tajawal" pitchFamily="34" charset="-120"/>
+              </a:rPr>
+              <a:t>توليد الرواية بتسع وعشرين لغة</a:t>
+            </a:r>
+            <a:endParaRPr lang="en-US" sz="1150" dirty="0"/>
+          </a:p>
+        </p:txBody>
+      </p:sp>
+      <p:sp>
+        <p:nvSpPr>
+          <p:cNvPr id="20" name="Shape 17"/>
+          <p:cNvSpPr/>
+          <p:nvPr/>
+        </p:nvSpPr>
+        <p:spPr>
+          <a:xfrm>
+            <a:off x="6233008" y="2761488"/>
+            <a:ext cx="5181448" cy="2249424"/>
+          </a:xfrm>
+          <a:prstGeom prst="roundRect">
+            <a:avLst>
+              <a:gd name="adj" fmla="val 3252"/>
+            </a:avLst>
+          </a:prstGeom>
+          <a:solidFill>
+            <a:srgbClr val="EEF3F9"/>
+          </a:solidFill>
+          <a:ln w="9525">
+            <a:solidFill>
+              <a:srgbClr val="D9E2EC"/>
+            </a:solidFill>
+            <a:prstDash val="solid"/>
+          </a:ln>
+        </p:spPr>
+      </p:sp>
+      <p:sp>
+        <p:nvSpPr>
+          <p:cNvPr id="21" name="Text 18"/>
+          <p:cNvSpPr/>
+          <p:nvPr/>
+        </p:nvSpPr>
+        <p:spPr>
+          <a:xfrm>
+            <a:off x="6507328" y="2962656"/>
+            <a:ext cx="4632808" cy="329184"/>
+          </a:xfrm>
+          <a:prstGeom prst="rect">
+            <a:avLst/>
+          </a:prstGeom>
+          <a:noFill/>
+          <a:ln/>
+        </p:spPr>
+        <p:txBody>
+          <a:bodyPr wrap="square" lIns="0" tIns="0" rIns="0" bIns="0" rtlCol="0" anchor="ctr"/>
+          <a:lstStyle/>
+          <a:p>
+            <a:pPr rtl="1" algn="r" indent="0" marL="0">
+              <a:buNone/>
+            </a:pPr>
+            <a:r>
+              <a:rPr lang="en-US" sz="1500" b="1" dirty="0">
+                <a:solidFill>
+                  <a:srgbClr val="255174"/>
+                </a:solidFill>
+                <a:latin typeface="Tajawal" pitchFamily="34" charset="0"/>
+                <a:ea typeface="Tajawal" pitchFamily="34" charset="-122"/>
+                <a:cs typeface="Tajawal" pitchFamily="34" charset="-120"/>
+              </a:rPr>
+              <a:t>لا إعادة تدريب ولا بنية تحتية</a:t>
+            </a:r>
+            <a:endParaRPr lang="en-US" sz="1500" dirty="0"/>
+          </a:p>
+        </p:txBody>
+      </p:sp>
+      <p:sp>
+        <p:nvSpPr>
+          <p:cNvPr id="22" name="Text 19"/>
+          <p:cNvSpPr/>
+          <p:nvPr/>
+        </p:nvSpPr>
+        <p:spPr>
+          <a:xfrm>
+            <a:off x="6507328" y="3383280"/>
+            <a:ext cx="4632808" cy="1463040"/>
+          </a:xfrm>
+          <a:prstGeom prst="rect">
+            <a:avLst/>
+          </a:prstGeom>
+          <a:noFill/>
+          <a:ln/>
+        </p:spPr>
+        <p:txBody>
+          <a:bodyPr wrap="square" lIns="0" tIns="0" rIns="0" bIns="0" rtlCol="0" anchor="t"/>
+          <a:lstStyle/>
+          <a:p>
+            <a:pPr rtl="1" algn="r" indent="0" marL="0">
+              <a:lnSpc>
+                <a:spcPts val="2000"/>
               </a:lnSpc>
               <a:spcAft>
-                <a:spcPts val="2000"/>
+                <a:spcPts val="1300"/>
               </a:spcAft>
               <a:buNone/>
             </a:pPr>
             <a:r>
-              <a:rPr lang="en-US" sz="1600" dirty="0">
-                <a:solidFill>
-                  <a:srgbClr val="3C4C60"/>
-                </a:solidFill>
-                <a:latin typeface="Tajawal" pitchFamily="34" charset="0"/>
-                <a:ea typeface="Tajawal" pitchFamily="34" charset="-122"/>
-                <a:cs typeface="Tajawal" pitchFamily="34" charset="-120"/>
-              </a:rPr>
-              <a:t>إضافة موقع جديد = تصوير ومحتوى وترجمة. لا إعادة تدريب، ولا بنية تحتية تبنى.</a:t>
-            </a:r>
-            <a:endParaRPr lang="en-US" sz="1600" dirty="0"/>
+              <a:rPr lang="en-US" sz="1250" dirty="0">
+                <a:solidFill>
+                  <a:srgbClr val="4B5B6E"/>
+                </a:solidFill>
+                <a:latin typeface="Tajawal" pitchFamily="34" charset="0"/>
+                <a:ea typeface="Tajawal" pitchFamily="34" charset="-122"/>
+                <a:cs typeface="Tajawal" pitchFamily="34" charset="-120"/>
+              </a:rPr>
+              <a:t>النموذج لم ندربه على جبة، فهو لا يعرفها أكثر مما سيعرف غيرها.</a:t>
+            </a:r>
+            <a:endParaRPr lang="en-US" sz="1250" dirty="0"/>
           </a:p>
           <a:p>
             <a:pPr rtl="1" algn="r" indent="0" marL="0">
               <a:lnSpc>
-                <a:spcPts val="2800"/>
+                <a:spcPts val="2000"/>
               </a:lnSpc>
               <a:spcAft>
-                <a:spcPts val="2000"/>
+                <a:spcPts val="1300"/>
               </a:spcAft>
               <a:buNone/>
             </a:pPr>
             <a:r>
-              <a:rPr lang="en-US" sz="1600" dirty="0">
-                <a:solidFill>
-                  <a:srgbClr val="3C4C60"/>
-                </a:solidFill>
-                <a:latin typeface="Tajawal" pitchFamily="34" charset="0"/>
-                <a:ea typeface="Tajawal" pitchFamily="34" charset="-122"/>
-                <a:cs typeface="Tajawal" pitchFamily="34" charset="-120"/>
-              </a:rPr>
-              <a:t>والفهرس يتوسع بلا حد: النموذج لم ندربه على جبة، فهو لا يعرفها أكثر مما سيعرف غيرها.</a:t>
-            </a:r>
-            <a:endParaRPr lang="en-US" sz="1600" dirty="0"/>
+              <a:rPr lang="en-US" sz="1250" dirty="0">
+                <a:solidFill>
+                  <a:srgbClr val="4B5B6E"/>
+                </a:solidFill>
+                <a:latin typeface="Tajawal" pitchFamily="34" charset="0"/>
+                <a:ea typeface="Tajawal" pitchFamily="34" charset="-122"/>
+                <a:cs typeface="Tajawal" pitchFamily="34" charset="-120"/>
+              </a:rPr>
+              <a:t>وإضافة موقع جديد لا تمس الشيفرة: مجلد صور جديد، وإعادة تشغيل بناء الفهرس.</a:t>
+            </a:r>
+            <a:endParaRPr lang="en-US" sz="1250" dirty="0"/>
           </a:p>
           <a:p>
             <a:pPr rtl="1" algn="r" indent="0" marL="0">
               <a:lnSpc>
-                <a:spcPts val="2800"/>
+                <a:spcPts val="2000"/>
               </a:lnSpc>
               <a:spcAft>
-                <a:spcPts val="2000"/>
+                <a:spcPts val="1300"/>
               </a:spcAft>
               <a:buNone/>
             </a:pPr>
             <a:r>
-              <a:rPr lang="en-US" sz="1600" dirty="0">
-                <a:solidFill>
-                  <a:srgbClr val="3C4C60"/>
-                </a:solidFill>
-                <a:latin typeface="Tajawal" pitchFamily="34" charset="0"/>
-                <a:ea typeface="Tajawal" pitchFamily="34" charset="-122"/>
-                <a:cs typeface="Tajawal" pitchFamily="34" charset="-120"/>
-              </a:rPr>
-              <a:t>قابل للنقل إلى أي موقع تراثي في المملكة — العلا، والأحساء، وبقية مواقع حائل.</a:t>
-            </a:r>
-            <a:endParaRPr lang="en-US" sz="1600" dirty="0"/>
-          </a:p>
+              <a:rPr lang="en-US" sz="1250" dirty="0">
+                <a:solidFill>
+                  <a:srgbClr val="4B5B6E"/>
+                </a:solidFill>
+                <a:latin typeface="Tajawal" pitchFamily="34" charset="0"/>
+                <a:ea typeface="Tajawal" pitchFamily="34" charset="-122"/>
+                <a:cs typeface="Tajawal" pitchFamily="34" charset="-120"/>
+              </a:rPr>
+              <a:t>والفهرس يتوسع بلا حد: كل زائر يصحح يزيد دقته لمن بعده.</a:t>
+            </a:r>
+            <a:endParaRPr lang="en-US" sz="1250" dirty="0"/>
+          </a:p>
+        </p:txBody>
+      </p:sp>
+      <p:sp>
+        <p:nvSpPr>
+          <p:cNvPr id="23" name="Shape 20"/>
+          <p:cNvSpPr/>
+          <p:nvPr/>
+        </p:nvSpPr>
+        <p:spPr>
+          <a:xfrm>
+            <a:off x="777240" y="2761488"/>
+            <a:ext cx="5181448" cy="2249424"/>
+          </a:xfrm>
+          <a:prstGeom prst="roundRect">
+            <a:avLst>
+              <a:gd name="adj" fmla="val 3252"/>
+            </a:avLst>
+          </a:prstGeom>
+          <a:solidFill>
+            <a:srgbClr val="EEF3F9"/>
+          </a:solidFill>
+          <a:ln w="9525">
+            <a:solidFill>
+              <a:srgbClr val="D9E2EC"/>
+            </a:solidFill>
+            <a:prstDash val="solid"/>
+          </a:ln>
+        </p:spPr>
+      </p:sp>
+      <p:sp>
+        <p:nvSpPr>
+          <p:cNvPr id="24" name="Text 21"/>
+          <p:cNvSpPr/>
+          <p:nvPr/>
+        </p:nvSpPr>
+        <p:spPr>
+          <a:xfrm>
+            <a:off x="1051560" y="2962656"/>
+            <a:ext cx="4632808" cy="329184"/>
+          </a:xfrm>
+          <a:prstGeom prst="rect">
+            <a:avLst/>
+          </a:prstGeom>
+          <a:noFill/>
+          <a:ln/>
+        </p:spPr>
+        <p:txBody>
+          <a:bodyPr wrap="square" lIns="0" tIns="0" rIns="0" bIns="0" rtlCol="0" anchor="ctr"/>
+          <a:lstStyle/>
+          <a:p>
+            <a:pPr rtl="1" algn="r" indent="0" marL="0">
+              <a:buNone/>
+            </a:pPr>
+            <a:r>
+              <a:rPr lang="en-US" sz="1500" b="1" dirty="0">
+                <a:solidFill>
+                  <a:srgbClr val="255174"/>
+                </a:solidFill>
+                <a:latin typeface="Tajawal" pitchFamily="34" charset="0"/>
+                <a:ea typeface="Tajawal" pitchFamily="34" charset="-122"/>
+                <a:cs typeface="Tajawal" pitchFamily="34" charset="-120"/>
+              </a:rPr>
+              <a:t>إلى أين يتوسع</a:t>
+            </a:r>
+            <a:endParaRPr lang="en-US" sz="1500" dirty="0"/>
+          </a:p>
+        </p:txBody>
+      </p:sp>
+      <p:sp>
+        <p:nvSpPr>
+          <p:cNvPr id="25" name="Text 22"/>
+          <p:cNvSpPr/>
+          <p:nvPr/>
+        </p:nvSpPr>
+        <p:spPr>
+          <a:xfrm>
+            <a:off x="1051560" y="3383280"/>
+            <a:ext cx="4632808" cy="1463040"/>
+          </a:xfrm>
+          <a:prstGeom prst="rect">
+            <a:avLst/>
+          </a:prstGeom>
+          <a:noFill/>
+          <a:ln/>
+        </p:spPr>
+        <p:txBody>
+          <a:bodyPr wrap="square" lIns="0" tIns="0" rIns="0" bIns="0" rtlCol="0" anchor="t"/>
+          <a:lstStyle/>
           <a:p>
             <a:pPr rtl="1" algn="r" indent="0" marL="0">
               <a:lnSpc>
-                <a:spcPts val="2800"/>
+                <a:spcPts val="2000"/>
               </a:lnSpc>
               <a:spcAft>
+                <a:spcPts val="1300"/>
+              </a:spcAft>
+              <a:buNone/>
+            </a:pPr>
+            <a:r>
+              <a:rPr lang="en-US" sz="1250" dirty="0">
+                <a:solidFill>
+                  <a:srgbClr val="4B5B6E"/>
+                </a:solidFill>
+                <a:latin typeface="Tajawal" pitchFamily="34" charset="0"/>
+                <a:ea typeface="Tajawal" pitchFamily="34" charset="-122"/>
+                <a:cs typeface="Tajawal" pitchFamily="34" charset="-120"/>
+              </a:rPr>
+              <a:t>بقية مواقع حائل: الشويمس، وجبال أجا، والقشلة، وقلعة أعيرف.</a:t>
+            </a:r>
+            <a:endParaRPr lang="en-US" sz="1250" dirty="0"/>
+          </a:p>
+          <a:p>
+            <a:pPr rtl="1" algn="r" indent="0" marL="0">
+              <a:lnSpc>
                 <a:spcPts val="2000"/>
+              </a:lnSpc>
+              <a:spcAft>
+                <a:spcPts val="1300"/>
               </a:spcAft>
               <a:buNone/>
             </a:pPr>
             <a:r>
-              <a:rPr lang="en-US" sz="1600" dirty="0">
-                <a:solidFill>
-                  <a:srgbClr val="3C4C60"/>
-                </a:solidFill>
-                <a:latin typeface="Tajawal" pitchFamily="34" charset="0"/>
-                <a:ea typeface="Tajawal" pitchFamily="34" charset="-122"/>
-                <a:cs typeface="Tajawal" pitchFamily="34" charset="-120"/>
-              </a:rPr>
-              <a:t>ويتحسن من تلقاء نفسه: كل زائر يصحح يزيد دقة الفهرس لمن بعده.</a:t>
-            </a:r>
-            <a:endParaRPr lang="en-US" sz="1600" dirty="0"/>
+              <a:rPr lang="en-US" sz="1250" dirty="0">
+                <a:solidFill>
+                  <a:srgbClr val="4B5B6E"/>
+                </a:solidFill>
+                <a:latin typeface="Tajawal" pitchFamily="34" charset="0"/>
+                <a:ea typeface="Tajawal" pitchFamily="34" charset="-122"/>
+                <a:cs typeface="Tajawal" pitchFamily="34" charset="-120"/>
+              </a:rPr>
+              <a:t>ثم مواقع المملكة: العلا، والأحساء، والدرعية.</a:t>
+            </a:r>
+            <a:endParaRPr lang="en-US" sz="1250" dirty="0"/>
+          </a:p>
+          <a:p>
+            <a:pPr rtl="1" algn="r" indent="0" marL="0">
+              <a:lnSpc>
+                <a:spcPts val="2000"/>
+              </a:lnSpc>
+              <a:spcAft>
+                <a:spcPts val="1300"/>
+              </a:spcAft>
+              <a:buNone/>
+            </a:pPr>
+            <a:r>
+              <a:rPr lang="en-US" sz="1250" dirty="0">
+                <a:solidFill>
+                  <a:srgbClr val="4B5B6E"/>
+                </a:solidFill>
+                <a:latin typeface="Tajawal" pitchFamily="34" charset="0"/>
+                <a:ea typeface="Tajawal" pitchFamily="34" charset="-122"/>
+                <a:cs typeface="Tajawal" pitchFamily="34" charset="-120"/>
+              </a:rPr>
+              <a:t>ثم نسخة بيضاء لأي متحف أو موقع تراثي — الشيفرة نفسها، ومحتوى آخر.</a:t>
+            </a:r>
+            <a:endParaRPr lang="en-US" sz="1250" dirty="0"/>
+          </a:p>
+        </p:txBody>
+      </p:sp>
+      <p:pic>
+        <p:nvPicPr>
+          <p:cNvPr id="26" name="Image 1" descr="preencoded.png">    </p:cNvPr>
+          <p:cNvPicPr>
+            <a:picLocks noChangeAspect="1"/>
+          </p:cNvPicPr>
+          <p:nvPr/>
+        </p:nvPicPr>
+        <p:blipFill>
+          <a:blip r:embed="rId2"/>
+          <a:stretch>
+            <a:fillRect/>
+          </a:stretch>
+        </p:blipFill>
+        <p:spPr>
+          <a:xfrm>
+            <a:off x="9677095" y="5175504"/>
+            <a:ext cx="1737360" cy="1158240"/>
+          </a:xfrm>
+          <a:prstGeom prst="rect">
+            <a:avLst/>
+          </a:prstGeom>
+        </p:spPr>
+      </p:pic>
+      <p:sp>
+        <p:nvSpPr>
+          <p:cNvPr id="27" name="Text 23"/>
+          <p:cNvSpPr/>
+          <p:nvPr/>
+        </p:nvSpPr>
+        <p:spPr>
+          <a:xfrm>
+            <a:off x="9585655" y="6406896"/>
+            <a:ext cx="1920240" cy="256032"/>
+          </a:xfrm>
+          <a:prstGeom prst="rect">
+            <a:avLst/>
+          </a:prstGeom>
+          <a:noFill/>
+          <a:ln/>
+        </p:spPr>
+        <p:txBody>
+          <a:bodyPr wrap="square" lIns="0" tIns="0" rIns="0" bIns="0" rtlCol="0" anchor="ctr"/>
+          <a:lstStyle/>
+          <a:p>
+            <a:pPr rtl="1" algn="ctr" indent="0" marL="0">
+              <a:buNone/>
+            </a:pPr>
+            <a:r>
+              <a:rPr lang="en-US" sz="1100" dirty="0">
+                <a:solidFill>
+                  <a:srgbClr val="4B5B6E"/>
+                </a:solidFill>
+                <a:latin typeface="Tajawal" pitchFamily="34" charset="0"/>
+                <a:ea typeface="Tajawal" pitchFamily="34" charset="-122"/>
+                <a:cs typeface="Tajawal" pitchFamily="34" charset="-120"/>
+              </a:rPr>
+              <a:t>الشويمس</a:t>
+            </a:r>
+            <a:endParaRPr lang="en-US" sz="1100" dirty="0"/>
+          </a:p>
+        </p:txBody>
+      </p:sp>
+      <p:pic>
+        <p:nvPicPr>
+          <p:cNvPr id="28" name="Image 2" descr="preencoded.png">    </p:cNvPr>
+          <p:cNvPicPr>
+            <a:picLocks noChangeAspect="1"/>
+          </p:cNvPicPr>
+          <p:nvPr/>
+        </p:nvPicPr>
+        <p:blipFill>
+          <a:blip r:embed="rId3"/>
+          <a:stretch>
+            <a:fillRect/>
+          </a:stretch>
+        </p:blipFill>
+        <p:spPr>
+          <a:xfrm>
+            <a:off x="7720279" y="5175504"/>
+            <a:ext cx="1737360" cy="1158240"/>
+          </a:xfrm>
+          <a:prstGeom prst="rect">
+            <a:avLst/>
+          </a:prstGeom>
+        </p:spPr>
+      </p:pic>
+      <p:sp>
+        <p:nvSpPr>
+          <p:cNvPr id="29" name="Text 24"/>
+          <p:cNvSpPr/>
+          <p:nvPr/>
+        </p:nvSpPr>
+        <p:spPr>
+          <a:xfrm>
+            <a:off x="7628839" y="6406896"/>
+            <a:ext cx="1920240" cy="256032"/>
+          </a:xfrm>
+          <a:prstGeom prst="rect">
+            <a:avLst/>
+          </a:prstGeom>
+          <a:noFill/>
+          <a:ln/>
+        </p:spPr>
+        <p:txBody>
+          <a:bodyPr wrap="square" lIns="0" tIns="0" rIns="0" bIns="0" rtlCol="0" anchor="ctr"/>
+          <a:lstStyle/>
+          <a:p>
+            <a:pPr rtl="1" algn="ctr" indent="0" marL="0">
+              <a:buNone/>
+            </a:pPr>
+            <a:r>
+              <a:rPr lang="en-US" sz="1100" dirty="0">
+                <a:solidFill>
+                  <a:srgbClr val="4B5B6E"/>
+                </a:solidFill>
+                <a:latin typeface="Tajawal" pitchFamily="34" charset="0"/>
+                <a:ea typeface="Tajawal" pitchFamily="34" charset="-122"/>
+                <a:cs typeface="Tajawal" pitchFamily="34" charset="-120"/>
+              </a:rPr>
+              <a:t>جبال أجا</a:t>
+            </a:r>
+            <a:endParaRPr lang="en-US" sz="1100" dirty="0"/>
+          </a:p>
+        </p:txBody>
+      </p:sp>
+      <p:pic>
+        <p:nvPicPr>
+          <p:cNvPr id="30" name="Image 3" descr="preencoded.png">    </p:cNvPr>
+          <p:cNvPicPr>
+            <a:picLocks noChangeAspect="1"/>
+          </p:cNvPicPr>
+          <p:nvPr/>
+        </p:nvPicPr>
+        <p:blipFill>
+          <a:blip r:embed="rId4"/>
+          <a:stretch>
+            <a:fillRect/>
+          </a:stretch>
+        </p:blipFill>
+        <p:spPr>
+          <a:xfrm>
+            <a:off x="5763463" y="5175504"/>
+            <a:ext cx="1737360" cy="1158240"/>
+          </a:xfrm>
+          <a:prstGeom prst="rect">
+            <a:avLst/>
+          </a:prstGeom>
+        </p:spPr>
+      </p:pic>
+      <p:sp>
+        <p:nvSpPr>
+          <p:cNvPr id="31" name="Text 25"/>
+          <p:cNvSpPr/>
+          <p:nvPr/>
+        </p:nvSpPr>
+        <p:spPr>
+          <a:xfrm>
+            <a:off x="5672023" y="6406896"/>
+            <a:ext cx="1920240" cy="256032"/>
+          </a:xfrm>
+          <a:prstGeom prst="rect">
+            <a:avLst/>
+          </a:prstGeom>
+          <a:noFill/>
+          <a:ln/>
+        </p:spPr>
+        <p:txBody>
+          <a:bodyPr wrap="square" lIns="0" tIns="0" rIns="0" bIns="0" rtlCol="0" anchor="ctr"/>
+          <a:lstStyle/>
+          <a:p>
+            <a:pPr rtl="1" algn="ctr" indent="0" marL="0">
+              <a:buNone/>
+            </a:pPr>
+            <a:r>
+              <a:rPr lang="en-US" sz="1100" dirty="0">
+                <a:solidFill>
+                  <a:srgbClr val="4B5B6E"/>
+                </a:solidFill>
+                <a:latin typeface="Tajawal" pitchFamily="34" charset="0"/>
+                <a:ea typeface="Tajawal" pitchFamily="34" charset="-122"/>
+                <a:cs typeface="Tajawal" pitchFamily="34" charset="-120"/>
+              </a:rPr>
+              <a:t>القشلة</a:t>
+            </a:r>
+            <a:endParaRPr lang="en-US" sz="1100" dirty="0"/>
+          </a:p>
+        </p:txBody>
+      </p:sp>
+      <p:pic>
+        <p:nvPicPr>
+          <p:cNvPr id="32" name="Image 4" descr="preencoded.png">    </p:cNvPr>
+          <p:cNvPicPr>
+            <a:picLocks noChangeAspect="1"/>
+          </p:cNvPicPr>
+          <p:nvPr/>
+        </p:nvPicPr>
+        <p:blipFill>
+          <a:blip r:embed="rId5"/>
+          <a:stretch>
+            <a:fillRect/>
+          </a:stretch>
+        </p:blipFill>
+        <p:spPr>
+          <a:xfrm>
+            <a:off x="3806647" y="5175504"/>
+            <a:ext cx="1737360" cy="1158240"/>
+          </a:xfrm>
+          <a:prstGeom prst="rect">
+            <a:avLst/>
+          </a:prstGeom>
+        </p:spPr>
+      </p:pic>
+      <p:sp>
+        <p:nvSpPr>
+          <p:cNvPr id="33" name="Text 26"/>
+          <p:cNvSpPr/>
+          <p:nvPr/>
+        </p:nvSpPr>
+        <p:spPr>
+          <a:xfrm>
+            <a:off x="3715207" y="6406896"/>
+            <a:ext cx="1920240" cy="256032"/>
+          </a:xfrm>
+          <a:prstGeom prst="rect">
+            <a:avLst/>
+          </a:prstGeom>
+          <a:noFill/>
+          <a:ln/>
+        </p:spPr>
+        <p:txBody>
+          <a:bodyPr wrap="square" lIns="0" tIns="0" rIns="0" bIns="0" rtlCol="0" anchor="ctr"/>
+          <a:lstStyle/>
+          <a:p>
+            <a:pPr rtl="1" algn="ctr" indent="0" marL="0">
+              <a:buNone/>
+            </a:pPr>
+            <a:r>
+              <a:rPr lang="en-US" sz="1100" dirty="0">
+                <a:solidFill>
+                  <a:srgbClr val="4B5B6E"/>
+                </a:solidFill>
+                <a:latin typeface="Tajawal" pitchFamily="34" charset="0"/>
+                <a:ea typeface="Tajawal" pitchFamily="34" charset="-122"/>
+                <a:cs typeface="Tajawal" pitchFamily="34" charset="-120"/>
+              </a:rPr>
+              <a:t>قلعة أعيرف</a:t>
+            </a:r>
+            <a:endParaRPr lang="en-US" sz="1100" dirty="0"/>
           </a:p>
         </p:txBody>
       </p:sp>
@@ -3401,7 +5895,7 @@
         <p:spPr>
           <a:xfrm>
             <a:off x="457200" y="384048"/>
-            <a:ext cx="1371600" cy="914400"/>
+            <a:ext cx="1371600" cy="512064"/>
           </a:xfrm>
           <a:prstGeom prst="rect">
             <a:avLst/>
@@ -3599,8 +6093,8 @@
         </p:nvSpPr>
         <p:spPr>
           <a:xfrm>
-            <a:off x="868680" y="658368"/>
-            <a:ext cx="10454335" cy="548640"/>
+            <a:off x="777240" y="548640"/>
+            <a:ext cx="10637215" cy="502920"/>
           </a:xfrm>
           <a:prstGeom prst="rect">
             <a:avLst/>
@@ -3616,7 +6110,7 @@
               <a:buNone/>
             </a:pPr>
             <a:r>
-              <a:rPr lang="en-US" sz="3000" b="1" dirty="0">
+              <a:rPr lang="en-US" sz="2600" b="1" dirty="0">
                 <a:solidFill>
                   <a:srgbClr val="255174"/>
                 </a:solidFill>
@@ -3626,30 +6120,171 @@
               </a:rPr>
               <a:t>نبذة عنا</a:t>
             </a:r>
-            <a:endParaRPr lang="en-US" sz="3000" dirty="0"/>
-          </a:p>
-        </p:txBody>
-      </p:sp>
-      <p:sp>
-        <p:nvSpPr>
-          <p:cNvPr id="4" name="Shape 1"/>
-          <p:cNvSpPr/>
-          <p:nvPr/>
-        </p:nvSpPr>
-        <p:spPr>
-          <a:xfrm>
-            <a:off x="9494215" y="1298448"/>
-            <a:ext cx="1828800" cy="54864"/>
-          </a:xfrm>
-          <a:prstGeom prst="rect">
-            <a:avLst/>
+            <a:endParaRPr lang="en-US" sz="2600" dirty="0"/>
+          </a:p>
+        </p:txBody>
+      </p:sp>
+      <p:pic>
+        <p:nvPicPr>
+          <p:cNvPr id="4" name="Image 1" descr="preencoded.png">    </p:cNvPr>
+          <p:cNvPicPr>
+            <a:picLocks noChangeAspect="1"/>
+          </p:cNvPicPr>
+          <p:nvPr/>
+        </p:nvPicPr>
+        <p:blipFill>
+          <a:blip r:embed="rId2"/>
+          <a:stretch>
+            <a:fillRect/>
+          </a:stretch>
+        </p:blipFill>
+        <p:spPr>
+          <a:xfrm>
+            <a:off x="777240" y="1371600"/>
+            <a:ext cx="1489409" cy="3108960"/>
+          </a:xfrm>
+          <a:prstGeom prst="rect">
+            <a:avLst/>
+          </a:prstGeom>
+        </p:spPr>
+      </p:pic>
+      <p:pic>
+        <p:nvPicPr>
+          <p:cNvPr id="5" name="Image 2" descr="preencoded.png">    </p:cNvPr>
+          <p:cNvPicPr>
+            <a:picLocks noChangeAspect="1"/>
+          </p:cNvPicPr>
+          <p:nvPr/>
+        </p:nvPicPr>
+        <p:blipFill>
+          <a:blip r:embed="rId3"/>
+          <a:stretch>
+            <a:fillRect/>
+          </a:stretch>
+        </p:blipFill>
+        <p:spPr>
+          <a:xfrm>
+            <a:off x="2540969" y="1371600"/>
+            <a:ext cx="1489409" cy="3108960"/>
+          </a:xfrm>
+          <a:prstGeom prst="rect">
+            <a:avLst/>
+          </a:prstGeom>
+        </p:spPr>
+      </p:pic>
+      <p:sp>
+        <p:nvSpPr>
+          <p:cNvPr id="6" name="Text 1"/>
+          <p:cNvSpPr/>
+          <p:nvPr/>
+        </p:nvSpPr>
+        <p:spPr>
+          <a:xfrm>
+            <a:off x="4579017" y="1463040"/>
+            <a:ext cx="6835438" cy="2286000"/>
+          </a:xfrm>
+          <a:prstGeom prst="rect">
+            <a:avLst/>
+          </a:prstGeom>
+          <a:noFill/>
+          <a:ln/>
+        </p:spPr>
+        <p:txBody>
+          <a:bodyPr wrap="square" lIns="0" tIns="0" rIns="0" bIns="0" rtlCol="0" anchor="ctr"/>
+          <a:lstStyle/>
+          <a:p>
+            <a:pPr rtl="1" algn="r" indent="0" marL="0">
+              <a:lnSpc>
+                <a:spcPts val="2700"/>
+              </a:lnSpc>
+              <a:spcAft>
+                <a:spcPts val="1600"/>
+              </a:spcAft>
+              <a:buNone/>
+            </a:pPr>
+            <a:r>
+              <a:rPr lang="en-US" sz="1500" dirty="0">
+                <a:solidFill>
+                  <a:srgbClr val="4B5B6E"/>
+                </a:solidFill>
+                <a:latin typeface="Tajawal" pitchFamily="34" charset="0"/>
+                <a:ea typeface="Tajawal" pitchFamily="34" charset="-122"/>
+                <a:cs typeface="Tajawal" pitchFamily="34" charset="-120"/>
+              </a:rPr>
+              <a:t>أثر دليل تراثي ذكي لمنطقة حائل، يعمل بدون إنترنت.</a:t>
+            </a:r>
+            <a:endParaRPr lang="en-US" sz="1500" dirty="0"/>
+          </a:p>
+          <a:p>
+            <a:pPr rtl="1" algn="r" indent="0" marL="0">
+              <a:lnSpc>
+                <a:spcPts val="2700"/>
+              </a:lnSpc>
+              <a:spcAft>
+                <a:spcPts val="1600"/>
+              </a:spcAft>
+              <a:buNone/>
+            </a:pPr>
+            <a:r>
+              <a:rPr lang="en-US" sz="1500" dirty="0">
+                <a:solidFill>
+                  <a:srgbClr val="4B5B6E"/>
+                </a:solidFill>
+                <a:latin typeface="Tajawal" pitchFamily="34" charset="0"/>
+                <a:ea typeface="Tajawal" pitchFamily="34" charset="-122"/>
+                <a:cs typeface="Tajawal" pitchFamily="34" charset="-120"/>
+              </a:rPr>
+              <a:t>يوجه الزائر كاميرا جواله على النقش الصخري، فيتعرف التطبيق على اللوحة بعينها، ويروي قصتها مسموعة بلغته.</a:t>
+            </a:r>
+            <a:endParaRPr lang="en-US" sz="1500" dirty="0"/>
+          </a:p>
+          <a:p>
+            <a:pPr rtl="1" algn="r" indent="0" marL="0">
+              <a:lnSpc>
+                <a:spcPts val="2700"/>
+              </a:lnSpc>
+              <a:spcAft>
+                <a:spcPts val="1600"/>
+              </a:spcAft>
+              <a:buNone/>
+            </a:pPr>
+            <a:r>
+              <a:rPr lang="en-US" sz="1500" dirty="0">
+                <a:solidFill>
+                  <a:srgbClr val="4B5B6E"/>
+                </a:solidFill>
+                <a:latin typeface="Tajawal" pitchFamily="34" charset="0"/>
+                <a:ea typeface="Tajawal" pitchFamily="34" charset="-122"/>
+                <a:cs typeface="Tajawal" pitchFamily="34" charset="-120"/>
+              </a:rPr>
+              <a:t>وكل شيء داخل الجوال: لا خادم، ولا اشتراك، ولا إنترنت بعد أول تحميل.</a:t>
+            </a:r>
+            <a:endParaRPr lang="en-US" sz="1500" dirty="0"/>
+          </a:p>
+        </p:txBody>
+      </p:sp>
+      <p:sp>
+        <p:nvSpPr>
+          <p:cNvPr id="7" name="Shape 2"/>
+          <p:cNvSpPr/>
+          <p:nvPr/>
+        </p:nvSpPr>
+        <p:spPr>
+          <a:xfrm>
+            <a:off x="9282280" y="3950208"/>
+            <a:ext cx="2132175" cy="1225296"/>
+          </a:xfrm>
+          <a:prstGeom prst="roundRect">
+            <a:avLst>
+              <a:gd name="adj" fmla="val 5970"/>
+            </a:avLst>
           </a:prstGeom>
           <a:solidFill>
-            <a:srgbClr val="8357F6"/>
+            <a:srgbClr val="EEF3F9"/>
           </a:solidFill>
-          <a:ln w="12700">
+          <a:ln w="9525">
             <a:solidFill>
-              <a:srgbClr val="333333"/>
+              <a:srgbClr val="D9E2EC"/>
             </a:solidFill>
             <a:prstDash val="solid"/>
           </a:ln>
@@ -3657,101 +6292,358 @@
       </p:sp>
       <p:sp>
         <p:nvSpPr>
-          <p:cNvPr id="5" name="Text 2"/>
-          <p:cNvSpPr/>
-          <p:nvPr/>
-        </p:nvSpPr>
-        <p:spPr>
-          <a:xfrm>
-            <a:off x="868680" y="1783080"/>
-            <a:ext cx="10454335" cy="2194560"/>
-          </a:xfrm>
-          <a:prstGeom prst="rect">
-            <a:avLst/>
-          </a:prstGeom>
-          <a:noFill/>
-          <a:ln/>
-        </p:spPr>
-        <p:txBody>
-          <a:bodyPr wrap="square" lIns="0" tIns="0" rIns="0" bIns="0" rtlCol="0" anchor="ctr"/>
-          <a:lstStyle/>
-          <a:p>
-            <a:pPr rtl="1" algn="r" indent="0" marL="0">
+          <p:cNvPr id="8" name="Text 3"/>
+          <p:cNvSpPr/>
+          <p:nvPr/>
+        </p:nvSpPr>
+        <p:spPr>
+          <a:xfrm>
+            <a:off x="9282280" y="4096512"/>
+            <a:ext cx="2132175" cy="548640"/>
+          </a:xfrm>
+          <a:prstGeom prst="rect">
+            <a:avLst/>
+          </a:prstGeom>
+          <a:noFill/>
+          <a:ln/>
+        </p:spPr>
+        <p:txBody>
+          <a:bodyPr wrap="square" lIns="0" tIns="0" rIns="0" bIns="0" rtlCol="0" anchor="ctr"/>
+          <a:lstStyle/>
+          <a:p>
+            <a:pPr algn="ctr" indent="0" marL="0">
+              <a:buNone/>
+            </a:pPr>
+            <a:r>
+              <a:rPr lang="en-US" sz="2800" b="1" dirty="0">
+                <a:solidFill>
+                  <a:srgbClr val="255174"/>
+                </a:solidFill>
+                <a:latin typeface="Calibri" pitchFamily="34" charset="0"/>
+                <a:ea typeface="Calibri" pitchFamily="34" charset="-122"/>
+                <a:cs typeface="Calibri" pitchFamily="34" charset="-120"/>
+              </a:rPr>
+              <a:t>29</a:t>
+            </a:r>
+            <a:endParaRPr lang="en-US" sz="2800" dirty="0"/>
+          </a:p>
+        </p:txBody>
+      </p:sp>
+      <p:sp>
+        <p:nvSpPr>
+          <p:cNvPr id="9" name="Text 4"/>
+          <p:cNvSpPr/>
+          <p:nvPr/>
+        </p:nvSpPr>
+        <p:spPr>
+          <a:xfrm>
+            <a:off x="9392008" y="4681728"/>
+            <a:ext cx="1912719" cy="402336"/>
+          </a:xfrm>
+          <a:prstGeom prst="rect">
+            <a:avLst/>
+          </a:prstGeom>
+          <a:noFill/>
+          <a:ln/>
+        </p:spPr>
+        <p:txBody>
+          <a:bodyPr wrap="square" lIns="0" tIns="0" rIns="0" bIns="0" rtlCol="0" anchor="ctr"/>
+          <a:lstStyle/>
+          <a:p>
+            <a:pPr rtl="1" algn="ctr" indent="0" marL="0">
               <a:lnSpc>
-                <a:spcPts val="3400"/>
+                <a:spcPts val="1500"/>
               </a:lnSpc>
               <a:buNone/>
             </a:pPr>
             <a:r>
-              <a:rPr lang="en-US" sz="1800" b="1" dirty="0">
-                <a:solidFill>
-                  <a:srgbClr val="3C4C60"/>
-                </a:solidFill>
-                <a:latin typeface="Tajawal" pitchFamily="34" charset="0"/>
-                <a:ea typeface="Tajawal" pitchFamily="34" charset="-122"/>
-                <a:cs typeface="Tajawal" pitchFamily="34" charset="-120"/>
-              </a:rPr>
-              <a:t>أثر دليل تراثي ذكي لمنطقة حائل، يعمل بدون إنترنت.</a:t>
-            </a:r>
-            <a:endParaRPr lang="en-US" sz="1800" dirty="0"/>
-          </a:p>
-          <a:p>
-            <a:pPr rtl="1" algn="r" indent="0" marL="0">
+              <a:rPr lang="en-US" sz="1100" dirty="0">
+                <a:solidFill>
+                  <a:srgbClr val="4B5B6E"/>
+                </a:solidFill>
+                <a:latin typeface="Tajawal" pitchFamily="34" charset="0"/>
+                <a:ea typeface="Tajawal" pitchFamily="34" charset="-122"/>
+                <a:cs typeface="Tajawal" pitchFamily="34" charset="-120"/>
+              </a:rPr>
+              <a:t>لغة، ولكل لغة</a:t>
+            </a:r>
+            <a:endParaRPr lang="en-US" sz="1100" dirty="0"/>
+          </a:p>
+          <a:p>
+            <a:pPr rtl="1" algn="ctr" indent="0" marL="0">
               <a:lnSpc>
-                <a:spcPts val="3400"/>
+                <a:spcPts val="1500"/>
               </a:lnSpc>
               <a:buNone/>
             </a:pPr>
-            <a:endParaRPr lang="en-US" sz="1800" dirty="0"/>
-          </a:p>
-          <a:p>
-            <a:pPr rtl="1" algn="r" indent="0" marL="0">
+            <a:r>
+              <a:rPr lang="en-US" sz="1100" dirty="0">
+                <a:solidFill>
+                  <a:srgbClr val="4B5B6E"/>
+                </a:solidFill>
+                <a:latin typeface="Tajawal" pitchFamily="34" charset="0"/>
+                <a:ea typeface="Tajawal" pitchFamily="34" charset="-122"/>
+                <a:cs typeface="Tajawal" pitchFamily="34" charset="-120"/>
+              </a:rPr>
+              <a:t>رواية مسموعة</a:t>
+            </a:r>
+            <a:endParaRPr lang="en-US" sz="1100" dirty="0"/>
+          </a:p>
+        </p:txBody>
+      </p:sp>
+      <p:sp>
+        <p:nvSpPr>
+          <p:cNvPr id="10" name="Shape 5"/>
+          <p:cNvSpPr/>
+          <p:nvPr/>
+        </p:nvSpPr>
+        <p:spPr>
+          <a:xfrm>
+            <a:off x="6930649" y="3950208"/>
+            <a:ext cx="2132175" cy="1225296"/>
+          </a:xfrm>
+          <a:prstGeom prst="roundRect">
+            <a:avLst>
+              <a:gd name="adj" fmla="val 5970"/>
+            </a:avLst>
+          </a:prstGeom>
+          <a:solidFill>
+            <a:srgbClr val="EEF3F9"/>
+          </a:solidFill>
+          <a:ln w="9525">
+            <a:solidFill>
+              <a:srgbClr val="D9E2EC"/>
+            </a:solidFill>
+            <a:prstDash val="solid"/>
+          </a:ln>
+        </p:spPr>
+      </p:sp>
+      <p:sp>
+        <p:nvSpPr>
+          <p:cNvPr id="11" name="Text 6"/>
+          <p:cNvSpPr/>
+          <p:nvPr/>
+        </p:nvSpPr>
+        <p:spPr>
+          <a:xfrm>
+            <a:off x="6930649" y="4096512"/>
+            <a:ext cx="2132175" cy="548640"/>
+          </a:xfrm>
+          <a:prstGeom prst="rect">
+            <a:avLst/>
+          </a:prstGeom>
+          <a:noFill/>
+          <a:ln/>
+        </p:spPr>
+        <p:txBody>
+          <a:bodyPr wrap="square" lIns="0" tIns="0" rIns="0" bIns="0" rtlCol="0" anchor="ctr"/>
+          <a:lstStyle/>
+          <a:p>
+            <a:pPr algn="ctr" indent="0" marL="0">
+              <a:buNone/>
+            </a:pPr>
+            <a:r>
+              <a:rPr lang="en-US" sz="2800" b="1" dirty="0">
+                <a:solidFill>
+                  <a:srgbClr val="255174"/>
+                </a:solidFill>
+                <a:latin typeface="Calibri" pitchFamily="34" charset="0"/>
+                <a:ea typeface="Calibri" pitchFamily="34" charset="-122"/>
+                <a:cs typeface="Calibri" pitchFamily="34" charset="-120"/>
+              </a:rPr>
+              <a:t>10</a:t>
+            </a:r>
+            <a:endParaRPr lang="en-US" sz="2800" dirty="0"/>
+          </a:p>
+        </p:txBody>
+      </p:sp>
+      <p:sp>
+        <p:nvSpPr>
+          <p:cNvPr id="12" name="Text 7"/>
+          <p:cNvSpPr/>
+          <p:nvPr/>
+        </p:nvSpPr>
+        <p:spPr>
+          <a:xfrm>
+            <a:off x="7040377" y="4681728"/>
+            <a:ext cx="1912719" cy="402336"/>
+          </a:xfrm>
+          <a:prstGeom prst="rect">
+            <a:avLst/>
+          </a:prstGeom>
+          <a:noFill/>
+          <a:ln/>
+        </p:spPr>
+        <p:txBody>
+          <a:bodyPr wrap="square" lIns="0" tIns="0" rIns="0" bIns="0" rtlCol="0" anchor="ctr"/>
+          <a:lstStyle/>
+          <a:p>
+            <a:pPr rtl="1" algn="ctr" indent="0" marL="0">
               <a:lnSpc>
-                <a:spcPts val="3400"/>
+                <a:spcPts val="1500"/>
               </a:lnSpc>
               <a:buNone/>
             </a:pPr>
             <a:r>
-              <a:rPr lang="en-US" sz="1800" dirty="0">
-                <a:solidFill>
-                  <a:srgbClr val="3C4C60"/>
-                </a:solidFill>
-                <a:latin typeface="Tajawal" pitchFamily="34" charset="0"/>
-                <a:ea typeface="Tajawal" pitchFamily="34" charset="-122"/>
-                <a:cs typeface="Tajawal" pitchFamily="34" charset="-120"/>
-              </a:rPr>
-              <a:t>يوجه الزائر كاميرا جواله على النقش الصخري، فيتعرف التطبيق على اللوحة بعينها، ويروي قصتها مسموعة بلغته — تسع وعشرون لغة.</a:t>
-            </a:r>
-            <a:endParaRPr lang="en-US" sz="1800" dirty="0"/>
-          </a:p>
-          <a:p>
-            <a:pPr rtl="1" algn="r" indent="0" marL="0">
+              <a:rPr lang="en-US" sz="1100" dirty="0">
+                <a:solidFill>
+                  <a:srgbClr val="4B5B6E"/>
+                </a:solidFill>
+                <a:latin typeface="Tajawal" pitchFamily="34" charset="0"/>
+                <a:ea typeface="Tajawal" pitchFamily="34" charset="-122"/>
+                <a:cs typeface="Tajawal" pitchFamily="34" charset="-120"/>
+              </a:rPr>
+              <a:t>لوحات موثقة</a:t>
+            </a:r>
+            <a:endParaRPr lang="en-US" sz="1100" dirty="0"/>
+          </a:p>
+          <a:p>
+            <a:pPr rtl="1" algn="ctr" indent="0" marL="0">
               <a:lnSpc>
-                <a:spcPts val="3400"/>
+                <a:spcPts val="1500"/>
               </a:lnSpc>
               <a:buNone/>
             </a:pPr>
-            <a:endParaRPr lang="en-US" sz="1800" dirty="0"/>
-          </a:p>
-          <a:p>
-            <a:pPr rtl="1" algn="r" indent="0" marL="0">
+            <a:r>
+              <a:rPr lang="en-US" sz="1100" dirty="0">
+                <a:solidFill>
+                  <a:srgbClr val="4B5B6E"/>
+                </a:solidFill>
+                <a:latin typeface="Tajawal" pitchFamily="34" charset="0"/>
+                <a:ea typeface="Tajawal" pitchFamily="34" charset="-122"/>
+                <a:cs typeface="Tajawal" pitchFamily="34" charset="-120"/>
+              </a:rPr>
+              <a:t>في جبة</a:t>
+            </a:r>
+            <a:endParaRPr lang="en-US" sz="1100" dirty="0"/>
+          </a:p>
+        </p:txBody>
+      </p:sp>
+      <p:sp>
+        <p:nvSpPr>
+          <p:cNvPr id="13" name="Shape 8"/>
+          <p:cNvSpPr/>
+          <p:nvPr/>
+        </p:nvSpPr>
+        <p:spPr>
+          <a:xfrm>
+            <a:off x="4579017" y="3950208"/>
+            <a:ext cx="2132175" cy="1225296"/>
+          </a:xfrm>
+          <a:prstGeom prst="roundRect">
+            <a:avLst>
+              <a:gd name="adj" fmla="val 5970"/>
+            </a:avLst>
+          </a:prstGeom>
+          <a:solidFill>
+            <a:srgbClr val="EEF3F9"/>
+          </a:solidFill>
+          <a:ln w="9525">
+            <a:solidFill>
+              <a:srgbClr val="D9E2EC"/>
+            </a:solidFill>
+            <a:prstDash val="solid"/>
+          </a:ln>
+        </p:spPr>
+      </p:sp>
+      <p:sp>
+        <p:nvSpPr>
+          <p:cNvPr id="14" name="Text 9"/>
+          <p:cNvSpPr/>
+          <p:nvPr/>
+        </p:nvSpPr>
+        <p:spPr>
+          <a:xfrm>
+            <a:off x="4579017" y="4096512"/>
+            <a:ext cx="2132175" cy="548640"/>
+          </a:xfrm>
+          <a:prstGeom prst="rect">
+            <a:avLst/>
+          </a:prstGeom>
+          <a:noFill/>
+          <a:ln/>
+        </p:spPr>
+        <p:txBody>
+          <a:bodyPr wrap="square" lIns="0" tIns="0" rIns="0" bIns="0" rtlCol="0" anchor="ctr"/>
+          <a:lstStyle/>
+          <a:p>
+            <a:pPr algn="ctr" indent="0" marL="0">
+              <a:buNone/>
+            </a:pPr>
+            <a:r>
+              <a:rPr lang="en-US" sz="2800" b="1" dirty="0">
+                <a:solidFill>
+                  <a:srgbClr val="8357F6"/>
+                </a:solidFill>
+                <a:latin typeface="Calibri" pitchFamily="34" charset="0"/>
+                <a:ea typeface="Calibri" pitchFamily="34" charset="-122"/>
+                <a:cs typeface="Calibri" pitchFamily="34" charset="-120"/>
+              </a:rPr>
+              <a:t>0</a:t>
+            </a:r>
+            <a:endParaRPr lang="en-US" sz="2800" dirty="0"/>
+          </a:p>
+        </p:txBody>
+      </p:sp>
+      <p:sp>
+        <p:nvSpPr>
+          <p:cNvPr id="15" name="Text 10"/>
+          <p:cNvSpPr/>
+          <p:nvPr/>
+        </p:nvSpPr>
+        <p:spPr>
+          <a:xfrm>
+            <a:off x="4688745" y="4681728"/>
+            <a:ext cx="1912719" cy="402336"/>
+          </a:xfrm>
+          <a:prstGeom prst="rect">
+            <a:avLst/>
+          </a:prstGeom>
+          <a:noFill/>
+          <a:ln/>
+        </p:spPr>
+        <p:txBody>
+          <a:bodyPr wrap="square" lIns="0" tIns="0" rIns="0" bIns="0" rtlCol="0" anchor="ctr"/>
+          <a:lstStyle/>
+          <a:p>
+            <a:pPr rtl="1" algn="ctr" indent="0" marL="0">
               <a:lnSpc>
-                <a:spcPts val="3400"/>
+                <a:spcPts val="1500"/>
               </a:lnSpc>
               <a:buNone/>
             </a:pPr>
             <a:r>
-              <a:rPr lang="en-US" sz="1800" dirty="0">
-                <a:solidFill>
-                  <a:srgbClr val="3C4C60"/>
-                </a:solidFill>
-                <a:latin typeface="Tajawal" pitchFamily="34" charset="0"/>
-                <a:ea typeface="Tajawal" pitchFamily="34" charset="-122"/>
-                <a:cs typeface="Tajawal" pitchFamily="34" charset="-120"/>
-              </a:rPr>
-              <a:t>وكل شيء داخل الجوال: لا خادم، ولا اشتراك، ولا إنترنت بعد أول تحميل.</a:t>
-            </a:r>
-            <a:endParaRPr lang="en-US" sz="1800" dirty="0"/>
+              <a:rPr lang="en-US" sz="1100" dirty="0">
+                <a:solidFill>
+                  <a:srgbClr val="4B5B6E"/>
+                </a:solidFill>
+                <a:latin typeface="Tajawal" pitchFamily="34" charset="0"/>
+                <a:ea typeface="Tajawal" pitchFamily="34" charset="-122"/>
+                <a:cs typeface="Tajawal" pitchFamily="34" charset="-120"/>
+              </a:rPr>
+              <a:t>خوادم، وصفر تكلفة</a:t>
+            </a:r>
+            <a:endParaRPr lang="en-US" sz="1100" dirty="0"/>
+          </a:p>
+          <a:p>
+            <a:pPr rtl="1" algn="ctr" indent="0" marL="0">
+              <a:lnSpc>
+                <a:spcPts val="1500"/>
+              </a:lnSpc>
+              <a:buNone/>
+            </a:pPr>
+            <a:r>
+              <a:rPr lang="en-US" sz="1100" dirty="0">
+                <a:solidFill>
+                  <a:srgbClr val="4B5B6E"/>
+                </a:solidFill>
+                <a:latin typeface="Tajawal" pitchFamily="34" charset="0"/>
+                <a:ea typeface="Tajawal" pitchFamily="34" charset="-122"/>
+                <a:cs typeface="Tajawal" pitchFamily="34" charset="-120"/>
+              </a:rPr>
+              <a:t>لكل زائر</a:t>
+            </a:r>
+            <a:endParaRPr lang="en-US" sz="1100" dirty="0"/>
           </a:p>
         </p:txBody>
       </p:sp>
@@ -3859,7 +6751,7 @@
         <p:spPr>
           <a:xfrm>
             <a:off x="5120640" y="2788920"/>
-            <a:ext cx="6202375" cy="1280160"/>
+            <a:ext cx="6293815" cy="1280160"/>
           </a:xfrm>
           <a:prstGeom prst="rect">
             <a:avLst/>
@@ -3875,7 +6767,7 @@
               <a:buNone/>
             </a:pPr>
             <a:r>
-              <a:rPr lang="en-US" sz="3800" b="1" dirty="0">
+              <a:rPr lang="en-US" sz="3600" b="1" dirty="0">
                 <a:solidFill>
                   <a:srgbClr val="255174"/>
                 </a:solidFill>
@@ -3885,7 +6777,7 @@
               </a:rPr>
               <a:t>الابتكار والأصالة</a:t>
             </a:r>
-            <a:endParaRPr lang="en-US" sz="3800" dirty="0"/>
+            <a:endParaRPr lang="en-US" sz="3600" dirty="0"/>
           </a:p>
         </p:txBody>
       </p:sp>
@@ -3953,8 +6845,8 @@
         </p:nvSpPr>
         <p:spPr>
           <a:xfrm>
-            <a:off x="868680" y="658368"/>
-            <a:ext cx="10454335" cy="502920"/>
+            <a:off x="777240" y="548640"/>
+            <a:ext cx="10637215" cy="502920"/>
           </a:xfrm>
           <a:prstGeom prst="rect">
             <a:avLst/>
@@ -3992,18 +6884,20 @@
         </p:nvSpPr>
         <p:spPr>
           <a:xfrm>
-            <a:off x="9768535" y="1243584"/>
-            <a:ext cx="1554480" cy="54864"/>
-          </a:xfrm>
-          <a:prstGeom prst="rect">
-            <a:avLst/>
+            <a:off x="8027213" y="1234440"/>
+            <a:ext cx="3387242" cy="1783080"/>
+          </a:xfrm>
+          <a:prstGeom prst="roundRect">
+            <a:avLst>
+              <a:gd name="adj" fmla="val 4103"/>
+            </a:avLst>
           </a:prstGeom>
           <a:solidFill>
-            <a:srgbClr val="8357F6"/>
+            <a:srgbClr val="EEF3F9"/>
           </a:solidFill>
-          <a:ln w="12700">
+          <a:ln w="9525">
             <a:solidFill>
-              <a:srgbClr val="333333"/>
+              <a:srgbClr val="D9E2EC"/>
             </a:solidFill>
             <a:prstDash val="solid"/>
           </a:ln>
@@ -4017,8 +6911,47 @@
         </p:nvSpPr>
         <p:spPr>
           <a:xfrm>
-            <a:off x="868680" y="1691640"/>
-            <a:ext cx="10454335" cy="4206240"/>
+            <a:off x="8264957" y="1417320"/>
+            <a:ext cx="2911754" cy="310896"/>
+          </a:xfrm>
+          <a:prstGeom prst="rect">
+            <a:avLst/>
+          </a:prstGeom>
+          <a:noFill/>
+          <a:ln/>
+        </p:spPr>
+        <p:txBody>
+          <a:bodyPr wrap="square" lIns="0" tIns="0" rIns="0" bIns="0" rtlCol="0" anchor="ctr"/>
+          <a:lstStyle/>
+          <a:p>
+            <a:pPr rtl="1" algn="r" indent="0" marL="0">
+              <a:buNone/>
+            </a:pPr>
+            <a:r>
+              <a:rPr lang="en-US" sz="1400" b="1" dirty="0">
+                <a:solidFill>
+                  <a:srgbClr val="8357F6"/>
+                </a:solidFill>
+                <a:latin typeface="Tajawal" pitchFamily="34" charset="0"/>
+                <a:ea typeface="Tajawal" pitchFamily="34" charset="-122"/>
+                <a:cs typeface="Tajawal" pitchFamily="34" charset="-120"/>
+              </a:rPr>
+              <a:t>تميز الفكرة</a:t>
+            </a:r>
+            <a:endParaRPr lang="en-US" sz="1400" dirty="0"/>
+          </a:p>
+        </p:txBody>
+      </p:sp>
+      <p:sp>
+        <p:nvSpPr>
+          <p:cNvPr id="6" name="Text 3"/>
+          <p:cNvSpPr/>
+          <p:nvPr/>
+        </p:nvSpPr>
+        <p:spPr>
+          <a:xfrm>
+            <a:off x="8264957" y="1801368"/>
+            <a:ext cx="2911754" cy="1033272"/>
           </a:xfrm>
           <a:prstGeom prst="rect">
             <a:avLst/>
@@ -4032,117 +6965,844 @@
           <a:p>
             <a:pPr rtl="1" algn="r" indent="0" marL="0">
               <a:lnSpc>
-                <a:spcPts val="2800"/>
+                <a:spcPts val="2000"/>
               </a:lnSpc>
-              <a:spcAft>
-                <a:spcPts val="2000"/>
-              </a:spcAft>
-              <a:buNone/>
-            </a:pPr>
-            <a:r>
-              <a:rPr lang="en-US" sz="1600" dirty="0">
-                <a:solidFill>
-                  <a:srgbClr val="3C4C60"/>
-                </a:solidFill>
-                <a:latin typeface="Tajawal" pitchFamily="34" charset="0"/>
-                <a:ea typeface="Tajawal" pitchFamily="34" charset="-122"/>
-                <a:cs typeface="Tajawal" pitchFamily="34" charset="-120"/>
-              </a:rPr>
-              <a:t>التعرف على مستوى اللوحة لا الموقع: عشر لوحات موثقة في جبل أم سنمان، لكل واحدة اسم وقصة وزمن.</a:t>
-            </a:r>
-            <a:endParaRPr lang="en-US" sz="1600" dirty="0"/>
-          </a:p>
+              <a:buNone/>
+            </a:pPr>
+            <a:r>
+              <a:rPr lang="en-US" sz="1250" dirty="0">
+                <a:solidFill>
+                  <a:srgbClr val="4B5B6E"/>
+                </a:solidFill>
+                <a:latin typeface="Tajawal" pitchFamily="34" charset="0"/>
+                <a:ea typeface="Tajawal" pitchFamily="34" charset="-122"/>
+                <a:cs typeface="Tajawal" pitchFamily="34" charset="-120"/>
+              </a:rPr>
+              <a:t>دليل يقرأ النقش نفسه لا لافتة عند المدخل: يسمي اللوحة التي أمامك من بين مئات اللوحات على الجدار الواحد.</a:t>
+            </a:r>
+            <a:endParaRPr lang="en-US" sz="1250" dirty="0"/>
+          </a:p>
+        </p:txBody>
+      </p:sp>
+      <p:sp>
+        <p:nvSpPr>
+          <p:cNvPr id="7" name="Shape 4"/>
+          <p:cNvSpPr/>
+          <p:nvPr/>
+        </p:nvSpPr>
+        <p:spPr>
+          <a:xfrm>
+            <a:off x="4402226" y="1234440"/>
+            <a:ext cx="3387242" cy="1783080"/>
+          </a:xfrm>
+          <a:prstGeom prst="roundRect">
+            <a:avLst>
+              <a:gd name="adj" fmla="val 4103"/>
+            </a:avLst>
+          </a:prstGeom>
+          <a:solidFill>
+            <a:srgbClr val="EEF3F9"/>
+          </a:solidFill>
+          <a:ln w="9525">
+            <a:solidFill>
+              <a:srgbClr val="D9E2EC"/>
+            </a:solidFill>
+            <a:prstDash val="solid"/>
+          </a:ln>
+        </p:spPr>
+      </p:sp>
+      <p:sp>
+        <p:nvSpPr>
+          <p:cNvPr id="8" name="Text 5"/>
+          <p:cNvSpPr/>
+          <p:nvPr/>
+        </p:nvSpPr>
+        <p:spPr>
+          <a:xfrm>
+            <a:off x="4639970" y="1417320"/>
+            <a:ext cx="2911754" cy="310896"/>
+          </a:xfrm>
+          <a:prstGeom prst="rect">
+            <a:avLst/>
+          </a:prstGeom>
+          <a:noFill/>
+          <a:ln/>
+        </p:spPr>
+        <p:txBody>
+          <a:bodyPr wrap="square" lIns="0" tIns="0" rIns="0" bIns="0" rtlCol="0" anchor="ctr"/>
+          <a:lstStyle/>
+          <a:p>
+            <a:pPr rtl="1" algn="r" indent="0" marL="0">
+              <a:buNone/>
+            </a:pPr>
+            <a:r>
+              <a:rPr lang="en-US" sz="1400" b="1" dirty="0">
+                <a:solidFill>
+                  <a:srgbClr val="8357F6"/>
+                </a:solidFill>
+                <a:latin typeface="Tajawal" pitchFamily="34" charset="0"/>
+                <a:ea typeface="Tajawal" pitchFamily="34" charset="-122"/>
+                <a:cs typeface="Tajawal" pitchFamily="34" charset="-120"/>
+              </a:rPr>
+              <a:t>مستوى الابتكار</a:t>
+            </a:r>
+            <a:endParaRPr lang="en-US" sz="1400" dirty="0"/>
+          </a:p>
+        </p:txBody>
+      </p:sp>
+      <p:sp>
+        <p:nvSpPr>
+          <p:cNvPr id="9" name="Text 6"/>
+          <p:cNvSpPr/>
+          <p:nvPr/>
+        </p:nvSpPr>
+        <p:spPr>
+          <a:xfrm>
+            <a:off x="4639970" y="1801368"/>
+            <a:ext cx="2911754" cy="1033272"/>
+          </a:xfrm>
+          <a:prstGeom prst="rect">
+            <a:avLst/>
+          </a:prstGeom>
+          <a:noFill/>
+          <a:ln/>
+        </p:spPr>
+        <p:txBody>
+          <a:bodyPr wrap="square" lIns="0" tIns="0" rIns="0" bIns="0" rtlCol="0" anchor="t"/>
+          <a:lstStyle/>
           <a:p>
             <a:pPr rtl="1" algn="r" indent="0" marL="0">
               <a:lnSpc>
-                <a:spcPts val="2800"/>
+                <a:spcPts val="2000"/>
               </a:lnSpc>
-              <a:spcAft>
-                <a:spcPts val="2000"/>
-              </a:spcAft>
-              <a:buNone/>
-            </a:pPr>
-            <a:r>
-              <a:rPr lang="en-US" sz="1600" dirty="0">
-                <a:solidFill>
-                  <a:srgbClr val="3C4C60"/>
-                </a:solidFill>
-                <a:latin typeface="Tajawal" pitchFamily="34" charset="0"/>
-                <a:ea typeface="Tajawal" pitchFamily="34" charset="-122"/>
-                <a:cs typeface="Tajawal" pitchFamily="34" charset="-120"/>
-              </a:rPr>
-              <a:t>يعمل بلا إنترنت بالكامل — النموذج نفسه، اثنان وعشرون ميغابايت، داخل المتصفح لا على خادم.</a:t>
-            </a:r>
-            <a:endParaRPr lang="en-US" sz="1600" dirty="0"/>
-          </a:p>
+              <a:buNone/>
+            </a:pPr>
+            <a:r>
+              <a:rPr lang="en-US" sz="1250" dirty="0">
+                <a:solidFill>
+                  <a:srgbClr val="4B5B6E"/>
+                </a:solidFill>
+                <a:latin typeface="Tajawal" pitchFamily="34" charset="0"/>
+                <a:ea typeface="Tajawal" pitchFamily="34" charset="-122"/>
+                <a:cs typeface="Tajawal" pitchFamily="34" charset="-120"/>
+              </a:rPr>
+              <a:t>نموذج الرؤية كله داخل المتصفح، 22 ميغابايت، ويتعلم من تصحيح الزائر على جهازه فيصيب في المسح التالي.</a:t>
+            </a:r>
+            <a:endParaRPr lang="en-US" sz="1250" dirty="0"/>
+          </a:p>
+        </p:txBody>
+      </p:sp>
+      <p:sp>
+        <p:nvSpPr>
+          <p:cNvPr id="10" name="Shape 7"/>
+          <p:cNvSpPr/>
+          <p:nvPr/>
+        </p:nvSpPr>
+        <p:spPr>
+          <a:xfrm>
+            <a:off x="777240" y="1234440"/>
+            <a:ext cx="3387242" cy="1783080"/>
+          </a:xfrm>
+          <a:prstGeom prst="roundRect">
+            <a:avLst>
+              <a:gd name="adj" fmla="val 4103"/>
+            </a:avLst>
+          </a:prstGeom>
+          <a:solidFill>
+            <a:srgbClr val="EEF3F9"/>
+          </a:solidFill>
+          <a:ln w="9525">
+            <a:solidFill>
+              <a:srgbClr val="D9E2EC"/>
+            </a:solidFill>
+            <a:prstDash val="solid"/>
+          </a:ln>
+        </p:spPr>
+      </p:sp>
+      <p:sp>
+        <p:nvSpPr>
+          <p:cNvPr id="11" name="Text 8"/>
+          <p:cNvSpPr/>
+          <p:nvPr/>
+        </p:nvSpPr>
+        <p:spPr>
+          <a:xfrm>
+            <a:off x="1014984" y="1417320"/>
+            <a:ext cx="2911754" cy="310896"/>
+          </a:xfrm>
+          <a:prstGeom prst="rect">
+            <a:avLst/>
+          </a:prstGeom>
+          <a:noFill/>
+          <a:ln/>
+        </p:spPr>
+        <p:txBody>
+          <a:bodyPr wrap="square" lIns="0" tIns="0" rIns="0" bIns="0" rtlCol="0" anchor="ctr"/>
+          <a:lstStyle/>
+          <a:p>
+            <a:pPr rtl="1" algn="r" indent="0" marL="0">
+              <a:buNone/>
+            </a:pPr>
+            <a:r>
+              <a:rPr lang="en-US" sz="1400" b="1" dirty="0">
+                <a:solidFill>
+                  <a:srgbClr val="8357F6"/>
+                </a:solidFill>
+                <a:latin typeface="Tajawal" pitchFamily="34" charset="0"/>
+                <a:ea typeface="Tajawal" pitchFamily="34" charset="-122"/>
+                <a:cs typeface="Tajawal" pitchFamily="34" charset="-120"/>
+              </a:rPr>
+              <a:t>الاختلاف عن البدائل</a:t>
+            </a:r>
+            <a:endParaRPr lang="en-US" sz="1400" dirty="0"/>
+          </a:p>
+        </p:txBody>
+      </p:sp>
+      <p:sp>
+        <p:nvSpPr>
+          <p:cNvPr id="12" name="Text 9"/>
+          <p:cNvSpPr/>
+          <p:nvPr/>
+        </p:nvSpPr>
+        <p:spPr>
+          <a:xfrm>
+            <a:off x="1014984" y="1801368"/>
+            <a:ext cx="2911754" cy="1033272"/>
+          </a:xfrm>
+          <a:prstGeom prst="rect">
+            <a:avLst/>
+          </a:prstGeom>
+          <a:noFill/>
+          <a:ln/>
+        </p:spPr>
+        <p:txBody>
+          <a:bodyPr wrap="square" lIns="0" tIns="0" rIns="0" bIns="0" rtlCol="0" anchor="t"/>
+          <a:lstStyle/>
           <a:p>
             <a:pPr rtl="1" algn="r" indent="0" marL="0">
               <a:lnSpc>
-                <a:spcPts val="2800"/>
+                <a:spcPts val="2000"/>
               </a:lnSpc>
-              <a:spcAft>
-                <a:spcPts val="2000"/>
-              </a:spcAft>
-              <a:buNone/>
-            </a:pPr>
-            <a:r>
-              <a:rPr lang="en-US" sz="1600" dirty="0">
-                <a:solidFill>
-                  <a:srgbClr val="3C4C60"/>
-                </a:solidFill>
-                <a:latin typeface="Tajawal" pitchFamily="34" charset="0"/>
-                <a:ea typeface="Tajawal" pitchFamily="34" charset="-122"/>
-                <a:cs typeface="Tajawal" pitchFamily="34" charset="-120"/>
-              </a:rPr>
-              <a:t>يتعلم من الزائر على جهازه: تصحيحه يدخل الفهرس فورا فيصيب في المسح التالي، ويتعلم الرفض أيضا.</a:t>
-            </a:r>
-            <a:endParaRPr lang="en-US" sz="1600" dirty="0"/>
-          </a:p>
+              <a:buNone/>
+            </a:pPr>
+            <a:r>
+              <a:rPr lang="en-US" sz="1250" dirty="0">
+                <a:solidFill>
+                  <a:srgbClr val="4B5B6E"/>
+                </a:solidFill>
+                <a:latin typeface="Tajawal" pitchFamily="34" charset="0"/>
+                <a:ea typeface="Tajawal" pitchFamily="34" charset="-122"/>
+                <a:cs typeface="Tajawal" pitchFamily="34" charset="-120"/>
+              </a:rPr>
+              <a:t>كل بديل يقف عند حد: اللافتة عامة، والمرشد بموعد، والتطبيق السحابي يتوقف حيث لا شبكة.</a:t>
+            </a:r>
+            <a:endParaRPr lang="en-US" sz="1250" dirty="0"/>
+          </a:p>
+        </p:txBody>
+      </p:sp>
+      <p:sp>
+        <p:nvSpPr>
+          <p:cNvPr id="13" name="Text 10"/>
+          <p:cNvSpPr/>
+          <p:nvPr/>
+        </p:nvSpPr>
+        <p:spPr>
+          <a:xfrm>
+            <a:off x="6842455" y="3310128"/>
+            <a:ext cx="4297680" cy="292608"/>
+          </a:xfrm>
+          <a:prstGeom prst="rect">
+            <a:avLst/>
+          </a:prstGeom>
+          <a:noFill/>
+          <a:ln/>
+        </p:spPr>
+        <p:txBody>
+          <a:bodyPr wrap="square" lIns="0" tIns="0" rIns="0" bIns="0" rtlCol="0" anchor="ctr"/>
+          <a:lstStyle/>
           <a:p>
             <a:pPr rtl="1" algn="r" indent="0" marL="0">
-              <a:lnSpc>
-                <a:spcPts val="2800"/>
-              </a:lnSpc>
-              <a:spcAft>
-                <a:spcPts val="2000"/>
-              </a:spcAft>
-              <a:buNone/>
-            </a:pPr>
-            <a:r>
-              <a:rPr lang="en-US" sz="1600" dirty="0">
-                <a:solidFill>
-                  <a:srgbClr val="3C4C60"/>
-                </a:solidFill>
-                <a:latin typeface="Tajawal" pitchFamily="34" charset="0"/>
-                <a:ea typeface="Tajawal" pitchFamily="34" charset="-122"/>
-                <a:cs typeface="Tajawal" pitchFamily="34" charset="-120"/>
-              </a:rPr>
-              <a:t>دليل يقرأ النقش نفسه، لا لافتة عند المدخل.</a:t>
-            </a:r>
-            <a:endParaRPr lang="en-US" sz="1600" dirty="0"/>
-          </a:p>
+              <a:buNone/>
+            </a:pPr>
+            <a:r>
+              <a:rPr lang="en-US" sz="1300" b="1" dirty="0">
+                <a:solidFill>
+                  <a:srgbClr val="4B5B6E"/>
+                </a:solidFill>
+                <a:latin typeface="Tajawal" pitchFamily="34" charset="0"/>
+                <a:ea typeface="Tajawal" pitchFamily="34" charset="-122"/>
+                <a:cs typeface="Tajawal" pitchFamily="34" charset="-120"/>
+              </a:rPr>
+              <a:t>البدائل الحالية</a:t>
+            </a:r>
+            <a:endParaRPr lang="en-US" sz="1300" dirty="0"/>
+          </a:p>
+        </p:txBody>
+      </p:sp>
+      <p:sp>
+        <p:nvSpPr>
+          <p:cNvPr id="14" name="Text 11"/>
+          <p:cNvSpPr/>
+          <p:nvPr/>
+        </p:nvSpPr>
+        <p:spPr>
+          <a:xfrm>
+            <a:off x="777240" y="3310128"/>
+            <a:ext cx="5760720" cy="292608"/>
+          </a:xfrm>
+          <a:prstGeom prst="rect">
+            <a:avLst/>
+          </a:prstGeom>
+          <a:noFill/>
+          <a:ln/>
+        </p:spPr>
+        <p:txBody>
+          <a:bodyPr wrap="square" lIns="0" tIns="0" rIns="0" bIns="0" rtlCol="0" anchor="ctr"/>
+          <a:lstStyle/>
           <a:p>
             <a:pPr rtl="1" algn="r" indent="0" marL="0">
-              <a:lnSpc>
-                <a:spcPts val="2800"/>
-              </a:lnSpc>
-              <a:spcAft>
-                <a:spcPts val="2000"/>
-              </a:spcAft>
-              <a:buNone/>
-            </a:pPr>
-            <a:r>
-              <a:rPr lang="en-US" sz="1600" dirty="0">
-                <a:solidFill>
-                  <a:srgbClr val="3C4C60"/>
-                </a:solidFill>
-                <a:latin typeface="Tajawal" pitchFamily="34" charset="0"/>
-                <a:ea typeface="Tajawal" pitchFamily="34" charset="-122"/>
-                <a:cs typeface="Tajawal" pitchFamily="34" charset="-120"/>
-              </a:rPr>
-              <a:t>وطبقة للخط الثمودي: جدول الحروف الرسمي من هيئة تطوير منطقة حائل، وحقائق الخط التي تفسر حيرة الزائر — أنه بلا حركات، واتجاهه متقلب، وبلا فواصل بين الكلمات.</a:t>
-            </a:r>
-            <a:endParaRPr lang="en-US" sz="1600" dirty="0"/>
+              <a:buNone/>
+            </a:pPr>
+            <a:r>
+              <a:rPr lang="en-US" sz="1300" b="1" dirty="0">
+                <a:solidFill>
+                  <a:srgbClr val="255174"/>
+                </a:solidFill>
+                <a:latin typeface="Tajawal" pitchFamily="34" charset="0"/>
+                <a:ea typeface="Tajawal" pitchFamily="34" charset="-122"/>
+                <a:cs typeface="Tajawal" pitchFamily="34" charset="-120"/>
+              </a:rPr>
+              <a:t>أثر</a:t>
+            </a:r>
+            <a:endParaRPr lang="en-US" sz="1300" dirty="0"/>
+          </a:p>
+        </p:txBody>
+      </p:sp>
+      <p:sp>
+        <p:nvSpPr>
+          <p:cNvPr id="15" name="Shape 12"/>
+          <p:cNvSpPr/>
+          <p:nvPr/>
+        </p:nvSpPr>
+        <p:spPr>
+          <a:xfrm>
+            <a:off x="6842455" y="3712464"/>
+            <a:ext cx="4572000" cy="475488"/>
+          </a:xfrm>
+          <a:prstGeom prst="roundRect">
+            <a:avLst>
+              <a:gd name="adj" fmla="val 15385"/>
+            </a:avLst>
+          </a:prstGeom>
+          <a:solidFill>
+            <a:srgbClr val="F4F6F9"/>
+          </a:solidFill>
+          <a:ln w="9525">
+            <a:solidFill>
+              <a:srgbClr val="D9E2EC"/>
+            </a:solidFill>
+            <a:prstDash val="solid"/>
+          </a:ln>
+        </p:spPr>
+      </p:sp>
+      <p:sp>
+        <p:nvSpPr>
+          <p:cNvPr id="16" name="Text 13"/>
+          <p:cNvSpPr/>
+          <p:nvPr/>
+        </p:nvSpPr>
+        <p:spPr>
+          <a:xfrm>
+            <a:off x="7061911" y="3822192"/>
+            <a:ext cx="4133088" cy="274320"/>
+          </a:xfrm>
+          <a:prstGeom prst="rect">
+            <a:avLst/>
+          </a:prstGeom>
+          <a:noFill/>
+          <a:ln/>
+        </p:spPr>
+        <p:txBody>
+          <a:bodyPr wrap="square" lIns="0" tIns="0" rIns="0" bIns="0" rtlCol="0" anchor="ctr"/>
+          <a:lstStyle/>
+          <a:p>
+            <a:pPr rtl="1" algn="r" indent="0" marL="0">
+              <a:buNone/>
+            </a:pPr>
+            <a:r>
+              <a:rPr lang="en-US" sz="1200" dirty="0">
+                <a:solidFill>
+                  <a:srgbClr val="4B5B6E"/>
+                </a:solidFill>
+                <a:latin typeface="Tajawal" pitchFamily="34" charset="0"/>
+                <a:ea typeface="Tajawal" pitchFamily="34" charset="-122"/>
+                <a:cs typeface="Tajawal" pitchFamily="34" charset="-120"/>
+              </a:rPr>
+              <a:t>لافتة واحدة عند مدخل الموقع</a:t>
+            </a:r>
+            <a:endParaRPr lang="en-US" sz="1200" dirty="0"/>
+          </a:p>
+        </p:txBody>
+      </p:sp>
+      <p:sp>
+        <p:nvSpPr>
+          <p:cNvPr id="17" name="Shape 14"/>
+          <p:cNvSpPr/>
+          <p:nvPr/>
+        </p:nvSpPr>
+        <p:spPr>
+          <a:xfrm>
+            <a:off x="777240" y="3712464"/>
+            <a:ext cx="6035040" cy="475488"/>
+          </a:xfrm>
+          <a:prstGeom prst="roundRect">
+            <a:avLst>
+              <a:gd name="adj" fmla="val 15385"/>
+            </a:avLst>
+          </a:prstGeom>
+          <a:solidFill>
+            <a:srgbClr val="EEF3F9"/>
+          </a:solidFill>
+          <a:ln w="9525">
+            <a:solidFill>
+              <a:srgbClr val="D9E2EC"/>
+            </a:solidFill>
+            <a:prstDash val="solid"/>
+          </a:ln>
+        </p:spPr>
+      </p:sp>
+      <p:sp>
+        <p:nvSpPr>
+          <p:cNvPr id="18" name="Text 15"/>
+          <p:cNvSpPr/>
+          <p:nvPr/>
+        </p:nvSpPr>
+        <p:spPr>
+          <a:xfrm>
+            <a:off x="996696" y="3822192"/>
+            <a:ext cx="5596128" cy="274320"/>
+          </a:xfrm>
+          <a:prstGeom prst="rect">
+            <a:avLst/>
+          </a:prstGeom>
+          <a:noFill/>
+          <a:ln/>
+        </p:spPr>
+        <p:txBody>
+          <a:bodyPr wrap="square" lIns="0" tIns="0" rIns="0" bIns="0" rtlCol="0" anchor="ctr"/>
+          <a:lstStyle/>
+          <a:p>
+            <a:pPr rtl="1" algn="r" indent="0" marL="0">
+              <a:buNone/>
+            </a:pPr>
+            <a:r>
+              <a:rPr lang="en-US" sz="1200" b="1" dirty="0">
+                <a:solidFill>
+                  <a:srgbClr val="2B3A4C"/>
+                </a:solidFill>
+                <a:latin typeface="Tajawal" pitchFamily="34" charset="0"/>
+                <a:ea typeface="Tajawal" pitchFamily="34" charset="-122"/>
+                <a:cs typeface="Tajawal" pitchFamily="34" charset="-120"/>
+              </a:rPr>
+              <a:t>يسمي اللوحة التي أمامك بعينها</a:t>
+            </a:r>
+            <a:endParaRPr lang="en-US" sz="1200" dirty="0"/>
+          </a:p>
+        </p:txBody>
+      </p:sp>
+      <p:sp>
+        <p:nvSpPr>
+          <p:cNvPr id="19" name="Shape 16"/>
+          <p:cNvSpPr/>
+          <p:nvPr/>
+        </p:nvSpPr>
+        <p:spPr>
+          <a:xfrm>
+            <a:off x="6842455" y="4288536"/>
+            <a:ext cx="4572000" cy="475488"/>
+          </a:xfrm>
+          <a:prstGeom prst="roundRect">
+            <a:avLst>
+              <a:gd name="adj" fmla="val 15385"/>
+            </a:avLst>
+          </a:prstGeom>
+          <a:solidFill>
+            <a:srgbClr val="F4F6F9"/>
+          </a:solidFill>
+          <a:ln w="9525">
+            <a:solidFill>
+              <a:srgbClr val="D9E2EC"/>
+            </a:solidFill>
+            <a:prstDash val="solid"/>
+          </a:ln>
+        </p:spPr>
+      </p:sp>
+      <p:sp>
+        <p:nvSpPr>
+          <p:cNvPr id="20" name="Text 17"/>
+          <p:cNvSpPr/>
+          <p:nvPr/>
+        </p:nvSpPr>
+        <p:spPr>
+          <a:xfrm>
+            <a:off x="7061911" y="4398264"/>
+            <a:ext cx="4133088" cy="274320"/>
+          </a:xfrm>
+          <a:prstGeom prst="rect">
+            <a:avLst/>
+          </a:prstGeom>
+          <a:noFill/>
+          <a:ln/>
+        </p:spPr>
+        <p:txBody>
+          <a:bodyPr wrap="square" lIns="0" tIns="0" rIns="0" bIns="0" rtlCol="0" anchor="ctr"/>
+          <a:lstStyle/>
+          <a:p>
+            <a:pPr rtl="1" algn="r" indent="0" marL="0">
+              <a:buNone/>
+            </a:pPr>
+            <a:r>
+              <a:rPr lang="en-US" sz="1200" dirty="0">
+                <a:solidFill>
+                  <a:srgbClr val="4B5B6E"/>
+                </a:solidFill>
+                <a:latin typeface="Tajawal" pitchFamily="34" charset="0"/>
+                <a:ea typeface="Tajawal" pitchFamily="34" charset="-122"/>
+                <a:cs typeface="Tajawal" pitchFamily="34" charset="-120"/>
+              </a:rPr>
+              <a:t>مرشد بحجز مسبق وبلغات محدودة</a:t>
+            </a:r>
+            <a:endParaRPr lang="en-US" sz="1200" dirty="0"/>
+          </a:p>
+        </p:txBody>
+      </p:sp>
+      <p:sp>
+        <p:nvSpPr>
+          <p:cNvPr id="21" name="Shape 18"/>
+          <p:cNvSpPr/>
+          <p:nvPr/>
+        </p:nvSpPr>
+        <p:spPr>
+          <a:xfrm>
+            <a:off x="777240" y="4288536"/>
+            <a:ext cx="6035040" cy="475488"/>
+          </a:xfrm>
+          <a:prstGeom prst="roundRect">
+            <a:avLst>
+              <a:gd name="adj" fmla="val 15385"/>
+            </a:avLst>
+          </a:prstGeom>
+          <a:solidFill>
+            <a:srgbClr val="EEF3F9"/>
+          </a:solidFill>
+          <a:ln w="9525">
+            <a:solidFill>
+              <a:srgbClr val="D9E2EC"/>
+            </a:solidFill>
+            <a:prstDash val="solid"/>
+          </a:ln>
+        </p:spPr>
+      </p:sp>
+      <p:sp>
+        <p:nvSpPr>
+          <p:cNvPr id="22" name="Text 19"/>
+          <p:cNvSpPr/>
+          <p:nvPr/>
+        </p:nvSpPr>
+        <p:spPr>
+          <a:xfrm>
+            <a:off x="996696" y="4398264"/>
+            <a:ext cx="5596128" cy="274320"/>
+          </a:xfrm>
+          <a:prstGeom prst="rect">
+            <a:avLst/>
+          </a:prstGeom>
+          <a:noFill/>
+          <a:ln/>
+        </p:spPr>
+        <p:txBody>
+          <a:bodyPr wrap="square" lIns="0" tIns="0" rIns="0" bIns="0" rtlCol="0" anchor="ctr"/>
+          <a:lstStyle/>
+          <a:p>
+            <a:pPr rtl="1" algn="r" indent="0" marL="0">
+              <a:buNone/>
+            </a:pPr>
+            <a:r>
+              <a:rPr lang="en-US" sz="1200" b="1" dirty="0">
+                <a:solidFill>
+                  <a:srgbClr val="2B3A4C"/>
+                </a:solidFill>
+                <a:latin typeface="Tajawal" pitchFamily="34" charset="0"/>
+                <a:ea typeface="Tajawal" pitchFamily="34" charset="-122"/>
+                <a:cs typeface="Tajawal" pitchFamily="34" charset="-120"/>
+              </a:rPr>
+              <a:t>تسع وعشرون لغة، ولكل لغة صوت</a:t>
+            </a:r>
+            <a:endParaRPr lang="en-US" sz="1200" dirty="0"/>
+          </a:p>
+        </p:txBody>
+      </p:sp>
+      <p:sp>
+        <p:nvSpPr>
+          <p:cNvPr id="23" name="Shape 20"/>
+          <p:cNvSpPr/>
+          <p:nvPr/>
+        </p:nvSpPr>
+        <p:spPr>
+          <a:xfrm>
+            <a:off x="6842455" y="4864608"/>
+            <a:ext cx="4572000" cy="475488"/>
+          </a:xfrm>
+          <a:prstGeom prst="roundRect">
+            <a:avLst>
+              <a:gd name="adj" fmla="val 15385"/>
+            </a:avLst>
+          </a:prstGeom>
+          <a:solidFill>
+            <a:srgbClr val="F4F6F9"/>
+          </a:solidFill>
+          <a:ln w="9525">
+            <a:solidFill>
+              <a:srgbClr val="D9E2EC"/>
+            </a:solidFill>
+            <a:prstDash val="solid"/>
+          </a:ln>
+        </p:spPr>
+      </p:sp>
+      <p:sp>
+        <p:nvSpPr>
+          <p:cNvPr id="24" name="Text 21"/>
+          <p:cNvSpPr/>
+          <p:nvPr/>
+        </p:nvSpPr>
+        <p:spPr>
+          <a:xfrm>
+            <a:off x="7061911" y="4974336"/>
+            <a:ext cx="4133088" cy="274320"/>
+          </a:xfrm>
+          <a:prstGeom prst="rect">
+            <a:avLst/>
+          </a:prstGeom>
+          <a:noFill/>
+          <a:ln/>
+        </p:spPr>
+        <p:txBody>
+          <a:bodyPr wrap="square" lIns="0" tIns="0" rIns="0" bIns="0" rtlCol="0" anchor="ctr"/>
+          <a:lstStyle/>
+          <a:p>
+            <a:pPr rtl="1" algn="r" indent="0" marL="0">
+              <a:buNone/>
+            </a:pPr>
+            <a:r>
+              <a:rPr lang="en-US" sz="1200" dirty="0">
+                <a:solidFill>
+                  <a:srgbClr val="4B5B6E"/>
+                </a:solidFill>
+                <a:latin typeface="Tajawal" pitchFamily="34" charset="0"/>
+                <a:ea typeface="Tajawal" pitchFamily="34" charset="-122"/>
+                <a:cs typeface="Tajawal" pitchFamily="34" charset="-120"/>
+              </a:rPr>
+              <a:t>تطبيق سحابي يتوقف بلا تغطية</a:t>
+            </a:r>
+            <a:endParaRPr lang="en-US" sz="1200" dirty="0"/>
+          </a:p>
+        </p:txBody>
+      </p:sp>
+      <p:sp>
+        <p:nvSpPr>
+          <p:cNvPr id="25" name="Shape 22"/>
+          <p:cNvSpPr/>
+          <p:nvPr/>
+        </p:nvSpPr>
+        <p:spPr>
+          <a:xfrm>
+            <a:off x="777240" y="4864608"/>
+            <a:ext cx="6035040" cy="475488"/>
+          </a:xfrm>
+          <a:prstGeom prst="roundRect">
+            <a:avLst>
+              <a:gd name="adj" fmla="val 15385"/>
+            </a:avLst>
+          </a:prstGeom>
+          <a:solidFill>
+            <a:srgbClr val="EEF3F9"/>
+          </a:solidFill>
+          <a:ln w="9525">
+            <a:solidFill>
+              <a:srgbClr val="D9E2EC"/>
+            </a:solidFill>
+            <a:prstDash val="solid"/>
+          </a:ln>
+        </p:spPr>
+      </p:sp>
+      <p:sp>
+        <p:nvSpPr>
+          <p:cNvPr id="26" name="Text 23"/>
+          <p:cNvSpPr/>
+          <p:nvPr/>
+        </p:nvSpPr>
+        <p:spPr>
+          <a:xfrm>
+            <a:off x="996696" y="4974336"/>
+            <a:ext cx="5596128" cy="274320"/>
+          </a:xfrm>
+          <a:prstGeom prst="rect">
+            <a:avLst/>
+          </a:prstGeom>
+          <a:noFill/>
+          <a:ln/>
+        </p:spPr>
+        <p:txBody>
+          <a:bodyPr wrap="square" lIns="0" tIns="0" rIns="0" bIns="0" rtlCol="0" anchor="ctr"/>
+          <a:lstStyle/>
+          <a:p>
+            <a:pPr rtl="1" algn="r" indent="0" marL="0">
+              <a:buNone/>
+            </a:pPr>
+            <a:r>
+              <a:rPr lang="en-US" sz="1200" b="1" dirty="0">
+                <a:solidFill>
+                  <a:srgbClr val="2B3A4C"/>
+                </a:solidFill>
+                <a:latin typeface="Tajawal" pitchFamily="34" charset="0"/>
+                <a:ea typeface="Tajawal" pitchFamily="34" charset="-122"/>
+                <a:cs typeface="Tajawal" pitchFamily="34" charset="-120"/>
+              </a:rPr>
+              <a:t>يعمل كاملا بلا إنترنت</a:t>
+            </a:r>
+            <a:endParaRPr lang="en-US" sz="1200" dirty="0"/>
+          </a:p>
+        </p:txBody>
+      </p:sp>
+      <p:sp>
+        <p:nvSpPr>
+          <p:cNvPr id="27" name="Shape 24"/>
+          <p:cNvSpPr/>
+          <p:nvPr/>
+        </p:nvSpPr>
+        <p:spPr>
+          <a:xfrm>
+            <a:off x="6842455" y="5440680"/>
+            <a:ext cx="4572000" cy="475488"/>
+          </a:xfrm>
+          <a:prstGeom prst="roundRect">
+            <a:avLst>
+              <a:gd name="adj" fmla="val 15385"/>
+            </a:avLst>
+          </a:prstGeom>
+          <a:solidFill>
+            <a:srgbClr val="F4F6F9"/>
+          </a:solidFill>
+          <a:ln w="9525">
+            <a:solidFill>
+              <a:srgbClr val="D9E2EC"/>
+            </a:solidFill>
+            <a:prstDash val="solid"/>
+          </a:ln>
+        </p:spPr>
+      </p:sp>
+      <p:sp>
+        <p:nvSpPr>
+          <p:cNvPr id="28" name="Text 25"/>
+          <p:cNvSpPr/>
+          <p:nvPr/>
+        </p:nvSpPr>
+        <p:spPr>
+          <a:xfrm>
+            <a:off x="7061911" y="5550408"/>
+            <a:ext cx="4133088" cy="274320"/>
+          </a:xfrm>
+          <a:prstGeom prst="rect">
+            <a:avLst/>
+          </a:prstGeom>
+          <a:noFill/>
+          <a:ln/>
+        </p:spPr>
+        <p:txBody>
+          <a:bodyPr wrap="square" lIns="0" tIns="0" rIns="0" bIns="0" rtlCol="0" anchor="ctr"/>
+          <a:lstStyle/>
+          <a:p>
+            <a:pPr rtl="1" algn="r" indent="0" marL="0">
+              <a:buNone/>
+            </a:pPr>
+            <a:r>
+              <a:rPr lang="en-US" sz="1200" dirty="0">
+                <a:solidFill>
+                  <a:srgbClr val="4B5B6E"/>
+                </a:solidFill>
+                <a:latin typeface="Tajawal" pitchFamily="34" charset="0"/>
+                <a:ea typeface="Tajawal" pitchFamily="34" charset="-122"/>
+                <a:cs typeface="Tajawal" pitchFamily="34" charset="-120"/>
+              </a:rPr>
+              <a:t>بحث بالصور يعطي نتيجة عامة</a:t>
+            </a:r>
+            <a:endParaRPr lang="en-US" sz="1200" dirty="0"/>
+          </a:p>
+        </p:txBody>
+      </p:sp>
+      <p:sp>
+        <p:nvSpPr>
+          <p:cNvPr id="29" name="Shape 26"/>
+          <p:cNvSpPr/>
+          <p:nvPr/>
+        </p:nvSpPr>
+        <p:spPr>
+          <a:xfrm>
+            <a:off x="777240" y="5440680"/>
+            <a:ext cx="6035040" cy="475488"/>
+          </a:xfrm>
+          <a:prstGeom prst="roundRect">
+            <a:avLst>
+              <a:gd name="adj" fmla="val 15385"/>
+            </a:avLst>
+          </a:prstGeom>
+          <a:solidFill>
+            <a:srgbClr val="EEF3F9"/>
+          </a:solidFill>
+          <a:ln w="9525">
+            <a:solidFill>
+              <a:srgbClr val="D9E2EC"/>
+            </a:solidFill>
+            <a:prstDash val="solid"/>
+          </a:ln>
+        </p:spPr>
+      </p:sp>
+      <p:sp>
+        <p:nvSpPr>
+          <p:cNvPr id="30" name="Text 27"/>
+          <p:cNvSpPr/>
+          <p:nvPr/>
+        </p:nvSpPr>
+        <p:spPr>
+          <a:xfrm>
+            <a:off x="996696" y="5550408"/>
+            <a:ext cx="5596128" cy="274320"/>
+          </a:xfrm>
+          <a:prstGeom prst="rect">
+            <a:avLst/>
+          </a:prstGeom>
+          <a:noFill/>
+          <a:ln/>
+        </p:spPr>
+        <p:txBody>
+          <a:bodyPr wrap="square" lIns="0" tIns="0" rIns="0" bIns="0" rtlCol="0" anchor="ctr"/>
+          <a:lstStyle/>
+          <a:p>
+            <a:pPr rtl="1" algn="r" indent="0" marL="0">
+              <a:buNone/>
+            </a:pPr>
+            <a:r>
+              <a:rPr lang="en-US" sz="1200" b="1" dirty="0">
+                <a:solidFill>
+                  <a:srgbClr val="2B3A4C"/>
+                </a:solidFill>
+                <a:latin typeface="Tajawal" pitchFamily="34" charset="0"/>
+                <a:ea typeface="Tajawal" pitchFamily="34" charset="-122"/>
+                <a:cs typeface="Tajawal" pitchFamily="34" charset="-120"/>
+              </a:rPr>
+              <a:t>مبني على 201 صورة من جبة نفسها</a:t>
+            </a:r>
+            <a:endParaRPr lang="en-US" sz="1200" dirty="0"/>
           </a:p>
         </p:txBody>
       </p:sp>
@@ -4250,7 +7910,7 @@
         <p:spPr>
           <a:xfrm>
             <a:off x="5120640" y="2788920"/>
-            <a:ext cx="6202375" cy="1280160"/>
+            <a:ext cx="6293815" cy="1280160"/>
           </a:xfrm>
           <a:prstGeom prst="rect">
             <a:avLst/>
@@ -4266,7 +7926,7 @@
               <a:buNone/>
             </a:pPr>
             <a:r>
-              <a:rPr lang="en-US" sz="3800" b="1" dirty="0">
+              <a:rPr lang="en-US" sz="3600" b="1" dirty="0">
                 <a:solidFill>
                   <a:srgbClr val="255174"/>
                 </a:solidFill>
@@ -4276,7 +7936,7 @@
               </a:rPr>
               <a:t>توظيف الذكاء الاصطناعي</a:t>
             </a:r>
-            <a:endParaRPr lang="en-US" sz="3800" dirty="0"/>
+            <a:endParaRPr lang="en-US" sz="3600" dirty="0"/>
           </a:p>
         </p:txBody>
       </p:sp>
@@ -4344,8 +8004,8 @@
         </p:nvSpPr>
         <p:spPr>
           <a:xfrm>
-            <a:off x="868680" y="658368"/>
-            <a:ext cx="10454335" cy="502920"/>
+            <a:off x="777240" y="548640"/>
+            <a:ext cx="10637215" cy="502920"/>
           </a:xfrm>
           <a:prstGeom prst="rect">
             <a:avLst/>
@@ -4383,11 +8043,325 @@
         </p:nvSpPr>
         <p:spPr>
           <a:xfrm>
-            <a:off x="9768535" y="1243584"/>
-            <a:ext cx="1554480" cy="54864"/>
-          </a:xfrm>
-          <a:prstGeom prst="rect">
-            <a:avLst/>
+            <a:off x="9082735" y="1234440"/>
+            <a:ext cx="2331720" cy="4297680"/>
+          </a:xfrm>
+          <a:prstGeom prst="roundRect">
+            <a:avLst>
+              <a:gd name="adj" fmla="val 3137"/>
+            </a:avLst>
+          </a:prstGeom>
+          <a:solidFill>
+            <a:srgbClr val="F4F6F9"/>
+          </a:solidFill>
+          <a:ln w="9525">
+            <a:solidFill>
+              <a:srgbClr val="D9E2EC"/>
+            </a:solidFill>
+            <a:prstDash val="solid"/>
+          </a:ln>
+        </p:spPr>
+      </p:sp>
+      <p:pic>
+        <p:nvPicPr>
+          <p:cNvPr id="5" name="Image 1" descr="preencoded.png">    </p:cNvPr>
+          <p:cNvPicPr>
+            <a:picLocks noChangeAspect="1"/>
+          </p:cNvPicPr>
+          <p:nvPr/>
+        </p:nvPicPr>
+        <p:blipFill>
+          <a:blip r:embed="rId2"/>
+          <a:stretch>
+            <a:fillRect/>
+          </a:stretch>
+        </p:blipFill>
+        <p:spPr>
+          <a:xfrm>
+            <a:off x="9631375" y="1481328"/>
+            <a:ext cx="1234440" cy="925830"/>
+          </a:xfrm>
+          <a:prstGeom prst="rect">
+            <a:avLst/>
+          </a:prstGeom>
+        </p:spPr>
+      </p:pic>
+      <p:sp>
+        <p:nvSpPr>
+          <p:cNvPr id="6" name="Text 2"/>
+          <p:cNvSpPr/>
+          <p:nvPr/>
+        </p:nvSpPr>
+        <p:spPr>
+          <a:xfrm>
+            <a:off x="9082735" y="2450592"/>
+            <a:ext cx="2331720" cy="237744"/>
+          </a:xfrm>
+          <a:prstGeom prst="rect">
+            <a:avLst/>
+          </a:prstGeom>
+          <a:noFill/>
+          <a:ln/>
+        </p:spPr>
+        <p:txBody>
+          <a:bodyPr wrap="square" lIns="0" tIns="0" rIns="0" bIns="0" rtlCol="0" anchor="ctr"/>
+          <a:lstStyle/>
+          <a:p>
+            <a:pPr rtl="1" algn="ctr" indent="0" marL="0">
+              <a:buNone/>
+            </a:pPr>
+            <a:r>
+              <a:rPr lang="en-US" sz="1000" dirty="0">
+                <a:solidFill>
+                  <a:srgbClr val="4B5B6E"/>
+                </a:solidFill>
+                <a:latin typeface="Tajawal" pitchFamily="34" charset="0"/>
+                <a:ea typeface="Tajawal" pitchFamily="34" charset="-122"/>
+                <a:cs typeface="Tajawal" pitchFamily="34" charset="-120"/>
+              </a:rPr>
+              <a:t>ما تراه الكاميرا</a:t>
+            </a:r>
+            <a:endParaRPr lang="en-US" sz="1000" dirty="0"/>
+          </a:p>
+        </p:txBody>
+      </p:sp>
+      <p:sp>
+        <p:nvSpPr>
+          <p:cNvPr id="7" name="Text 3"/>
+          <p:cNvSpPr/>
+          <p:nvPr/>
+        </p:nvSpPr>
+        <p:spPr>
+          <a:xfrm>
+            <a:off x="9082735" y="2724912"/>
+            <a:ext cx="2331720" cy="219456"/>
+          </a:xfrm>
+          <a:prstGeom prst="rect">
+            <a:avLst/>
+          </a:prstGeom>
+          <a:noFill/>
+          <a:ln/>
+        </p:spPr>
+        <p:txBody>
+          <a:bodyPr wrap="square" lIns="0" tIns="0" rIns="0" bIns="0" rtlCol="0" anchor="ctr"/>
+          <a:lstStyle/>
+          <a:p>
+            <a:pPr algn="ctr" indent="0" marL="0">
+              <a:buNone/>
+            </a:pPr>
+            <a:r>
+              <a:rPr lang="en-US" sz="1200" dirty="0">
+                <a:solidFill>
+                  <a:srgbClr val="8357F6"/>
+                </a:solidFill>
+                <a:latin typeface="Calibri" pitchFamily="34" charset="0"/>
+                <a:ea typeface="Calibri" pitchFamily="34" charset="-122"/>
+                <a:cs typeface="Calibri" pitchFamily="34" charset="-120"/>
+              </a:rPr>
+              <a:t>▼</a:t>
+            </a:r>
+            <a:endParaRPr lang="en-US" sz="1200" dirty="0"/>
+          </a:p>
+        </p:txBody>
+      </p:sp>
+      <p:sp>
+        <p:nvSpPr>
+          <p:cNvPr id="8" name="Shape 4"/>
+          <p:cNvSpPr/>
+          <p:nvPr/>
+        </p:nvSpPr>
+        <p:spPr>
+          <a:xfrm>
+            <a:off x="9631375" y="2980944"/>
+            <a:ext cx="1234440" cy="530352"/>
+          </a:xfrm>
+          <a:prstGeom prst="roundRect">
+            <a:avLst>
+              <a:gd name="adj" fmla="val 13793"/>
+            </a:avLst>
+          </a:prstGeom>
+          <a:solidFill>
+            <a:srgbClr val="FFFFFF"/>
+          </a:solidFill>
+          <a:ln w="9525">
+            <a:solidFill>
+              <a:srgbClr val="D9E2EC"/>
+            </a:solidFill>
+            <a:prstDash val="solid"/>
+          </a:ln>
+        </p:spPr>
+      </p:sp>
+      <p:sp>
+        <p:nvSpPr>
+          <p:cNvPr id="9" name="Text 5"/>
+          <p:cNvSpPr/>
+          <p:nvPr/>
+        </p:nvSpPr>
+        <p:spPr>
+          <a:xfrm>
+            <a:off x="9631375" y="3044952"/>
+            <a:ext cx="1234440" cy="219456"/>
+          </a:xfrm>
+          <a:prstGeom prst="rect">
+            <a:avLst/>
+          </a:prstGeom>
+          <a:noFill/>
+          <a:ln/>
+        </p:spPr>
+        <p:txBody>
+          <a:bodyPr wrap="square" lIns="0" tIns="0" rIns="0" bIns="0" rtlCol="0" anchor="ctr"/>
+          <a:lstStyle/>
+          <a:p>
+            <a:pPr algn="ctr" indent="0" marL="0">
+              <a:buNone/>
+            </a:pPr>
+            <a:r>
+              <a:rPr lang="en-US" sz="950" dirty="0">
+                <a:solidFill>
+                  <a:srgbClr val="255174"/>
+                </a:solidFill>
+                <a:latin typeface="Courier New" pitchFamily="34" charset="0"/>
+                <a:ea typeface="Courier New" pitchFamily="34" charset="-122"/>
+                <a:cs typeface="Courier New" pitchFamily="34" charset="-120"/>
+              </a:rPr>
+              <a:t>0.417   0.902</a:t>
+            </a:r>
+            <a:endParaRPr lang="en-US" sz="950" dirty="0"/>
+          </a:p>
+        </p:txBody>
+      </p:sp>
+      <p:sp>
+        <p:nvSpPr>
+          <p:cNvPr id="10" name="Text 6"/>
+          <p:cNvSpPr/>
+          <p:nvPr/>
+        </p:nvSpPr>
+        <p:spPr>
+          <a:xfrm>
+            <a:off x="9631375" y="3246120"/>
+            <a:ext cx="1234440" cy="219456"/>
+          </a:xfrm>
+          <a:prstGeom prst="rect">
+            <a:avLst/>
+          </a:prstGeom>
+          <a:noFill/>
+          <a:ln/>
+        </p:spPr>
+        <p:txBody>
+          <a:bodyPr wrap="square" lIns="0" tIns="0" rIns="0" bIns="0" rtlCol="0" anchor="ctr"/>
+          <a:lstStyle/>
+          <a:p>
+            <a:pPr algn="ctr" indent="0" marL="0">
+              <a:buNone/>
+            </a:pPr>
+            <a:r>
+              <a:rPr lang="en-US" sz="950" dirty="0">
+                <a:solidFill>
+                  <a:srgbClr val="255174"/>
+                </a:solidFill>
+                <a:latin typeface="Courier New" pitchFamily="34" charset="0"/>
+                <a:ea typeface="Courier New" pitchFamily="34" charset="-122"/>
+                <a:cs typeface="Courier New" pitchFamily="34" charset="-120"/>
+              </a:rPr>
+              <a:t>0.773   0.264</a:t>
+            </a:r>
+            <a:endParaRPr lang="en-US" sz="950" dirty="0"/>
+          </a:p>
+        </p:txBody>
+      </p:sp>
+      <p:sp>
+        <p:nvSpPr>
+          <p:cNvPr id="11" name="Text 7"/>
+          <p:cNvSpPr/>
+          <p:nvPr/>
+        </p:nvSpPr>
+        <p:spPr>
+          <a:xfrm>
+            <a:off x="9082735" y="3547872"/>
+            <a:ext cx="2331720" cy="237744"/>
+          </a:xfrm>
+          <a:prstGeom prst="rect">
+            <a:avLst/>
+          </a:prstGeom>
+          <a:noFill/>
+          <a:ln/>
+        </p:spPr>
+        <p:txBody>
+          <a:bodyPr wrap="square" lIns="0" tIns="0" rIns="0" bIns="0" rtlCol="0" anchor="ctr"/>
+          <a:lstStyle/>
+          <a:p>
+            <a:pPr rtl="1" algn="ctr" indent="0" marL="0">
+              <a:buNone/>
+            </a:pPr>
+            <a:r>
+              <a:rPr lang="en-US" sz="1000" dirty="0">
+                <a:solidFill>
+                  <a:srgbClr val="4B5B6E"/>
+                </a:solidFill>
+                <a:latin typeface="Tajawal" pitchFamily="34" charset="0"/>
+                <a:ea typeface="Tajawal" pitchFamily="34" charset="-122"/>
+                <a:cs typeface="Tajawal" pitchFamily="34" charset="-120"/>
+              </a:rPr>
+              <a:t>384 رقما — بصمة الصورة</a:t>
+            </a:r>
+            <a:endParaRPr lang="en-US" sz="1000" dirty="0"/>
+          </a:p>
+        </p:txBody>
+      </p:sp>
+      <p:sp>
+        <p:nvSpPr>
+          <p:cNvPr id="12" name="Text 8"/>
+          <p:cNvSpPr/>
+          <p:nvPr/>
+        </p:nvSpPr>
+        <p:spPr>
+          <a:xfrm>
+            <a:off x="9082735" y="3822192"/>
+            <a:ext cx="2331720" cy="219456"/>
+          </a:xfrm>
+          <a:prstGeom prst="rect">
+            <a:avLst/>
+          </a:prstGeom>
+          <a:noFill/>
+          <a:ln/>
+        </p:spPr>
+        <p:txBody>
+          <a:bodyPr wrap="square" lIns="0" tIns="0" rIns="0" bIns="0" rtlCol="0" anchor="ctr"/>
+          <a:lstStyle/>
+          <a:p>
+            <a:pPr algn="ctr" indent="0" marL="0">
+              <a:buNone/>
+            </a:pPr>
+            <a:r>
+              <a:rPr lang="en-US" sz="1200" dirty="0">
+                <a:solidFill>
+                  <a:srgbClr val="8357F6"/>
+                </a:solidFill>
+                <a:latin typeface="Calibri" pitchFamily="34" charset="0"/>
+                <a:ea typeface="Calibri" pitchFamily="34" charset="-122"/>
+                <a:cs typeface="Calibri" pitchFamily="34" charset="-120"/>
+              </a:rPr>
+              <a:t>▼</a:t>
+            </a:r>
+            <a:endParaRPr lang="en-US" sz="1200" dirty="0"/>
+          </a:p>
+        </p:txBody>
+      </p:sp>
+      <p:sp>
+        <p:nvSpPr>
+          <p:cNvPr id="13" name="Shape 9"/>
+          <p:cNvSpPr/>
+          <p:nvPr/>
+        </p:nvSpPr>
+        <p:spPr>
+          <a:xfrm>
+            <a:off x="9576511" y="4096512"/>
+            <a:ext cx="1344168" cy="1035558"/>
+          </a:xfrm>
+          <a:prstGeom prst="roundRect">
+            <a:avLst>
+              <a:gd name="adj" fmla="val 4415"/>
+            </a:avLst>
           </a:prstGeom>
           <a:solidFill>
             <a:srgbClr val="8357F6"/>
@@ -4400,16 +8374,145 @@
           </a:ln>
         </p:spPr>
       </p:sp>
-      <p:sp>
-        <p:nvSpPr>
-          <p:cNvPr id="5" name="Text 2"/>
-          <p:cNvSpPr/>
-          <p:nvPr/>
-        </p:nvSpPr>
-        <p:spPr>
-          <a:xfrm>
-            <a:off x="868680" y="1691640"/>
-            <a:ext cx="10454335" cy="4206240"/>
+      <p:pic>
+        <p:nvPicPr>
+          <p:cNvPr id="14" name="Image 2" descr="preencoded.png">    </p:cNvPr>
+          <p:cNvPicPr>
+            <a:picLocks noChangeAspect="1"/>
+          </p:cNvPicPr>
+          <p:nvPr/>
+        </p:nvPicPr>
+        <p:blipFill>
+          <a:blip r:embed="rId3"/>
+          <a:stretch>
+            <a:fillRect/>
+          </a:stretch>
+        </p:blipFill>
+        <p:spPr>
+          <a:xfrm>
+            <a:off x="9631375" y="4151376"/>
+            <a:ext cx="1234440" cy="925830"/>
+          </a:xfrm>
+          <a:prstGeom prst="rect">
+            <a:avLst/>
+          </a:prstGeom>
+        </p:spPr>
+      </p:pic>
+      <p:sp>
+        <p:nvSpPr>
+          <p:cNvPr id="15" name="Text 10"/>
+          <p:cNvSpPr/>
+          <p:nvPr/>
+        </p:nvSpPr>
+        <p:spPr>
+          <a:xfrm>
+            <a:off x="9082735" y="5230368"/>
+            <a:ext cx="2331720" cy="237744"/>
+          </a:xfrm>
+          <a:prstGeom prst="rect">
+            <a:avLst/>
+          </a:prstGeom>
+          <a:noFill/>
+          <a:ln/>
+        </p:spPr>
+        <p:txBody>
+          <a:bodyPr wrap="square" lIns="0" tIns="0" rIns="0" bIns="0" rtlCol="0" anchor="ctr"/>
+          <a:lstStyle/>
+          <a:p>
+            <a:pPr rtl="1" algn="ctr" indent="0" marL="0">
+              <a:buNone/>
+            </a:pPr>
+            <a:r>
+              <a:rPr lang="en-US" sz="1000" dirty="0">
+                <a:solidFill>
+                  <a:srgbClr val="4B5B6E"/>
+                </a:solidFill>
+                <a:latin typeface="Tajawal" pitchFamily="34" charset="0"/>
+                <a:ea typeface="Tajawal" pitchFamily="34" charset="-122"/>
+                <a:cs typeface="Tajawal" pitchFamily="34" charset="-120"/>
+              </a:rPr>
+              <a:t>أقرب لوحة في الفهرس</a:t>
+            </a:r>
+            <a:endParaRPr lang="en-US" sz="1000" dirty="0"/>
+          </a:p>
+        </p:txBody>
+      </p:sp>
+      <p:sp>
+        <p:nvSpPr>
+          <p:cNvPr id="16" name="Shape 11"/>
+          <p:cNvSpPr/>
+          <p:nvPr/>
+        </p:nvSpPr>
+        <p:spPr>
+          <a:xfrm>
+            <a:off x="777240" y="1234440"/>
+            <a:ext cx="7985455" cy="1225296"/>
+          </a:xfrm>
+          <a:prstGeom prst="roundRect">
+            <a:avLst>
+              <a:gd name="adj" fmla="val 5970"/>
+            </a:avLst>
+          </a:prstGeom>
+          <a:solidFill>
+            <a:srgbClr val="EEF3F9"/>
+          </a:solidFill>
+          <a:ln w="9525">
+            <a:solidFill>
+              <a:srgbClr val="D9E2EC"/>
+            </a:solidFill>
+            <a:prstDash val="solid"/>
+          </a:ln>
+        </p:spPr>
+      </p:sp>
+      <p:sp>
+        <p:nvSpPr>
+          <p:cNvPr id="17" name="Text 12"/>
+          <p:cNvSpPr/>
+          <p:nvPr/>
+        </p:nvSpPr>
+        <p:spPr>
+          <a:xfrm>
+            <a:off x="1014984" y="1380744"/>
+            <a:ext cx="7509967" cy="292608"/>
+          </a:xfrm>
+          <a:prstGeom prst="rect">
+            <a:avLst/>
+          </a:prstGeom>
+          <a:noFill/>
+          <a:ln/>
+        </p:spPr>
+        <p:txBody>
+          <a:bodyPr wrap="square" lIns="0" tIns="0" rIns="0" bIns="0" rtlCol="0" anchor="ctr"/>
+          <a:lstStyle/>
+          <a:p>
+            <a:pPr rtl="1" algn="r" indent="0" marL="0">
+              <a:buNone/>
+            </a:pPr>
+            <a:r>
+              <a:rPr lang="en-US" sz="1350" b="1" dirty="0">
+                <a:solidFill>
+                  <a:srgbClr val="8357F6"/>
+                </a:solidFill>
+                <a:latin typeface="Tajawal" pitchFamily="34" charset="0"/>
+                <a:ea typeface="Tajawal" pitchFamily="34" charset="-122"/>
+                <a:cs typeface="Tajawal" pitchFamily="34" charset="-120"/>
+              </a:rPr>
+              <a:t>جوهرية الذكاء الاصطناعي في الحل</a:t>
+            </a:r>
+            <a:endParaRPr lang="en-US" sz="1350" dirty="0"/>
+          </a:p>
+        </p:txBody>
+      </p:sp>
+      <p:sp>
+        <p:nvSpPr>
+          <p:cNvPr id="18" name="Text 13"/>
+          <p:cNvSpPr/>
+          <p:nvPr/>
+        </p:nvSpPr>
+        <p:spPr>
+          <a:xfrm>
+            <a:off x="1014984" y="1728216"/>
+            <a:ext cx="7509967" cy="585216"/>
           </a:xfrm>
           <a:prstGeom prst="rect">
             <a:avLst/>
@@ -4423,94 +8526,238 @@
           <a:p>
             <a:pPr rtl="1" algn="r" indent="0" marL="0">
               <a:lnSpc>
-                <a:spcPts val="2800"/>
+                <a:spcPts val="2000"/>
               </a:lnSpc>
-              <a:spcAft>
-                <a:spcPts val="2000"/>
-              </a:spcAft>
-              <a:buNone/>
-            </a:pPr>
-            <a:r>
-              <a:rPr lang="en-US" sz="1600" dirty="0">
-                <a:solidFill>
-                  <a:srgbClr val="3C4C60"/>
-                </a:solidFill>
-                <a:latin typeface="Tajawal" pitchFamily="34" charset="0"/>
-                <a:ea typeface="Tajawal" pitchFamily="34" charset="-122"/>
-                <a:cs typeface="Tajawal" pitchFamily="34" charset="-120"/>
-              </a:rPr>
-              <a:t>نموذج الرؤية DINOv3 من Meta، مفتوح المصدر — تعلم أشكال الأشياء من ملايين الصور بلا وسم بشري.</a:t>
-            </a:r>
-            <a:endParaRPr lang="en-US" sz="1600" dirty="0"/>
-          </a:p>
+              <a:buNone/>
+            </a:pPr>
+            <a:r>
+              <a:rPr lang="en-US" sz="1250" dirty="0">
+                <a:solidFill>
+                  <a:srgbClr val="4B5B6E"/>
+                </a:solidFill>
+                <a:latin typeface="Tajawal" pitchFamily="34" charset="0"/>
+                <a:ea typeface="Tajawal" pitchFamily="34" charset="-122"/>
+                <a:cs typeface="Tajawal" pitchFamily="34" charset="-120"/>
+              </a:rPr>
+              <a:t>بلا النموذج لا يوجد منتج: التعرف على اللوحة هو المنتج نفسه لا ميزة مضافة إليه. ونموذج الرؤية DINOv3 من Meta، مفتوح المصدر، تعلم أشكال الأشياء من ملايين الصور بلا وسم بشري.</a:t>
+            </a:r>
+            <a:endParaRPr lang="en-US" sz="1250" dirty="0"/>
+          </a:p>
+        </p:txBody>
+      </p:sp>
+      <p:sp>
+        <p:nvSpPr>
+          <p:cNvPr id="19" name="Shape 14"/>
+          <p:cNvSpPr/>
+          <p:nvPr/>
+        </p:nvSpPr>
+        <p:spPr>
+          <a:xfrm>
+            <a:off x="777240" y="2642616"/>
+            <a:ext cx="7985455" cy="1572768"/>
+          </a:xfrm>
+          <a:prstGeom prst="roundRect">
+            <a:avLst>
+              <a:gd name="adj" fmla="val 4651"/>
+            </a:avLst>
+          </a:prstGeom>
+          <a:solidFill>
+            <a:srgbClr val="EEF3F9"/>
+          </a:solidFill>
+          <a:ln w="9525">
+            <a:solidFill>
+              <a:srgbClr val="D9E2EC"/>
+            </a:solidFill>
+            <a:prstDash val="solid"/>
+          </a:ln>
+        </p:spPr>
+      </p:sp>
+      <p:sp>
+        <p:nvSpPr>
+          <p:cNvPr id="20" name="Text 15"/>
+          <p:cNvSpPr/>
+          <p:nvPr/>
+        </p:nvSpPr>
+        <p:spPr>
+          <a:xfrm>
+            <a:off x="1014984" y="2788920"/>
+            <a:ext cx="7509967" cy="292608"/>
+          </a:xfrm>
+          <a:prstGeom prst="rect">
+            <a:avLst/>
+          </a:prstGeom>
+          <a:noFill/>
+          <a:ln/>
+        </p:spPr>
+        <p:txBody>
+          <a:bodyPr wrap="square" lIns="0" tIns="0" rIns="0" bIns="0" rtlCol="0" anchor="ctr"/>
+          <a:lstStyle/>
+          <a:p>
+            <a:pPr rtl="1" algn="r" indent="0" marL="0">
+              <a:buNone/>
+            </a:pPr>
+            <a:r>
+              <a:rPr lang="en-US" sz="1350" b="1" dirty="0">
+                <a:solidFill>
+                  <a:srgbClr val="8357F6"/>
+                </a:solidFill>
+                <a:latin typeface="Tajawal" pitchFamily="34" charset="0"/>
+                <a:ea typeface="Tajawal" pitchFamily="34" charset="-122"/>
+                <a:cs typeface="Tajawal" pitchFamily="34" charset="-120"/>
+              </a:rPr>
+              <a:t>ملاءمة استخدامه للمشكلة</a:t>
+            </a:r>
+            <a:endParaRPr lang="en-US" sz="1350" dirty="0"/>
+          </a:p>
+        </p:txBody>
+      </p:sp>
+      <p:sp>
+        <p:nvSpPr>
+          <p:cNvPr id="21" name="Text 16"/>
+          <p:cNvSpPr/>
+          <p:nvPr/>
+        </p:nvSpPr>
+        <p:spPr>
+          <a:xfrm>
+            <a:off x="1014984" y="3136392"/>
+            <a:ext cx="7509967" cy="932688"/>
+          </a:xfrm>
+          <a:prstGeom prst="rect">
+            <a:avLst/>
+          </a:prstGeom>
+          <a:noFill/>
+          <a:ln/>
+        </p:spPr>
+        <p:txBody>
+          <a:bodyPr wrap="square" lIns="0" tIns="0" rIns="0" bIns="0" rtlCol="0" anchor="t"/>
+          <a:lstStyle/>
           <a:p>
             <a:pPr rtl="1" algn="r" indent="0" marL="0">
               <a:lnSpc>
-                <a:spcPts val="2800"/>
+                <a:spcPts val="2000"/>
               </a:lnSpc>
-              <a:spcAft>
-                <a:spcPts val="2000"/>
-              </a:spcAft>
-              <a:buNone/>
-            </a:pPr>
-            <a:r>
-              <a:rPr lang="en-US" sz="1600" dirty="0">
-                <a:solidFill>
-                  <a:srgbClr val="3C4C60"/>
-                </a:solidFill>
-                <a:latin typeface="Tajawal" pitchFamily="34" charset="0"/>
-                <a:ea typeface="Tajawal" pitchFamily="34" charset="-122"/>
-                <a:cs typeface="Tajawal" pitchFamily="34" charset="-120"/>
-              </a:rPr>
-              <a:t>وبنينا فوقه طبقة التعرف: فهرس بصمات 201 صورة ميدانية، وسلم قص يعالج اختلاف الإطار، وطبقة قرار تقول: لا أعرف — بدل أن تخمن، وجمع أدلة من عدة لقطات.</a:t>
-            </a:r>
-            <a:endParaRPr lang="en-US" sz="1600" dirty="0"/>
-          </a:p>
+              <a:buNone/>
+            </a:pPr>
+            <a:r>
+              <a:rPr lang="en-US" sz="1250" dirty="0">
+                <a:solidFill>
+                  <a:srgbClr val="4B5B6E"/>
+                </a:solidFill>
+                <a:latin typeface="Tajawal" pitchFamily="34" charset="0"/>
+                <a:ea typeface="Tajawal" pitchFamily="34" charset="-122"/>
+                <a:cs typeface="Tajawal" pitchFamily="34" charset="-120"/>
+              </a:rPr>
+              <a:t>المشكلة بصرية لا نصية: صخرة أمام الزائر. والموقع بلا تغطية، فاخترنا نموذجا يعمل داخل الجهاز لا واجهة سحابية. وبنينا فوقه طبقة القرار: فهرس بصمات ميداني، وسلم قص يعالج اختلاف الإطار، وحكم يقول لا أعرف بدل أن يخمن.</a:t>
+            </a:r>
+            <a:endParaRPr lang="en-US" sz="1250" dirty="0"/>
+          </a:p>
+        </p:txBody>
+      </p:sp>
+      <p:sp>
+        <p:nvSpPr>
+          <p:cNvPr id="22" name="Shape 17"/>
+          <p:cNvSpPr/>
+          <p:nvPr/>
+        </p:nvSpPr>
+        <p:spPr>
+          <a:xfrm>
+            <a:off x="777240" y="4398264"/>
+            <a:ext cx="7985455" cy="1133856"/>
+          </a:xfrm>
+          <a:prstGeom prst="roundRect">
+            <a:avLst>
+              <a:gd name="adj" fmla="val 6452"/>
+            </a:avLst>
+          </a:prstGeom>
+          <a:solidFill>
+            <a:srgbClr val="EEF3F9"/>
+          </a:solidFill>
+          <a:ln w="9525">
+            <a:solidFill>
+              <a:srgbClr val="D9E2EC"/>
+            </a:solidFill>
+            <a:prstDash val="solid"/>
+          </a:ln>
+        </p:spPr>
+      </p:sp>
+      <p:sp>
+        <p:nvSpPr>
+          <p:cNvPr id="23" name="Text 18"/>
+          <p:cNvSpPr/>
+          <p:nvPr/>
+        </p:nvSpPr>
+        <p:spPr>
+          <a:xfrm>
+            <a:off x="1014984" y="4544568"/>
+            <a:ext cx="7509967" cy="292608"/>
+          </a:xfrm>
+          <a:prstGeom prst="rect">
+            <a:avLst/>
+          </a:prstGeom>
+          <a:noFill/>
+          <a:ln/>
+        </p:spPr>
+        <p:txBody>
+          <a:bodyPr wrap="square" lIns="0" tIns="0" rIns="0" bIns="0" rtlCol="0" anchor="ctr"/>
+          <a:lstStyle/>
+          <a:p>
+            <a:pPr rtl="1" algn="r" indent="0" marL="0">
+              <a:buNone/>
+            </a:pPr>
+            <a:r>
+              <a:rPr lang="en-US" sz="1350" b="1" dirty="0">
+                <a:solidFill>
+                  <a:srgbClr val="8357F6"/>
+                </a:solidFill>
+                <a:latin typeface="Tajawal" pitchFamily="34" charset="0"/>
+                <a:ea typeface="Tajawal" pitchFamily="34" charset="-122"/>
+                <a:cs typeface="Tajawal" pitchFamily="34" charset="-120"/>
+              </a:rPr>
+              <a:t>القيمة الحقيقية المضافة</a:t>
+            </a:r>
+            <a:endParaRPr lang="en-US" sz="1350" dirty="0"/>
+          </a:p>
+        </p:txBody>
+      </p:sp>
+      <p:sp>
+        <p:nvSpPr>
+          <p:cNvPr id="24" name="Text 19"/>
+          <p:cNvSpPr/>
+          <p:nvPr/>
+        </p:nvSpPr>
+        <p:spPr>
+          <a:xfrm>
+            <a:off x="1014984" y="4892040"/>
+            <a:ext cx="7509967" cy="493776"/>
+          </a:xfrm>
+          <a:prstGeom prst="rect">
+            <a:avLst/>
+          </a:prstGeom>
+          <a:noFill/>
+          <a:ln/>
+        </p:spPr>
+        <p:txBody>
+          <a:bodyPr wrap="square" lIns="0" tIns="0" rIns="0" bIns="0" rtlCol="0" anchor="t"/>
+          <a:lstStyle/>
           <a:p>
             <a:pPr rtl="1" algn="r" indent="0" marL="0">
               <a:lnSpc>
-                <a:spcPts val="2800"/>
+                <a:spcPts val="2000"/>
               </a:lnSpc>
-              <a:spcAft>
-                <a:spcPts val="2000"/>
-              </a:spcAft>
-              <a:buNone/>
-            </a:pPr>
-            <a:r>
-              <a:rPr lang="en-US" sz="1600" dirty="0">
-                <a:solidFill>
-                  <a:srgbClr val="3C4C60"/>
-                </a:solidFill>
-                <a:latin typeface="Tajawal" pitchFamily="34" charset="0"/>
-                <a:ea typeface="Tajawal" pitchFamily="34" charset="-122"/>
-                <a:cs typeface="Tajawal" pitchFamily="34" charset="-120"/>
-              </a:rPr>
-              <a:t>تعلم انتقالي بالأمثلة على الجهاز — لا ضبط لأوزان الشبكة.</a:t>
-            </a:r>
-            <a:endParaRPr lang="en-US" sz="1600" dirty="0"/>
-          </a:p>
-          <a:p>
-            <a:pPr rtl="1" algn="r" indent="0" marL="0">
-              <a:lnSpc>
-                <a:spcPts val="2800"/>
-              </a:lnSpc>
-              <a:spcAft>
-                <a:spcPts val="2000"/>
-              </a:spcAft>
-              <a:buNone/>
-            </a:pPr>
-            <a:r>
-              <a:rPr lang="en-US" sz="1600" dirty="0">
-                <a:solidFill>
-                  <a:srgbClr val="3C4C60"/>
-                </a:solidFill>
-                <a:latin typeface="Tajawal" pitchFamily="34" charset="0"/>
-                <a:ea typeface="Tajawal" pitchFamily="34" charset="-122"/>
-                <a:cs typeface="Tajawal" pitchFamily="34" charset="-120"/>
-              </a:rPr>
-              <a:t>وتوظيف ثان للذكاء الاصطناعي: توليد الرواية الصوتية بتسع وعشرين لغة بنماذج نطق مفتوحة المصدر.</a:t>
-            </a:r>
-            <a:endParaRPr lang="en-US" sz="1600" dirty="0"/>
+              <a:buNone/>
+            </a:pPr>
+            <a:r>
+              <a:rPr lang="en-US" sz="1250" dirty="0">
+                <a:solidFill>
+                  <a:srgbClr val="4B5B6E"/>
+                </a:solidFill>
+                <a:latin typeface="Tajawal" pitchFamily="34" charset="0"/>
+                <a:ea typeface="Tajawal" pitchFamily="34" charset="-122"/>
+                <a:cs typeface="Tajawal" pitchFamily="34" charset="-120"/>
+              </a:rPr>
+              <a:t>يتعلم من تصحيح الزائر على جهازه فيتحسن بالاستعمال. وذكاء اصطناعي ثان في المشروع: توليد الرواية المسموعة بتسع وعشرين لغة بنماذج نطق مفتوحة المصدر.</a:t>
+            </a:r>
+            <a:endParaRPr lang="en-US" sz="1250" dirty="0"/>
           </a:p>
         </p:txBody>
       </p:sp>
@@ -4618,7 +8865,7 @@
         <p:spPr>
           <a:xfrm>
             <a:off x="5120640" y="2788920"/>
-            <a:ext cx="6202375" cy="1280160"/>
+            <a:ext cx="6293815" cy="1280160"/>
           </a:xfrm>
           <a:prstGeom prst="rect">
             <a:avLst/>
@@ -4634,7 +8881,7 @@
               <a:buNone/>
             </a:pPr>
             <a:r>
-              <a:rPr lang="en-US" sz="3800" b="1" dirty="0">
+              <a:rPr lang="en-US" sz="3600" b="1" dirty="0">
                 <a:solidFill>
                   <a:srgbClr val="255174"/>
                 </a:solidFill>
@@ -4644,7 +8891,7 @@
               </a:rPr>
               <a:t>حاجة السوق والقيمة المقدمة</a:t>
             </a:r>
-            <a:endParaRPr lang="en-US" sz="3800" dirty="0"/>
+            <a:endParaRPr lang="en-US" sz="3600" dirty="0"/>
           </a:p>
         </p:txBody>
       </p:sp>
@@ -4712,8 +8959,8 @@
         </p:nvSpPr>
         <p:spPr>
           <a:xfrm>
-            <a:off x="868680" y="658368"/>
-            <a:ext cx="10454335" cy="502920"/>
+            <a:off x="777240" y="548640"/>
+            <a:ext cx="10637215" cy="502920"/>
           </a:xfrm>
           <a:prstGeom prst="rect">
             <a:avLst/>
@@ -4751,33 +8998,98 @@
         </p:nvSpPr>
         <p:spPr>
           <a:xfrm>
-            <a:off x="9768535" y="1243584"/>
-            <a:ext cx="1554480" cy="54864"/>
-          </a:xfrm>
-          <a:prstGeom prst="rect">
-            <a:avLst/>
+            <a:off x="6233008" y="1234440"/>
+            <a:ext cx="5181448" cy="1783080"/>
+          </a:xfrm>
+          <a:prstGeom prst="roundRect">
+            <a:avLst>
+              <a:gd name="adj" fmla="val 4103"/>
+            </a:avLst>
           </a:prstGeom>
           <a:solidFill>
-            <a:srgbClr val="8357F6"/>
+            <a:srgbClr val="EEF3F9"/>
           </a:solidFill>
-          <a:ln w="12700">
+          <a:ln w="9525">
             <a:solidFill>
-              <a:srgbClr val="333333"/>
+              <a:srgbClr val="D9E2EC"/>
             </a:solidFill>
             <a:prstDash val="solid"/>
           </a:ln>
         </p:spPr>
       </p:sp>
-      <p:sp>
-        <p:nvSpPr>
-          <p:cNvPr id="5" name="Text 2"/>
-          <p:cNvSpPr/>
-          <p:nvPr/>
-        </p:nvSpPr>
-        <p:spPr>
-          <a:xfrm>
-            <a:off x="868680" y="1691640"/>
-            <a:ext cx="10454335" cy="4206240"/>
+      <p:pic>
+        <p:nvPicPr>
+          <p:cNvPr id="5" name="Image 1" descr="preencoded.png">    </p:cNvPr>
+          <p:cNvPicPr>
+            <a:picLocks noChangeAspect="1"/>
+          </p:cNvPicPr>
+          <p:nvPr/>
+        </p:nvPicPr>
+        <p:blipFill>
+          <a:blip r:embed="rId2"/>
+          <a:stretch>
+            <a:fillRect/>
+          </a:stretch>
+        </p:blipFill>
+        <p:spPr>
+          <a:xfrm>
+            <a:off x="6489040" y="1453896"/>
+            <a:ext cx="560349" cy="457200"/>
+          </a:xfrm>
+          <a:prstGeom prst="rect">
+            <a:avLst/>
+          </a:prstGeom>
+        </p:spPr>
+      </p:pic>
+      <p:sp>
+        <p:nvSpPr>
+          <p:cNvPr id="6" name="Text 2"/>
+          <p:cNvSpPr/>
+          <p:nvPr/>
+        </p:nvSpPr>
+        <p:spPr>
+          <a:xfrm>
+            <a:off x="6507328" y="1472184"/>
+            <a:ext cx="3889579" cy="329184"/>
+          </a:xfrm>
+          <a:prstGeom prst="rect">
+            <a:avLst/>
+          </a:prstGeom>
+          <a:noFill/>
+          <a:ln/>
+        </p:spPr>
+        <p:txBody>
+          <a:bodyPr wrap="square" lIns="0" tIns="0" rIns="0" bIns="0" rtlCol="0" anchor="ctr"/>
+          <a:lstStyle/>
+          <a:p>
+            <a:pPr rtl="1" algn="r" indent="0" marL="0">
+              <a:buNone/>
+            </a:pPr>
+            <a:r>
+              <a:rPr lang="en-US" sz="1500" b="1" dirty="0">
+                <a:solidFill>
+                  <a:srgbClr val="255174"/>
+                </a:solidFill>
+                <a:latin typeface="Tajawal" pitchFamily="34" charset="0"/>
+                <a:ea typeface="Tajawal" pitchFamily="34" charset="-122"/>
+                <a:cs typeface="Tajawal" pitchFamily="34" charset="-120"/>
+              </a:rPr>
+              <a:t>المشكلة</a:t>
+            </a:r>
+            <a:endParaRPr lang="en-US" sz="1500" dirty="0"/>
+          </a:p>
+        </p:txBody>
+      </p:sp>
+      <p:sp>
+        <p:nvSpPr>
+          <p:cNvPr id="7" name="Text 3"/>
+          <p:cNvSpPr/>
+          <p:nvPr/>
+        </p:nvSpPr>
+        <p:spPr>
+          <a:xfrm>
+            <a:off x="6507328" y="2020824"/>
+            <a:ext cx="4632808" cy="832104"/>
           </a:xfrm>
           <a:prstGeom prst="rect">
             <a:avLst/>
@@ -4791,94 +9103,418 @@
           <a:p>
             <a:pPr rtl="1" algn="r" indent="0" marL="0">
               <a:lnSpc>
-                <a:spcPts val="2800"/>
+                <a:spcPts val="2000"/>
               </a:lnSpc>
-              <a:spcAft>
-                <a:spcPts val="2000"/>
-              </a:spcAft>
-              <a:buNone/>
-            </a:pPr>
-            <a:r>
-              <a:rPr lang="en-US" sz="1600" dirty="0">
-                <a:solidFill>
-                  <a:srgbClr val="3C4C60"/>
-                </a:solidFill>
-                <a:latin typeface="Tajawal" pitchFamily="34" charset="0"/>
-                <a:ea typeface="Tajawal" pitchFamily="34" charset="-122"/>
-                <a:cs typeface="Tajawal" pitchFamily="34" charset="-120"/>
-              </a:rPr>
-              <a:t>جبة مسجلة في قائمة التراث العالمي لليونسكو، وفيها مئات اللوحات — والزائر يقف أمام الصخرة ولا يعرف ما أمامه.</a:t>
-            </a:r>
-            <a:endParaRPr lang="en-US" sz="1600" dirty="0"/>
-          </a:p>
+              <a:buNone/>
+            </a:pPr>
+            <a:r>
+              <a:rPr lang="en-US" sz="1250" dirty="0">
+                <a:solidFill>
+                  <a:srgbClr val="4B5B6E"/>
+                </a:solidFill>
+                <a:latin typeface="Tajawal" pitchFamily="34" charset="0"/>
+                <a:ea typeface="Tajawal" pitchFamily="34" charset="-122"/>
+                <a:cs typeface="Tajawal" pitchFamily="34" charset="-120"/>
+              </a:rPr>
+              <a:t>جبة مسجلة في قائمة التراث العالمي لليونسكو، وفيها مئات اللوحات. والزائر يقف أمام الصخرة فلا يعرف ما أمامه ولا كم عمره. ولا تغطية شبكة في الموقع.</a:t>
+            </a:r>
+            <a:endParaRPr lang="en-US" sz="1250" dirty="0"/>
+          </a:p>
+        </p:txBody>
+      </p:sp>
+      <p:sp>
+        <p:nvSpPr>
+          <p:cNvPr id="8" name="Shape 4"/>
+          <p:cNvSpPr/>
+          <p:nvPr/>
+        </p:nvSpPr>
+        <p:spPr>
+          <a:xfrm>
+            <a:off x="777240" y="1234440"/>
+            <a:ext cx="5181448" cy="1783080"/>
+          </a:xfrm>
+          <a:prstGeom prst="roundRect">
+            <a:avLst>
+              <a:gd name="adj" fmla="val 4103"/>
+            </a:avLst>
+          </a:prstGeom>
+          <a:solidFill>
+            <a:srgbClr val="EEF3F9"/>
+          </a:solidFill>
+          <a:ln w="9525">
+            <a:solidFill>
+              <a:srgbClr val="D9E2EC"/>
+            </a:solidFill>
+            <a:prstDash val="solid"/>
+          </a:ln>
+        </p:spPr>
+      </p:sp>
+      <p:pic>
+        <p:nvPicPr>
+          <p:cNvPr id="9" name="Image 2" descr="preencoded.png">    </p:cNvPr>
+          <p:cNvPicPr>
+            <a:picLocks noChangeAspect="1"/>
+          </p:cNvPicPr>
+          <p:nvPr/>
+        </p:nvPicPr>
+        <p:blipFill>
+          <a:blip r:embed="rId3"/>
+          <a:stretch>
+            <a:fillRect/>
+          </a:stretch>
+        </p:blipFill>
+        <p:spPr>
+          <a:xfrm>
+            <a:off x="1033272" y="1453896"/>
+            <a:ext cx="493986" cy="457200"/>
+          </a:xfrm>
+          <a:prstGeom prst="rect">
+            <a:avLst/>
+          </a:prstGeom>
+        </p:spPr>
+      </p:pic>
+      <p:sp>
+        <p:nvSpPr>
+          <p:cNvPr id="10" name="Text 5"/>
+          <p:cNvSpPr/>
+          <p:nvPr/>
+        </p:nvSpPr>
+        <p:spPr>
+          <a:xfrm>
+            <a:off x="1051560" y="1472184"/>
+            <a:ext cx="3955941" cy="329184"/>
+          </a:xfrm>
+          <a:prstGeom prst="rect">
+            <a:avLst/>
+          </a:prstGeom>
+          <a:noFill/>
+          <a:ln/>
+        </p:spPr>
+        <p:txBody>
+          <a:bodyPr wrap="square" lIns="0" tIns="0" rIns="0" bIns="0" rtlCol="0" anchor="ctr"/>
+          <a:lstStyle/>
+          <a:p>
+            <a:pPr rtl="1" algn="r" indent="0" marL="0">
+              <a:buNone/>
+            </a:pPr>
+            <a:r>
+              <a:rPr lang="en-US" sz="1500" b="1" dirty="0">
+                <a:solidFill>
+                  <a:srgbClr val="255174"/>
+                </a:solidFill>
+                <a:latin typeface="Tajawal" pitchFamily="34" charset="0"/>
+                <a:ea typeface="Tajawal" pitchFamily="34" charset="-122"/>
+                <a:cs typeface="Tajawal" pitchFamily="34" charset="-120"/>
+              </a:rPr>
+              <a:t>الفئة المستهدفة</a:t>
+            </a:r>
+            <a:endParaRPr lang="en-US" sz="1500" dirty="0"/>
+          </a:p>
+        </p:txBody>
+      </p:sp>
+      <p:sp>
+        <p:nvSpPr>
+          <p:cNvPr id="11" name="Text 6"/>
+          <p:cNvSpPr/>
+          <p:nvPr/>
+        </p:nvSpPr>
+        <p:spPr>
+          <a:xfrm>
+            <a:off x="1051560" y="2020824"/>
+            <a:ext cx="4632808" cy="832104"/>
+          </a:xfrm>
+          <a:prstGeom prst="rect">
+            <a:avLst/>
+          </a:prstGeom>
+          <a:noFill/>
+          <a:ln/>
+        </p:spPr>
+        <p:txBody>
+          <a:bodyPr wrap="square" lIns="0" tIns="0" rIns="0" bIns="0" rtlCol="0" anchor="t"/>
+          <a:lstStyle/>
           <a:p>
             <a:pPr rtl="1" algn="r" indent="0" marL="0">
               <a:lnSpc>
-                <a:spcPts val="2800"/>
+                <a:spcPts val="2000"/>
               </a:lnSpc>
-              <a:spcAft>
-                <a:spcPts val="2000"/>
-              </a:spcAft>
-              <a:buNone/>
-            </a:pPr>
-            <a:r>
-              <a:rPr lang="en-US" sz="1600" dirty="0">
-                <a:solidFill>
-                  <a:srgbClr val="3C4C60"/>
-                </a:solidFill>
-                <a:latin typeface="Tajawal" pitchFamily="34" charset="0"/>
-                <a:ea typeface="Tajawal" pitchFamily="34" charset="-122"/>
-                <a:cs typeface="Tajawal" pitchFamily="34" charset="-120"/>
-              </a:rPr>
-              <a:t>ولا تغطية شبكة في الموقع، فكل حل يعتمد على السحابة يسقط هناك.</a:t>
-            </a:r>
-            <a:endParaRPr lang="en-US" sz="1600" dirty="0"/>
-          </a:p>
+              <a:buNone/>
+            </a:pPr>
+            <a:r>
+              <a:rPr lang="en-US" sz="1250" dirty="0">
+                <a:solidFill>
+                  <a:srgbClr val="4B5B6E"/>
+                </a:solidFill>
+                <a:latin typeface="Tajawal" pitchFamily="34" charset="0"/>
+                <a:ea typeface="Tajawal" pitchFamily="34" charset="-122"/>
+                <a:cs typeface="Tajawal" pitchFamily="34" charset="-120"/>
+              </a:rPr>
+              <a:t>زوار جبة والشويمس، محليون ودوليون. والرحلات المدرسية والجامعية. وهيئة التراث ومركز الزوار. والمنشآت المحلية التي تريد الوصول إلى الزائر.</a:t>
+            </a:r>
+            <a:endParaRPr lang="en-US" sz="1250" dirty="0"/>
+          </a:p>
+        </p:txBody>
+      </p:sp>
+      <p:sp>
+        <p:nvSpPr>
+          <p:cNvPr id="12" name="Shape 7"/>
+          <p:cNvSpPr/>
+          <p:nvPr/>
+        </p:nvSpPr>
+        <p:spPr>
+          <a:xfrm>
+            <a:off x="6233008" y="3273552"/>
+            <a:ext cx="5181448" cy="1783080"/>
+          </a:xfrm>
+          <a:prstGeom prst="roundRect">
+            <a:avLst>
+              <a:gd name="adj" fmla="val 4103"/>
+            </a:avLst>
+          </a:prstGeom>
+          <a:solidFill>
+            <a:srgbClr val="EEF3F9"/>
+          </a:solidFill>
+          <a:ln w="9525">
+            <a:solidFill>
+              <a:srgbClr val="D9E2EC"/>
+            </a:solidFill>
+            <a:prstDash val="solid"/>
+          </a:ln>
+        </p:spPr>
+      </p:sp>
+      <p:pic>
+        <p:nvPicPr>
+          <p:cNvPr id="13" name="Image 3" descr="preencoded.png">    </p:cNvPr>
+          <p:cNvPicPr>
+            <a:picLocks noChangeAspect="1"/>
+          </p:cNvPicPr>
+          <p:nvPr/>
+        </p:nvPicPr>
+        <p:blipFill>
+          <a:blip r:embed="rId4"/>
+          <a:stretch>
+            <a:fillRect/>
+          </a:stretch>
+        </p:blipFill>
+        <p:spPr>
+          <a:xfrm>
+            <a:off x="6489040" y="3493008"/>
+            <a:ext cx="391187" cy="457200"/>
+          </a:xfrm>
+          <a:prstGeom prst="rect">
+            <a:avLst/>
+          </a:prstGeom>
+        </p:spPr>
+      </p:pic>
+      <p:sp>
+        <p:nvSpPr>
+          <p:cNvPr id="14" name="Text 8"/>
+          <p:cNvSpPr/>
+          <p:nvPr/>
+        </p:nvSpPr>
+        <p:spPr>
+          <a:xfrm>
+            <a:off x="6507328" y="3511296"/>
+            <a:ext cx="4058740" cy="329184"/>
+          </a:xfrm>
+          <a:prstGeom prst="rect">
+            <a:avLst/>
+          </a:prstGeom>
+          <a:noFill/>
+          <a:ln/>
+        </p:spPr>
+        <p:txBody>
+          <a:bodyPr wrap="square" lIns="0" tIns="0" rIns="0" bIns="0" rtlCol="0" anchor="ctr"/>
+          <a:lstStyle/>
+          <a:p>
+            <a:pPr rtl="1" algn="r" indent="0" marL="0">
+              <a:buNone/>
+            </a:pPr>
+            <a:r>
+              <a:rPr lang="en-US" sz="1500" b="1" dirty="0">
+                <a:solidFill>
+                  <a:srgbClr val="255174"/>
+                </a:solidFill>
+                <a:latin typeface="Tajawal" pitchFamily="34" charset="0"/>
+                <a:ea typeface="Tajawal" pitchFamily="34" charset="-122"/>
+                <a:cs typeface="Tajawal" pitchFamily="34" charset="-120"/>
+              </a:rPr>
+              <a:t>الحاجة الفعلية</a:t>
+            </a:r>
+            <a:endParaRPr lang="en-US" sz="1500" dirty="0"/>
+          </a:p>
+        </p:txBody>
+      </p:sp>
+      <p:sp>
+        <p:nvSpPr>
+          <p:cNvPr id="15" name="Text 9"/>
+          <p:cNvSpPr/>
+          <p:nvPr/>
+        </p:nvSpPr>
+        <p:spPr>
+          <a:xfrm>
+            <a:off x="6507328" y="4059936"/>
+            <a:ext cx="4632808" cy="832104"/>
+          </a:xfrm>
+          <a:prstGeom prst="rect">
+            <a:avLst/>
+          </a:prstGeom>
+          <a:noFill/>
+          <a:ln/>
+        </p:spPr>
+        <p:txBody>
+          <a:bodyPr wrap="square" lIns="0" tIns="0" rIns="0" bIns="0" rtlCol="0" anchor="t"/>
+          <a:lstStyle/>
           <a:p>
             <a:pPr rtl="1" algn="r" indent="0" marL="0">
               <a:lnSpc>
-                <a:spcPts val="2800"/>
+                <a:spcPts val="2000"/>
               </a:lnSpc>
-              <a:spcAft>
-                <a:spcPts val="2000"/>
-              </a:spcAft>
-              <a:buNone/>
-            </a:pPr>
-            <a:r>
-              <a:rPr lang="en-US" sz="1600" dirty="0">
-                <a:solidFill>
-                  <a:srgbClr val="3C4C60"/>
-                </a:solidFill>
-                <a:latin typeface="Tajawal" pitchFamily="34" charset="0"/>
-                <a:ea typeface="Tajawal" pitchFamily="34" charset="-122"/>
-                <a:cs typeface="Tajawal" pitchFamily="34" charset="-120"/>
-              </a:rPr>
-              <a:t>وزواره من كل مكان: تسع وعشرون لغة، ولكل لغة رواية مسموعة.</a:t>
-            </a:r>
-            <a:endParaRPr lang="en-US" sz="1600" dirty="0"/>
-          </a:p>
+              <a:buNone/>
+            </a:pPr>
+            <a:r>
+              <a:rPr lang="en-US" sz="1250" dirty="0">
+                <a:solidFill>
+                  <a:srgbClr val="4B5B6E"/>
+                </a:solidFill>
+                <a:latin typeface="Tajawal" pitchFamily="34" charset="0"/>
+                <a:ea typeface="Tajawal" pitchFamily="34" charset="-122"/>
+                <a:cs typeface="Tajawal" pitchFamily="34" charset="-120"/>
+              </a:rPr>
+              <a:t>زوار من كل مكان ولغة، وموقع في الصحراء المفتوحة: كل حل يعتمد على السحابة يسقط هناك، وكل حل بلغة واحدة يترك أكثر الزوار.</a:t>
+            </a:r>
+            <a:endParaRPr lang="en-US" sz="1250" dirty="0"/>
+          </a:p>
+        </p:txBody>
+      </p:sp>
+      <p:sp>
+        <p:nvSpPr>
+          <p:cNvPr id="16" name="Shape 10"/>
+          <p:cNvSpPr/>
+          <p:nvPr/>
+        </p:nvSpPr>
+        <p:spPr>
+          <a:xfrm>
+            <a:off x="777240" y="3273552"/>
+            <a:ext cx="5181448" cy="1783080"/>
+          </a:xfrm>
+          <a:prstGeom prst="roundRect">
+            <a:avLst>
+              <a:gd name="adj" fmla="val 4103"/>
+            </a:avLst>
+          </a:prstGeom>
+          <a:solidFill>
+            <a:srgbClr val="EEF3F9"/>
+          </a:solidFill>
+          <a:ln w="9525">
+            <a:solidFill>
+              <a:srgbClr val="D9E2EC"/>
+            </a:solidFill>
+            <a:prstDash val="solid"/>
+          </a:ln>
+        </p:spPr>
+      </p:sp>
+      <p:pic>
+        <p:nvPicPr>
+          <p:cNvPr id="17" name="Image 4" descr="preencoded.png">    </p:cNvPr>
+          <p:cNvPicPr>
+            <a:picLocks noChangeAspect="1"/>
+          </p:cNvPicPr>
+          <p:nvPr/>
+        </p:nvPicPr>
+        <p:blipFill>
+          <a:blip r:embed="rId5"/>
+          <a:stretch>
+            <a:fillRect/>
+          </a:stretch>
+        </p:blipFill>
+        <p:spPr>
+          <a:xfrm>
+            <a:off x="1033272" y="3493008"/>
+            <a:ext cx="720896" cy="457200"/>
+          </a:xfrm>
+          <a:prstGeom prst="rect">
+            <a:avLst/>
+          </a:prstGeom>
+        </p:spPr>
+      </p:pic>
+      <p:sp>
+        <p:nvSpPr>
+          <p:cNvPr id="18" name="Text 11"/>
+          <p:cNvSpPr/>
+          <p:nvPr/>
+        </p:nvSpPr>
+        <p:spPr>
+          <a:xfrm>
+            <a:off x="1051560" y="3511296"/>
+            <a:ext cx="3729031" cy="329184"/>
+          </a:xfrm>
+          <a:prstGeom prst="rect">
+            <a:avLst/>
+          </a:prstGeom>
+          <a:noFill/>
+          <a:ln/>
+        </p:spPr>
+        <p:txBody>
+          <a:bodyPr wrap="square" lIns="0" tIns="0" rIns="0" bIns="0" rtlCol="0" anchor="ctr"/>
+          <a:lstStyle/>
+          <a:p>
+            <a:pPr rtl="1" algn="r" indent="0" marL="0">
+              <a:buNone/>
+            </a:pPr>
+            <a:r>
+              <a:rPr lang="en-US" sz="1500" b="1" dirty="0">
+                <a:solidFill>
+                  <a:srgbClr val="255174"/>
+                </a:solidFill>
+                <a:latin typeface="Tajawal" pitchFamily="34" charset="0"/>
+                <a:ea typeface="Tajawal" pitchFamily="34" charset="-122"/>
+                <a:cs typeface="Tajawal" pitchFamily="34" charset="-120"/>
+              </a:rPr>
+              <a:t>القيمة المقدمة</a:t>
+            </a:r>
+            <a:endParaRPr lang="en-US" sz="1500" dirty="0"/>
+          </a:p>
+        </p:txBody>
+      </p:sp>
+      <p:sp>
+        <p:nvSpPr>
+          <p:cNvPr id="19" name="Text 12"/>
+          <p:cNvSpPr/>
+          <p:nvPr/>
+        </p:nvSpPr>
+        <p:spPr>
+          <a:xfrm>
+            <a:off x="1051560" y="4059936"/>
+            <a:ext cx="4632808" cy="832104"/>
+          </a:xfrm>
+          <a:prstGeom prst="rect">
+            <a:avLst/>
+          </a:prstGeom>
+          <a:noFill/>
+          <a:ln/>
+        </p:spPr>
+        <p:txBody>
+          <a:bodyPr wrap="square" lIns="0" tIns="0" rIns="0" bIns="0" rtlCol="0" anchor="t"/>
+          <a:lstStyle/>
           <a:p>
             <a:pPr rtl="1" algn="r" indent="0" marL="0">
               <a:lnSpc>
-                <a:spcPts val="2800"/>
+                <a:spcPts val="2000"/>
               </a:lnSpc>
-              <a:spcAft>
-                <a:spcPts val="2000"/>
-              </a:spcAft>
-              <a:buNone/>
-            </a:pPr>
-            <a:r>
-              <a:rPr lang="en-US" sz="1600" dirty="0">
-                <a:solidFill>
-                  <a:srgbClr val="3C4C60"/>
-                </a:solidFill>
-                <a:latin typeface="Tajawal" pitchFamily="34" charset="0"/>
-                <a:ea typeface="Tajawal" pitchFamily="34" charset="-122"/>
-                <a:cs typeface="Tajawal" pitchFamily="34" charset="-120"/>
-              </a:rPr>
-              <a:t>والقيمة للجهة المشغلة: تجربة زائر أفضل بصفر تكلفة تشغيل.</a:t>
-            </a:r>
-            <a:endParaRPr lang="en-US" sz="1600" dirty="0"/>
+              <a:buNone/>
+            </a:pPr>
+            <a:r>
+              <a:rPr lang="en-US" sz="1250" dirty="0">
+                <a:solidFill>
+                  <a:srgbClr val="4B5B6E"/>
+                </a:solidFill>
+                <a:latin typeface="Tajawal" pitchFamily="34" charset="0"/>
+                <a:ea typeface="Tajawal" pitchFamily="34" charset="-122"/>
+                <a:cs typeface="Tajawal" pitchFamily="34" charset="-120"/>
+              </a:rPr>
+              <a:t>للزائر: يعرف ما أمامه بلغته وبصوت. وللجهة المشغلة: تجربة زائر أفضل بصفر تكلفة تشغيل، وبلا بنية تحتية ندير.</a:t>
+            </a:r>
+            <a:endParaRPr lang="en-US" sz="1250" dirty="0"/>
           </a:p>
         </p:txBody>
       </p:sp>
@@ -4986,7 +9622,7 @@
         <p:spPr>
           <a:xfrm>
             <a:off x="5120640" y="2788920"/>
-            <a:ext cx="6202375" cy="1280160"/>
+            <a:ext cx="6293815" cy="1280160"/>
           </a:xfrm>
           <a:prstGeom prst="rect">
             <a:avLst/>
@@ -5002,7 +9638,7 @@
               <a:buNone/>
             </a:pPr>
             <a:r>
-              <a:rPr lang="en-US" sz="3800" b="1" dirty="0">
+              <a:rPr lang="en-US" sz="3600" b="1" dirty="0">
                 <a:solidFill>
                   <a:srgbClr val="255174"/>
                 </a:solidFill>
@@ -5012,7 +9648,7 @@
               </a:rPr>
               <a:t>جودة الحل والنموذج الأولي MVP</a:t>
             </a:r>
-            <a:endParaRPr lang="en-US" sz="3800" dirty="0"/>
+            <a:endParaRPr lang="en-US" sz="3600" dirty="0"/>
           </a:p>
         </p:txBody>
       </p:sp>

--- a/athr-aja-submission.pptx
+++ b/athr-aja-submission.pptx
@@ -2886,7 +2886,7 @@
                 <a:ea typeface="Tajawal" pitchFamily="34" charset="-122"/>
                 <a:cs typeface="Tajawal" pitchFamily="34" charset="-120"/>
               </a:rPr>
-              <a:t>اختبارا آليا يعمل</a:t>
+              <a:t>اختبارا آليا تعمل</a:t>
             </a:r>
             <a:endParaRPr lang="en-US" sz="1100" dirty="0"/>
           </a:p>
@@ -4049,7 +4049,7 @@
                 <a:ea typeface="Tajawal" pitchFamily="34" charset="-122"/>
                 <a:cs typeface="Tajawal" pitchFamily="34" charset="-120"/>
               </a:rPr>
-              <a:t>فزائر واحد وزائر مليون سواء في الكلفة — لأن التعرف والصوت والمحتوى كلها داخل جهاز الزائر، لا على خادم نملكه.</a:t>
+              <a:t>زائر واحد وزائر مليون سواء في الكلفة — لأن التعرف والصوت والمحتوى كلها داخل جهاز الزائر، لا على خادم نملكه.</a:t>
             </a:r>
             <a:endParaRPr lang="en-US" sz="1450" dirty="0"/>
           </a:p>
@@ -6234,7 +6234,7 @@
                 <a:ea typeface="Tajawal" pitchFamily="34" charset="-122"/>
                 <a:cs typeface="Tajawal" pitchFamily="34" charset="-120"/>
               </a:rPr>
-              <a:t>يوجه الزائر كاميرا جواله على النقش الصخري، فيتعرف التطبيق على اللوحة بعينها، ويروي قصتها مسموعة بلغته.</a:t>
+              <a:t>يوجه الزائر كاميرا جواله على النقش الصخري، فيتعرف التطبيق على النقش بعينه، ويروي قصته مسموعة بلغته.</a:t>
             </a:r>
             <a:endParaRPr lang="en-US" sz="1500" dirty="0"/>
           </a:p>
@@ -6493,7 +6493,7 @@
                 <a:ea typeface="Tajawal" pitchFamily="34" charset="-122"/>
                 <a:cs typeface="Tajawal" pitchFamily="34" charset="-120"/>
               </a:rPr>
-              <a:t>لوحات موثقة</a:t>
+              <a:t>نقوش موثقة</a:t>
             </a:r>
             <a:endParaRPr lang="en-US" sz="1100" dirty="0"/>
           </a:p>
@@ -6644,6 +6644,216 @@
               <a:t>لكل زائر</a:t>
             </a:r>
             <a:endParaRPr lang="en-US" sz="1100" dirty="0"/>
+          </a:p>
+        </p:txBody>
+      </p:sp>
+      <p:sp>
+        <p:nvSpPr>
+          <p:cNvPr id="16" name="Shape 11"/>
+          <p:cNvSpPr/>
+          <p:nvPr/>
+        </p:nvSpPr>
+        <p:spPr>
+          <a:xfrm>
+            <a:off x="6214720" y="5413248"/>
+            <a:ext cx="5199736" cy="841248"/>
+          </a:xfrm>
+          <a:prstGeom prst="roundRect">
+            <a:avLst>
+              <a:gd name="adj" fmla="val 8696"/>
+            </a:avLst>
+          </a:prstGeom>
+          <a:solidFill>
+            <a:srgbClr val="EEF3F9"/>
+          </a:solidFill>
+          <a:ln w="9525">
+            <a:solidFill>
+              <a:srgbClr val="D9E2EC"/>
+            </a:solidFill>
+            <a:prstDash val="solid"/>
+          </a:ln>
+        </p:spPr>
+      </p:sp>
+      <p:sp>
+        <p:nvSpPr>
+          <p:cNvPr id="17" name="Text 12"/>
+          <p:cNvSpPr/>
+          <p:nvPr/>
+        </p:nvSpPr>
+        <p:spPr>
+          <a:xfrm>
+            <a:off x="6489040" y="5541264"/>
+            <a:ext cx="4651096" cy="329184"/>
+          </a:xfrm>
+          <a:prstGeom prst="rect">
+            <a:avLst/>
+          </a:prstGeom>
+          <a:noFill/>
+          <a:ln/>
+        </p:spPr>
+        <p:txBody>
+          <a:bodyPr wrap="square" lIns="0" tIns="0" rIns="0" bIns="0" rtlCol="0" anchor="ctr"/>
+          <a:lstStyle/>
+          <a:p>
+            <a:pPr rtl="1" algn="r" indent="0" marL="0">
+              <a:buNone/>
+            </a:pPr>
+            <a:r>
+              <a:rPr lang="en-US" sz="1600" b="1" dirty="0">
+                <a:solidFill>
+                  <a:srgbClr val="255174"/>
+                </a:solidFill>
+                <a:latin typeface="Tajawal" pitchFamily="34" charset="0"/>
+                <a:ea typeface="Tajawal" pitchFamily="34" charset="-122"/>
+                <a:cs typeface="Tajawal" pitchFamily="34" charset="-120"/>
+              </a:rPr>
+              <a:t>وليد الشمري</a:t>
+            </a:r>
+            <a:endParaRPr lang="en-US" sz="1600" dirty="0"/>
+          </a:p>
+        </p:txBody>
+      </p:sp>
+      <p:sp>
+        <p:nvSpPr>
+          <p:cNvPr id="18" name="Text 13"/>
+          <p:cNvSpPr/>
+          <p:nvPr/>
+        </p:nvSpPr>
+        <p:spPr>
+          <a:xfrm>
+            <a:off x="6489040" y="5888736"/>
+            <a:ext cx="4651096" cy="274320"/>
+          </a:xfrm>
+          <a:prstGeom prst="rect">
+            <a:avLst/>
+          </a:prstGeom>
+          <a:noFill/>
+          <a:ln/>
+        </p:spPr>
+        <p:txBody>
+          <a:bodyPr wrap="square" lIns="0" tIns="0" rIns="0" bIns="0" rtlCol="0" anchor="ctr"/>
+          <a:lstStyle/>
+          <a:p>
+            <a:pPr rtl="1" algn="r" indent="0" marL="0">
+              <a:buNone/>
+            </a:pPr>
+            <a:r>
+              <a:rPr lang="en-US" sz="1250" dirty="0">
+                <a:solidFill>
+                  <a:srgbClr val="4B5B6E"/>
+                </a:solidFill>
+                <a:latin typeface="Tajawal" pitchFamily="34" charset="0"/>
+                <a:ea typeface="Tajawal" pitchFamily="34" charset="-122"/>
+                <a:cs typeface="Tajawal" pitchFamily="34" charset="-120"/>
+              </a:rPr>
+              <a:t>قائد الفريق</a:t>
+            </a:r>
+            <a:endParaRPr lang="en-US" sz="1250" dirty="0"/>
+          </a:p>
+        </p:txBody>
+      </p:sp>
+      <p:sp>
+        <p:nvSpPr>
+          <p:cNvPr id="19" name="Shape 14"/>
+          <p:cNvSpPr/>
+          <p:nvPr/>
+        </p:nvSpPr>
+        <p:spPr>
+          <a:xfrm>
+            <a:off x="777240" y="5413248"/>
+            <a:ext cx="5199736" cy="841248"/>
+          </a:xfrm>
+          <a:prstGeom prst="roundRect">
+            <a:avLst>
+              <a:gd name="adj" fmla="val 8696"/>
+            </a:avLst>
+          </a:prstGeom>
+          <a:solidFill>
+            <a:srgbClr val="EEF3F9"/>
+          </a:solidFill>
+          <a:ln w="9525">
+            <a:solidFill>
+              <a:srgbClr val="D9E2EC"/>
+            </a:solidFill>
+            <a:prstDash val="solid"/>
+          </a:ln>
+        </p:spPr>
+      </p:sp>
+      <p:sp>
+        <p:nvSpPr>
+          <p:cNvPr id="20" name="Text 15"/>
+          <p:cNvSpPr/>
+          <p:nvPr/>
+        </p:nvSpPr>
+        <p:spPr>
+          <a:xfrm>
+            <a:off x="1051560" y="5541264"/>
+            <a:ext cx="4651096" cy="329184"/>
+          </a:xfrm>
+          <a:prstGeom prst="rect">
+            <a:avLst/>
+          </a:prstGeom>
+          <a:noFill/>
+          <a:ln/>
+        </p:spPr>
+        <p:txBody>
+          <a:bodyPr wrap="square" lIns="0" tIns="0" rIns="0" bIns="0" rtlCol="0" anchor="ctr"/>
+          <a:lstStyle/>
+          <a:p>
+            <a:pPr rtl="1" algn="r" indent="0" marL="0">
+              <a:buNone/>
+            </a:pPr>
+            <a:r>
+              <a:rPr lang="en-US" sz="1600" b="1" dirty="0">
+                <a:solidFill>
+                  <a:srgbClr val="255174"/>
+                </a:solidFill>
+                <a:latin typeface="Tajawal" pitchFamily="34" charset="0"/>
+                <a:ea typeface="Tajawal" pitchFamily="34" charset="-122"/>
+                <a:cs typeface="Tajawal" pitchFamily="34" charset="-120"/>
+              </a:rPr>
+              <a:t>فالح الغسلان</a:t>
+            </a:r>
+            <a:endParaRPr lang="en-US" sz="1600" dirty="0"/>
+          </a:p>
+        </p:txBody>
+      </p:sp>
+      <p:sp>
+        <p:nvSpPr>
+          <p:cNvPr id="21" name="Text 16"/>
+          <p:cNvSpPr/>
+          <p:nvPr/>
+        </p:nvSpPr>
+        <p:spPr>
+          <a:xfrm>
+            <a:off x="1051560" y="5888736"/>
+            <a:ext cx="4651096" cy="274320"/>
+          </a:xfrm>
+          <a:prstGeom prst="rect">
+            <a:avLst/>
+          </a:prstGeom>
+          <a:noFill/>
+          <a:ln/>
+        </p:spPr>
+        <p:txBody>
+          <a:bodyPr wrap="square" lIns="0" tIns="0" rIns="0" bIns="0" rtlCol="0" anchor="ctr"/>
+          <a:lstStyle/>
+          <a:p>
+            <a:pPr rtl="1" algn="r" indent="0" marL="0">
+              <a:buNone/>
+            </a:pPr>
+            <a:r>
+              <a:rPr lang="en-US" sz="1250" dirty="0">
+                <a:solidFill>
+                  <a:srgbClr val="4B5B6E"/>
+                </a:solidFill>
+                <a:latin typeface="Tajawal" pitchFamily="34" charset="0"/>
+                <a:ea typeface="Tajawal" pitchFamily="34" charset="-122"/>
+                <a:cs typeface="Tajawal" pitchFamily="34" charset="-120"/>
+              </a:rPr>
+              <a:t>مؤرخ</a:t>
+            </a:r>
+            <a:endParaRPr lang="en-US" sz="1250" dirty="0"/>
           </a:p>
         </p:txBody>
       </p:sp>
@@ -6978,7 +7188,7 @@
                 <a:ea typeface="Tajawal" pitchFamily="34" charset="-122"/>
                 <a:cs typeface="Tajawal" pitchFamily="34" charset="-120"/>
               </a:rPr>
-              <a:t>دليل يقرأ النقش نفسه لا لافتة عند المدخل: يسمي اللوحة التي أمامك من بين مئات اللوحات على الجدار الواحد.</a:t>
+              <a:t>دليل يقرأ النقش نفسه لا لافتة عند المدخل: يسمي النقش الذي أمامك من بين مئات النقوش على الجدار الواحد.</a:t>
             </a:r>
             <a:endParaRPr lang="en-US" sz="1250" dirty="0"/>
           </a:p>
@@ -7404,7 +7614,7 @@
                 <a:ea typeface="Tajawal" pitchFamily="34" charset="-122"/>
                 <a:cs typeface="Tajawal" pitchFamily="34" charset="-120"/>
               </a:rPr>
-              <a:t>يسمي اللوحة التي أمامك بعينها</a:t>
+              <a:t>يسمي النقش الذي أمامك بعينه</a:t>
             </a:r>
             <a:endParaRPr lang="en-US" sz="1200" dirty="0"/>
           </a:p>
@@ -8431,7 +8641,7 @@
                 <a:ea typeface="Tajawal" pitchFamily="34" charset="-122"/>
                 <a:cs typeface="Tajawal" pitchFamily="34" charset="-120"/>
               </a:rPr>
-              <a:t>أقرب لوحة في الفهرس</a:t>
+              <a:t>أقرب نقش في الفهرس</a:t>
             </a:r>
             <a:endParaRPr lang="en-US" sz="1000" dirty="0"/>
           </a:p>
@@ -8539,7 +8749,7 @@
                 <a:ea typeface="Tajawal" pitchFamily="34" charset="-122"/>
                 <a:cs typeface="Tajawal" pitchFamily="34" charset="-120"/>
               </a:rPr>
-              <a:t>بلا النموذج لا يوجد منتج: التعرف على اللوحة هو المنتج نفسه لا ميزة مضافة إليه. ونموذج الرؤية DINOv3 من Meta، مفتوح المصدر، تعلم أشكال الأشياء من ملايين الصور بلا وسم بشري.</a:t>
+              <a:t>بلا النموذج لا يوجد منتج: التعرف على النقش هو المنتج نفسه لا ميزة مضافة إليه. ونموذج الرؤية DINOv3 من Meta، مفتوح المصدر، تعلم أشكال الأشياء من ملايين الصور بلا وسم بشري.</a:t>
             </a:r>
             <a:endParaRPr lang="en-US" sz="1250" dirty="0"/>
           </a:p>
@@ -8755,7 +8965,7 @@
                 <a:ea typeface="Tajawal" pitchFamily="34" charset="-122"/>
                 <a:cs typeface="Tajawal" pitchFamily="34" charset="-120"/>
               </a:rPr>
-              <a:t>يتعلم من تصحيح الزائر على جهازه فيتحسن بالاستعمال. وذكاء اصطناعي ثان في المشروع: توليد الرواية المسموعة بتسع وعشرين لغة بنماذج نطق مفتوحة المصدر.</a:t>
+              <a:t>يتعلم من تصحيح الزائر على جهازه فيتحسن بالاستعمال. وتوظيف ثان للذكاء الاصطناعي: توليد الرواية المسموعة بتسع وعشرين لغة بنماذج نطق مفتوحة المصدر.</a:t>
             </a:r>
             <a:endParaRPr lang="en-US" sz="1250" dirty="0"/>
           </a:p>
@@ -9116,7 +9326,7 @@
                 <a:ea typeface="Tajawal" pitchFamily="34" charset="-122"/>
                 <a:cs typeface="Tajawal" pitchFamily="34" charset="-120"/>
               </a:rPr>
-              <a:t>جبة مسجلة في قائمة التراث العالمي لليونسكو، وفيها مئات اللوحات. والزائر يقف أمام الصخرة فلا يعرف ما أمامه ولا كم عمره. ولا تغطية شبكة في الموقع.</a:t>
+              <a:t>جبة مسجلة في قائمة التراث العالمي لليونسكو، وفيها مئات النقوش. والزائر يقف أمام الصخرة فلا يعرف ما أمامه ولا كم عمره. ولا تغطية شبكة في الموقع.</a:t>
             </a:r>
             <a:endParaRPr lang="en-US" sz="1250" dirty="0"/>
           </a:p>
@@ -9248,7 +9458,7 @@
                 <a:ea typeface="Tajawal" pitchFamily="34" charset="-122"/>
                 <a:cs typeface="Tajawal" pitchFamily="34" charset="-120"/>
               </a:rPr>
-              <a:t>زوار جبة والشويمس، محليون ودوليون. والرحلات المدرسية والجامعية. وهيئة التراث ومركز الزوار. والمنشآت المحلية التي تريد الوصول إلى الزائر.</a:t>
+              <a:t>زوار جبة والشويمس من داخل المملكة وخارجها، والرحلات المدرسية والجامعية، وهيئة التراث ومركز الزوار، والمنشآت المحلية التي تريد الوصول إلى الزائر.</a:t>
             </a:r>
             <a:endParaRPr lang="en-US" sz="1250" dirty="0"/>
           </a:p>
@@ -9512,7 +9722,7 @@
                 <a:ea typeface="Tajawal" pitchFamily="34" charset="-122"/>
                 <a:cs typeface="Tajawal" pitchFamily="34" charset="-120"/>
               </a:rPr>
-              <a:t>للزائر: يعرف ما أمامه بلغته وبصوت. وللجهة المشغلة: تجربة زائر أفضل بصفر تكلفة تشغيل، وبلا بنية تحتية ندير.</a:t>
+              <a:t>للزائر: يعرف ما أمامه بلغته وبصوت. وللجهة المشغلة: تجربة زائر أفضل بصفر تكلفة تشغيل، ودون بنية تحتية تحتاج إلى إدارة.</a:t>
             </a:r>
             <a:endParaRPr lang="en-US" sz="1250" dirty="0"/>
           </a:p>

--- a/athr-aja-submission.pptx
+++ b/athr-aja-submission.pptx
@@ -2792,8 +2792,8 @@
         </p:nvSpPr>
         <p:spPr>
           <a:xfrm>
-            <a:off x="8933459" y="4498848"/>
-            <a:ext cx="2480996" cy="1225296"/>
+            <a:off x="9447947" y="4498848"/>
+            <a:ext cx="1966509" cy="1225296"/>
           </a:xfrm>
           <a:prstGeom prst="roundRect">
             <a:avLst>
@@ -2819,8 +2819,8 @@
         </p:nvSpPr>
         <p:spPr>
           <a:xfrm>
-            <a:off x="8933459" y="4645152"/>
-            <a:ext cx="2480996" cy="548640"/>
+            <a:off x="9447947" y="4645152"/>
+            <a:ext cx="1966509" cy="548640"/>
           </a:xfrm>
           <a:prstGeom prst="rect">
             <a:avLst/>
@@ -2844,7 +2844,7 @@
                 <a:ea typeface="Calibri" pitchFamily="34" charset="-122"/>
                 <a:cs typeface="Calibri" pitchFamily="34" charset="-120"/>
               </a:rPr>
-              <a:t>663</a:t>
+              <a:t>96.5%</a:t>
             </a:r>
             <a:endParaRPr lang="en-US" sz="2800" dirty="0"/>
           </a:p>
@@ -2858,8 +2858,8 @@
         </p:nvSpPr>
         <p:spPr>
           <a:xfrm>
-            <a:off x="9043187" y="5230368"/>
-            <a:ext cx="2261540" cy="402336"/>
+            <a:off x="9557675" y="5230368"/>
+            <a:ext cx="1747053" cy="402336"/>
           </a:xfrm>
           <a:prstGeom prst="rect">
             <a:avLst/>
@@ -2886,7 +2886,7 @@
                 <a:ea typeface="Tajawal" pitchFamily="34" charset="-122"/>
                 <a:cs typeface="Tajawal" pitchFamily="34" charset="-120"/>
               </a:rPr>
-              <a:t>اختبارا آليا تعمل</a:t>
+              <a:t>تعرف صحيح على</a:t>
             </a:r>
             <a:endParaRPr lang="en-US" sz="1100" dirty="0"/>
           </a:p>
@@ -2906,7 +2906,7 @@
                 <a:ea typeface="Tajawal" pitchFamily="34" charset="-122"/>
                 <a:cs typeface="Tajawal" pitchFamily="34" charset="-120"/>
               </a:rPr>
-              <a:t>مع كل تعديل</a:t>
+              <a:t>صور الموقع</a:t>
             </a:r>
             <a:endParaRPr lang="en-US" sz="1100" dirty="0"/>
           </a:p>
@@ -2920,8 +2920,8 @@
         </p:nvSpPr>
         <p:spPr>
           <a:xfrm>
-            <a:off x="6214720" y="4498848"/>
-            <a:ext cx="2480996" cy="1225296"/>
+            <a:off x="7280270" y="4498848"/>
+            <a:ext cx="1966509" cy="1225296"/>
           </a:xfrm>
           <a:prstGeom prst="roundRect">
             <a:avLst>
@@ -2947,8 +2947,8 @@
         </p:nvSpPr>
         <p:spPr>
           <a:xfrm>
-            <a:off x="6214720" y="4645152"/>
-            <a:ext cx="2480996" cy="548640"/>
+            <a:off x="7280270" y="4645152"/>
+            <a:ext cx="1966509" cy="548640"/>
           </a:xfrm>
           <a:prstGeom prst="rect">
             <a:avLst/>
@@ -2986,8 +2986,8 @@
         </p:nvSpPr>
         <p:spPr>
           <a:xfrm>
-            <a:off x="6324448" y="5230368"/>
-            <a:ext cx="2261540" cy="402336"/>
+            <a:off x="7389998" y="5230368"/>
+            <a:ext cx="1747053" cy="402336"/>
           </a:xfrm>
           <a:prstGeom prst="rect">
             <a:avLst/>
@@ -3014,7 +3014,7 @@
                 <a:ea typeface="Tajawal" pitchFamily="34" charset="-122"/>
                 <a:cs typeface="Tajawal" pitchFamily="34" charset="-120"/>
               </a:rPr>
-              <a:t>دقة على صورة جديدة</a:t>
+              <a:t>على صورة من يوم</a:t>
             </a:r>
             <a:endParaRPr lang="en-US" sz="1100" dirty="0"/>
           </a:p>
@@ -3034,7 +3034,7 @@
                 <a:ea typeface="Tajawal" pitchFamily="34" charset="-122"/>
                 <a:cs typeface="Tajawal" pitchFamily="34" charset="-120"/>
               </a:rPr>
-              <a:t>من يوم وجهاز آخرين</a:t>
+              <a:t>وجهاز آخرين</a:t>
             </a:r>
             <a:endParaRPr lang="en-US" sz="1100" dirty="0"/>
           </a:p>
@@ -3048,8 +3048,8 @@
         </p:nvSpPr>
         <p:spPr>
           <a:xfrm>
-            <a:off x="3495980" y="4498848"/>
-            <a:ext cx="2480996" cy="1225296"/>
+            <a:off x="5112593" y="4498848"/>
+            <a:ext cx="1966509" cy="1225296"/>
           </a:xfrm>
           <a:prstGeom prst="roundRect">
             <a:avLst>
@@ -3075,8 +3075,8 @@
         </p:nvSpPr>
         <p:spPr>
           <a:xfrm>
-            <a:off x="3495980" y="4645152"/>
-            <a:ext cx="2480996" cy="548640"/>
+            <a:off x="5112593" y="4645152"/>
+            <a:ext cx="1966509" cy="548640"/>
           </a:xfrm>
           <a:prstGeom prst="rect">
             <a:avLst/>
@@ -3114,8 +3114,8 @@
         </p:nvSpPr>
         <p:spPr>
           <a:xfrm>
-            <a:off x="3605708" y="5230368"/>
-            <a:ext cx="2261540" cy="402336"/>
+            <a:off x="5222321" y="5230368"/>
+            <a:ext cx="1747053" cy="402336"/>
           </a:xfrm>
           <a:prstGeom prst="rect">
             <a:avLst/>
@@ -3142,7 +3142,7 @@
                 <a:ea typeface="Tajawal" pitchFamily="34" charset="-122"/>
                 <a:cs typeface="Tajawal" pitchFamily="34" charset="-120"/>
               </a:rPr>
-              <a:t>إجابة خاطئة على</a:t>
+              <a:t>إجابة خاطئة على 175</a:t>
             </a:r>
             <a:endParaRPr lang="en-US" sz="1100" dirty="0"/>
           </a:p>
@@ -3162,7 +3162,7 @@
                 <a:ea typeface="Tajawal" pitchFamily="34" charset="-122"/>
                 <a:cs typeface="Tajawal" pitchFamily="34" charset="-120"/>
               </a:rPr>
-              <a:t>53 صورة رمل وسماء</a:t>
+              <a:t>صورة من خارج الفهرس</a:t>
             </a:r>
             <a:endParaRPr lang="en-US" sz="1100" dirty="0"/>
           </a:p>
@@ -3176,8 +3176,8 @@
         </p:nvSpPr>
         <p:spPr>
           <a:xfrm>
-            <a:off x="777240" y="4498848"/>
-            <a:ext cx="2480996" cy="1225296"/>
+            <a:off x="2944917" y="4498848"/>
+            <a:ext cx="1966509" cy="1225296"/>
           </a:xfrm>
           <a:prstGeom prst="roundRect">
             <a:avLst>
@@ -3203,8 +3203,8 @@
         </p:nvSpPr>
         <p:spPr>
           <a:xfrm>
-            <a:off x="777240" y="4645152"/>
-            <a:ext cx="2480996" cy="548640"/>
+            <a:off x="2944917" y="4645152"/>
+            <a:ext cx="1966509" cy="548640"/>
           </a:xfrm>
           <a:prstGeom prst="rect">
             <a:avLst/>
@@ -3228,7 +3228,7 @@
                 <a:ea typeface="Calibri" pitchFamily="34" charset="-122"/>
                 <a:cs typeface="Calibri" pitchFamily="34" charset="-120"/>
               </a:rPr>
-              <a:t>174</a:t>
+              <a:t>663</a:t>
             </a:r>
             <a:endParaRPr lang="en-US" sz="2800" dirty="0"/>
           </a:p>
@@ -3242,8 +3242,8 @@
         </p:nvSpPr>
         <p:spPr>
           <a:xfrm>
-            <a:off x="886968" y="5230368"/>
-            <a:ext cx="2261540" cy="402336"/>
+            <a:off x="3054645" y="5230368"/>
+            <a:ext cx="1747053" cy="402336"/>
           </a:xfrm>
           <a:prstGeom prst="rect">
             <a:avLst/>
@@ -3270,7 +3270,7 @@
                 <a:ea typeface="Tajawal" pitchFamily="34" charset="-122"/>
                 <a:cs typeface="Tajawal" pitchFamily="34" charset="-120"/>
               </a:rPr>
-              <a:t>مقطعا صوتيا</a:t>
+              <a:t>اختبارا آليا تعمل</a:t>
             </a:r>
             <a:endParaRPr lang="en-US" sz="1100" dirty="0"/>
           </a:p>
@@ -3290,6 +3290,134 @@
                 <a:ea typeface="Tajawal" pitchFamily="34" charset="-122"/>
                 <a:cs typeface="Tajawal" pitchFamily="34" charset="-120"/>
               </a:rPr>
+              <a:t>مع كل تعديل</a:t>
+            </a:r>
+            <a:endParaRPr lang="en-US" sz="1100" dirty="0"/>
+          </a:p>
+        </p:txBody>
+      </p:sp>
+      <p:sp>
+        <p:nvSpPr>
+          <p:cNvPr id="27" name="Shape 19"/>
+          <p:cNvSpPr/>
+          <p:nvPr/>
+        </p:nvSpPr>
+        <p:spPr>
+          <a:xfrm>
+            <a:off x="777240" y="4498848"/>
+            <a:ext cx="1966509" cy="1225296"/>
+          </a:xfrm>
+          <a:prstGeom prst="roundRect">
+            <a:avLst>
+              <a:gd name="adj" fmla="val 5970"/>
+            </a:avLst>
+          </a:prstGeom>
+          <a:solidFill>
+            <a:srgbClr val="EEF3F9"/>
+          </a:solidFill>
+          <a:ln w="9525">
+            <a:solidFill>
+              <a:srgbClr val="D9E2EC"/>
+            </a:solidFill>
+            <a:prstDash val="solid"/>
+          </a:ln>
+        </p:spPr>
+      </p:sp>
+      <p:sp>
+        <p:nvSpPr>
+          <p:cNvPr id="28" name="Text 20"/>
+          <p:cNvSpPr/>
+          <p:nvPr/>
+        </p:nvSpPr>
+        <p:spPr>
+          <a:xfrm>
+            <a:off x="777240" y="4645152"/>
+            <a:ext cx="1966509" cy="548640"/>
+          </a:xfrm>
+          <a:prstGeom prst="rect">
+            <a:avLst/>
+          </a:prstGeom>
+          <a:noFill/>
+          <a:ln/>
+        </p:spPr>
+        <p:txBody>
+          <a:bodyPr wrap="square" lIns="0" tIns="0" rIns="0" bIns="0" rtlCol="0" anchor="ctr"/>
+          <a:lstStyle/>
+          <a:p>
+            <a:pPr algn="ctr" indent="0" marL="0">
+              <a:buNone/>
+            </a:pPr>
+            <a:r>
+              <a:rPr lang="en-US" sz="2800" b="1" dirty="0">
+                <a:solidFill>
+                  <a:srgbClr val="255174"/>
+                </a:solidFill>
+                <a:latin typeface="Calibri" pitchFamily="34" charset="0"/>
+                <a:ea typeface="Calibri" pitchFamily="34" charset="-122"/>
+                <a:cs typeface="Calibri" pitchFamily="34" charset="-120"/>
+              </a:rPr>
+              <a:t>174</a:t>
+            </a:r>
+            <a:endParaRPr lang="en-US" sz="2800" dirty="0"/>
+          </a:p>
+        </p:txBody>
+      </p:sp>
+      <p:sp>
+        <p:nvSpPr>
+          <p:cNvPr id="29" name="Text 21"/>
+          <p:cNvSpPr/>
+          <p:nvPr/>
+        </p:nvSpPr>
+        <p:spPr>
+          <a:xfrm>
+            <a:off x="886968" y="5230368"/>
+            <a:ext cx="1747053" cy="402336"/>
+          </a:xfrm>
+          <a:prstGeom prst="rect">
+            <a:avLst/>
+          </a:prstGeom>
+          <a:noFill/>
+          <a:ln/>
+        </p:spPr>
+        <p:txBody>
+          <a:bodyPr wrap="square" lIns="0" tIns="0" rIns="0" bIns="0" rtlCol="0" anchor="ctr"/>
+          <a:lstStyle/>
+          <a:p>
+            <a:pPr rtl="1" algn="ctr" indent="0" marL="0">
+              <a:lnSpc>
+                <a:spcPts val="1500"/>
+              </a:lnSpc>
+              <a:buNone/>
+            </a:pPr>
+            <a:r>
+              <a:rPr lang="en-US" sz="1100" dirty="0">
+                <a:solidFill>
+                  <a:srgbClr val="4B5B6E"/>
+                </a:solidFill>
+                <a:latin typeface="Tajawal" pitchFamily="34" charset="0"/>
+                <a:ea typeface="Tajawal" pitchFamily="34" charset="-122"/>
+                <a:cs typeface="Tajawal" pitchFamily="34" charset="-120"/>
+              </a:rPr>
+              <a:t>مقطعا صوتيا</a:t>
+            </a:r>
+            <a:endParaRPr lang="en-US" sz="1100" dirty="0"/>
+          </a:p>
+          <a:p>
+            <a:pPr rtl="1" algn="ctr" indent="0" marL="0">
+              <a:lnSpc>
+                <a:spcPts val="1500"/>
+              </a:lnSpc>
+              <a:buNone/>
+            </a:pPr>
+            <a:r>
+              <a:rPr lang="en-US" sz="1100" dirty="0">
+                <a:solidFill>
+                  <a:srgbClr val="4B5B6E"/>
+                </a:solidFill>
+                <a:latin typeface="Tajawal" pitchFamily="34" charset="0"/>
+                <a:ea typeface="Tajawal" pitchFamily="34" charset="-122"/>
+                <a:cs typeface="Tajawal" pitchFamily="34" charset="-120"/>
+              </a:rPr>
               <a:t>في 29 لغة</a:t>
             </a:r>
             <a:endParaRPr lang="en-US" sz="1100" dirty="0"/>
@@ -3298,7 +3426,7 @@
       </p:sp>
       <p:sp>
         <p:nvSpPr>
-          <p:cNvPr id="27" name="Text 19"/>
+          <p:cNvPr id="30" name="Text 22"/>
           <p:cNvSpPr/>
           <p:nvPr/>
         </p:nvSpPr>
@@ -3329,7 +3457,7 @@
                 <a:ea typeface="Tajawal" pitchFamily="34" charset="-122"/>
                 <a:cs typeface="Tajawal" pitchFamily="34" charset="-120"/>
               </a:rPr>
-              <a:t>ولا نخترع ترجمة لنقش ثمودي لا نملك قراءته الموثقة: نعرض جدول الحروف الرسمي ليطابق الزائر بنفسه.</a:t>
+              <a:t>وقراءة النقوش الثمودية قيد التطوير: لا نخترع ترجمة لا نملك أصلها الموثق، ونعرض الآن جدول الحروف الرسمي ليطابق السائح بنفسه.</a:t>
             </a:r>
             <a:endParaRPr lang="en-US" sz="1200" dirty="0"/>
           </a:p>
@@ -3692,7 +3820,7 @@
                 <a:ea typeface="Tajawal" pitchFamily="34" charset="-122"/>
                 <a:cs typeface="Tajawal" pitchFamily="34" charset="-120"/>
               </a:rPr>
-              <a:t>والمنشآت المحلية: مطاعم ومقاه وفنادق حائل تريد الوصول إلى الزائر.</a:t>
+              <a:t>والمنشآت المحلية: مطاعم ومقاه وفنادق حائل تريد الوصول إلى السائح.</a:t>
             </a:r>
             <a:endParaRPr lang="en-US" sz="1250" dirty="0"/>
           </a:p>
@@ -3715,7 +3843,7 @@
                 <a:ea typeface="Tajawal" pitchFamily="34" charset="-122"/>
                 <a:cs typeface="Tajawal" pitchFamily="34" charset="-120"/>
               </a:rPr>
-              <a:t>والزائر نفسه، والتطبيق مجاني له دائما.</a:t>
+              <a:t>والسائح نفسه، والتطبيق مجاني له دائما.</a:t>
             </a:r>
             <a:endParaRPr lang="en-US" sz="1250" dirty="0"/>
           </a:p>
@@ -3826,7 +3954,7 @@
                 <a:ea typeface="Tajawal" pitchFamily="34" charset="-122"/>
                 <a:cs typeface="Tajawal" pitchFamily="34" charset="-120"/>
               </a:rPr>
-              <a:t>شركاء محليون: ندرج مواقعهم في مسار رحلتي برسم سنوي. الزائر جائع بعد ساعتين في الموقع، والمطعم يريد أن يصل إليه.</a:t>
+              <a:t>شركاء محليون: ندرج مواقعهم في مسار رحلتي برسم سنوي. السائح جائع بعد ساعتين في الموقع، والمطعم يريد أن يصل إليه.</a:t>
             </a:r>
             <a:endParaRPr lang="en-US" sz="1250" dirty="0"/>
           </a:p>
@@ -3960,7 +4088,7 @@
                 <a:ea typeface="Tajawal" pitchFamily="34" charset="-122"/>
                 <a:cs typeface="Tajawal" pitchFamily="34" charset="-120"/>
               </a:rPr>
-              <a:t>التكلفة الحدية للزائر الإضافي صفر: لا خوادم ولا واجهات مدفوعة.</a:t>
+              <a:t>التكلفة الحدية للسائح الإضافي صفر: لا خوادم ولا واجهات مدفوعة.</a:t>
             </a:r>
             <a:endParaRPr lang="en-US" sz="1250" dirty="0"/>
           </a:p>
@@ -4049,7 +4177,7 @@
                 <a:ea typeface="Tajawal" pitchFamily="34" charset="-122"/>
                 <a:cs typeface="Tajawal" pitchFamily="34" charset="-120"/>
               </a:rPr>
-              <a:t>زائر واحد وزائر مليون سواء في الكلفة — لأن التعرف والصوت والمحتوى كلها داخل جهاز الزائر، لا على خادم نملكه.</a:t>
+              <a:t>سائح واحد وسائح مليون سواء في الكلفة — لأن التعرف والصوت والمحتوى كلها داخل جهاز السائح، لا على خادم نملكه.</a:t>
             </a:r>
             <a:endParaRPr lang="en-US" sz="1450" dirty="0"/>
           </a:p>
@@ -5407,7 +5535,7 @@
                 <a:ea typeface="Tajawal" pitchFamily="34" charset="-122"/>
                 <a:cs typeface="Tajawal" pitchFamily="34" charset="-120"/>
               </a:rPr>
-              <a:t>والفهرس يتوسع بلا حد: كل زائر يصحح يزيد دقته لمن بعده.</a:t>
+              <a:t>والفهرس يتوسع بلا حد: كل سائح يصحح يزيد دقته لمن بعده.</a:t>
             </a:r>
             <a:endParaRPr lang="en-US" sz="1250" dirty="0"/>
           </a:p>
@@ -5505,7 +5633,7 @@
                 <a:spcPts val="2000"/>
               </a:lnSpc>
               <a:spcAft>
-                <a:spcPts val="1300"/>
+                <a:spcPts val="900"/>
               </a:spcAft>
               <a:buNone/>
             </a:pPr>
@@ -5528,7 +5656,7 @@
                 <a:spcPts val="2000"/>
               </a:lnSpc>
               <a:spcAft>
-                <a:spcPts val="1300"/>
+                <a:spcPts val="900"/>
               </a:spcAft>
               <a:buNone/>
             </a:pPr>
@@ -5541,7 +5669,7 @@
                 <a:ea typeface="Tajawal" pitchFamily="34" charset="-122"/>
                 <a:cs typeface="Tajawal" pitchFamily="34" charset="-120"/>
               </a:rPr>
-              <a:t>ثم مواقع المملكة: العلا، والأحساء، والدرعية.</a:t>
+              <a:t>ثم الجنوب حيث النقوش بالآلاف: أبها، وعسير، ونجران، وجازان.</a:t>
             </a:r>
             <a:endParaRPr lang="en-US" sz="1250" dirty="0"/>
           </a:p>
@@ -5551,7 +5679,7 @@
                 <a:spcPts val="2000"/>
               </a:lnSpc>
               <a:spcAft>
-                <a:spcPts val="1300"/>
+                <a:spcPts val="900"/>
               </a:spcAft>
               <a:buNone/>
             </a:pPr>
@@ -5564,7 +5692,30 @@
                 <a:ea typeface="Tajawal" pitchFamily="34" charset="-122"/>
                 <a:cs typeface="Tajawal" pitchFamily="34" charset="-120"/>
               </a:rPr>
-              <a:t>ثم نسخة بيضاء لأي متحف أو موقع تراثي — الشيفرة نفسها، ومحتوى آخر.</a:t>
+              <a:t>وكل مدينة غنية بالنقوش: العلا، وتيماء، وتبوك، والجوف.</a:t>
+            </a:r>
+            <a:endParaRPr lang="en-US" sz="1250" dirty="0"/>
+          </a:p>
+          <a:p>
+            <a:pPr rtl="1" algn="r" indent="0" marL="0">
+              <a:lnSpc>
+                <a:spcPts val="2000"/>
+              </a:lnSpc>
+              <a:spcAft>
+                <a:spcPts val="900"/>
+              </a:spcAft>
+              <a:buNone/>
+            </a:pPr>
+            <a:r>
+              <a:rPr lang="en-US" sz="1250" dirty="0">
+                <a:solidFill>
+                  <a:srgbClr val="4B5B6E"/>
+                </a:solidFill>
+                <a:latin typeface="Tajawal" pitchFamily="34" charset="0"/>
+                <a:ea typeface="Tajawal" pitchFamily="34" charset="-122"/>
+                <a:cs typeface="Tajawal" pitchFamily="34" charset="-120"/>
+              </a:rPr>
+              <a:t>ثم نسخة بيضاء لأي متحف أو موقع تراثي.</a:t>
             </a:r>
             <a:endParaRPr lang="en-US" sz="1250" dirty="0"/>
           </a:p>
@@ -6234,7 +6385,7 @@
                 <a:ea typeface="Tajawal" pitchFamily="34" charset="-122"/>
                 <a:cs typeface="Tajawal" pitchFamily="34" charset="-120"/>
               </a:rPr>
-              <a:t>يوجه الزائر كاميرا جواله على النقش الصخري، فيتعرف التطبيق على النقش بعينه، ويروي قصته مسموعة بلغته.</a:t>
+              <a:t>يوجه السائح كاميرا جواله على النقش الصخري، فيتعرف التطبيق على النقش بعينه، ويروي قصته مسموعة بلغته.</a:t>
             </a:r>
             <a:endParaRPr lang="en-US" sz="1500" dirty="0"/>
           </a:p>
@@ -6641,7 +6792,7 @@
                 <a:ea typeface="Tajawal" pitchFamily="34" charset="-122"/>
                 <a:cs typeface="Tajawal" pitchFamily="34" charset="-120"/>
               </a:rPr>
-              <a:t>لكل زائر</a:t>
+              <a:t>لكل سائح</a:t>
             </a:r>
             <a:endParaRPr lang="en-US" sz="1100" dirty="0"/>
           </a:p>
@@ -7296,7 +7447,7 @@
                 <a:ea typeface="Tajawal" pitchFamily="34" charset="-122"/>
                 <a:cs typeface="Tajawal" pitchFamily="34" charset="-120"/>
               </a:rPr>
-              <a:t>نموذج الرؤية كله داخل المتصفح، 22 ميغابايت، ويتعلم من تصحيح الزائر على جهازه فيصيب في المسح التالي.</a:t>
+              <a:t>نموذج الرؤية كله داخل المتصفح، 22 ميغابايت، ويتعلم من تصحيح السائح على جهازه فيصيب في المسح التالي.</a:t>
             </a:r>
             <a:endParaRPr lang="en-US" sz="1250" dirty="0"/>
           </a:p>
@@ -8329,7 +8480,7 @@
                 <a:ea typeface="Tajawal" pitchFamily="34" charset="-122"/>
                 <a:cs typeface="Tajawal" pitchFamily="34" charset="-120"/>
               </a:rPr>
-              <a:t>ما تراه الكاميرا</a:t>
+              <a:t>السائح يصور النقش</a:t>
             </a:r>
             <a:endParaRPr lang="en-US" sz="1000" dirty="0"/>
           </a:p>
@@ -8512,7 +8663,7 @@
                 <a:ea typeface="Tajawal" pitchFamily="34" charset="-122"/>
                 <a:cs typeface="Tajawal" pitchFamily="34" charset="-120"/>
               </a:rPr>
-              <a:t>384 رقما — بصمة الصورة</a:t>
+              <a:t>النموذج يلخص شكله في أرقام</a:t>
             </a:r>
             <a:endParaRPr lang="en-US" sz="1000" dirty="0"/>
           </a:p>
@@ -8641,7 +8792,7 @@
                 <a:ea typeface="Tajawal" pitchFamily="34" charset="-122"/>
                 <a:cs typeface="Tajawal" pitchFamily="34" charset="-120"/>
               </a:rPr>
-              <a:t>أقرب نقش في الفهرس</a:t>
+              <a:t>يطابقها بنقوش جبة فيعرف اسمه</a:t>
             </a:r>
             <a:endParaRPr lang="en-US" sz="1000" dirty="0"/>
           </a:p>
@@ -8857,7 +9008,7 @@
                 <a:ea typeface="Tajawal" pitchFamily="34" charset="-122"/>
                 <a:cs typeface="Tajawal" pitchFamily="34" charset="-120"/>
               </a:rPr>
-              <a:t>المشكلة بصرية لا نصية: صخرة أمام الزائر. والموقع بلا تغطية، فاخترنا نموذجا يعمل داخل الجهاز لا واجهة سحابية. وبنينا فوقه طبقة القرار: فهرس بصمات ميداني، وسلم قص يعالج اختلاف الإطار، وحكم يقول لا أعرف بدل أن يخمن.</a:t>
+              <a:t>المشكلة بصرية لا نصية: صخرة أمام السائح. والموقع بلا تغطية، فاخترنا نموذجا يعمل داخل الجهاز لا واجهة سحابية. وبنينا فوقه طبقة القرار: فهرس بصمات ميداني، وسلم قص يعالج اختلاف الإطار، وحكم يقول لا أعرف بدل أن يخمن.</a:t>
             </a:r>
             <a:endParaRPr lang="en-US" sz="1250" dirty="0"/>
           </a:p>
@@ -8965,7 +9116,7 @@
                 <a:ea typeface="Tajawal" pitchFamily="34" charset="-122"/>
                 <a:cs typeface="Tajawal" pitchFamily="34" charset="-120"/>
               </a:rPr>
-              <a:t>يتعلم من تصحيح الزائر على جهازه فيتحسن بالاستعمال. وتوظيف ثان للذكاء الاصطناعي: توليد الرواية المسموعة بتسع وعشرين لغة بنماذج نطق مفتوحة المصدر.</a:t>
+              <a:t>يتعلم من تصحيح السائح على جهازه فيتحسن بالاستعمال. وتوظيف ثان للذكاء الاصطناعي: توليد الرواية المسموعة بتسع وعشرين لغة بنماذج نطق مفتوحة المصدر.</a:t>
             </a:r>
             <a:endParaRPr lang="en-US" sz="1250" dirty="0"/>
           </a:p>
@@ -9326,7 +9477,7 @@
                 <a:ea typeface="Tajawal" pitchFamily="34" charset="-122"/>
                 <a:cs typeface="Tajawal" pitchFamily="34" charset="-120"/>
               </a:rPr>
-              <a:t>جبة مسجلة في قائمة التراث العالمي لليونسكو، وفيها مئات النقوش. والزائر يقف أمام الصخرة فلا يعرف ما أمامه ولا كم عمره. ولا تغطية شبكة في الموقع.</a:t>
+              <a:t>جبة مسجلة في قائمة التراث العالمي لليونسكو، وفيها مئات النقوش. والسائح يقف أمام الصخرة فلا يعرف ما أمامه ولا كم عمره. ولا تغطية شبكة في الموقع.</a:t>
             </a:r>
             <a:endParaRPr lang="en-US" sz="1250" dirty="0"/>
           </a:p>
@@ -9458,7 +9609,7 @@
                 <a:ea typeface="Tajawal" pitchFamily="34" charset="-122"/>
                 <a:cs typeface="Tajawal" pitchFamily="34" charset="-120"/>
               </a:rPr>
-              <a:t>زوار جبة والشويمس من داخل المملكة وخارجها، والرحلات المدرسية والجامعية، وهيئة التراث ومركز الزوار، والمنشآت المحلية التي تريد الوصول إلى الزائر.</a:t>
+              <a:t>سياح جبة والشويمس من داخل المملكة وخارجها، والرحلات المدرسية والجامعية، وهيئة التراث ومركز الزوار، والمنشآت المحلية التي تريد الوصول إلى السائح.</a:t>
             </a:r>
             <a:endParaRPr lang="en-US" sz="1250" dirty="0"/>
           </a:p>
@@ -9590,7 +9741,7 @@
                 <a:ea typeface="Tajawal" pitchFamily="34" charset="-122"/>
                 <a:cs typeface="Tajawal" pitchFamily="34" charset="-120"/>
               </a:rPr>
-              <a:t>زوار من كل مكان ولغة، وموقع في الصحراء المفتوحة: كل حل يعتمد على السحابة يسقط هناك، وكل حل بلغة واحدة يترك أكثر الزوار.</a:t>
+              <a:t>سياح من كل مكان ولغة، وموقع في الصحراء المفتوحة: كل حل يعتمد على السحابة يسقط هناك، وكل حل بلغة واحدة يترك أكثر السياح.</a:t>
             </a:r>
             <a:endParaRPr lang="en-US" sz="1250" dirty="0"/>
           </a:p>
@@ -9722,7 +9873,7 @@
                 <a:ea typeface="Tajawal" pitchFamily="34" charset="-122"/>
                 <a:cs typeface="Tajawal" pitchFamily="34" charset="-120"/>
               </a:rPr>
-              <a:t>للزائر: يعرف ما أمامه بلغته وبصوت. وللجهة المشغلة: تجربة زائر أفضل بصفر تكلفة تشغيل، ودون بنية تحتية تحتاج إلى إدارة.</a:t>
+              <a:t>للسائح: يعرف ما أمامه بلغته وبصوت. وللجهة المشغلة: تجربة سائح أفضل بصفر تكلفة تشغيل، ودون بنية تحتية تحتاج إلى إدارة.</a:t>
             </a:r>
             <a:endParaRPr lang="en-US" sz="1250" dirty="0"/>
           </a:p>

--- a/athr-aja-submission.pptx
+++ b/athr-aja-submission.pptx
@@ -2792,8 +2792,8 @@
         </p:nvSpPr>
         <p:spPr>
           <a:xfrm>
-            <a:off x="9447947" y="4498848"/>
-            <a:ext cx="1966509" cy="1225296"/>
+            <a:off x="8933459" y="4498848"/>
+            <a:ext cx="2480996" cy="1225296"/>
           </a:xfrm>
           <a:prstGeom prst="roundRect">
             <a:avLst>
@@ -2819,8 +2819,8 @@
         </p:nvSpPr>
         <p:spPr>
           <a:xfrm>
-            <a:off x="9447947" y="4645152"/>
-            <a:ext cx="1966509" cy="548640"/>
+            <a:off x="8933459" y="4645152"/>
+            <a:ext cx="2480996" cy="548640"/>
           </a:xfrm>
           <a:prstGeom prst="rect">
             <a:avLst/>
@@ -2858,8 +2858,8 @@
         </p:nvSpPr>
         <p:spPr>
           <a:xfrm>
-            <a:off x="9557675" y="5230368"/>
-            <a:ext cx="1747053" cy="402336"/>
+            <a:off x="9043187" y="5230368"/>
+            <a:ext cx="2261540" cy="402336"/>
           </a:xfrm>
           <a:prstGeom prst="rect">
             <a:avLst/>
@@ -2920,8 +2920,8 @@
         </p:nvSpPr>
         <p:spPr>
           <a:xfrm>
-            <a:off x="7280270" y="4498848"/>
-            <a:ext cx="1966509" cy="1225296"/>
+            <a:off x="6214720" y="4498848"/>
+            <a:ext cx="2480996" cy="1225296"/>
           </a:xfrm>
           <a:prstGeom prst="roundRect">
             <a:avLst>
@@ -2947,8 +2947,8 @@
         </p:nvSpPr>
         <p:spPr>
           <a:xfrm>
-            <a:off x="7280270" y="4645152"/>
-            <a:ext cx="1966509" cy="548640"/>
+            <a:off x="6214720" y="4645152"/>
+            <a:ext cx="2480996" cy="548640"/>
           </a:xfrm>
           <a:prstGeom prst="rect">
             <a:avLst/>
@@ -2966,13 +2966,13 @@
             <a:r>
               <a:rPr lang="en-US" sz="2800" b="1" dirty="0">
                 <a:solidFill>
-                  <a:srgbClr val="255174"/>
+                  <a:srgbClr val="8357F6"/>
                 </a:solidFill>
                 <a:latin typeface="Calibri" pitchFamily="34" charset="0"/>
                 <a:ea typeface="Calibri" pitchFamily="34" charset="-122"/>
                 <a:cs typeface="Calibri" pitchFamily="34" charset="-120"/>
               </a:rPr>
-              <a:t>79.3%</a:t>
+              <a:t>0</a:t>
             </a:r>
             <a:endParaRPr lang="en-US" sz="2800" dirty="0"/>
           </a:p>
@@ -2986,8 +2986,8 @@
         </p:nvSpPr>
         <p:spPr>
           <a:xfrm>
-            <a:off x="7389998" y="5230368"/>
-            <a:ext cx="1747053" cy="402336"/>
+            <a:off x="6324448" y="5230368"/>
+            <a:ext cx="2261540" cy="402336"/>
           </a:xfrm>
           <a:prstGeom prst="rect">
             <a:avLst/>
@@ -3014,7 +3014,7 @@
                 <a:ea typeface="Tajawal" pitchFamily="34" charset="-122"/>
                 <a:cs typeface="Tajawal" pitchFamily="34" charset="-120"/>
               </a:rPr>
-              <a:t>على صورة من يوم</a:t>
+              <a:t>إجابة خاطئة على 175</a:t>
             </a:r>
             <a:endParaRPr lang="en-US" sz="1100" dirty="0"/>
           </a:p>
@@ -3034,7 +3034,7 @@
                 <a:ea typeface="Tajawal" pitchFamily="34" charset="-122"/>
                 <a:cs typeface="Tajawal" pitchFamily="34" charset="-120"/>
               </a:rPr>
-              <a:t>وجهاز آخرين</a:t>
+              <a:t>صورة من خارج الفهرس</a:t>
             </a:r>
             <a:endParaRPr lang="en-US" sz="1100" dirty="0"/>
           </a:p>
@@ -3048,8 +3048,8 @@
         </p:nvSpPr>
         <p:spPr>
           <a:xfrm>
-            <a:off x="5112593" y="4498848"/>
-            <a:ext cx="1966509" cy="1225296"/>
+            <a:off x="3495980" y="4498848"/>
+            <a:ext cx="2480996" cy="1225296"/>
           </a:xfrm>
           <a:prstGeom prst="roundRect">
             <a:avLst>
@@ -3075,8 +3075,8 @@
         </p:nvSpPr>
         <p:spPr>
           <a:xfrm>
-            <a:off x="5112593" y="4645152"/>
-            <a:ext cx="1966509" cy="548640"/>
+            <a:off x="3495980" y="4645152"/>
+            <a:ext cx="2480996" cy="548640"/>
           </a:xfrm>
           <a:prstGeom prst="rect">
             <a:avLst/>
@@ -3094,13 +3094,13 @@
             <a:r>
               <a:rPr lang="en-US" sz="2800" b="1" dirty="0">
                 <a:solidFill>
-                  <a:srgbClr val="8357F6"/>
+                  <a:srgbClr val="255174"/>
                 </a:solidFill>
                 <a:latin typeface="Calibri" pitchFamily="34" charset="0"/>
                 <a:ea typeface="Calibri" pitchFamily="34" charset="-122"/>
                 <a:cs typeface="Calibri" pitchFamily="34" charset="-120"/>
               </a:rPr>
-              <a:t>0</a:t>
+              <a:t>663</a:t>
             </a:r>
             <a:endParaRPr lang="en-US" sz="2800" dirty="0"/>
           </a:p>
@@ -3114,8 +3114,8 @@
         </p:nvSpPr>
         <p:spPr>
           <a:xfrm>
-            <a:off x="5222321" y="5230368"/>
-            <a:ext cx="1747053" cy="402336"/>
+            <a:off x="3605708" y="5230368"/>
+            <a:ext cx="2261540" cy="402336"/>
           </a:xfrm>
           <a:prstGeom prst="rect">
             <a:avLst/>
@@ -3142,7 +3142,7 @@
                 <a:ea typeface="Tajawal" pitchFamily="34" charset="-122"/>
                 <a:cs typeface="Tajawal" pitchFamily="34" charset="-120"/>
               </a:rPr>
-              <a:t>إجابة خاطئة على 175</a:t>
+              <a:t>اختبارا آليا تعمل</a:t>
             </a:r>
             <a:endParaRPr lang="en-US" sz="1100" dirty="0"/>
           </a:p>
@@ -3162,7 +3162,7 @@
                 <a:ea typeface="Tajawal" pitchFamily="34" charset="-122"/>
                 <a:cs typeface="Tajawal" pitchFamily="34" charset="-120"/>
               </a:rPr>
-              <a:t>صورة من خارج الفهرس</a:t>
+              <a:t>مع كل تعديل</a:t>
             </a:r>
             <a:endParaRPr lang="en-US" sz="1100" dirty="0"/>
           </a:p>
@@ -3176,8 +3176,8 @@
         </p:nvSpPr>
         <p:spPr>
           <a:xfrm>
-            <a:off x="2944917" y="4498848"/>
-            <a:ext cx="1966509" cy="1225296"/>
+            <a:off x="777240" y="4498848"/>
+            <a:ext cx="2480996" cy="1225296"/>
           </a:xfrm>
           <a:prstGeom prst="roundRect">
             <a:avLst>
@@ -3203,8 +3203,8 @@
         </p:nvSpPr>
         <p:spPr>
           <a:xfrm>
-            <a:off x="2944917" y="4645152"/>
-            <a:ext cx="1966509" cy="548640"/>
+            <a:off x="777240" y="4645152"/>
+            <a:ext cx="2480996" cy="548640"/>
           </a:xfrm>
           <a:prstGeom prst="rect">
             <a:avLst/>
@@ -3228,7 +3228,7 @@
                 <a:ea typeface="Calibri" pitchFamily="34" charset="-122"/>
                 <a:cs typeface="Calibri" pitchFamily="34" charset="-120"/>
               </a:rPr>
-              <a:t>663</a:t>
+              <a:t>174</a:t>
             </a:r>
             <a:endParaRPr lang="en-US" sz="2800" dirty="0"/>
           </a:p>
@@ -3242,8 +3242,8 @@
         </p:nvSpPr>
         <p:spPr>
           <a:xfrm>
-            <a:off x="3054645" y="5230368"/>
-            <a:ext cx="1747053" cy="402336"/>
+            <a:off x="886968" y="5230368"/>
+            <a:ext cx="2261540" cy="402336"/>
           </a:xfrm>
           <a:prstGeom prst="rect">
             <a:avLst/>
@@ -3270,7 +3270,7 @@
                 <a:ea typeface="Tajawal" pitchFamily="34" charset="-122"/>
                 <a:cs typeface="Tajawal" pitchFamily="34" charset="-120"/>
               </a:rPr>
-              <a:t>اختبارا آليا تعمل</a:t>
+              <a:t>مقطعا صوتيا</a:t>
             </a:r>
             <a:endParaRPr lang="en-US" sz="1100" dirty="0"/>
           </a:p>
@@ -3290,7 +3290,7 @@
                 <a:ea typeface="Tajawal" pitchFamily="34" charset="-122"/>
                 <a:cs typeface="Tajawal" pitchFamily="34" charset="-120"/>
               </a:rPr>
-              <a:t>مع كل تعديل</a:t>
+              <a:t>في 29 لغة</a:t>
             </a:r>
             <a:endParaRPr lang="en-US" sz="1100" dirty="0"/>
           </a:p>
@@ -3298,135 +3298,7 @@
       </p:sp>
       <p:sp>
         <p:nvSpPr>
-          <p:cNvPr id="27" name="Shape 19"/>
-          <p:cNvSpPr/>
-          <p:nvPr/>
-        </p:nvSpPr>
-        <p:spPr>
-          <a:xfrm>
-            <a:off x="777240" y="4498848"/>
-            <a:ext cx="1966509" cy="1225296"/>
-          </a:xfrm>
-          <a:prstGeom prst="roundRect">
-            <a:avLst>
-              <a:gd name="adj" fmla="val 5970"/>
-            </a:avLst>
-          </a:prstGeom>
-          <a:solidFill>
-            <a:srgbClr val="EEF3F9"/>
-          </a:solidFill>
-          <a:ln w="9525">
-            <a:solidFill>
-              <a:srgbClr val="D9E2EC"/>
-            </a:solidFill>
-            <a:prstDash val="solid"/>
-          </a:ln>
-        </p:spPr>
-      </p:sp>
-      <p:sp>
-        <p:nvSpPr>
-          <p:cNvPr id="28" name="Text 20"/>
-          <p:cNvSpPr/>
-          <p:nvPr/>
-        </p:nvSpPr>
-        <p:spPr>
-          <a:xfrm>
-            <a:off x="777240" y="4645152"/>
-            <a:ext cx="1966509" cy="548640"/>
-          </a:xfrm>
-          <a:prstGeom prst="rect">
-            <a:avLst/>
-          </a:prstGeom>
-          <a:noFill/>
-          <a:ln/>
-        </p:spPr>
-        <p:txBody>
-          <a:bodyPr wrap="square" lIns="0" tIns="0" rIns="0" bIns="0" rtlCol="0" anchor="ctr"/>
-          <a:lstStyle/>
-          <a:p>
-            <a:pPr algn="ctr" indent="0" marL="0">
-              <a:buNone/>
-            </a:pPr>
-            <a:r>
-              <a:rPr lang="en-US" sz="2800" b="1" dirty="0">
-                <a:solidFill>
-                  <a:srgbClr val="255174"/>
-                </a:solidFill>
-                <a:latin typeface="Calibri" pitchFamily="34" charset="0"/>
-                <a:ea typeface="Calibri" pitchFamily="34" charset="-122"/>
-                <a:cs typeface="Calibri" pitchFamily="34" charset="-120"/>
-              </a:rPr>
-              <a:t>174</a:t>
-            </a:r>
-            <a:endParaRPr lang="en-US" sz="2800" dirty="0"/>
-          </a:p>
-        </p:txBody>
-      </p:sp>
-      <p:sp>
-        <p:nvSpPr>
-          <p:cNvPr id="29" name="Text 21"/>
-          <p:cNvSpPr/>
-          <p:nvPr/>
-        </p:nvSpPr>
-        <p:spPr>
-          <a:xfrm>
-            <a:off x="886968" y="5230368"/>
-            <a:ext cx="1747053" cy="402336"/>
-          </a:xfrm>
-          <a:prstGeom prst="rect">
-            <a:avLst/>
-          </a:prstGeom>
-          <a:noFill/>
-          <a:ln/>
-        </p:spPr>
-        <p:txBody>
-          <a:bodyPr wrap="square" lIns="0" tIns="0" rIns="0" bIns="0" rtlCol="0" anchor="ctr"/>
-          <a:lstStyle/>
-          <a:p>
-            <a:pPr rtl="1" algn="ctr" indent="0" marL="0">
-              <a:lnSpc>
-                <a:spcPts val="1500"/>
-              </a:lnSpc>
-              <a:buNone/>
-            </a:pPr>
-            <a:r>
-              <a:rPr lang="en-US" sz="1100" dirty="0">
-                <a:solidFill>
-                  <a:srgbClr val="4B5B6E"/>
-                </a:solidFill>
-                <a:latin typeface="Tajawal" pitchFamily="34" charset="0"/>
-                <a:ea typeface="Tajawal" pitchFamily="34" charset="-122"/>
-                <a:cs typeface="Tajawal" pitchFamily="34" charset="-120"/>
-              </a:rPr>
-              <a:t>مقطعا صوتيا</a:t>
-            </a:r>
-            <a:endParaRPr lang="en-US" sz="1100" dirty="0"/>
-          </a:p>
-          <a:p>
-            <a:pPr rtl="1" algn="ctr" indent="0" marL="0">
-              <a:lnSpc>
-                <a:spcPts val="1500"/>
-              </a:lnSpc>
-              <a:buNone/>
-            </a:pPr>
-            <a:r>
-              <a:rPr lang="en-US" sz="1100" dirty="0">
-                <a:solidFill>
-                  <a:srgbClr val="4B5B6E"/>
-                </a:solidFill>
-                <a:latin typeface="Tajawal" pitchFamily="34" charset="0"/>
-                <a:ea typeface="Tajawal" pitchFamily="34" charset="-122"/>
-                <a:cs typeface="Tajawal" pitchFamily="34" charset="-120"/>
-              </a:rPr>
-              <a:t>في 29 لغة</a:t>
-            </a:r>
-            <a:endParaRPr lang="en-US" sz="1100" dirty="0"/>
-          </a:p>
-        </p:txBody>
-      </p:sp>
-      <p:sp>
-        <p:nvSpPr>
-          <p:cNvPr id="30" name="Text 22"/>
+          <p:cNvPr id="27" name="Text 19"/>
           <p:cNvSpPr/>
           <p:nvPr/>
         </p:nvSpPr>

--- a/athr-aja-submission.pptx
+++ b/athr-aja-submission.pptx
@@ -6257,7 +6257,7 @@
                 <a:ea typeface="Tajawal" pitchFamily="34" charset="-122"/>
                 <a:cs typeface="Tajawal" pitchFamily="34" charset="-120"/>
               </a:rPr>
-              <a:t>يوجه السائح كاميرا جواله على النقش الصخري، فيتعرف التطبيق على النقش بعينه، ويروي قصته مسموعة بلغته.</a:t>
+              <a:t>يشمل مسارا كاملا لرحلة السائح، إضافة إلى الماسح الذكي المبني على نموذج الذكاء الاصطناعي DINOv3.</a:t>
             </a:r>
             <a:endParaRPr lang="en-US" sz="1500" dirty="0"/>
           </a:p>
@@ -6280,7 +6280,7 @@
                 <a:ea typeface="Tajawal" pitchFamily="34" charset="-122"/>
                 <a:cs typeface="Tajawal" pitchFamily="34" charset="-120"/>
               </a:rPr>
-              <a:t>وكل شيء داخل الجوال: لا خادم، ولا اشتراك، ولا إنترنت بعد أول تحميل.</a:t>
+              <a:t>يوجه السائح كاميرا جواله على النقش الصخري، فيتعرف الماسح على النقش بعينه، ويروي قصته مسموعة بلغته.</a:t>
             </a:r>
             <a:endParaRPr lang="en-US" sz="1500" dirty="0"/>
           </a:p>
@@ -7520,11 +7520,11 @@
         <p:spPr>
           <a:xfrm>
             <a:off x="6842455" y="3712464"/>
-            <a:ext cx="4572000" cy="475488"/>
+            <a:ext cx="4572000" cy="420624"/>
           </a:xfrm>
           <a:prstGeom prst="roundRect">
             <a:avLst>
-              <a:gd name="adj" fmla="val 15385"/>
+              <a:gd name="adj" fmla="val 17391"/>
             </a:avLst>
           </a:prstGeom>
           <a:solidFill>
@@ -7546,8 +7546,8 @@
         </p:nvSpPr>
         <p:spPr>
           <a:xfrm>
-            <a:off x="7061911" y="3822192"/>
-            <a:ext cx="4133088" cy="274320"/>
+            <a:off x="7061911" y="3794760"/>
+            <a:ext cx="4133088" cy="256032"/>
           </a:xfrm>
           <a:prstGeom prst="rect">
             <a:avLst/>
@@ -7586,11 +7586,11 @@
         <p:spPr>
           <a:xfrm>
             <a:off x="777240" y="3712464"/>
-            <a:ext cx="6035040" cy="475488"/>
+            <a:ext cx="6035040" cy="420624"/>
           </a:xfrm>
           <a:prstGeom prst="roundRect">
             <a:avLst>
-              <a:gd name="adj" fmla="val 15385"/>
+              <a:gd name="adj" fmla="val 17391"/>
             </a:avLst>
           </a:prstGeom>
           <a:solidFill>
@@ -7612,8 +7612,8 @@
         </p:nvSpPr>
         <p:spPr>
           <a:xfrm>
-            <a:off x="996696" y="3822192"/>
-            <a:ext cx="5596128" cy="274320"/>
+            <a:off x="996696" y="3794760"/>
+            <a:ext cx="5596128" cy="256032"/>
           </a:xfrm>
           <a:prstGeom prst="rect">
             <a:avLst/>
@@ -7651,12 +7651,12 @@
         </p:nvSpPr>
         <p:spPr>
           <a:xfrm>
-            <a:off x="6842455" y="4288536"/>
-            <a:ext cx="4572000" cy="475488"/>
+            <a:off x="6842455" y="4224528"/>
+            <a:ext cx="4572000" cy="420624"/>
           </a:xfrm>
           <a:prstGeom prst="roundRect">
             <a:avLst>
-              <a:gd name="adj" fmla="val 15385"/>
+              <a:gd name="adj" fmla="val 17391"/>
             </a:avLst>
           </a:prstGeom>
           <a:solidFill>
@@ -7678,8 +7678,8 @@
         </p:nvSpPr>
         <p:spPr>
           <a:xfrm>
-            <a:off x="7061911" y="4398264"/>
-            <a:ext cx="4133088" cy="274320"/>
+            <a:off x="7061911" y="4306824"/>
+            <a:ext cx="4133088" cy="256032"/>
           </a:xfrm>
           <a:prstGeom prst="rect">
             <a:avLst/>
@@ -7717,12 +7717,12 @@
         </p:nvSpPr>
         <p:spPr>
           <a:xfrm>
-            <a:off x="777240" y="4288536"/>
-            <a:ext cx="6035040" cy="475488"/>
+            <a:off x="777240" y="4224528"/>
+            <a:ext cx="6035040" cy="420624"/>
           </a:xfrm>
           <a:prstGeom prst="roundRect">
             <a:avLst>
-              <a:gd name="adj" fmla="val 15385"/>
+              <a:gd name="adj" fmla="val 17391"/>
             </a:avLst>
           </a:prstGeom>
           <a:solidFill>
@@ -7744,8 +7744,8 @@
         </p:nvSpPr>
         <p:spPr>
           <a:xfrm>
-            <a:off x="996696" y="4398264"/>
-            <a:ext cx="5596128" cy="274320"/>
+            <a:off x="996696" y="4306824"/>
+            <a:ext cx="5596128" cy="256032"/>
           </a:xfrm>
           <a:prstGeom prst="rect">
             <a:avLst/>
@@ -7783,12 +7783,12 @@
         </p:nvSpPr>
         <p:spPr>
           <a:xfrm>
-            <a:off x="6842455" y="4864608"/>
-            <a:ext cx="4572000" cy="475488"/>
+            <a:off x="6842455" y="4736592"/>
+            <a:ext cx="4572000" cy="420624"/>
           </a:xfrm>
           <a:prstGeom prst="roundRect">
             <a:avLst>
-              <a:gd name="adj" fmla="val 15385"/>
+              <a:gd name="adj" fmla="val 17391"/>
             </a:avLst>
           </a:prstGeom>
           <a:solidFill>
@@ -7810,8 +7810,8 @@
         </p:nvSpPr>
         <p:spPr>
           <a:xfrm>
-            <a:off x="7061911" y="4974336"/>
-            <a:ext cx="4133088" cy="274320"/>
+            <a:off x="7061911" y="4818888"/>
+            <a:ext cx="4133088" cy="256032"/>
           </a:xfrm>
           <a:prstGeom prst="rect">
             <a:avLst/>
@@ -7849,12 +7849,12 @@
         </p:nvSpPr>
         <p:spPr>
           <a:xfrm>
-            <a:off x="777240" y="4864608"/>
-            <a:ext cx="6035040" cy="475488"/>
+            <a:off x="777240" y="4736592"/>
+            <a:ext cx="6035040" cy="420624"/>
           </a:xfrm>
           <a:prstGeom prst="roundRect">
             <a:avLst>
-              <a:gd name="adj" fmla="val 15385"/>
+              <a:gd name="adj" fmla="val 17391"/>
             </a:avLst>
           </a:prstGeom>
           <a:solidFill>
@@ -7876,8 +7876,8 @@
         </p:nvSpPr>
         <p:spPr>
           <a:xfrm>
-            <a:off x="996696" y="4974336"/>
-            <a:ext cx="5596128" cy="274320"/>
+            <a:off x="996696" y="4818888"/>
+            <a:ext cx="5596128" cy="256032"/>
           </a:xfrm>
           <a:prstGeom prst="rect">
             <a:avLst/>
@@ -7915,12 +7915,12 @@
         </p:nvSpPr>
         <p:spPr>
           <a:xfrm>
-            <a:off x="6842455" y="5440680"/>
-            <a:ext cx="4572000" cy="475488"/>
+            <a:off x="6842455" y="5248656"/>
+            <a:ext cx="4572000" cy="420624"/>
           </a:xfrm>
           <a:prstGeom prst="roundRect">
             <a:avLst>
-              <a:gd name="adj" fmla="val 15385"/>
+              <a:gd name="adj" fmla="val 17391"/>
             </a:avLst>
           </a:prstGeom>
           <a:solidFill>
@@ -7942,8 +7942,8 @@
         </p:nvSpPr>
         <p:spPr>
           <a:xfrm>
-            <a:off x="7061911" y="5550408"/>
-            <a:ext cx="4133088" cy="274320"/>
+            <a:off x="7061911" y="5330952"/>
+            <a:ext cx="4133088" cy="256032"/>
           </a:xfrm>
           <a:prstGeom prst="rect">
             <a:avLst/>
@@ -7981,12 +7981,12 @@
         </p:nvSpPr>
         <p:spPr>
           <a:xfrm>
-            <a:off x="777240" y="5440680"/>
-            <a:ext cx="6035040" cy="475488"/>
+            <a:off x="777240" y="5248656"/>
+            <a:ext cx="6035040" cy="420624"/>
           </a:xfrm>
           <a:prstGeom prst="roundRect">
             <a:avLst>
-              <a:gd name="adj" fmla="val 15385"/>
+              <a:gd name="adj" fmla="val 17391"/>
             </a:avLst>
           </a:prstGeom>
           <a:solidFill>
@@ -8008,8 +8008,8 @@
         </p:nvSpPr>
         <p:spPr>
           <a:xfrm>
-            <a:off x="996696" y="5550408"/>
-            <a:ext cx="5596128" cy="274320"/>
+            <a:off x="996696" y="5330952"/>
+            <a:ext cx="5596128" cy="256032"/>
           </a:xfrm>
           <a:prstGeom prst="rect">
             <a:avLst/>
@@ -8034,6 +8034,138 @@
                 <a:cs typeface="Tajawal" pitchFamily="34" charset="-120"/>
               </a:rPr>
               <a:t>مبني على 201 صورة من جبة نفسها</a:t>
+            </a:r>
+            <a:endParaRPr lang="en-US" sz="1200" dirty="0"/>
+          </a:p>
+        </p:txBody>
+      </p:sp>
+      <p:sp>
+        <p:nvSpPr>
+          <p:cNvPr id="31" name="Shape 28"/>
+          <p:cNvSpPr/>
+          <p:nvPr/>
+        </p:nvSpPr>
+        <p:spPr>
+          <a:xfrm>
+            <a:off x="6842455" y="5760720"/>
+            <a:ext cx="4572000" cy="420624"/>
+          </a:xfrm>
+          <a:prstGeom prst="roundRect">
+            <a:avLst>
+              <a:gd name="adj" fmla="val 17391"/>
+            </a:avLst>
+          </a:prstGeom>
+          <a:solidFill>
+            <a:srgbClr val="F4F6F9"/>
+          </a:solidFill>
+          <a:ln w="9525">
+            <a:solidFill>
+              <a:srgbClr val="D9E2EC"/>
+            </a:solidFill>
+            <a:prstDash val="solid"/>
+          </a:ln>
+        </p:spPr>
+      </p:sp>
+      <p:sp>
+        <p:nvSpPr>
+          <p:cNvPr id="32" name="Text 29"/>
+          <p:cNvSpPr/>
+          <p:nvPr/>
+        </p:nvSpPr>
+        <p:spPr>
+          <a:xfrm>
+            <a:off x="7061911" y="5843016"/>
+            <a:ext cx="4133088" cy="256032"/>
+          </a:xfrm>
+          <a:prstGeom prst="rect">
+            <a:avLst/>
+          </a:prstGeom>
+          <a:noFill/>
+          <a:ln/>
+        </p:spPr>
+        <p:txBody>
+          <a:bodyPr wrap="square" lIns="0" tIns="0" rIns="0" bIns="0" rtlCol="0" anchor="ctr"/>
+          <a:lstStyle/>
+          <a:p>
+            <a:pPr rtl="1" algn="r" indent="0" marL="0">
+              <a:buNone/>
+            </a:pPr>
+            <a:r>
+              <a:rPr lang="en-US" sz="1200" dirty="0">
+                <a:solidFill>
+                  <a:srgbClr val="4B5B6E"/>
+                </a:solidFill>
+                <a:latin typeface="Tajawal" pitchFamily="34" charset="0"/>
+                <a:ea typeface="Tajawal" pitchFamily="34" charset="-122"/>
+                <a:cs typeface="Tajawal" pitchFamily="34" charset="-120"/>
+              </a:rPr>
+              <a:t>ذكاء اصطناعي عام مثل ChatGPT يخمن اسما بثقة</a:t>
+            </a:r>
+            <a:endParaRPr lang="en-US" sz="1200" dirty="0"/>
+          </a:p>
+        </p:txBody>
+      </p:sp>
+      <p:sp>
+        <p:nvSpPr>
+          <p:cNvPr id="33" name="Shape 30"/>
+          <p:cNvSpPr/>
+          <p:nvPr/>
+        </p:nvSpPr>
+        <p:spPr>
+          <a:xfrm>
+            <a:off x="777240" y="5760720"/>
+            <a:ext cx="6035040" cy="420624"/>
+          </a:xfrm>
+          <a:prstGeom prst="roundRect">
+            <a:avLst>
+              <a:gd name="adj" fmla="val 17391"/>
+            </a:avLst>
+          </a:prstGeom>
+          <a:solidFill>
+            <a:srgbClr val="E9E2FB"/>
+          </a:solidFill>
+          <a:ln w="9525">
+            <a:solidFill>
+              <a:srgbClr val="D9E2EC"/>
+            </a:solidFill>
+            <a:prstDash val="solid"/>
+          </a:ln>
+        </p:spPr>
+      </p:sp>
+      <p:sp>
+        <p:nvSpPr>
+          <p:cNvPr id="34" name="Text 31"/>
+          <p:cNvSpPr/>
+          <p:nvPr/>
+        </p:nvSpPr>
+        <p:spPr>
+          <a:xfrm>
+            <a:off x="996696" y="5843016"/>
+            <a:ext cx="5596128" cy="256032"/>
+          </a:xfrm>
+          <a:prstGeom prst="rect">
+            <a:avLst/>
+          </a:prstGeom>
+          <a:noFill/>
+          <a:ln/>
+        </p:spPr>
+        <p:txBody>
+          <a:bodyPr wrap="square" lIns="0" tIns="0" rIns="0" bIns="0" rtlCol="0" anchor="ctr"/>
+          <a:lstStyle/>
+          <a:p>
+            <a:pPr rtl="1" algn="r" indent="0" marL="0">
+              <a:buNone/>
+            </a:pPr>
+            <a:r>
+              <a:rPr lang="en-US" sz="1200" b="1" dirty="0">
+                <a:solidFill>
+                  <a:srgbClr val="4B2E9E"/>
+                </a:solidFill>
+                <a:latin typeface="Tajawal" pitchFamily="34" charset="0"/>
+                <a:ea typeface="Tajawal" pitchFamily="34" charset="-122"/>
+                <a:cs typeface="Tajawal" pitchFamily="34" charset="-120"/>
+              </a:rPr>
+              <a:t>يعرف متى لا يعرف: صفر إجابة خاطئة على 175 صورة</a:t>
             </a:r>
             <a:endParaRPr lang="en-US" sz="1200" dirty="0"/>
           </a:p>

--- a/athr-aja-submission.pptx
+++ b/athr-aja-submission.pptx
@@ -8099,7 +8099,7 @@
                 <a:ea typeface="Tajawal" pitchFamily="34" charset="-122"/>
                 <a:cs typeface="Tajawal" pitchFamily="34" charset="-120"/>
               </a:rPr>
-              <a:t>ذكاء اصطناعي عام مثل ChatGPT يخمن اسما بثقة</a:t>
+              <a:t>ذكاء اصطناعي عام مثل ChatGPT: نقوش صخرية، وبإنترنت فقط</a:t>
             </a:r>
             <a:endParaRPr lang="en-US" sz="1200" dirty="0"/>
           </a:p>
@@ -8165,7 +8165,7 @@
                 <a:ea typeface="Tajawal" pitchFamily="34" charset="-122"/>
                 <a:cs typeface="Tajawal" pitchFamily="34" charset="-120"/>
               </a:rPr>
-              <a:t>يعرف متى لا يعرف: صفر إجابة خاطئة على 175 صورة</a:t>
+              <a:t>هذا نقش الأسد ومروضه، وقصته بلغتك، في الصحراء بلا شبكة</a:t>
             </a:r>
             <a:endParaRPr lang="en-US" sz="1200" dirty="0"/>
           </a:p>

--- a/athr-aja-submission.pptx
+++ b/athr-aja-submission.pptx
@@ -8099,7 +8099,7 @@
                 <a:ea typeface="Tajawal" pitchFamily="34" charset="-122"/>
                 <a:cs typeface="Tajawal" pitchFamily="34" charset="-120"/>
               </a:rPr>
-              <a:t>ذكاء اصطناعي عام مثل ChatGPT: نقوش صخرية، وبإنترنت فقط</a:t>
+              <a:t>تصور الصخرة في ChatGPT فيقول: نقوش صخرية، وبإنترنت فقط</a:t>
             </a:r>
             <a:endParaRPr lang="en-US" sz="1200" dirty="0"/>
           </a:p>
@@ -8165,7 +8165,7 @@
                 <a:ea typeface="Tajawal" pitchFamily="34" charset="-122"/>
                 <a:cs typeface="Tajawal" pitchFamily="34" charset="-120"/>
               </a:rPr>
-              <a:t>هذا نقش الأسد ومروضه، وقصته بلغتك، في الصحراء بلا شبكة</a:t>
+              <a:t>تصورها بماسح أثر فيقول: هذا نقش الأسد ومروضه، ويروي قصته بلا شبكة</a:t>
             </a:r>
             <a:endParaRPr lang="en-US" sz="1200" dirty="0"/>
           </a:p>

--- a/athr-aja-submission.pptx
+++ b/athr-aja-submission.pptx
@@ -3692,7 +3692,7 @@
                 <a:ea typeface="Tajawal" pitchFamily="34" charset="-122"/>
                 <a:cs typeface="Tajawal" pitchFamily="34" charset="-120"/>
               </a:rPr>
-              <a:t>والمنشآت المحلية: مطاعم ومقاه وفنادق حائل تريد الوصول إلى السائح.</a:t>
+              <a:t>والمنشآت المحلية: مطاعم ومقاهي وفنادق حائل تريد الوصول إلى السائح.</a:t>
             </a:r>
             <a:endParaRPr lang="en-US" sz="1250" dirty="0"/>
           </a:p>
@@ -4063,8 +4063,8 @@
         </p:nvSpPr>
         <p:spPr>
           <a:xfrm>
-            <a:off x="8027213" y="4992624"/>
-            <a:ext cx="3387242" cy="1225296"/>
+            <a:off x="9037015" y="4992624"/>
+            <a:ext cx="2377440" cy="1225296"/>
           </a:xfrm>
           <a:prstGeom prst="roundRect">
             <a:avLst>
@@ -4090,8 +4090,8 @@
         </p:nvSpPr>
         <p:spPr>
           <a:xfrm>
-            <a:off x="8027213" y="5138928"/>
-            <a:ext cx="3387242" cy="548640"/>
+            <a:off x="9037015" y="5138928"/>
+            <a:ext cx="2377440" cy="548640"/>
           </a:xfrm>
           <a:prstGeom prst="rect">
             <a:avLst/>
@@ -4109,13 +4109,13 @@
             <a:r>
               <a:rPr lang="en-US" sz="2800" b="1" dirty="0">
                 <a:solidFill>
-                  <a:srgbClr val="255174"/>
+                  <a:srgbClr val="8357F6"/>
                 </a:solidFill>
                 <a:latin typeface="Calibri" pitchFamily="34" charset="0"/>
                 <a:ea typeface="Calibri" pitchFamily="34" charset="-122"/>
                 <a:cs typeface="Calibri" pitchFamily="34" charset="-120"/>
               </a:rPr>
-              <a:t>99$</a:t>
+              <a:t>0$</a:t>
             </a:r>
             <a:endParaRPr lang="en-US" sz="2800" dirty="0"/>
           </a:p>
@@ -4129,8 +4129,8 @@
         </p:nvSpPr>
         <p:spPr>
           <a:xfrm>
-            <a:off x="8136941" y="5724144"/>
-            <a:ext cx="3167786" cy="402336"/>
+            <a:off x="9146743" y="5724144"/>
+            <a:ext cx="2157984" cy="402336"/>
           </a:xfrm>
           <a:prstGeom prst="rect">
             <a:avLst/>
@@ -4157,7 +4157,7 @@
                 <a:ea typeface="Tajawal" pitchFamily="34" charset="-122"/>
                 <a:cs typeface="Tajawal" pitchFamily="34" charset="-120"/>
               </a:rPr>
-              <a:t>حساب مطور آبل</a:t>
+              <a:t>تكلفة تشغيل</a:t>
             </a:r>
             <a:endParaRPr lang="en-US" sz="1100" dirty="0"/>
           </a:p>
@@ -4177,7 +4177,7 @@
                 <a:ea typeface="Tajawal" pitchFamily="34" charset="-122"/>
                 <a:cs typeface="Tajawal" pitchFamily="34" charset="-120"/>
               </a:rPr>
-              <a:t>سنويا</a:t>
+              <a:t>شهرية</a:t>
             </a:r>
             <a:endParaRPr lang="en-US" sz="1100" dirty="0"/>
           </a:p>
@@ -4191,8 +4191,8 @@
         </p:nvSpPr>
         <p:spPr>
           <a:xfrm>
-            <a:off x="4402226" y="4992624"/>
-            <a:ext cx="3387242" cy="1225296"/>
+            <a:off x="777240" y="4992624"/>
+            <a:ext cx="8022031" cy="1225296"/>
           </a:xfrm>
           <a:prstGeom prst="roundRect">
             <a:avLst>
@@ -4200,7 +4200,7 @@
             </a:avLst>
           </a:prstGeom>
           <a:solidFill>
-            <a:srgbClr val="EEF3F9"/>
+            <a:srgbClr val="E9E2FB"/>
           </a:solidFill>
           <a:ln w="9525">
             <a:solidFill>
@@ -4218,34 +4218,34 @@
         </p:nvSpPr>
         <p:spPr>
           <a:xfrm>
-            <a:off x="4402226" y="5138928"/>
-            <a:ext cx="3387242" cy="548640"/>
-          </a:xfrm>
-          <a:prstGeom prst="rect">
-            <a:avLst/>
-          </a:prstGeom>
-          <a:noFill/>
-          <a:ln/>
-        </p:spPr>
-        <p:txBody>
-          <a:bodyPr wrap="square" lIns="0" tIns="0" rIns="0" bIns="0" rtlCol="0" anchor="ctr"/>
-          <a:lstStyle/>
-          <a:p>
-            <a:pPr algn="ctr" indent="0" marL="0">
-              <a:buNone/>
-            </a:pPr>
-            <a:r>
-              <a:rPr lang="en-US" sz="2800" b="1" dirty="0">
-                <a:solidFill>
-                  <a:srgbClr val="255174"/>
-                </a:solidFill>
-                <a:latin typeface="Calibri" pitchFamily="34" charset="0"/>
-                <a:ea typeface="Calibri" pitchFamily="34" charset="-122"/>
-                <a:cs typeface="Calibri" pitchFamily="34" charset="-120"/>
-              </a:rPr>
-              <a:t>25$</a:t>
-            </a:r>
-            <a:endParaRPr lang="en-US" sz="2800" dirty="0"/>
+            <a:off x="1051560" y="5120640"/>
+            <a:ext cx="7473391" cy="310896"/>
+          </a:xfrm>
+          <a:prstGeom prst="rect">
+            <a:avLst/>
+          </a:prstGeom>
+          <a:noFill/>
+          <a:ln/>
+        </p:spPr>
+        <p:txBody>
+          <a:bodyPr wrap="square" lIns="0" tIns="0" rIns="0" bIns="0" rtlCol="0" anchor="ctr"/>
+          <a:lstStyle/>
+          <a:p>
+            <a:pPr rtl="1" algn="r" indent="0" marL="0">
+              <a:buNone/>
+            </a:pPr>
+            <a:r>
+              <a:rPr lang="en-US" sz="1400" b="1" dirty="0">
+                <a:solidFill>
+                  <a:srgbClr val="4B2E9E"/>
+                </a:solidFill>
+                <a:latin typeface="Tajawal" pitchFamily="34" charset="0"/>
+                <a:ea typeface="Tajawal" pitchFamily="34" charset="-122"/>
+                <a:cs typeface="Tajawal" pitchFamily="34" charset="-120"/>
+              </a:rPr>
+              <a:t>دخل مبتكر: ختم الرحلة</a:t>
+            </a:r>
+            <a:endParaRPr lang="en-US" sz="1400" dirty="0"/>
           </a:p>
         </p:txBody>
       </p:sp>
@@ -4257,27 +4257,27 @@
         </p:nvSpPr>
         <p:spPr>
           <a:xfrm>
-            <a:off x="4511954" y="5724144"/>
-            <a:ext cx="3167786" cy="402336"/>
-          </a:xfrm>
-          <a:prstGeom prst="rect">
-            <a:avLst/>
-          </a:prstGeom>
-          <a:noFill/>
-          <a:ln/>
-        </p:spPr>
-        <p:txBody>
-          <a:bodyPr wrap="square" lIns="0" tIns="0" rIns="0" bIns="0" rtlCol="0" anchor="ctr"/>
-          <a:lstStyle/>
-          <a:p>
-            <a:pPr rtl="1" algn="ctr" indent="0" marL="0">
+            <a:off x="1051560" y="5468112"/>
+            <a:ext cx="7473391" cy="640080"/>
+          </a:xfrm>
+          <a:prstGeom prst="rect">
+            <a:avLst/>
+          </a:prstGeom>
+          <a:noFill/>
+          <a:ln/>
+        </p:spPr>
+        <p:txBody>
+          <a:bodyPr wrap="square" lIns="0" tIns="0" rIns="0" bIns="0" rtlCol="0" anchor="t"/>
+          <a:lstStyle/>
+          <a:p>
+            <a:pPr rtl="1" algn="r" indent="0" marL="0">
               <a:lnSpc>
-                <a:spcPts val="1500"/>
+                <a:spcPts val="1900"/>
               </a:lnSpc>
               <a:buNone/>
             </a:pPr>
             <a:r>
-              <a:rPr lang="en-US" sz="1100" dirty="0">
+              <a:rPr lang="en-US" sz="1250" dirty="0">
                 <a:solidFill>
                   <a:srgbClr val="4B5B6E"/>
                 </a:solidFill>
@@ -4285,157 +4285,9 @@
                 <a:ea typeface="Tajawal" pitchFamily="34" charset="-122"/>
                 <a:cs typeface="Tajawal" pitchFamily="34" charset="-120"/>
               </a:rPr>
-              <a:t>حساب مطور جوجل</a:t>
-            </a:r>
-            <a:endParaRPr lang="en-US" sz="1100" dirty="0"/>
-          </a:p>
-          <a:p>
-            <a:pPr rtl="1" algn="ctr" indent="0" marL="0">
-              <a:lnSpc>
-                <a:spcPts val="1500"/>
-              </a:lnSpc>
-              <a:buNone/>
-            </a:pPr>
-            <a:r>
-              <a:rPr lang="en-US" sz="1100" dirty="0">
-                <a:solidFill>
-                  <a:srgbClr val="4B5B6E"/>
-                </a:solidFill>
-                <a:latin typeface="Tajawal" pitchFamily="34" charset="0"/>
-                <a:ea typeface="Tajawal" pitchFamily="34" charset="-122"/>
-                <a:cs typeface="Tajawal" pitchFamily="34" charset="-120"/>
-              </a:rPr>
-              <a:t>مرة واحدة</a:t>
-            </a:r>
-            <a:endParaRPr lang="en-US" sz="1100" dirty="0"/>
-          </a:p>
-        </p:txBody>
-      </p:sp>
-      <p:sp>
-        <p:nvSpPr>
-          <p:cNvPr id="21" name="Shape 18"/>
-          <p:cNvSpPr/>
-          <p:nvPr/>
-        </p:nvSpPr>
-        <p:spPr>
-          <a:xfrm>
-            <a:off x="777240" y="4992624"/>
-            <a:ext cx="3387242" cy="1225296"/>
-          </a:xfrm>
-          <a:prstGeom prst="roundRect">
-            <a:avLst>
-              <a:gd name="adj" fmla="val 5970"/>
-            </a:avLst>
-          </a:prstGeom>
-          <a:solidFill>
-            <a:srgbClr val="EEF3F9"/>
-          </a:solidFill>
-          <a:ln w="9525">
-            <a:solidFill>
-              <a:srgbClr val="D9E2EC"/>
-            </a:solidFill>
-            <a:prstDash val="solid"/>
-          </a:ln>
-        </p:spPr>
-      </p:sp>
-      <p:sp>
-        <p:nvSpPr>
-          <p:cNvPr id="22" name="Text 19"/>
-          <p:cNvSpPr/>
-          <p:nvPr/>
-        </p:nvSpPr>
-        <p:spPr>
-          <a:xfrm>
-            <a:off x="777240" y="5138928"/>
-            <a:ext cx="3387242" cy="548640"/>
-          </a:xfrm>
-          <a:prstGeom prst="rect">
-            <a:avLst/>
-          </a:prstGeom>
-          <a:noFill/>
-          <a:ln/>
-        </p:spPr>
-        <p:txBody>
-          <a:bodyPr wrap="square" lIns="0" tIns="0" rIns="0" bIns="0" rtlCol="0" anchor="ctr"/>
-          <a:lstStyle/>
-          <a:p>
-            <a:pPr algn="ctr" indent="0" marL="0">
-              <a:buNone/>
-            </a:pPr>
-            <a:r>
-              <a:rPr lang="en-US" sz="2800" b="1" dirty="0">
-                <a:solidFill>
-                  <a:srgbClr val="8357F6"/>
-                </a:solidFill>
-                <a:latin typeface="Calibri" pitchFamily="34" charset="0"/>
-                <a:ea typeface="Calibri" pitchFamily="34" charset="-122"/>
-                <a:cs typeface="Calibri" pitchFamily="34" charset="-120"/>
-              </a:rPr>
-              <a:t>0$</a:t>
-            </a:r>
-            <a:endParaRPr lang="en-US" sz="2800" dirty="0"/>
-          </a:p>
-        </p:txBody>
-      </p:sp>
-      <p:sp>
-        <p:nvSpPr>
-          <p:cNvPr id="23" name="Text 20"/>
-          <p:cNvSpPr/>
-          <p:nvPr/>
-        </p:nvSpPr>
-        <p:spPr>
-          <a:xfrm>
-            <a:off x="886968" y="5724144"/>
-            <a:ext cx="3167786" cy="402336"/>
-          </a:xfrm>
-          <a:prstGeom prst="rect">
-            <a:avLst/>
-          </a:prstGeom>
-          <a:noFill/>
-          <a:ln/>
-        </p:spPr>
-        <p:txBody>
-          <a:bodyPr wrap="square" lIns="0" tIns="0" rIns="0" bIns="0" rtlCol="0" anchor="ctr"/>
-          <a:lstStyle/>
-          <a:p>
-            <a:pPr rtl="1" algn="ctr" indent="0" marL="0">
-              <a:lnSpc>
-                <a:spcPts val="1500"/>
-              </a:lnSpc>
-              <a:buNone/>
-            </a:pPr>
-            <a:r>
-              <a:rPr lang="en-US" sz="1100" dirty="0">
-                <a:solidFill>
-                  <a:srgbClr val="4B5B6E"/>
-                </a:solidFill>
-                <a:latin typeface="Tajawal" pitchFamily="34" charset="0"/>
-                <a:ea typeface="Tajawal" pitchFamily="34" charset="-122"/>
-                <a:cs typeface="Tajawal" pitchFamily="34" charset="-120"/>
-              </a:rPr>
-              <a:t>تكلفة تشغيل</a:t>
-            </a:r>
-            <a:endParaRPr lang="en-US" sz="1100" dirty="0"/>
-          </a:p>
-          <a:p>
-            <a:pPr rtl="1" algn="ctr" indent="0" marL="0">
-              <a:lnSpc>
-                <a:spcPts val="1500"/>
-              </a:lnSpc>
-              <a:buNone/>
-            </a:pPr>
-            <a:r>
-              <a:rPr lang="en-US" sz="1100" dirty="0">
-                <a:solidFill>
-                  <a:srgbClr val="4B5B6E"/>
-                </a:solidFill>
-                <a:latin typeface="Tajawal" pitchFamily="34" charset="0"/>
-                <a:ea typeface="Tajawal" pitchFamily="34" charset="-122"/>
-                <a:cs typeface="Tajawal" pitchFamily="34" charset="-120"/>
-              </a:rPr>
-              <a:t>شهرية</a:t>
-            </a:r>
-            <a:endParaRPr lang="en-US" sz="1100" dirty="0"/>
+              <a:t>مسح النقش يثبت أن السائح وقف في الموقع فعلا، فيفتح له خصما عند أقرب مقهى أو مطعم شريك. والشريك يدفع عمولة عن كل زيارة مثبتة، لا عن إعلان قد لا يراه أحد.</a:t>
+            </a:r>
+            <a:endParaRPr lang="en-US" sz="1250" dirty="0"/>
           </a:p>
         </p:txBody>
       </p:sp>

--- a/athr-aja-submission.pptx
+++ b/athr-aja-submission.pptx
@@ -3573,11 +3573,11 @@
         <p:spPr>
           <a:xfrm>
             <a:off x="8027213" y="1234440"/>
-            <a:ext cx="3387242" cy="2487168"/>
+            <a:ext cx="3387242" cy="2697480"/>
           </a:xfrm>
           <a:prstGeom prst="roundRect">
             <a:avLst>
-              <a:gd name="adj" fmla="val 2941"/>
+              <a:gd name="adj" fmla="val 2712"/>
             </a:avLst>
           </a:prstGeom>
           <a:solidFill>
@@ -3639,7 +3639,7 @@
         <p:spPr>
           <a:xfrm>
             <a:off x="8264957" y="1801368"/>
-            <a:ext cx="2911754" cy="1737360"/>
+            <a:ext cx="2911754" cy="1947672"/>
           </a:xfrm>
           <a:prstGeom prst="rect">
             <a:avLst/>
@@ -3730,11 +3730,11 @@
         <p:spPr>
           <a:xfrm>
             <a:off x="4402226" y="1234440"/>
-            <a:ext cx="3387242" cy="2487168"/>
+            <a:ext cx="3387242" cy="2697480"/>
           </a:xfrm>
           <a:prstGeom prst="roundRect">
             <a:avLst>
-              <a:gd name="adj" fmla="val 2941"/>
+              <a:gd name="adj" fmla="val 2712"/>
             </a:avLst>
           </a:prstGeom>
           <a:solidFill>
@@ -3796,7 +3796,7 @@
         <p:spPr>
           <a:xfrm>
             <a:off x="4639970" y="1801368"/>
-            <a:ext cx="2911754" cy="1737360"/>
+            <a:ext cx="2911754" cy="1947672"/>
           </a:xfrm>
           <a:prstGeom prst="rect">
             <a:avLst/>
@@ -3826,7 +3826,7 @@
                 <a:ea typeface="Tajawal" pitchFamily="34" charset="-122"/>
                 <a:cs typeface="Tajawal" pitchFamily="34" charset="-120"/>
               </a:rPr>
-              <a:t>شركاء محليون: ندرج مواقعهم في مسار رحلتي برسم سنوي. السائح جائع بعد ساعتين في الموقع، والمطعم يريد أن يصل إليه.</a:t>
+              <a:t>شركاء محليون: ندرج مواقعهم في مسار رحلتي برسوم محددة. السائح جائع بعد ساعتين في الموقع، والمطعم يريد أن يصل إليه.</a:t>
             </a:r>
             <a:endParaRPr lang="en-US" sz="1250" dirty="0"/>
           </a:p>
@@ -3864,11 +3864,11 @@
         <p:spPr>
           <a:xfrm>
             <a:off x="777240" y="1234440"/>
-            <a:ext cx="3387242" cy="2487168"/>
+            <a:ext cx="3387242" cy="2697480"/>
           </a:xfrm>
           <a:prstGeom prst="roundRect">
             <a:avLst>
-              <a:gd name="adj" fmla="val 2941"/>
+              <a:gd name="adj" fmla="val 2712"/>
             </a:avLst>
           </a:prstGeom>
           <a:solidFill>
@@ -3930,7 +3930,7 @@
         <p:spPr>
           <a:xfrm>
             <a:off x="1014984" y="1801368"/>
-            <a:ext cx="2911754" cy="1737360"/>
+            <a:ext cx="2911754" cy="1947672"/>
           </a:xfrm>
           <a:prstGeom prst="rect">
             <a:avLst/>
@@ -3997,7 +3997,7 @@
         </p:nvSpPr>
         <p:spPr>
           <a:xfrm>
-            <a:off x="777240" y="3950208"/>
+            <a:off x="777240" y="4114800"/>
             <a:ext cx="10637215" cy="841248"/>
           </a:xfrm>
           <a:prstGeom prst="roundRect">
@@ -4024,7 +4024,7 @@
         </p:nvSpPr>
         <p:spPr>
           <a:xfrm>
-            <a:off x="1088136" y="4169664"/>
+            <a:off x="1088136" y="4334256"/>
             <a:ext cx="10015423" cy="420624"/>
           </a:xfrm>
           <a:prstGeom prst="rect">
@@ -4049,7 +4049,7 @@
                 <a:ea typeface="Tajawal" pitchFamily="34" charset="-122"/>
                 <a:cs typeface="Tajawal" pitchFamily="34" charset="-120"/>
               </a:rPr>
-              <a:t>سائح واحد وسائح مليون سواء في الكلفة — لأن التعرف والصوت والمحتوى كلها داخل جهاز السائح، لا على خادم نملكه.</a:t>
+              <a:t>سائح واحد ومليون سائح، كلهم سواء في الكلفة — لأن التعرف والصوت والمحتوى كلها داخل جهاز السائح، لا على خادم نملكه.</a:t>
             </a:r>
             <a:endParaRPr lang="en-US" sz="1450" dirty="0"/>
           </a:p>
@@ -4063,7 +4063,7 @@
         </p:nvSpPr>
         <p:spPr>
           <a:xfrm>
-            <a:off x="9037015" y="4992624"/>
+            <a:off x="9037015" y="5138928"/>
             <a:ext cx="2377440" cy="1225296"/>
           </a:xfrm>
           <a:prstGeom prst="roundRect">
@@ -4090,7 +4090,7 @@
         </p:nvSpPr>
         <p:spPr>
           <a:xfrm>
-            <a:off x="9037015" y="5138928"/>
+            <a:off x="9037015" y="5285232"/>
             <a:ext cx="2377440" cy="548640"/>
           </a:xfrm>
           <a:prstGeom prst="rect">
@@ -4129,7 +4129,7 @@
         </p:nvSpPr>
         <p:spPr>
           <a:xfrm>
-            <a:off x="9146743" y="5724144"/>
+            <a:off x="9146743" y="5870448"/>
             <a:ext cx="2157984" cy="402336"/>
           </a:xfrm>
           <a:prstGeom prst="rect">
@@ -4191,7 +4191,7 @@
         </p:nvSpPr>
         <p:spPr>
           <a:xfrm>
-            <a:off x="777240" y="4992624"/>
+            <a:off x="777240" y="5138928"/>
             <a:ext cx="8022031" cy="1225296"/>
           </a:xfrm>
           <a:prstGeom prst="roundRect">
@@ -4218,7 +4218,7 @@
         </p:nvSpPr>
         <p:spPr>
           <a:xfrm>
-            <a:off x="1051560" y="5120640"/>
+            <a:off x="1051560" y="5266944"/>
             <a:ext cx="7473391" cy="310896"/>
           </a:xfrm>
           <a:prstGeom prst="rect">
@@ -4243,7 +4243,7 @@
                 <a:ea typeface="Tajawal" pitchFamily="34" charset="-122"/>
                 <a:cs typeface="Tajawal" pitchFamily="34" charset="-120"/>
               </a:rPr>
-              <a:t>دخل مبتكر: ختم الرحلة</a:t>
+              <a:t>مصدر دخل مبتكر: ختم الرحلة</a:t>
             </a:r>
             <a:endParaRPr lang="en-US" sz="1400" dirty="0"/>
           </a:p>
@@ -4257,7 +4257,7 @@
         </p:nvSpPr>
         <p:spPr>
           <a:xfrm>
-            <a:off x="1051560" y="5468112"/>
+            <a:off x="1051560" y="5614416"/>
             <a:ext cx="7473391" cy="640080"/>
           </a:xfrm>
           <a:prstGeom prst="rect">
@@ -4285,7 +4285,7 @@
                 <a:ea typeface="Tajawal" pitchFamily="34" charset="-122"/>
                 <a:cs typeface="Tajawal" pitchFamily="34" charset="-120"/>
               </a:rPr>
-              <a:t>مسح النقش يثبت أن السائح وقف في الموقع فعلا، فيفتح له خصما عند أقرب مقهى أو مطعم شريك. والشريك يدفع عمولة عن كل زيارة مثبتة، لا عن إعلان قد لا يراه أحد.</a:t>
+              <a:t>حين يمسح السائح النقش يثبت وجوده في الموقع، فيحصل على خصم في أقرب مقهى أو مطعم شريك. ويدفع الشريك عمولة عن كل زيارة مؤكدة، لا عن إعلان قد لا يراه أحد.</a:t>
             </a:r>
             <a:endParaRPr lang="en-US" sz="1250" dirty="0"/>
           </a:p>

--- a/athr-aja-submission.pptx
+++ b/athr-aja-submission.pptx
@@ -3329,7 +3329,7 @@
                 <a:ea typeface="Tajawal" pitchFamily="34" charset="-122"/>
                 <a:cs typeface="Tajawal" pitchFamily="34" charset="-120"/>
               </a:rPr>
-              <a:t>وقراءة النقوش الثمودية قيد التطوير: لا نخترع ترجمة لا نملك أصلها الموثق، ونعرض الآن جدول الحروف الرسمي ليطابق السائح بنفسه.</a:t>
+              <a:t>قراءة النقوش الثمودية قيد التطوير، ولن نخترع ترجمة لا نملك أصلها الموثق، فنعرض الآن جدول الحروف الرسمي ليقارن السائح بنفسه</a:t>
             </a:r>
             <a:endParaRPr lang="en-US" sz="1200" dirty="0"/>
           </a:p>
@@ -3669,7 +3669,7 @@
                 <a:ea typeface="Tajawal" pitchFamily="34" charset="-122"/>
                 <a:cs typeface="Tajawal" pitchFamily="34" charset="-120"/>
               </a:rPr>
-              <a:t>الجهة المشغلة: هيئة التراث ومركز الزوار.</a:t>
+              <a:t>الجهة المشغلة: هيئة التراث ومركز الزوار</a:t>
             </a:r>
             <a:endParaRPr lang="en-US" sz="1250" dirty="0"/>
           </a:p>
@@ -3692,7 +3692,7 @@
                 <a:ea typeface="Tajawal" pitchFamily="34" charset="-122"/>
                 <a:cs typeface="Tajawal" pitchFamily="34" charset="-120"/>
               </a:rPr>
-              <a:t>والمنشآت المحلية: مطاعم ومقاهي وفنادق حائل تريد الوصول إلى السائح.</a:t>
+              <a:t>والمنشآت المحلية: مطاعم ومقاهي وفنادق حائل تريد الوصول إلى السائح</a:t>
             </a:r>
             <a:endParaRPr lang="en-US" sz="1250" dirty="0"/>
           </a:p>
@@ -3715,7 +3715,7 @@
                 <a:ea typeface="Tajawal" pitchFamily="34" charset="-122"/>
                 <a:cs typeface="Tajawal" pitchFamily="34" charset="-120"/>
               </a:rPr>
-              <a:t>والسائح نفسه، والتطبيق مجاني له دائما.</a:t>
+              <a:t>والسائح نفسه، والتطبيق مجاني له دائما</a:t>
             </a:r>
             <a:endParaRPr lang="en-US" sz="1250" dirty="0"/>
           </a:p>
@@ -3826,7 +3826,7 @@
                 <a:ea typeface="Tajawal" pitchFamily="34" charset="-122"/>
                 <a:cs typeface="Tajawal" pitchFamily="34" charset="-120"/>
               </a:rPr>
-              <a:t>شركاء محليون: ندرج مواقعهم في مسار رحلتي برسوم محددة. السائح جائع بعد ساعتين في الموقع، والمطعم يريد أن يصل إليه.</a:t>
+              <a:t>شركاء محليون ندرج مواقعهم في مسار رحلتي برسوم محددة، فالسائح يجوع بعد ساعتين في الموقع، والمطعم يريد أن يصل إليه</a:t>
             </a:r>
             <a:endParaRPr lang="en-US" sz="1250" dirty="0"/>
           </a:p>
@@ -3849,7 +3849,7 @@
                 <a:ea typeface="Tajawal" pitchFamily="34" charset="-122"/>
                 <a:cs typeface="Tajawal" pitchFamily="34" charset="-120"/>
               </a:rPr>
-              <a:t>وترخيص سنوي للجهة المشغلة عن كل موقع، ورسوم إعداد لكل موقع جديد، ونسخة بيضاء لمتاحف أخرى.</a:t>
+              <a:t>وترخيص سنوي للجهة المشغلة عن كل موقع، ورسوم إعداد لكل موقع جديد، ونسخة بيضاء لمتاحف أخرى</a:t>
             </a:r>
             <a:endParaRPr lang="en-US" sz="1250" dirty="0"/>
           </a:p>
@@ -3960,7 +3960,7 @@
                 <a:ea typeface="Tajawal" pitchFamily="34" charset="-122"/>
                 <a:cs typeface="Tajawal" pitchFamily="34" charset="-120"/>
               </a:rPr>
-              <a:t>التكلفة الحدية للسائح الإضافي صفر: لا خوادم ولا واجهات مدفوعة.</a:t>
+              <a:t>لا يكلفنا السائح الإضافي شيئا، فلا خوادم ولا واجهات برمجية مدفوعة</a:t>
             </a:r>
             <a:endParaRPr lang="en-US" sz="1250" dirty="0"/>
           </a:p>
@@ -3983,7 +3983,7 @@
                 <a:ea typeface="Tajawal" pitchFamily="34" charset="-122"/>
                 <a:cs typeface="Tajawal" pitchFamily="34" charset="-120"/>
               </a:rPr>
-              <a:t>والتكلفة كلها إعداد لمرة واحدة عن كل موقع: تصوير وفهرسة ومحتوى وترجمة.</a:t>
+              <a:t>والتكلفة كلها إعداد لمرة واحدة عن كل موقع: تصوير وفهرسة ومحتوى وترجمة</a:t>
             </a:r>
             <a:endParaRPr lang="en-US" sz="1250" dirty="0"/>
           </a:p>
@@ -4049,7 +4049,7 @@
                 <a:ea typeface="Tajawal" pitchFamily="34" charset="-122"/>
                 <a:cs typeface="Tajawal" pitchFamily="34" charset="-120"/>
               </a:rPr>
-              <a:t>سائح واحد ومليون سائح، كلهم سواء في الكلفة — لأن التعرف والصوت والمحتوى كلها داخل جهاز السائح، لا على خادم نملكه.</a:t>
+              <a:t>سائح واحد ومليون سائح كلهم سواء في الكلفة، لأن التعرف والصوت والمحتوى كلها داخل جهاز السائح لا على خادم نملكه</a:t>
             </a:r>
             <a:endParaRPr lang="en-US" sz="1450" dirty="0"/>
           </a:p>
@@ -4285,7 +4285,7 @@
                 <a:ea typeface="Tajawal" pitchFamily="34" charset="-122"/>
                 <a:cs typeface="Tajawal" pitchFamily="34" charset="-120"/>
               </a:rPr>
-              <a:t>حين يمسح السائح النقش يثبت وجوده في الموقع، فيحصل على خصم في أقرب مقهى أو مطعم شريك. ويدفع الشريك عمولة عن كل زيارة مؤكدة، لا عن إعلان قد لا يراه أحد.</a:t>
+              <a:t>حين يمسح السائح النقش يثبت وجوده في الموقع، فيحصل على خصم في أقرب مقهى أو مطعم شريك، ويدفع الشريك عمولة عن كل زيارة مؤكدة لا عن إعلان قد لا يراه أحد</a:t>
             </a:r>
             <a:endParaRPr lang="en-US" sz="1250" dirty="0"/>
           </a:p>
@@ -5213,7 +5213,7 @@
                 <a:ea typeface="Tajawal" pitchFamily="34" charset="-122"/>
                 <a:cs typeface="Tajawal" pitchFamily="34" charset="-120"/>
               </a:rPr>
-              <a:t>النموذج لم ندربه على جبة، فهو لا يعرفها أكثر مما سيعرف غيرها.</a:t>
+              <a:t>لم ندرب النموذج على جبة، فهو يتعلم أي موقع بالطريقة نفسها</a:t>
             </a:r>
             <a:endParaRPr lang="en-US" sz="1250" dirty="0"/>
           </a:p>
@@ -5236,7 +5236,7 @@
                 <a:ea typeface="Tajawal" pitchFamily="34" charset="-122"/>
                 <a:cs typeface="Tajawal" pitchFamily="34" charset="-120"/>
               </a:rPr>
-              <a:t>وإضافة موقع جديد لا تمس الشيفرة: مجلد صور جديد، وإعادة تشغيل بناء الفهرس.</a:t>
+              <a:t>وإضافة موقع جديد لا تغير البرمجة، بل تحتاج إلى صوره فقط</a:t>
             </a:r>
             <a:endParaRPr lang="en-US" sz="1250" dirty="0"/>
           </a:p>
@@ -5259,7 +5259,7 @@
                 <a:ea typeface="Tajawal" pitchFamily="34" charset="-122"/>
                 <a:cs typeface="Tajawal" pitchFamily="34" charset="-120"/>
               </a:rPr>
-              <a:t>والفهرس يتوسع بلا حد: كل سائح يصحح يزيد دقته لمن بعده.</a:t>
+              <a:t>والفهرس يتوسع بلا حد، فكل تصحيح من سائح يزيد دقته لمن بعده</a:t>
             </a:r>
             <a:endParaRPr lang="en-US" sz="1250" dirty="0"/>
           </a:p>
@@ -5370,7 +5370,7 @@
                 <a:ea typeface="Tajawal" pitchFamily="34" charset="-122"/>
                 <a:cs typeface="Tajawal" pitchFamily="34" charset="-120"/>
               </a:rPr>
-              <a:t>بقية مواقع حائل: الشويمس، وجبال أجا، والقشلة، وقلعة أعيرف.</a:t>
+              <a:t>بقية مواقع حائل: الشويمس، وجبال أجا، والقشلة، وقلعة أعيرف</a:t>
             </a:r>
             <a:endParaRPr lang="en-US" sz="1250" dirty="0"/>
           </a:p>
@@ -5393,7 +5393,7 @@
                 <a:ea typeface="Tajawal" pitchFamily="34" charset="-122"/>
                 <a:cs typeface="Tajawal" pitchFamily="34" charset="-120"/>
               </a:rPr>
-              <a:t>ثم الجنوب حيث النقوش بالآلاف: أبها، وعسير، ونجران، وجازان.</a:t>
+              <a:t>ثم الجنوب حيث النقوش بالآلاف: أبها، وعسير، ونجران، وجازان</a:t>
             </a:r>
             <a:endParaRPr lang="en-US" sz="1250" dirty="0"/>
           </a:p>
@@ -5416,7 +5416,7 @@
                 <a:ea typeface="Tajawal" pitchFamily="34" charset="-122"/>
                 <a:cs typeface="Tajawal" pitchFamily="34" charset="-120"/>
               </a:rPr>
-              <a:t>وكل مدينة غنية بالنقوش: العلا، وتيماء، وتبوك، والجوف.</a:t>
+              <a:t>وكل مدينة غنية بالنقوش: العلا، وتيماء، وتبوك، والجوف</a:t>
             </a:r>
             <a:endParaRPr lang="en-US" sz="1250" dirty="0"/>
           </a:p>
@@ -5439,7 +5439,7 @@
                 <a:ea typeface="Tajawal" pitchFamily="34" charset="-122"/>
                 <a:cs typeface="Tajawal" pitchFamily="34" charset="-120"/>
               </a:rPr>
-              <a:t>ثم نسخة بيضاء لأي متحف أو موقع تراثي.</a:t>
+              <a:t>ثم نسخة بيضاء لأي متحف أو موقع تراثي</a:t>
             </a:r>
             <a:endParaRPr lang="en-US" sz="1250" dirty="0"/>
           </a:p>
@@ -6086,7 +6086,7 @@
                 <a:ea typeface="Tajawal" pitchFamily="34" charset="-122"/>
                 <a:cs typeface="Tajawal" pitchFamily="34" charset="-120"/>
               </a:rPr>
-              <a:t>أثر دليل تراثي ذكي لمنطقة حائل، يعمل بدون إنترنت.</a:t>
+              <a:t>أثر دليل تراثي ذكي لمنطقة حائل، يعمل دون اتصال بالإنترنت</a:t>
             </a:r>
             <a:endParaRPr lang="en-US" sz="1500" dirty="0"/>
           </a:p>
@@ -6109,7 +6109,7 @@
                 <a:ea typeface="Tajawal" pitchFamily="34" charset="-122"/>
                 <a:cs typeface="Tajawal" pitchFamily="34" charset="-120"/>
               </a:rPr>
-              <a:t>يشمل مسارا كاملا لرحلة السائح، إضافة إلى الماسح الذكي المبني على نموذج الذكاء الاصطناعي DINOv3.</a:t>
+              <a:t>يشمل مسارا كاملا لرحلة السائح، إضافة إلى ماسح ذكي يعمل بنموذج الذكاء الاصطناعي DINOv3</a:t>
             </a:r>
             <a:endParaRPr lang="en-US" sz="1500" dirty="0"/>
           </a:p>
@@ -6132,7 +6132,7 @@
                 <a:ea typeface="Tajawal" pitchFamily="34" charset="-122"/>
                 <a:cs typeface="Tajawal" pitchFamily="34" charset="-120"/>
               </a:rPr>
-              <a:t>يوجه السائح كاميرا جواله على النقش الصخري، فيتعرف الماسح على النقش بعينه، ويروي قصته مسموعة بلغته.</a:t>
+              <a:t>يوجه السائح كاميرا جواله إلى النقش الصخري، فيتعرف عليه الماسح بعينه، ويروي له قصته بصوت مسموع وبلغته</a:t>
             </a:r>
             <a:endParaRPr lang="en-US" sz="1500" dirty="0"/>
           </a:p>
@@ -7063,7 +7063,7 @@
                 <a:ea typeface="Tajawal" pitchFamily="34" charset="-122"/>
                 <a:cs typeface="Tajawal" pitchFamily="34" charset="-120"/>
               </a:rPr>
-              <a:t>دليل يقرأ النقش نفسه لا لافتة عند المدخل: يسمي النقش الذي أمامك من بين مئات النقوش على الجدار الواحد.</a:t>
+              <a:t>دليل يقرأ النقش نفسه، لا لافتة عامة عند المدخل، فيسمي النقش الذي أمامك من بين مئات النقوش على الصخرة الواحدة</a:t>
             </a:r>
             <a:endParaRPr lang="en-US" sz="1250" dirty="0"/>
           </a:p>
@@ -7171,7 +7171,7 @@
                 <a:ea typeface="Tajawal" pitchFamily="34" charset="-122"/>
                 <a:cs typeface="Tajawal" pitchFamily="34" charset="-120"/>
               </a:rPr>
-              <a:t>نموذج الرؤية كله داخل المتصفح، 22 ميغابايت، ويتعلم من تصحيح السائح على جهازه فيصيب في المسح التالي.</a:t>
+              <a:t>نموذج الرؤية يعمل كاملا داخل المتصفح بحجم 22 ميغابايت، ويتعلم من تصحيح السائح على جهازه فيصيب في المسح التالي</a:t>
             </a:r>
             <a:endParaRPr lang="en-US" sz="1250" dirty="0"/>
           </a:p>
@@ -7279,7 +7279,7 @@
                 <a:ea typeface="Tajawal" pitchFamily="34" charset="-122"/>
                 <a:cs typeface="Tajawal" pitchFamily="34" charset="-120"/>
               </a:rPr>
-              <a:t>كل بديل يقف عند حد: اللافتة عامة، والمرشد بموعد، والتطبيق السحابي يتوقف حيث لا شبكة.</a:t>
+              <a:t>لكل بديل حد يقف عنده، فاللافتة عامة، والمرشد يحتاج إلى موعد، والتطبيق السحابي يتوقف حيث لا شبكة</a:t>
             </a:r>
             <a:endParaRPr lang="en-US" sz="1250" dirty="0"/>
           </a:p>
@@ -8756,7 +8756,7 @@
                 <a:ea typeface="Tajawal" pitchFamily="34" charset="-122"/>
                 <a:cs typeface="Tajawal" pitchFamily="34" charset="-120"/>
               </a:rPr>
-              <a:t>بلا النموذج لا يوجد منتج: التعرف على النقش هو المنتج نفسه لا ميزة مضافة إليه. ونموذج الرؤية DINOv3 من Meta، مفتوح المصدر، تعلم أشكال الأشياء من ملايين الصور بلا وسم بشري.</a:t>
+              <a:t>التعرف على النقش هو المنتج نفسه لا ميزة مضافة إليه، فلا منتج دون النموذج، ونموذج الرؤية DINOv3 من Meta مفتوح المصدر، تعلم أشكال الأشياء من ملايين الصور دون وسم بشري</a:t>
             </a:r>
             <a:endParaRPr lang="en-US" sz="1250" dirty="0"/>
           </a:p>
@@ -8864,7 +8864,7 @@
                 <a:ea typeface="Tajawal" pitchFamily="34" charset="-122"/>
                 <a:cs typeface="Tajawal" pitchFamily="34" charset="-120"/>
               </a:rPr>
-              <a:t>المشكلة بصرية لا نصية: صخرة أمام السائح. والموقع بلا تغطية، فاخترنا نموذجا يعمل داخل الجهاز لا واجهة سحابية. وبنينا فوقه طبقة القرار: فهرس بصمات ميداني، وسلم قص يعالج اختلاف الإطار، وحكم يقول لا أعرف بدل أن يخمن.</a:t>
+              <a:t>المشكلة بصرية لا نصية، فأمام السائح صخرة لا نص، والموقع بلا تغطية، فاخترنا نموذجا يعمل داخل الجهاز لا على السحابة، وبنينا فوقه طبقة القرار: فهرس بصمات من الميدان، وسلم قص يعالج اختلاف الإطار، وحكم يقول لا أعرف بدل أن يخمن</a:t>
             </a:r>
             <a:endParaRPr lang="en-US" sz="1250" dirty="0"/>
           </a:p>
@@ -8972,7 +8972,7 @@
                 <a:ea typeface="Tajawal" pitchFamily="34" charset="-122"/>
                 <a:cs typeface="Tajawal" pitchFamily="34" charset="-120"/>
               </a:rPr>
-              <a:t>يتعلم من تصحيح السائح على جهازه فيتحسن بالاستعمال. وتوظيف ثان للذكاء الاصطناعي: توليد الرواية المسموعة بتسع وعشرين لغة بنماذج نطق مفتوحة المصدر.</a:t>
+              <a:t>يتعلم من تصحيح السائح على جهازه فيتحسن كلما استعمل، ونوظف الذكاء الاصطناعي مرة ثانية في توليد الرواية المسموعة بتسع وعشرين لغة بنماذج نطق مفتوحة المصدر</a:t>
             </a:r>
             <a:endParaRPr lang="en-US" sz="1250" dirty="0"/>
           </a:p>
@@ -9333,7 +9333,7 @@
                 <a:ea typeface="Tajawal" pitchFamily="34" charset="-122"/>
                 <a:cs typeface="Tajawal" pitchFamily="34" charset="-120"/>
               </a:rPr>
-              <a:t>جبة مسجلة في قائمة التراث العالمي لليونسكو، وفيها مئات النقوش. والسائح يقف أمام الصخرة فلا يعرف ما أمامه ولا كم عمره. ولا تغطية شبكة في الموقع.</a:t>
+              <a:t>جبة مسجلة في قائمة التراث العالمي لليونسكو وفيها مئات النقوش، لكن السائح يقف أمام الصخرة فلا يعرف ما أمامه ولا كم عمره، ولا تغطية للشبكة في الموقع</a:t>
             </a:r>
             <a:endParaRPr lang="en-US" sz="1250" dirty="0"/>
           </a:p>
@@ -9465,7 +9465,7 @@
                 <a:ea typeface="Tajawal" pitchFamily="34" charset="-122"/>
                 <a:cs typeface="Tajawal" pitchFamily="34" charset="-120"/>
               </a:rPr>
-              <a:t>سياح جبة والشويمس من داخل المملكة وخارجها، والرحلات المدرسية والجامعية، وهيئة التراث ومركز الزوار، والمنشآت المحلية التي تريد الوصول إلى السائح.</a:t>
+              <a:t>سياح جبة والشويمس من داخل المملكة وخارجها، والرحلات المدرسية والجامعية، وهيئة التراث ومركز الزوار، والمنشآت المحلية التي تريد الوصول إلى السائح</a:t>
             </a:r>
             <a:endParaRPr lang="en-US" sz="1250" dirty="0"/>
           </a:p>
@@ -9597,7 +9597,7 @@
                 <a:ea typeface="Tajawal" pitchFamily="34" charset="-122"/>
                 <a:cs typeface="Tajawal" pitchFamily="34" charset="-120"/>
               </a:rPr>
-              <a:t>سياح من كل مكان ولغة، وموقع في الصحراء المفتوحة: كل حل يعتمد على السحابة يسقط هناك، وكل حل بلغة واحدة يترك أكثر السياح.</a:t>
+              <a:t>سياح من كل مكان وبكل لغة، وموقع في الصحراء المفتوحة، فكل حل يعتمد على السحابة يتوقف هناك، وكل حل بلغة واحدة لا يخدم أكثر السياح</a:t>
             </a:r>
             <a:endParaRPr lang="en-US" sz="1250" dirty="0"/>
           </a:p>
@@ -9729,7 +9729,7 @@
                 <a:ea typeface="Tajawal" pitchFamily="34" charset="-122"/>
                 <a:cs typeface="Tajawal" pitchFamily="34" charset="-120"/>
               </a:rPr>
-              <a:t>للسائح: يعرف ما أمامه بلغته وبصوت. وللجهة المشغلة: تجربة سائح أفضل بصفر تكلفة تشغيل، ودون بنية تحتية تحتاج إلى إدارة.</a:t>
+              <a:t>للسائح أن يفهم ما أمامه بلغته وبصوت مسموع، وللجهة المشغلة تجربة سائح أفضل دون أي تكلفة تشغيل ولا بنية تحتية تحتاج إلى إدارة</a:t>
             </a:r>
             <a:endParaRPr lang="en-US" sz="1250" dirty="0"/>
           </a:p>

--- a/athr-aja-submission.pptx
+++ b/athr-aja-submission.pptx
@@ -3692,7 +3692,7 @@
                 <a:ea typeface="Tajawal" pitchFamily="34" charset="-122"/>
                 <a:cs typeface="Tajawal" pitchFamily="34" charset="-120"/>
               </a:rPr>
-              <a:t>والمنشآت المحلية: مطاعم ومقاهي وفنادق حائل تريد الوصول إلى السائح</a:t>
+              <a:t>والمنشآت المحلية: مطاعم ومقاهي وفنادق حائل، والمحميات السياحية مثل محمية رملة</a:t>
             </a:r>
             <a:endParaRPr lang="en-US" sz="1250" dirty="0"/>
           </a:p>
@@ -3826,7 +3826,7 @@
                 <a:ea typeface="Tajawal" pitchFamily="34" charset="-122"/>
                 <a:cs typeface="Tajawal" pitchFamily="34" charset="-120"/>
               </a:rPr>
-              <a:t>شركاء محليون ندرج مواقعهم في مسار رحلتي برسوم محددة، فالسائح يجوع بعد ساعتين في الموقع، والمطعم يريد أن يصل إليه</a:t>
+              <a:t>شركاء محليون من مطاعم ومقاهي ومحميات سياحية مثل محمية رملة، ندرج مواقعهم في مسار رحلتي برسوم محددة، فهم يريدون الوصول إلى السائح</a:t>
             </a:r>
             <a:endParaRPr lang="en-US" sz="1250" dirty="0"/>
           </a:p>

--- a/athr-aja-submission.pptx
+++ b/athr-aja-submission.pptx
@@ -3692,7 +3692,7 @@
                 <a:ea typeface="Tajawal" pitchFamily="34" charset="-122"/>
                 <a:cs typeface="Tajawal" pitchFamily="34" charset="-120"/>
               </a:rPr>
-              <a:t>والمنشآت المحلية: مطاعم ومقاهي وفنادق حائل، والمحميات السياحية مثل محمية رملة</a:t>
+              <a:t>والمنشآت المحلية: مطاعم ومقاهي وفنادق حائل، والمحميات السياحية</a:t>
             </a:r>
             <a:endParaRPr lang="en-US" sz="1250" dirty="0"/>
           </a:p>
@@ -3826,7 +3826,7 @@
                 <a:ea typeface="Tajawal" pitchFamily="34" charset="-122"/>
                 <a:cs typeface="Tajawal" pitchFamily="34" charset="-120"/>
               </a:rPr>
-              <a:t>شركاء محليون من مطاعم ومقاهي ومحميات سياحية مثل محمية رملة، ندرج مواقعهم في مسار رحلتي برسوم محددة، فهم يريدون الوصول إلى السائح</a:t>
+              <a:t>شركاء محليون من مطاعم ومقاهي ومحميات سياحية، ندرج مواقعهم في مسار رحلتي برسوم محددة، فهم يريدون الوصول إلى السائح</a:t>
             </a:r>
             <a:endParaRPr lang="en-US" sz="1250" dirty="0"/>
           </a:p>

--- a/athr-aja-submission.pptx
+++ b/athr-aja-submission.pptx
@@ -3715,6 +3715,29 @@
                 <a:ea typeface="Tajawal" pitchFamily="34" charset="-122"/>
                 <a:cs typeface="Tajawal" pitchFamily="34" charset="-120"/>
               </a:rPr>
+              <a:t>وشركات السياحة وفنادق حائل</a:t>
+            </a:r>
+            <a:endParaRPr lang="en-US" sz="1250" dirty="0"/>
+          </a:p>
+          <a:p>
+            <a:pPr rtl="1" algn="r" indent="0" marL="0">
+              <a:lnSpc>
+                <a:spcPts val="2000"/>
+              </a:lnSpc>
+              <a:spcAft>
+                <a:spcPts val="1200"/>
+              </a:spcAft>
+              <a:buNone/>
+            </a:pPr>
+            <a:r>
+              <a:rPr lang="en-US" sz="1250" dirty="0">
+                <a:solidFill>
+                  <a:srgbClr val="4B5B6E"/>
+                </a:solidFill>
+                <a:latin typeface="Tajawal" pitchFamily="34" charset="0"/>
+                <a:ea typeface="Tajawal" pitchFamily="34" charset="-122"/>
+                <a:cs typeface="Tajawal" pitchFamily="34" charset="-120"/>
+              </a:rPr>
               <a:t>والسائح نفسه، والتطبيق مجاني له دائما</a:t>
             </a:r>
             <a:endParaRPr lang="en-US" sz="1250" dirty="0"/>
@@ -3826,7 +3849,7 @@
                 <a:ea typeface="Tajawal" pitchFamily="34" charset="-122"/>
                 <a:cs typeface="Tajawal" pitchFamily="34" charset="-120"/>
               </a:rPr>
-              <a:t>شركاء محليون من مطاعم ومقاهي ومحميات سياحية، ندرج مواقعهم في مسار رحلتي برسوم محددة، فهم يريدون الوصول إلى السائح</a:t>
+              <a:t>رسوم إدراج محددة للمطاعم والمقاهي والفنادق والمحميات السياحية في مسار رحلتي</a:t>
             </a:r>
             <a:endParaRPr lang="en-US" sz="1250" dirty="0"/>
           </a:p>
@@ -4063,8 +4086,8 @@
         </p:nvSpPr>
         <p:spPr>
           <a:xfrm>
-            <a:off x="9037015" y="5138928"/>
-            <a:ext cx="2377440" cy="1225296"/>
+            <a:off x="9585655" y="5138928"/>
+            <a:ext cx="1828800" cy="1225296"/>
           </a:xfrm>
           <a:prstGeom prst="roundRect">
             <a:avLst>
@@ -4090,8 +4113,8 @@
         </p:nvSpPr>
         <p:spPr>
           <a:xfrm>
-            <a:off x="9037015" y="5285232"/>
-            <a:ext cx="2377440" cy="548640"/>
+            <a:off x="9585655" y="5285232"/>
+            <a:ext cx="1828800" cy="548640"/>
           </a:xfrm>
           <a:prstGeom prst="rect">
             <a:avLst/>
@@ -4129,8 +4152,8 @@
         </p:nvSpPr>
         <p:spPr>
           <a:xfrm>
-            <a:off x="9146743" y="5870448"/>
-            <a:ext cx="2157984" cy="402336"/>
+            <a:off x="9695383" y="5870448"/>
+            <a:ext cx="1609344" cy="402336"/>
           </a:xfrm>
           <a:prstGeom prst="rect">
             <a:avLst/>
@@ -4191,8 +4214,8 @@
         </p:nvSpPr>
         <p:spPr>
           <a:xfrm>
-            <a:off x="777240" y="5138928"/>
-            <a:ext cx="8022031" cy="1225296"/>
+            <a:off x="6649517" y="5138928"/>
+            <a:ext cx="2698394" cy="1225296"/>
           </a:xfrm>
           <a:prstGeom prst="roundRect">
             <a:avLst>
@@ -4218,8 +4241,8 @@
         </p:nvSpPr>
         <p:spPr>
           <a:xfrm>
-            <a:off x="1051560" y="5266944"/>
-            <a:ext cx="7473391" cy="310896"/>
+            <a:off x="6868973" y="5248656"/>
+            <a:ext cx="2259482" cy="292608"/>
           </a:xfrm>
           <a:prstGeom prst="rect">
             <a:avLst/>
@@ -4235,7 +4258,7 @@
               <a:buNone/>
             </a:pPr>
             <a:r>
-              <a:rPr lang="en-US" sz="1400" b="1" dirty="0">
+              <a:rPr lang="en-US" sz="1350" b="1" dirty="0">
                 <a:solidFill>
                   <a:srgbClr val="4B2E9E"/>
                 </a:solidFill>
@@ -4243,9 +4266,9 @@
                 <a:ea typeface="Tajawal" pitchFamily="34" charset="-122"/>
                 <a:cs typeface="Tajawal" pitchFamily="34" charset="-120"/>
               </a:rPr>
-              <a:t>مصدر دخل مبتكر: ختم الرحلة</a:t>
-            </a:r>
-            <a:endParaRPr lang="en-US" sz="1400" dirty="0"/>
+              <a:t>خصم مقابل المسح</a:t>
+            </a:r>
+            <a:endParaRPr lang="en-US" sz="1350" dirty="0"/>
           </a:p>
         </p:txBody>
       </p:sp>
@@ -4257,8 +4280,8 @@
         </p:nvSpPr>
         <p:spPr>
           <a:xfrm>
-            <a:off x="1051560" y="5614416"/>
-            <a:ext cx="7473391" cy="640080"/>
+            <a:off x="6868973" y="5559552"/>
+            <a:ext cx="2259482" cy="731520"/>
           </a:xfrm>
           <a:prstGeom prst="rect">
             <a:avLst/>
@@ -4272,12 +4295,12 @@
           <a:p>
             <a:pPr rtl="1" algn="r" indent="0" marL="0">
               <a:lnSpc>
-                <a:spcPts val="1900"/>
+                <a:spcPts val="1700"/>
               </a:lnSpc>
               <a:buNone/>
             </a:pPr>
             <a:r>
-              <a:rPr lang="en-US" sz="1250" dirty="0">
+              <a:rPr lang="en-US" sz="1150" dirty="0">
                 <a:solidFill>
                   <a:srgbClr val="4B5B6E"/>
                 </a:solidFill>
@@ -4285,9 +4308,225 @@
                 <a:ea typeface="Tajawal" pitchFamily="34" charset="-122"/>
                 <a:cs typeface="Tajawal" pitchFamily="34" charset="-120"/>
               </a:rPr>
-              <a:t>حين يمسح السائح النقش يثبت وجوده في الموقع، فيحصل على خصم في أقرب مقهى أو مطعم شريك، ويدفع الشريك عمولة عن كل زيارة مؤكدة لا عن إعلان قد لا يراه أحد</a:t>
-            </a:r>
-            <a:endParaRPr lang="en-US" sz="1250" dirty="0"/>
+              <a:t>يمسح السائح النقش فيحصل على رمز خصم، ويدفع المقهى أو المحمية رسما ثابتا عند استخدام الرمز فقط</a:t>
+            </a:r>
+            <a:endParaRPr lang="en-US" sz="1150" dirty="0"/>
+          </a:p>
+        </p:txBody>
+      </p:sp>
+      <p:sp>
+        <p:nvSpPr>
+          <p:cNvPr id="21" name="Shape 18"/>
+          <p:cNvSpPr/>
+          <p:nvPr/>
+        </p:nvSpPr>
+        <p:spPr>
+          <a:xfrm>
+            <a:off x="3713378" y="5138928"/>
+            <a:ext cx="2698394" cy="1225296"/>
+          </a:xfrm>
+          <a:prstGeom prst="roundRect">
+            <a:avLst>
+              <a:gd name="adj" fmla="val 5970"/>
+            </a:avLst>
+          </a:prstGeom>
+          <a:solidFill>
+            <a:srgbClr val="E9E2FB"/>
+          </a:solidFill>
+          <a:ln w="9525">
+            <a:solidFill>
+              <a:srgbClr val="D9E2EC"/>
+            </a:solidFill>
+            <a:prstDash val="solid"/>
+          </a:ln>
+        </p:spPr>
+      </p:sp>
+      <p:sp>
+        <p:nvSpPr>
+          <p:cNvPr id="22" name="Text 19"/>
+          <p:cNvSpPr/>
+          <p:nvPr/>
+        </p:nvSpPr>
+        <p:spPr>
+          <a:xfrm>
+            <a:off x="3932834" y="5248656"/>
+            <a:ext cx="2259482" cy="292608"/>
+          </a:xfrm>
+          <a:prstGeom prst="rect">
+            <a:avLst/>
+          </a:prstGeom>
+          <a:noFill/>
+          <a:ln/>
+        </p:spPr>
+        <p:txBody>
+          <a:bodyPr wrap="square" lIns="0" tIns="0" rIns="0" bIns="0" rtlCol="0" anchor="ctr"/>
+          <a:lstStyle/>
+          <a:p>
+            <a:pPr rtl="1" algn="r" indent="0" marL="0">
+              <a:buNone/>
+            </a:pPr>
+            <a:r>
+              <a:rPr lang="en-US" sz="1350" b="1" dirty="0">
+                <a:solidFill>
+                  <a:srgbClr val="4B2E9E"/>
+                </a:solidFill>
+                <a:latin typeface="Tajawal" pitchFamily="34" charset="0"/>
+                <a:ea typeface="Tajawal" pitchFamily="34" charset="-122"/>
+                <a:cs typeface="Tajawal" pitchFamily="34" charset="-120"/>
+              </a:rPr>
+              <a:t>عمولة الحجوزات</a:t>
+            </a:r>
+            <a:endParaRPr lang="en-US" sz="1350" dirty="0"/>
+          </a:p>
+        </p:txBody>
+      </p:sp>
+      <p:sp>
+        <p:nvSpPr>
+          <p:cNvPr id="23" name="Text 20"/>
+          <p:cNvSpPr/>
+          <p:nvPr/>
+        </p:nvSpPr>
+        <p:spPr>
+          <a:xfrm>
+            <a:off x="3932834" y="5559552"/>
+            <a:ext cx="2259482" cy="731520"/>
+          </a:xfrm>
+          <a:prstGeom prst="rect">
+            <a:avLst/>
+          </a:prstGeom>
+          <a:noFill/>
+          <a:ln/>
+        </p:spPr>
+        <p:txBody>
+          <a:bodyPr wrap="square" lIns="0" tIns="0" rIns="0" bIns="0" rtlCol="0" anchor="t"/>
+          <a:lstStyle/>
+          <a:p>
+            <a:pPr rtl="1" algn="r" indent="0" marL="0">
+              <a:lnSpc>
+                <a:spcPts val="1700"/>
+              </a:lnSpc>
+              <a:buNone/>
+            </a:pPr>
+            <a:r>
+              <a:rPr lang="en-US" sz="1150" dirty="0">
+                <a:solidFill>
+                  <a:srgbClr val="4B5B6E"/>
+                </a:solidFill>
+                <a:latin typeface="Tajawal" pitchFamily="34" charset="0"/>
+                <a:ea typeface="Tajawal" pitchFamily="34" charset="-122"/>
+                <a:cs typeface="Tajawal" pitchFamily="34" charset="-120"/>
+              </a:rPr>
+              <a:t>يحجز السائح من مسار رحلتي جولة مرشدة أو تخييما في محمية أو رحلة برية، ونأخذ نسبة من كل حجز</a:t>
+            </a:r>
+            <a:endParaRPr lang="en-US" sz="1150" dirty="0"/>
+          </a:p>
+        </p:txBody>
+      </p:sp>
+      <p:sp>
+        <p:nvSpPr>
+          <p:cNvPr id="24" name="Shape 21"/>
+          <p:cNvSpPr/>
+          <p:nvPr/>
+        </p:nvSpPr>
+        <p:spPr>
+          <a:xfrm>
+            <a:off x="777240" y="5138928"/>
+            <a:ext cx="2698394" cy="1225296"/>
+          </a:xfrm>
+          <a:prstGeom prst="roundRect">
+            <a:avLst>
+              <a:gd name="adj" fmla="val 5970"/>
+            </a:avLst>
+          </a:prstGeom>
+          <a:solidFill>
+            <a:srgbClr val="E9E2FB"/>
+          </a:solidFill>
+          <a:ln w="9525">
+            <a:solidFill>
+              <a:srgbClr val="D9E2EC"/>
+            </a:solidFill>
+            <a:prstDash val="solid"/>
+          </a:ln>
+        </p:spPr>
+      </p:sp>
+      <p:sp>
+        <p:nvSpPr>
+          <p:cNvPr id="25" name="Text 22"/>
+          <p:cNvSpPr/>
+          <p:nvPr/>
+        </p:nvSpPr>
+        <p:spPr>
+          <a:xfrm>
+            <a:off x="996696" y="5248656"/>
+            <a:ext cx="2259482" cy="292608"/>
+          </a:xfrm>
+          <a:prstGeom prst="rect">
+            <a:avLst/>
+          </a:prstGeom>
+          <a:noFill/>
+          <a:ln/>
+        </p:spPr>
+        <p:txBody>
+          <a:bodyPr wrap="square" lIns="0" tIns="0" rIns="0" bIns="0" rtlCol="0" anchor="ctr"/>
+          <a:lstStyle/>
+          <a:p>
+            <a:pPr rtl="1" algn="r" indent="0" marL="0">
+              <a:buNone/>
+            </a:pPr>
+            <a:r>
+              <a:rPr lang="en-US" sz="1350" b="1" dirty="0">
+                <a:solidFill>
+                  <a:srgbClr val="4B2E9E"/>
+                </a:solidFill>
+                <a:latin typeface="Tajawal" pitchFamily="34" charset="0"/>
+                <a:ea typeface="Tajawal" pitchFamily="34" charset="-122"/>
+                <a:cs typeface="Tajawal" pitchFamily="34" charset="-120"/>
+              </a:rPr>
+              <a:t>ترخيص لشركات السياحة</a:t>
+            </a:r>
+            <a:endParaRPr lang="en-US" sz="1350" dirty="0"/>
+          </a:p>
+        </p:txBody>
+      </p:sp>
+      <p:sp>
+        <p:nvSpPr>
+          <p:cNvPr id="26" name="Text 23"/>
+          <p:cNvSpPr/>
+          <p:nvPr/>
+        </p:nvSpPr>
+        <p:spPr>
+          <a:xfrm>
+            <a:off x="996696" y="5559552"/>
+            <a:ext cx="2259482" cy="731520"/>
+          </a:xfrm>
+          <a:prstGeom prst="rect">
+            <a:avLst/>
+          </a:prstGeom>
+          <a:noFill/>
+          <a:ln/>
+        </p:spPr>
+        <p:txBody>
+          <a:bodyPr wrap="square" lIns="0" tIns="0" rIns="0" bIns="0" rtlCol="0" anchor="t"/>
+          <a:lstStyle/>
+          <a:p>
+            <a:pPr rtl="1" algn="r" indent="0" marL="0">
+              <a:lnSpc>
+                <a:spcPts val="1700"/>
+              </a:lnSpc>
+              <a:buNone/>
+            </a:pPr>
+            <a:r>
+              <a:rPr lang="en-US" sz="1150" dirty="0">
+                <a:solidFill>
+                  <a:srgbClr val="4B5B6E"/>
+                </a:solidFill>
+                <a:latin typeface="Tajawal" pitchFamily="34" charset="0"/>
+                <a:ea typeface="Tajawal" pitchFamily="34" charset="-122"/>
+                <a:cs typeface="Tajawal" pitchFamily="34" charset="-120"/>
+              </a:rPr>
+              <a:t>تشترك شركات السياحة وفنادق حائل شهريا، فتحصل مجموعاتها على رواية بلغاتها دون مرشد لكل لغة</a:t>
+            </a:r>
+            <a:endParaRPr lang="en-US" sz="1150" dirty="0"/>
           </a:p>
         </p:txBody>
       </p:sp>

--- a/athr-aja-submission.pptx
+++ b/athr-aja-submission.pptx
@@ -3715,7 +3715,7 @@
                 <a:ea typeface="Tajawal" pitchFamily="34" charset="-122"/>
                 <a:cs typeface="Tajawal" pitchFamily="34" charset="-120"/>
               </a:rPr>
-              <a:t>وشركات السياحة وفنادق حائل</a:t>
+              <a:t>وشركات تأجير السيارات ومعدات التخييم</a:t>
             </a:r>
             <a:endParaRPr lang="en-US" sz="1250" dirty="0"/>
           </a:p>
@@ -4482,7 +4482,7 @@
                 <a:ea typeface="Tajawal" pitchFamily="34" charset="-122"/>
                 <a:cs typeface="Tajawal" pitchFamily="34" charset="-120"/>
               </a:rPr>
-              <a:t>ترخيص لشركات السياحة</a:t>
+              <a:t>عمولة التأجير</a:t>
             </a:r>
             <a:endParaRPr lang="en-US" sz="1350" dirty="0"/>
           </a:p>
@@ -4524,7 +4524,7 @@
                 <a:ea typeface="Tajawal" pitchFamily="34" charset="-122"/>
                 <a:cs typeface="Tajawal" pitchFamily="34" charset="-120"/>
               </a:rPr>
-              <a:t>تشترك شركات السياحة وفنادق حائل شهريا، فتحصل مجموعاتها على رواية بلغاتها دون مرشد لكل لغة</a:t>
+              <a:t>يستأجر السائح سيارة دفع رباعي أو معدات تخييم من مسار رحلتي، وتدفع شركة التأجير عمولة عن كل عقد</a:t>
             </a:r>
             <a:endParaRPr lang="en-US" sz="1150" dirty="0"/>
           </a:p>

--- a/athr-aja-submission.pptx
+++ b/athr-aja-submission.pptx
@@ -3715,29 +3715,6 @@
                 <a:ea typeface="Tajawal" pitchFamily="34" charset="-122"/>
                 <a:cs typeface="Tajawal" pitchFamily="34" charset="-120"/>
               </a:rPr>
-              <a:t>وشركات تأجير السيارات ومعدات التخييم</a:t>
-            </a:r>
-            <a:endParaRPr lang="en-US" sz="1250" dirty="0"/>
-          </a:p>
-          <a:p>
-            <a:pPr rtl="1" algn="r" indent="0" marL="0">
-              <a:lnSpc>
-                <a:spcPts val="2000"/>
-              </a:lnSpc>
-              <a:spcAft>
-                <a:spcPts val="1200"/>
-              </a:spcAft>
-              <a:buNone/>
-            </a:pPr>
-            <a:r>
-              <a:rPr lang="en-US" sz="1250" dirty="0">
-                <a:solidFill>
-                  <a:srgbClr val="4B5B6E"/>
-                </a:solidFill>
-                <a:latin typeface="Tajawal" pitchFamily="34" charset="0"/>
-                <a:ea typeface="Tajawal" pitchFamily="34" charset="-122"/>
-                <a:cs typeface="Tajawal" pitchFamily="34" charset="-120"/>
-              </a:rPr>
               <a:t>والسائح نفسه، والتطبيق مجاني له دائما</a:t>
             </a:r>
             <a:endParaRPr lang="en-US" sz="1250" dirty="0"/>
@@ -4214,8 +4191,8 @@
         </p:nvSpPr>
         <p:spPr>
           <a:xfrm>
-            <a:off x="6649517" y="5138928"/>
-            <a:ext cx="2698394" cy="1225296"/>
+            <a:off x="5181448" y="5138928"/>
+            <a:ext cx="4166464" cy="1225296"/>
           </a:xfrm>
           <a:prstGeom prst="roundRect">
             <a:avLst>
@@ -4241,8 +4218,8 @@
         </p:nvSpPr>
         <p:spPr>
           <a:xfrm>
-            <a:off x="6868973" y="5248656"/>
-            <a:ext cx="2259482" cy="292608"/>
+            <a:off x="5400904" y="5248656"/>
+            <a:ext cx="3727552" cy="292608"/>
           </a:xfrm>
           <a:prstGeom prst="rect">
             <a:avLst/>
@@ -4280,8 +4257,8 @@
         </p:nvSpPr>
         <p:spPr>
           <a:xfrm>
-            <a:off x="6868973" y="5559552"/>
-            <a:ext cx="2259482" cy="731520"/>
+            <a:off x="5400904" y="5559552"/>
+            <a:ext cx="3727552" cy="731520"/>
           </a:xfrm>
           <a:prstGeom prst="rect">
             <a:avLst/>
@@ -4322,8 +4299,8 @@
         </p:nvSpPr>
         <p:spPr>
           <a:xfrm>
-            <a:off x="3713378" y="5138928"/>
-            <a:ext cx="2698394" cy="1225296"/>
+            <a:off x="777240" y="5138928"/>
+            <a:ext cx="4166464" cy="1225296"/>
           </a:xfrm>
           <a:prstGeom prst="roundRect">
             <a:avLst>
@@ -4349,8 +4326,8 @@
         </p:nvSpPr>
         <p:spPr>
           <a:xfrm>
-            <a:off x="3932834" y="5248656"/>
-            <a:ext cx="2259482" cy="292608"/>
+            <a:off x="996696" y="5248656"/>
+            <a:ext cx="3727552" cy="292608"/>
           </a:xfrm>
           <a:prstGeom prst="rect">
             <a:avLst/>
@@ -4388,8 +4365,8 @@
         </p:nvSpPr>
         <p:spPr>
           <a:xfrm>
-            <a:off x="3932834" y="5559552"/>
-            <a:ext cx="2259482" cy="731520"/>
+            <a:off x="996696" y="5559552"/>
+            <a:ext cx="3727552" cy="731520"/>
           </a:xfrm>
           <a:prstGeom prst="rect">
             <a:avLst/>
@@ -4417,114 +4394,6 @@
                 <a:cs typeface="Tajawal" pitchFamily="34" charset="-120"/>
               </a:rPr>
               <a:t>يحجز السائح من مسار رحلتي جولة مرشدة أو تخييما في محمية أو رحلة برية، ونأخذ نسبة من كل حجز</a:t>
-            </a:r>
-            <a:endParaRPr lang="en-US" sz="1150" dirty="0"/>
-          </a:p>
-        </p:txBody>
-      </p:sp>
-      <p:sp>
-        <p:nvSpPr>
-          <p:cNvPr id="24" name="Shape 21"/>
-          <p:cNvSpPr/>
-          <p:nvPr/>
-        </p:nvSpPr>
-        <p:spPr>
-          <a:xfrm>
-            <a:off x="777240" y="5138928"/>
-            <a:ext cx="2698394" cy="1225296"/>
-          </a:xfrm>
-          <a:prstGeom prst="roundRect">
-            <a:avLst>
-              <a:gd name="adj" fmla="val 5970"/>
-            </a:avLst>
-          </a:prstGeom>
-          <a:solidFill>
-            <a:srgbClr val="E9E2FB"/>
-          </a:solidFill>
-          <a:ln w="9525">
-            <a:solidFill>
-              <a:srgbClr val="D9E2EC"/>
-            </a:solidFill>
-            <a:prstDash val="solid"/>
-          </a:ln>
-        </p:spPr>
-      </p:sp>
-      <p:sp>
-        <p:nvSpPr>
-          <p:cNvPr id="25" name="Text 22"/>
-          <p:cNvSpPr/>
-          <p:nvPr/>
-        </p:nvSpPr>
-        <p:spPr>
-          <a:xfrm>
-            <a:off x="996696" y="5248656"/>
-            <a:ext cx="2259482" cy="292608"/>
-          </a:xfrm>
-          <a:prstGeom prst="rect">
-            <a:avLst/>
-          </a:prstGeom>
-          <a:noFill/>
-          <a:ln/>
-        </p:spPr>
-        <p:txBody>
-          <a:bodyPr wrap="square" lIns="0" tIns="0" rIns="0" bIns="0" rtlCol="0" anchor="ctr"/>
-          <a:lstStyle/>
-          <a:p>
-            <a:pPr rtl="1" algn="r" indent="0" marL="0">
-              <a:buNone/>
-            </a:pPr>
-            <a:r>
-              <a:rPr lang="en-US" sz="1350" b="1" dirty="0">
-                <a:solidFill>
-                  <a:srgbClr val="4B2E9E"/>
-                </a:solidFill>
-                <a:latin typeface="Tajawal" pitchFamily="34" charset="0"/>
-                <a:ea typeface="Tajawal" pitchFamily="34" charset="-122"/>
-                <a:cs typeface="Tajawal" pitchFamily="34" charset="-120"/>
-              </a:rPr>
-              <a:t>عمولة التأجير</a:t>
-            </a:r>
-            <a:endParaRPr lang="en-US" sz="1350" dirty="0"/>
-          </a:p>
-        </p:txBody>
-      </p:sp>
-      <p:sp>
-        <p:nvSpPr>
-          <p:cNvPr id="26" name="Text 23"/>
-          <p:cNvSpPr/>
-          <p:nvPr/>
-        </p:nvSpPr>
-        <p:spPr>
-          <a:xfrm>
-            <a:off x="996696" y="5559552"/>
-            <a:ext cx="2259482" cy="731520"/>
-          </a:xfrm>
-          <a:prstGeom prst="rect">
-            <a:avLst/>
-          </a:prstGeom>
-          <a:noFill/>
-          <a:ln/>
-        </p:spPr>
-        <p:txBody>
-          <a:bodyPr wrap="square" lIns="0" tIns="0" rIns="0" bIns="0" rtlCol="0" anchor="t"/>
-          <a:lstStyle/>
-          <a:p>
-            <a:pPr rtl="1" algn="r" indent="0" marL="0">
-              <a:lnSpc>
-                <a:spcPts val="1700"/>
-              </a:lnSpc>
-              <a:buNone/>
-            </a:pPr>
-            <a:r>
-              <a:rPr lang="en-US" sz="1150" dirty="0">
-                <a:solidFill>
-                  <a:srgbClr val="4B5B6E"/>
-                </a:solidFill>
-                <a:latin typeface="Tajawal" pitchFamily="34" charset="0"/>
-                <a:ea typeface="Tajawal" pitchFamily="34" charset="-122"/>
-                <a:cs typeface="Tajawal" pitchFamily="34" charset="-120"/>
-              </a:rPr>
-              <a:t>يستأجر السائح سيارة دفع رباعي أو معدات تخييم من مسار رحلتي، وتدفع شركة التأجير عمولة عن كل عقد</a:t>
             </a:r>
             <a:endParaRPr lang="en-US" sz="1150" dirty="0"/>
           </a:p>

--- a/athr-aja-submission.pptx
+++ b/athr-aja-submission.pptx
@@ -4243,7 +4243,7 @@
                 <a:ea typeface="Tajawal" pitchFamily="34" charset="-122"/>
                 <a:cs typeface="Tajawal" pitchFamily="34" charset="-120"/>
               </a:rPr>
-              <a:t>خصم مقابل المسح</a:t>
+              <a:t>حجز بعد المسح</a:t>
             </a:r>
             <a:endParaRPr lang="en-US" sz="1350" dirty="0"/>
           </a:p>
@@ -4285,7 +4285,7 @@
                 <a:ea typeface="Tajawal" pitchFamily="34" charset="-122"/>
                 <a:cs typeface="Tajawal" pitchFamily="34" charset="-120"/>
               </a:rPr>
-              <a:t>يمسح السائح النقش فيحصل على رمز خصم، ويدفع المقهى أو المحمية رسما ثابتا عند استخدام الرمز فقط</a:t>
+              <a:t>بعد مسح النقش يقترح التطبيق أقرب مقهى أو مطعم أو محمية شريكة، فيحجز السائح منه مباشرة، ويدفع الشريك رسما ثابتا عن كل حجز مؤكد</a:t>
             </a:r>
             <a:endParaRPr lang="en-US" sz="1150" dirty="0"/>
           </a:p>

--- a/athr-aja-submission.pptx
+++ b/athr-aja-submission.pptx
@@ -4285,7 +4285,7 @@
                 <a:ea typeface="Tajawal" pitchFamily="34" charset="-122"/>
                 <a:cs typeface="Tajawal" pitchFamily="34" charset="-120"/>
               </a:rPr>
-              <a:t>بعد مسح النقش يقترح التطبيق أقرب مقهى أو مطعم أو محمية شريكة، فيحجز السائح منه مباشرة، ويدفع الشريك رسما ثابتا عن كل حجز مؤكد</a:t>
+              <a:t>بعد مسح النقش يقترح التطبيق أقرب مقهى أو مطعم أو محمية شريكة، فيحجز السائح منه مباشرة، ويدفع الشريك عمولة ثابتة عن كل حجز مؤكد</a:t>
             </a:r>
             <a:endParaRPr lang="en-US" sz="1150" dirty="0"/>
           </a:p>

--- a/athr-aja-submission.pptx
+++ b/athr-aja-submission.pptx
@@ -3715,7 +3715,7 @@
                 <a:ea typeface="Tajawal" pitchFamily="34" charset="-122"/>
                 <a:cs typeface="Tajawal" pitchFamily="34" charset="-120"/>
               </a:rPr>
-              <a:t>والسائح نفسه، والتطبيق مجاني له دائما</a:t>
+              <a:t>والسائح نفسه: مسحات مجانية، ثم باقات إضافية</a:t>
             </a:r>
             <a:endParaRPr lang="en-US" sz="1250" dirty="0"/>
           </a:p>
@@ -3849,7 +3849,30 @@
                 <a:ea typeface="Tajawal" pitchFamily="34" charset="-122"/>
                 <a:cs typeface="Tajawal" pitchFamily="34" charset="-120"/>
               </a:rPr>
-              <a:t>وترخيص سنوي للجهة المشغلة عن كل موقع، ورسوم إعداد لكل موقع جديد، ونسخة بيضاء لمتاحف أخرى</a:t>
+              <a:t>وترخيص سنوي تدفعه الجهة المشغلة للموقع، مقابل تشغيل الدليل فيه وتحديث نقوشه وقصصه كل عام</a:t>
+            </a:r>
+            <a:endParaRPr lang="en-US" sz="1250" dirty="0"/>
+          </a:p>
+          <a:p>
+            <a:pPr rtl="1" algn="r" indent="0" marL="0">
+              <a:lnSpc>
+                <a:spcPts val="2000"/>
+              </a:lnSpc>
+              <a:spcAft>
+                <a:spcPts val="1200"/>
+              </a:spcAft>
+              <a:buNone/>
+            </a:pPr>
+            <a:r>
+              <a:rPr lang="en-US" sz="1250" dirty="0">
+                <a:solidFill>
+                  <a:srgbClr val="4B5B6E"/>
+                </a:solidFill>
+                <a:latin typeface="Tajawal" pitchFamily="34" charset="0"/>
+                <a:ea typeface="Tajawal" pitchFamily="34" charset="-122"/>
+                <a:cs typeface="Tajawal" pitchFamily="34" charset="-120"/>
+              </a:rPr>
+              <a:t>ورسوم إعداد لكل موقع جديد، ونسخة بيضاء لمتاحف أخرى</a:t>
             </a:r>
             <a:endParaRPr lang="en-US" sz="1250" dirty="0"/>
           </a:p>
@@ -4351,7 +4374,7 @@
                 <a:ea typeface="Tajawal" pitchFamily="34" charset="-122"/>
                 <a:cs typeface="Tajawal" pitchFamily="34" charset="-120"/>
               </a:rPr>
-              <a:t>عمولة الحجوزات</a:t>
+              <a:t>باقات المسح</a:t>
             </a:r>
             <a:endParaRPr lang="en-US" sz="1350" dirty="0"/>
           </a:p>
@@ -4393,7 +4416,7 @@
                 <a:ea typeface="Tajawal" pitchFamily="34" charset="-122"/>
                 <a:cs typeface="Tajawal" pitchFamily="34" charset="-120"/>
               </a:rPr>
-              <a:t>يحجز السائح من مسار رحلتي جولة مرشدة أو تخييما في محمية أو رحلة برية، ونأخذ نسبة من كل حجز</a:t>
+              <a:t>لكل سائح عدد من المسحات المجانية، ثم يشتري باقة مسحات إضافية من داخل التطبيق، والقصص والمسار مجانية دائما</a:t>
             </a:r>
             <a:endParaRPr lang="en-US" sz="1150" dirty="0"/>
           </a:p>

--- a/athr-aja-submission.pptx
+++ b/athr-aja-submission.pptx
@@ -3849,29 +3849,6 @@
                 <a:ea typeface="Tajawal" pitchFamily="34" charset="-122"/>
                 <a:cs typeface="Tajawal" pitchFamily="34" charset="-120"/>
               </a:rPr>
-              <a:t>وترخيص سنوي تدفعه الجهة المشغلة للموقع، مقابل تشغيل الدليل فيه وتحديث نقوشه وقصصه كل عام</a:t>
-            </a:r>
-            <a:endParaRPr lang="en-US" sz="1250" dirty="0"/>
-          </a:p>
-          <a:p>
-            <a:pPr rtl="1" algn="r" indent="0" marL="0">
-              <a:lnSpc>
-                <a:spcPts val="2000"/>
-              </a:lnSpc>
-              <a:spcAft>
-                <a:spcPts val="1200"/>
-              </a:spcAft>
-              <a:buNone/>
-            </a:pPr>
-            <a:r>
-              <a:rPr lang="en-US" sz="1250" dirty="0">
-                <a:solidFill>
-                  <a:srgbClr val="4B5B6E"/>
-                </a:solidFill>
-                <a:latin typeface="Tajawal" pitchFamily="34" charset="0"/>
-                <a:ea typeface="Tajawal" pitchFamily="34" charset="-122"/>
-                <a:cs typeface="Tajawal" pitchFamily="34" charset="-120"/>
-              </a:rPr>
               <a:t>ورسوم إعداد لكل موقع جديد، ونسخة بيضاء لمتاحف أخرى</a:t>
             </a:r>
             <a:endParaRPr lang="en-US" sz="1250" dirty="0"/>

--- a/athr-aja-submission.pptx
+++ b/athr-aja-submission.pptx
@@ -3014,7 +3014,7 @@
                 <a:ea typeface="Tajawal" pitchFamily="34" charset="-122"/>
                 <a:cs typeface="Tajawal" pitchFamily="34" charset="-120"/>
               </a:rPr>
-              <a:t>إجابة خاطئة على 175</a:t>
+              <a:t>مرة سمى فيها نقشا باسم خاطئ</a:t>
             </a:r>
             <a:endParaRPr lang="en-US" sz="1100" dirty="0"/>
           </a:p>
@@ -3034,7 +3034,7 @@
                 <a:ea typeface="Tajawal" pitchFamily="34" charset="-122"/>
                 <a:cs typeface="Tajawal" pitchFamily="34" charset="-120"/>
               </a:rPr>
-              <a:t>صورة من خارج الفهرس</a:t>
+              <a:t>في 175 صورة اختبار</a:t>
             </a:r>
             <a:endParaRPr lang="en-US" sz="1100" dirty="0"/>
           </a:p>

--- a/athr-aja-submission.pptx
+++ b/athr-aja-submission.pptx
@@ -2792,8 +2792,8 @@
         </p:nvSpPr>
         <p:spPr>
           <a:xfrm>
-            <a:off x="8933459" y="4498848"/>
-            <a:ext cx="2480996" cy="1225296"/>
+            <a:off x="8027213" y="4498848"/>
+            <a:ext cx="3387242" cy="1225296"/>
           </a:xfrm>
           <a:prstGeom prst="roundRect">
             <a:avLst>
@@ -2819,8 +2819,8 @@
         </p:nvSpPr>
         <p:spPr>
           <a:xfrm>
-            <a:off x="8933459" y="4645152"/>
-            <a:ext cx="2480996" cy="548640"/>
+            <a:off x="8027213" y="4645152"/>
+            <a:ext cx="3387242" cy="548640"/>
           </a:xfrm>
           <a:prstGeom prst="rect">
             <a:avLst/>
@@ -2838,7 +2838,7 @@
             <a:r>
               <a:rPr lang="en-US" sz="2800" b="1" dirty="0">
                 <a:solidFill>
-                  <a:srgbClr val="255174"/>
+                  <a:srgbClr val="8357F6"/>
                 </a:solidFill>
                 <a:latin typeface="Calibri" pitchFamily="34" charset="0"/>
                 <a:ea typeface="Calibri" pitchFamily="34" charset="-122"/>
@@ -2858,8 +2858,8 @@
         </p:nvSpPr>
         <p:spPr>
           <a:xfrm>
-            <a:off x="9043187" y="5230368"/>
-            <a:ext cx="2261540" cy="402336"/>
+            <a:off x="8136941" y="5230368"/>
+            <a:ext cx="3167786" cy="402336"/>
           </a:xfrm>
           <a:prstGeom prst="rect">
             <a:avLst/>
@@ -2920,8 +2920,8 @@
         </p:nvSpPr>
         <p:spPr>
           <a:xfrm>
-            <a:off x="6214720" y="4498848"/>
-            <a:ext cx="2480996" cy="1225296"/>
+            <a:off x="4402226" y="4498848"/>
+            <a:ext cx="3387242" cy="1225296"/>
           </a:xfrm>
           <a:prstGeom prst="roundRect">
             <a:avLst>
@@ -2947,8 +2947,8 @@
         </p:nvSpPr>
         <p:spPr>
           <a:xfrm>
-            <a:off x="6214720" y="4645152"/>
-            <a:ext cx="2480996" cy="548640"/>
+            <a:off x="4402226" y="4645152"/>
+            <a:ext cx="3387242" cy="548640"/>
           </a:xfrm>
           <a:prstGeom prst="rect">
             <a:avLst/>
@@ -2966,13 +2966,13 @@
             <a:r>
               <a:rPr lang="en-US" sz="2800" b="1" dirty="0">
                 <a:solidFill>
-                  <a:srgbClr val="8357F6"/>
+                  <a:srgbClr val="255174"/>
                 </a:solidFill>
                 <a:latin typeface="Calibri" pitchFamily="34" charset="0"/>
                 <a:ea typeface="Calibri" pitchFamily="34" charset="-122"/>
                 <a:cs typeface="Calibri" pitchFamily="34" charset="-120"/>
               </a:rPr>
-              <a:t>0</a:t>
+              <a:t>663</a:t>
             </a:r>
             <a:endParaRPr lang="en-US" sz="2800" dirty="0"/>
           </a:p>
@@ -2986,8 +2986,8 @@
         </p:nvSpPr>
         <p:spPr>
           <a:xfrm>
-            <a:off x="6324448" y="5230368"/>
-            <a:ext cx="2261540" cy="402336"/>
+            <a:off x="4511954" y="5230368"/>
+            <a:ext cx="3167786" cy="402336"/>
           </a:xfrm>
           <a:prstGeom prst="rect">
             <a:avLst/>
@@ -3014,7 +3014,7 @@
                 <a:ea typeface="Tajawal" pitchFamily="34" charset="-122"/>
                 <a:cs typeface="Tajawal" pitchFamily="34" charset="-120"/>
               </a:rPr>
-              <a:t>مرة سمى فيها نقشا باسم خاطئ</a:t>
+              <a:t>اختبارا آليا تعمل</a:t>
             </a:r>
             <a:endParaRPr lang="en-US" sz="1100" dirty="0"/>
           </a:p>
@@ -3034,7 +3034,7 @@
                 <a:ea typeface="Tajawal" pitchFamily="34" charset="-122"/>
                 <a:cs typeface="Tajawal" pitchFamily="34" charset="-120"/>
               </a:rPr>
-              <a:t>في 175 صورة اختبار</a:t>
+              <a:t>مع كل تعديل</a:t>
             </a:r>
             <a:endParaRPr lang="en-US" sz="1100" dirty="0"/>
           </a:p>
@@ -3048,8 +3048,8 @@
         </p:nvSpPr>
         <p:spPr>
           <a:xfrm>
-            <a:off x="3495980" y="4498848"/>
-            <a:ext cx="2480996" cy="1225296"/>
+            <a:off x="777240" y="4498848"/>
+            <a:ext cx="3387242" cy="1225296"/>
           </a:xfrm>
           <a:prstGeom prst="roundRect">
             <a:avLst>
@@ -3075,8 +3075,8 @@
         </p:nvSpPr>
         <p:spPr>
           <a:xfrm>
-            <a:off x="3495980" y="4645152"/>
-            <a:ext cx="2480996" cy="548640"/>
+            <a:off x="777240" y="4645152"/>
+            <a:ext cx="3387242" cy="548640"/>
           </a:xfrm>
           <a:prstGeom prst="rect">
             <a:avLst/>
@@ -3100,7 +3100,7 @@
                 <a:ea typeface="Calibri" pitchFamily="34" charset="-122"/>
                 <a:cs typeface="Calibri" pitchFamily="34" charset="-120"/>
               </a:rPr>
-              <a:t>663</a:t>
+              <a:t>174</a:t>
             </a:r>
             <a:endParaRPr lang="en-US" sz="2800" dirty="0"/>
           </a:p>
@@ -3114,8 +3114,8 @@
         </p:nvSpPr>
         <p:spPr>
           <a:xfrm>
-            <a:off x="3605708" y="5230368"/>
-            <a:ext cx="2261540" cy="402336"/>
+            <a:off x="886968" y="5230368"/>
+            <a:ext cx="3167786" cy="402336"/>
           </a:xfrm>
           <a:prstGeom prst="rect">
             <a:avLst/>
@@ -3142,7 +3142,7 @@
                 <a:ea typeface="Tajawal" pitchFamily="34" charset="-122"/>
                 <a:cs typeface="Tajawal" pitchFamily="34" charset="-120"/>
               </a:rPr>
-              <a:t>اختبارا آليا تعمل</a:t>
+              <a:t>مقطعا صوتيا</a:t>
             </a:r>
             <a:endParaRPr lang="en-US" sz="1100" dirty="0"/>
           </a:p>
@@ -3162,7 +3162,7 @@
                 <a:ea typeface="Tajawal" pitchFamily="34" charset="-122"/>
                 <a:cs typeface="Tajawal" pitchFamily="34" charset="-120"/>
               </a:rPr>
-              <a:t>مع كل تعديل</a:t>
+              <a:t>في 29 لغة</a:t>
             </a:r>
             <a:endParaRPr lang="en-US" sz="1100" dirty="0"/>
           </a:p>
@@ -3170,135 +3170,7 @@
       </p:sp>
       <p:sp>
         <p:nvSpPr>
-          <p:cNvPr id="24" name="Shape 16"/>
-          <p:cNvSpPr/>
-          <p:nvPr/>
-        </p:nvSpPr>
-        <p:spPr>
-          <a:xfrm>
-            <a:off x="777240" y="4498848"/>
-            <a:ext cx="2480996" cy="1225296"/>
-          </a:xfrm>
-          <a:prstGeom prst="roundRect">
-            <a:avLst>
-              <a:gd name="adj" fmla="val 5970"/>
-            </a:avLst>
-          </a:prstGeom>
-          <a:solidFill>
-            <a:srgbClr val="EEF3F9"/>
-          </a:solidFill>
-          <a:ln w="9525">
-            <a:solidFill>
-              <a:srgbClr val="D9E2EC"/>
-            </a:solidFill>
-            <a:prstDash val="solid"/>
-          </a:ln>
-        </p:spPr>
-      </p:sp>
-      <p:sp>
-        <p:nvSpPr>
-          <p:cNvPr id="25" name="Text 17"/>
-          <p:cNvSpPr/>
-          <p:nvPr/>
-        </p:nvSpPr>
-        <p:spPr>
-          <a:xfrm>
-            <a:off x="777240" y="4645152"/>
-            <a:ext cx="2480996" cy="548640"/>
-          </a:xfrm>
-          <a:prstGeom prst="rect">
-            <a:avLst/>
-          </a:prstGeom>
-          <a:noFill/>
-          <a:ln/>
-        </p:spPr>
-        <p:txBody>
-          <a:bodyPr wrap="square" lIns="0" tIns="0" rIns="0" bIns="0" rtlCol="0" anchor="ctr"/>
-          <a:lstStyle/>
-          <a:p>
-            <a:pPr algn="ctr" indent="0" marL="0">
-              <a:buNone/>
-            </a:pPr>
-            <a:r>
-              <a:rPr lang="en-US" sz="2800" b="1" dirty="0">
-                <a:solidFill>
-                  <a:srgbClr val="255174"/>
-                </a:solidFill>
-                <a:latin typeface="Calibri" pitchFamily="34" charset="0"/>
-                <a:ea typeface="Calibri" pitchFamily="34" charset="-122"/>
-                <a:cs typeface="Calibri" pitchFamily="34" charset="-120"/>
-              </a:rPr>
-              <a:t>174</a:t>
-            </a:r>
-            <a:endParaRPr lang="en-US" sz="2800" dirty="0"/>
-          </a:p>
-        </p:txBody>
-      </p:sp>
-      <p:sp>
-        <p:nvSpPr>
-          <p:cNvPr id="26" name="Text 18"/>
-          <p:cNvSpPr/>
-          <p:nvPr/>
-        </p:nvSpPr>
-        <p:spPr>
-          <a:xfrm>
-            <a:off x="886968" y="5230368"/>
-            <a:ext cx="2261540" cy="402336"/>
-          </a:xfrm>
-          <a:prstGeom prst="rect">
-            <a:avLst/>
-          </a:prstGeom>
-          <a:noFill/>
-          <a:ln/>
-        </p:spPr>
-        <p:txBody>
-          <a:bodyPr wrap="square" lIns="0" tIns="0" rIns="0" bIns="0" rtlCol="0" anchor="ctr"/>
-          <a:lstStyle/>
-          <a:p>
-            <a:pPr rtl="1" algn="ctr" indent="0" marL="0">
-              <a:lnSpc>
-                <a:spcPts val="1500"/>
-              </a:lnSpc>
-              <a:buNone/>
-            </a:pPr>
-            <a:r>
-              <a:rPr lang="en-US" sz="1100" dirty="0">
-                <a:solidFill>
-                  <a:srgbClr val="4B5B6E"/>
-                </a:solidFill>
-                <a:latin typeface="Tajawal" pitchFamily="34" charset="0"/>
-                <a:ea typeface="Tajawal" pitchFamily="34" charset="-122"/>
-                <a:cs typeface="Tajawal" pitchFamily="34" charset="-120"/>
-              </a:rPr>
-              <a:t>مقطعا صوتيا</a:t>
-            </a:r>
-            <a:endParaRPr lang="en-US" sz="1100" dirty="0"/>
-          </a:p>
-          <a:p>
-            <a:pPr rtl="1" algn="ctr" indent="0" marL="0">
-              <a:lnSpc>
-                <a:spcPts val="1500"/>
-              </a:lnSpc>
-              <a:buNone/>
-            </a:pPr>
-            <a:r>
-              <a:rPr lang="en-US" sz="1100" dirty="0">
-                <a:solidFill>
-                  <a:srgbClr val="4B5B6E"/>
-                </a:solidFill>
-                <a:latin typeface="Tajawal" pitchFamily="34" charset="0"/>
-                <a:ea typeface="Tajawal" pitchFamily="34" charset="-122"/>
-                <a:cs typeface="Tajawal" pitchFamily="34" charset="-120"/>
-              </a:rPr>
-              <a:t>في 29 لغة</a:t>
-            </a:r>
-            <a:endParaRPr lang="en-US" sz="1100" dirty="0"/>
-          </a:p>
-        </p:txBody>
-      </p:sp>
-      <p:sp>
-        <p:nvSpPr>
-          <p:cNvPr id="27" name="Text 19"/>
+          <p:cNvPr id="24" name="Text 16"/>
           <p:cNvSpPr/>
           <p:nvPr/>
         </p:nvSpPr>
@@ -7993,7 +7865,7 @@
                 <a:ea typeface="Tajawal" pitchFamily="34" charset="-122"/>
                 <a:cs typeface="Tajawal" pitchFamily="34" charset="-120"/>
               </a:rPr>
-              <a:t>مبني على 201 صورة من جبة نفسها</a:t>
+              <a:t>مبني على 200 صورة من جبة نفسها</a:t>
             </a:r>
             <a:endParaRPr lang="en-US" sz="1200" dirty="0"/>
           </a:p>

--- a/athr-aja-submission.pptx
+++ b/athr-aja-submission.pptx
@@ -780,7 +780,7 @@
           <a:p>
             <a:r>
               <a:rPr lang="en-US" dirty="0"/>
-              <a:t/>
+              <a:t>النسخة البيضاء: نبيع التطبيق نفسه لمتحف أو جهة تراثية أخرى، فننشره باسمها وشعارها ونقوشها وقصصها، ولا يرى السائح اسم أثر. والجهة تدفع لنا البناء والإعداد، ونحن لا نبني تطبيقا جديدا في كل مرة.</a:t>
             </a:r>
             <a:endParaRPr lang="en-US" dirty="0"/>
           </a:p>
@@ -3438,7 +3438,7 @@
       </p:sp>
       <p:sp>
         <p:nvSpPr>
-          <p:cNvPr id="4" name="Shape 1"/>
+          <p:cNvPr id="5" name="Shape 1"/>
           <p:cNvSpPr/>
           <p:nvPr/>
         </p:nvSpPr>
@@ -3465,7 +3465,7 @@
       </p:sp>
       <p:sp>
         <p:nvSpPr>
-          <p:cNvPr id="5" name="Text 2"/>
+          <p:cNvPr id="6" name="Text 2"/>
           <p:cNvSpPr/>
           <p:nvPr/>
         </p:nvSpPr>
@@ -3504,7 +3504,7 @@
       </p:sp>
       <p:sp>
         <p:nvSpPr>
-          <p:cNvPr id="6" name="Text 3"/>
+          <p:cNvPr id="7" name="Text 3"/>
           <p:cNvSpPr/>
           <p:nvPr/>
         </p:nvSpPr>
@@ -3595,7 +3595,7 @@
       </p:sp>
       <p:sp>
         <p:nvSpPr>
-          <p:cNvPr id="7" name="Shape 4"/>
+          <p:cNvPr id="8" name="Shape 4"/>
           <p:cNvSpPr/>
           <p:nvPr/>
         </p:nvSpPr>
@@ -3622,7 +3622,7 @@
       </p:sp>
       <p:sp>
         <p:nvSpPr>
-          <p:cNvPr id="8" name="Text 5"/>
+          <p:cNvPr id="9" name="Text 5"/>
           <p:cNvSpPr/>
           <p:nvPr/>
         </p:nvSpPr>
@@ -3661,7 +3661,7 @@
       </p:sp>
       <p:sp>
         <p:nvSpPr>
-          <p:cNvPr id="9" name="Text 6"/>
+          <p:cNvPr id="10" name="Text 6"/>
           <p:cNvSpPr/>
           <p:nvPr/>
         </p:nvSpPr>
@@ -3721,15 +3721,38 @@
                 <a:ea typeface="Tajawal" pitchFamily="34" charset="-122"/>
                 <a:cs typeface="Tajawal" pitchFamily="34" charset="-120"/>
               </a:rPr>
-              <a:t>ورسوم إعداد لكل موقع جديد، ونسخة بيضاء لمتاحف أخرى</a:t>
+              <a:t>ورسوم إعداد لكل موقع جديد</a:t>
             </a:r>
             <a:endParaRPr lang="en-US" sz="1250" dirty="0"/>
           </a:p>
-        </p:txBody>
-      </p:sp>
-      <p:sp>
-        <p:nvSpPr>
-          <p:cNvPr id="10" name="Shape 7"/>
+          <a:p>
+            <a:pPr rtl="1" algn="r" indent="0" marL="0">
+              <a:lnSpc>
+                <a:spcPts val="2000"/>
+              </a:lnSpc>
+              <a:spcAft>
+                <a:spcPts val="1200"/>
+              </a:spcAft>
+              <a:buNone/>
+            </a:pPr>
+            <a:r>
+              <a:rPr lang="en-US" sz="1250" dirty="0">
+                <a:solidFill>
+                  <a:srgbClr val="4B5B6E"/>
+                </a:solidFill>
+                <a:latin typeface="Tajawal" pitchFamily="34" charset="0"/>
+                <a:ea typeface="Tajawal" pitchFamily="34" charset="-122"/>
+                <a:cs typeface="Tajawal" pitchFamily="34" charset="-120"/>
+              </a:rPr>
+              <a:t>ونسخة بيضاء: تطبيق أثر نفسه لمتحف آخر، باسمه وشعاره</a:t>
+            </a:r>
+            <a:endParaRPr lang="en-US" sz="1250" dirty="0"/>
+          </a:p>
+        </p:txBody>
+      </p:sp>
+      <p:sp>
+        <p:nvSpPr>
+          <p:cNvPr id="11" name="Shape 7"/>
           <p:cNvSpPr/>
           <p:nvPr/>
         </p:nvSpPr>
@@ -3756,7 +3779,7 @@
       </p:sp>
       <p:sp>
         <p:nvSpPr>
-          <p:cNvPr id="11" name="Text 8"/>
+          <p:cNvPr id="12" name="Text 8"/>
           <p:cNvSpPr/>
           <p:nvPr/>
         </p:nvSpPr>
@@ -3795,7 +3818,7 @@
       </p:sp>
       <p:sp>
         <p:nvSpPr>
-          <p:cNvPr id="12" name="Text 9"/>
+          <p:cNvPr id="13" name="Text 9"/>
           <p:cNvSpPr/>
           <p:nvPr/>
         </p:nvSpPr>
@@ -3863,7 +3886,7 @@
       </p:sp>
       <p:sp>
         <p:nvSpPr>
-          <p:cNvPr id="13" name="Shape 10"/>
+          <p:cNvPr id="14" name="Shape 10"/>
           <p:cNvSpPr/>
           <p:nvPr/>
         </p:nvSpPr>
@@ -3890,7 +3913,7 @@
       </p:sp>
       <p:sp>
         <p:nvSpPr>
-          <p:cNvPr id="14" name="Text 11"/>
+          <p:cNvPr id="15" name="Text 11"/>
           <p:cNvSpPr/>
           <p:nvPr/>
         </p:nvSpPr>
@@ -3929,7 +3952,7 @@
       </p:sp>
       <p:sp>
         <p:nvSpPr>
-          <p:cNvPr id="15" name="Shape 12"/>
+          <p:cNvPr id="16" name="Shape 12"/>
           <p:cNvSpPr/>
           <p:nvPr/>
         </p:nvSpPr>
@@ -3956,7 +3979,7 @@
       </p:sp>
       <p:sp>
         <p:nvSpPr>
-          <p:cNvPr id="16" name="Text 13"/>
+          <p:cNvPr id="17" name="Text 13"/>
           <p:cNvSpPr/>
           <p:nvPr/>
         </p:nvSpPr>
@@ -3995,7 +4018,7 @@
       </p:sp>
       <p:sp>
         <p:nvSpPr>
-          <p:cNvPr id="17" name="Text 14"/>
+          <p:cNvPr id="18" name="Text 14"/>
           <p:cNvSpPr/>
           <p:nvPr/>
         </p:nvSpPr>
@@ -4057,7 +4080,7 @@
       </p:sp>
       <p:sp>
         <p:nvSpPr>
-          <p:cNvPr id="18" name="Shape 15"/>
+          <p:cNvPr id="19" name="Shape 15"/>
           <p:cNvSpPr/>
           <p:nvPr/>
         </p:nvSpPr>
@@ -4084,7 +4107,7 @@
       </p:sp>
       <p:sp>
         <p:nvSpPr>
-          <p:cNvPr id="19" name="Text 16"/>
+          <p:cNvPr id="20" name="Text 16"/>
           <p:cNvSpPr/>
           <p:nvPr/>
         </p:nvSpPr>
@@ -4123,7 +4146,7 @@
       </p:sp>
       <p:sp>
         <p:nvSpPr>
-          <p:cNvPr id="20" name="Text 17"/>
+          <p:cNvPr id="21" name="Text 17"/>
           <p:cNvSpPr/>
           <p:nvPr/>
         </p:nvSpPr>
@@ -4165,7 +4188,7 @@
       </p:sp>
       <p:sp>
         <p:nvSpPr>
-          <p:cNvPr id="21" name="Shape 18"/>
+          <p:cNvPr id="22" name="Shape 18"/>
           <p:cNvSpPr/>
           <p:nvPr/>
         </p:nvSpPr>
@@ -4192,7 +4215,7 @@
       </p:sp>
       <p:sp>
         <p:nvSpPr>
-          <p:cNvPr id="22" name="Text 19"/>
+          <p:cNvPr id="23" name="Text 19"/>
           <p:cNvSpPr/>
           <p:nvPr/>
         </p:nvSpPr>
@@ -4231,7 +4254,7 @@
       </p:sp>
       <p:sp>
         <p:nvSpPr>
-          <p:cNvPr id="23" name="Text 20"/>
+          <p:cNvPr id="24" name="Text 20"/>
           <p:cNvSpPr/>
           <p:nvPr/>
         </p:nvSpPr>
@@ -5419,7 +5442,7 @@
                 <a:ea typeface="Tajawal" pitchFamily="34" charset="-122"/>
                 <a:cs typeface="Tajawal" pitchFamily="34" charset="-120"/>
               </a:rPr>
-              <a:t>ثم نسخة بيضاء لأي متحف أو موقع تراثي</a:t>
+              <a:t>ثم نسخة بيضاء لأي متحف: التطبيق نفسه باسمه وشعاره</a:t>
             </a:r>
             <a:endParaRPr lang="en-US" sz="1250" dirty="0"/>
           </a:p>

--- a/athr-aja-submission.pptx
+++ b/athr-aja-submission.pptx
@@ -8651,7 +8651,7 @@
                 <a:ea typeface="Tajawal" pitchFamily="34" charset="-122"/>
                 <a:cs typeface="Tajawal" pitchFamily="34" charset="-120"/>
               </a:rPr>
-              <a:t>يطابقها بنقوش جبة فيعرف اسمه</a:t>
+              <a:t>يطابقها بالنقوش فيعرف اسمه</a:t>
             </a:r>
             <a:endParaRPr lang="en-US" sz="1000" dirty="0"/>
           </a:p>
@@ -8759,7 +8759,7 @@
                 <a:ea typeface="Tajawal" pitchFamily="34" charset="-122"/>
                 <a:cs typeface="Tajawal" pitchFamily="34" charset="-120"/>
               </a:rPr>
-              <a:t>التعرف على النقش هو المنتج نفسه لا ميزة مضافة إليه، فلا منتج دون النموذج، ونموذج الرؤية DINOv3 من Meta مفتوح المصدر، تعلم أشكال الأشياء من ملايين الصور دون وسم بشري</a:t>
+              <a:t>التعرف على النقش هو المنتج نفسه لا ميزة مضافة إليه، فلا منتج دون النموذج، ونموذج الرؤية DINOv3 من Meta مفتوح المصدر، تدرب على ملايين الصور حتى صار يميز الأشكال والتفاصيل وحده، دون أن يخبره أحد بما في كل صورة</a:t>
             </a:r>
             <a:endParaRPr lang="en-US" sz="1250" dirty="0"/>
           </a:p>

--- a/athr-aja-submission.pptx
+++ b/athr-aja-submission.pptx
@@ -7174,7 +7174,7 @@
                 <a:ea typeface="Tajawal" pitchFamily="34" charset="-122"/>
                 <a:cs typeface="Tajawal" pitchFamily="34" charset="-120"/>
               </a:rPr>
-              <a:t>نموذج الرؤية يعمل كاملا داخل المتصفح بحجم 22 ميغابايت، ويتعلم من تصحيح السائح على جهازه فيصيب في المسح التالي</a:t>
+              <a:t>نموذج الرؤية يعمل كاملا داخل المتصفح بحجم 22 ميغابايت، ويتعلم من تصحيحات السياح فتصل إلى كل الأجهزة مع التحديث</a:t>
             </a:r>
             <a:endParaRPr lang="en-US" sz="1250" dirty="0"/>
           </a:p>
@@ -8975,7 +8975,7 @@
                 <a:ea typeface="Tajawal" pitchFamily="34" charset="-122"/>
                 <a:cs typeface="Tajawal" pitchFamily="34" charset="-120"/>
               </a:rPr>
-              <a:t>يتعلم من تصحيح السائح على جهازه فيتحسن كلما استعمل، ونوظف الذكاء الاصطناعي مرة ثانية في توليد الرواية المسموعة بتسع وعشرين لغة بنماذج نطق مفتوحة المصدر</a:t>
+              <a:t>يتعلم من تصحيحات السياح فتصل إلى كل الأجهزة مع التحديث، ويتحسن كلما استعمل، ونوظف الذكاء الاصطناعي مرة ثانية في توليد الرواية المسموعة بتسع وعشرين لغة بنماذج نطق مفتوحة المصدر</a:t>
             </a:r>
             <a:endParaRPr lang="en-US" sz="1250" dirty="0"/>
           </a:p>

--- a/athr-aja-submission.pptx
+++ b/athr-aja-submission.pptx
@@ -8867,7 +8867,7 @@
                 <a:ea typeface="Tajawal" pitchFamily="34" charset="-122"/>
                 <a:cs typeface="Tajawal" pitchFamily="34" charset="-120"/>
               </a:rPr>
-              <a:t>المشكلة بصرية لا نصية، فأمام السائح صخرة لا نص، والموقع بلا تغطية، فاخترنا نموذجا يعمل داخل الجهاز لا على السحابة، وبنينا فوقه طبقة القرار: فهرس بصمات من الميدان، وسلم قص يعالج اختلاف الإطار، وحكم يقول لا أعرف بدل أن يخمن</a:t>
+              <a:t>المشكلة بصرية لا نصية، فأمام السائح صخرة لا نص، والموقع بلا تغطية، فاخترنا نموذجا يعمل داخل الجهاز لا على السحابة، وبنينا فوقه طبقة التعرف: فهرس بصمات من الميدان، وسلم قص يعالج اختلاف الإطار</a:t>
             </a:r>
             <a:endParaRPr lang="en-US" sz="1250" dirty="0"/>
           </a:p>
@@ -8975,7 +8975,7 @@
                 <a:ea typeface="Tajawal" pitchFamily="34" charset="-122"/>
                 <a:cs typeface="Tajawal" pitchFamily="34" charset="-120"/>
               </a:rPr>
-              <a:t>يتعلم من تصحيحات السياح فتصل إلى كل الأجهزة مع التحديث، ويتحسن كلما استعمل، ونوظف الذكاء الاصطناعي مرة ثانية في توليد الرواية المسموعة بتسع وعشرين لغة بنماذج نطق مفتوحة المصدر</a:t>
+              <a:t>يتعلم من تصحيحات السياح فتصل إلى كل الأجهزة مع التحديث، ويتحسن كلما استعمل، ونوظف الذكاء الاصطناعي مرة أخرى في توليد الرواية المسموعة بتسع وعشرين لغة بنماذج نطق مفتوحة المصدر</a:t>
             </a:r>
             <a:endParaRPr lang="en-US" sz="1250" dirty="0"/>
           </a:p>

--- a/athr-aja-submission.pptx
+++ b/athr-aja-submission.pptx
@@ -9468,7 +9468,7 @@
                 <a:ea typeface="Tajawal" pitchFamily="34" charset="-122"/>
                 <a:cs typeface="Tajawal" pitchFamily="34" charset="-120"/>
               </a:rPr>
-              <a:t>سياح جبة والشويمس من داخل المملكة وخارجها، والرحلات المدرسية والجامعية، وهيئة التراث ومركز الزوار، والمنشآت المحلية التي تريد الوصول إلى السائح</a:t>
+              <a:t>السياح الذين يزورون النقوش، سواء من داخل المملكة أو من خارجها، والرحلات المدرسية والجامعية، وهيئة التراث ومركز الزوار، والمنشآت المحلية التي تريد الوصول إلى السائح</a:t>
             </a:r>
             <a:endParaRPr lang="en-US" sz="1250" dirty="0"/>
           </a:p>

--- a/athr-aja-submission.pptx
+++ b/athr-aja-submission.pptx
@@ -3201,7 +3201,7 @@
                 <a:ea typeface="Tajawal" pitchFamily="34" charset="-122"/>
                 <a:cs typeface="Tajawal" pitchFamily="34" charset="-120"/>
               </a:rPr>
-              <a:t>قراءة النقوش الثمودية قيد التطوير، ولن نخترع ترجمة لا نملك أصلها الموثق، فنعرض الآن جدول الحروف الرسمي ليقارن السائح بنفسه</a:t>
+              <a:t>قراءة النقوش الثمودية قيد التطوير، ونعرض الآن جدول الحروف الرسمي</a:t>
             </a:r>
             <a:endParaRPr lang="en-US" sz="1200" dirty="0"/>
           </a:p>
@@ -3698,7 +3698,7 @@
                 <a:ea typeface="Tajawal" pitchFamily="34" charset="-122"/>
                 <a:cs typeface="Tajawal" pitchFamily="34" charset="-120"/>
               </a:rPr>
-              <a:t>رسوم إدراج محددة للمطاعم والمقاهي والفنادق والمحميات السياحية في مسار رحلتي</a:t>
+              <a:t>رسوم إدراج للمطاعم والمقاهي والفنادق والمحميات في مسار الرحلة</a:t>
             </a:r>
             <a:endParaRPr lang="en-US" sz="1250" dirty="0"/>
           </a:p>
@@ -3744,7 +3744,7 @@
                 <a:ea typeface="Tajawal" pitchFamily="34" charset="-122"/>
                 <a:cs typeface="Tajawal" pitchFamily="34" charset="-120"/>
               </a:rPr>
-              <a:t>ونسخة بيضاء: تطبيق أثر نفسه لمتحف آخر، باسمه وشعاره</a:t>
+              <a:t>ونسخة بيضاء: التطبيق نفسه لمتحف آخر باسمه</a:t>
             </a:r>
             <a:endParaRPr lang="en-US" sz="1250" dirty="0"/>
           </a:p>
@@ -3855,7 +3855,7 @@
                 <a:ea typeface="Tajawal" pitchFamily="34" charset="-122"/>
                 <a:cs typeface="Tajawal" pitchFamily="34" charset="-120"/>
               </a:rPr>
-              <a:t>لا يكلفنا السائح الإضافي شيئا، فلا خوادم ولا واجهات برمجية مدفوعة</a:t>
+              <a:t>السائح الإضافي لا يكلفنا شيئا، فلا خوادم</a:t>
             </a:r>
             <a:endParaRPr lang="en-US" sz="1250" dirty="0"/>
           </a:p>
@@ -3878,7 +3878,7 @@
                 <a:ea typeface="Tajawal" pitchFamily="34" charset="-122"/>
                 <a:cs typeface="Tajawal" pitchFamily="34" charset="-120"/>
               </a:rPr>
-              <a:t>والتكلفة كلها إعداد لمرة واحدة عن كل موقع: تصوير وفهرسة ومحتوى وترجمة</a:t>
+              <a:t>والتكلفة إعداد لمرة واحدة لكل موقع</a:t>
             </a:r>
             <a:endParaRPr lang="en-US" sz="1250" dirty="0"/>
           </a:p>
@@ -3944,7 +3944,7 @@
                 <a:ea typeface="Tajawal" pitchFamily="34" charset="-122"/>
                 <a:cs typeface="Tajawal" pitchFamily="34" charset="-120"/>
               </a:rPr>
-              <a:t>سائح واحد ومليون سائح كلهم سواء في الكلفة، لأن التعرف والصوت والمحتوى كلها داخل جهاز السائح لا على خادم نملكه</a:t>
+              <a:t>سائح واحد ومليون سائح كلهم سواء في الكلفة، لأن كل شيء يعمل داخل جوال السائح</a:t>
             </a:r>
             <a:endParaRPr lang="en-US" sz="1450" dirty="0"/>
           </a:p>
@@ -4180,7 +4180,7 @@
                 <a:ea typeface="Tajawal" pitchFamily="34" charset="-122"/>
                 <a:cs typeface="Tajawal" pitchFamily="34" charset="-120"/>
               </a:rPr>
-              <a:t>بعد مسح النقش يقترح التطبيق أقرب مقهى أو مطعم أو محمية شريكة، فيحجز السائح منه مباشرة، ويدفع الشريك عمولة ثابتة عن كل حجز مؤكد</a:t>
+              <a:t>بعد المسح يقترح التطبيق أقرب شريك، فيحجز السائح منه، ويدفع الشريك عمولة عن كل حجز</a:t>
             </a:r>
             <a:endParaRPr lang="en-US" sz="1150" dirty="0"/>
           </a:p>
@@ -4288,7 +4288,7 @@
                 <a:ea typeface="Tajawal" pitchFamily="34" charset="-122"/>
                 <a:cs typeface="Tajawal" pitchFamily="34" charset="-120"/>
               </a:rPr>
-              <a:t>لكل سائح عدد من المسحات المجانية، ثم يشتري باقة مسحات إضافية من داخل التطبيق، والقصص والمسار مجانية دائما</a:t>
+              <a:t>مسحات مجانية لكل سائح، ثم باقات إضافية من داخل التطبيق، والقصص مجانية دائما</a:t>
             </a:r>
             <a:endParaRPr lang="en-US" sz="1150" dirty="0"/>
           </a:p>
@@ -5216,7 +5216,7 @@
                 <a:ea typeface="Tajawal" pitchFamily="34" charset="-122"/>
                 <a:cs typeface="Tajawal" pitchFamily="34" charset="-120"/>
               </a:rPr>
-              <a:t>لم ندرب النموذج على جبة، فهو يتعلم أي موقع بالطريقة نفسها</a:t>
+              <a:t>النموذج يتعلم أي موقع بالطريقة نفسها</a:t>
             </a:r>
             <a:endParaRPr lang="en-US" sz="1250" dirty="0"/>
           </a:p>
@@ -5239,7 +5239,7 @@
                 <a:ea typeface="Tajawal" pitchFamily="34" charset="-122"/>
                 <a:cs typeface="Tajawal" pitchFamily="34" charset="-120"/>
               </a:rPr>
-              <a:t>وإضافة موقع جديد لا تغير البرمجة، بل تحتاج إلى صوره فقط</a:t>
+              <a:t>والموقع الجديد يحتاج إلى صوره فقط</a:t>
             </a:r>
             <a:endParaRPr lang="en-US" sz="1250" dirty="0"/>
           </a:p>
@@ -5262,7 +5262,7 @@
                 <a:ea typeface="Tajawal" pitchFamily="34" charset="-122"/>
                 <a:cs typeface="Tajawal" pitchFamily="34" charset="-120"/>
               </a:rPr>
-              <a:t>والفهرس يتوسع بلا حد، فكل تصحيح من سائح يزيد دقته لمن بعده</a:t>
+              <a:t>وكل تصحيح من سائح يزيد الدقة لمن بعده</a:t>
             </a:r>
             <a:endParaRPr lang="en-US" sz="1250" dirty="0"/>
           </a:p>
@@ -5396,7 +5396,7 @@
                 <a:ea typeface="Tajawal" pitchFamily="34" charset="-122"/>
                 <a:cs typeface="Tajawal" pitchFamily="34" charset="-120"/>
               </a:rPr>
-              <a:t>ثم الجنوب حيث النقوش بالآلاف: أبها، وعسير، ونجران، وجازان</a:t>
+              <a:t>ثم الجنوب: أبها، وعسير، ونجران، وجازان</a:t>
             </a:r>
             <a:endParaRPr lang="en-US" sz="1250" dirty="0"/>
           </a:p>
@@ -5442,7 +5442,7 @@
                 <a:ea typeface="Tajawal" pitchFamily="34" charset="-122"/>
                 <a:cs typeface="Tajawal" pitchFamily="34" charset="-120"/>
               </a:rPr>
-              <a:t>ثم نسخة بيضاء لأي متحف: التطبيق نفسه باسمه وشعاره</a:t>
+              <a:t>ثم أي متحف بنسخة تحمل اسمه</a:t>
             </a:r>
             <a:endParaRPr lang="en-US" sz="1250" dirty="0"/>
           </a:p>
@@ -6112,7 +6112,7 @@
                 <a:ea typeface="Tajawal" pitchFamily="34" charset="-122"/>
                 <a:cs typeface="Tajawal" pitchFamily="34" charset="-120"/>
               </a:rPr>
-              <a:t>يشمل مسارا كاملا لرحلة السائح، إضافة إلى ماسح ذكي يعمل بنموذج الذكاء الاصطناعي DINOv3</a:t>
+              <a:t>يرسم مسار رحلة السائح كاملا، ومعه ماسح ذكي يعمل بنموذج DINOv3</a:t>
             </a:r>
             <a:endParaRPr lang="en-US" sz="1500" dirty="0"/>
           </a:p>
@@ -6135,7 +6135,7 @@
                 <a:ea typeface="Tajawal" pitchFamily="34" charset="-122"/>
                 <a:cs typeface="Tajawal" pitchFamily="34" charset="-120"/>
               </a:rPr>
-              <a:t>يوجه السائح كاميرا جواله إلى النقش الصخري، فيتعرف عليه الماسح بعينه، ويروي له قصته بصوت مسموع وبلغته</a:t>
+              <a:t>يصور السائح النقش، فيسميه الماسح ويروي قصته بلغته</a:t>
             </a:r>
             <a:endParaRPr lang="en-US" sz="1500" dirty="0"/>
           </a:p>
@@ -7066,7 +7066,7 @@
                 <a:ea typeface="Tajawal" pitchFamily="34" charset="-122"/>
                 <a:cs typeface="Tajawal" pitchFamily="34" charset="-120"/>
               </a:rPr>
-              <a:t>دليل يقرأ النقش نفسه، لا لافتة عامة عند المدخل، فيسمي النقش الذي أمامك من بين مئات النقوش على الصخرة الواحدة</a:t>
+              <a:t>دليل يقرأ النقش نفسه، فيسمي النقش الذي يراه السائح من بين مئات النقوش</a:t>
             </a:r>
             <a:endParaRPr lang="en-US" sz="1250" dirty="0"/>
           </a:p>
@@ -7174,7 +7174,7 @@
                 <a:ea typeface="Tajawal" pitchFamily="34" charset="-122"/>
                 <a:cs typeface="Tajawal" pitchFamily="34" charset="-120"/>
               </a:rPr>
-              <a:t>نموذج الرؤية يعمل كاملا داخل المتصفح بحجم 22 ميغابايت، ويتعلم من تصحيحات السياح فتصل إلى كل الأجهزة مع التحديث</a:t>
+              <a:t>ذكاء اصطناعي كامل داخل الجوال، يتعلم من تصحيحات السياح ويتحسن مع كل تحديث</a:t>
             </a:r>
             <a:endParaRPr lang="en-US" sz="1250" dirty="0"/>
           </a:p>
@@ -7282,7 +7282,7 @@
                 <a:ea typeface="Tajawal" pitchFamily="34" charset="-122"/>
                 <a:cs typeface="Tajawal" pitchFamily="34" charset="-120"/>
               </a:rPr>
-              <a:t>لكل بديل حد يقف عنده، فاللافتة عامة، والمرشد يحتاج إلى موعد، والتطبيق السحابي يتوقف حيث لا شبكة</a:t>
+              <a:t>اللافتة عامة، والمرشد بموعد، والتطبيق السحابي يتوقف بلا شبكة</a:t>
             </a:r>
             <a:endParaRPr lang="en-US" sz="1250" dirty="0"/>
           </a:p>
@@ -8759,7 +8759,7 @@
                 <a:ea typeface="Tajawal" pitchFamily="34" charset="-122"/>
                 <a:cs typeface="Tajawal" pitchFamily="34" charset="-120"/>
               </a:rPr>
-              <a:t>التعرف على النقش هو المنتج نفسه لا ميزة مضافة إليه، فلا منتج دون النموذج، ونموذج الرؤية DINOv3 من Meta مفتوح المصدر، تدرب على ملايين الصور حتى صار يميز الأشكال والتفاصيل وحده، دون أن يخبره أحد بما في كل صورة</a:t>
+              <a:t>التعرف على النقش هو المنتج نفسه، ويقوم على نموذج DINOv3 من Meta، المدرب على ملايين الصور فصار يميز الأشكال وحده</a:t>
             </a:r>
             <a:endParaRPr lang="en-US" sz="1250" dirty="0"/>
           </a:p>
@@ -8867,7 +8867,7 @@
                 <a:ea typeface="Tajawal" pitchFamily="34" charset="-122"/>
                 <a:cs typeface="Tajawal" pitchFamily="34" charset="-120"/>
               </a:rPr>
-              <a:t>المشكلة بصرية لا نصية، فأمام السائح صخرة لا نص، والموقع بلا تغطية، فاخترنا نموذجا يعمل داخل الجهاز لا على السحابة، وبنينا فوقه طبقة التعرف: فهرس بصمات من الميدان، وسلم قص يعالج اختلاف الإطار</a:t>
+              <a:t>المشكلة صورة لا نص، والموقع بلا شبكة، فاخترنا نموذجا يعمل داخل الجوال، وبنينا فوقه فهرسا من 200 صورة ميدانية</a:t>
             </a:r>
             <a:endParaRPr lang="en-US" sz="1250" dirty="0"/>
           </a:p>
@@ -8975,7 +8975,7 @@
                 <a:ea typeface="Tajawal" pitchFamily="34" charset="-122"/>
                 <a:cs typeface="Tajawal" pitchFamily="34" charset="-120"/>
               </a:rPr>
-              <a:t>يتعلم من تصحيحات السياح فتصل إلى كل الأجهزة مع التحديث، ويتحسن كلما استعمل، ونوظف الذكاء الاصطناعي مرة أخرى في توليد الرواية المسموعة بتسع وعشرين لغة بنماذج نطق مفتوحة المصدر</a:t>
+              <a:t>يتحسن مع كل تصحيح من السياح، ونوظف الذكاء الاصطناعي مرة أخرى في توليد الرواية المسموعة في 29 لغة</a:t>
             </a:r>
             <a:endParaRPr lang="en-US" sz="1250" dirty="0"/>
           </a:p>
@@ -9336,7 +9336,7 @@
                 <a:ea typeface="Tajawal" pitchFamily="34" charset="-122"/>
                 <a:cs typeface="Tajawal" pitchFamily="34" charset="-120"/>
               </a:rPr>
-              <a:t>جبة مسجلة في قائمة التراث العالمي لليونسكو وفيها مئات النقوش، لكن السائح يقف أمام الصخرة فلا يعرف ما أمامه ولا كم عمره، ولا تغطية للشبكة في الموقع</a:t>
+              <a:t>جبة موقع تراث عالمي فيه مئات النقوش، والسائح يقف أمامها لا يعرف ما يرى</a:t>
             </a:r>
             <a:endParaRPr lang="en-US" sz="1250" dirty="0"/>
           </a:p>
@@ -9468,7 +9468,7 @@
                 <a:ea typeface="Tajawal" pitchFamily="34" charset="-122"/>
                 <a:cs typeface="Tajawal" pitchFamily="34" charset="-120"/>
               </a:rPr>
-              <a:t>السياح الذين يزورون النقوش، سواء من داخل المملكة أو من خارجها، والرحلات المدرسية والجامعية، وهيئة التراث ومركز الزوار، والمنشآت المحلية التي تريد الوصول إلى السائح</a:t>
+              <a:t>السياح الذين يزورون النقوش، سواء من داخل المملكة أو من خارجها، والرحلات المدرسية، وهيئة التراث</a:t>
             </a:r>
             <a:endParaRPr lang="en-US" sz="1250" dirty="0"/>
           </a:p>
@@ -9600,7 +9600,7 @@
                 <a:ea typeface="Tajawal" pitchFamily="34" charset="-122"/>
                 <a:cs typeface="Tajawal" pitchFamily="34" charset="-120"/>
               </a:rPr>
-              <a:t>سياح من كل مكان وبكل لغة، وموقع في الصحراء المفتوحة، فكل حل يعتمد على السحابة يتوقف هناك، وكل حل بلغة واحدة لا يخدم أكثر السياح</a:t>
+              <a:t>سياح بلغات كثيرة في صحراء بلا شبكة، فلا يخدمهم حل سحابي ولا حل بلغة واحدة</a:t>
             </a:r>
             <a:endParaRPr lang="en-US" sz="1250" dirty="0"/>
           </a:p>
@@ -9732,7 +9732,7 @@
                 <a:ea typeface="Tajawal" pitchFamily="34" charset="-122"/>
                 <a:cs typeface="Tajawal" pitchFamily="34" charset="-120"/>
               </a:rPr>
-              <a:t>للسائح أن يفهم ما أمامه بلغته وبصوت مسموع، وللجهة المشغلة تجربة سائح أفضل دون أي تكلفة تشغيل ولا بنية تحتية تحتاج إلى إدارة</a:t>
+              <a:t>السائح يفهم ما يرى بلغته، والجهة المشغلة تقدم تجربة أفضل مجانا</a:t>
             </a:r>
             <a:endParaRPr lang="en-US" sz="1250" dirty="0"/>
           </a:p>

--- a/athr-aja-submission.pptx
+++ b/athr-aja-submission.pptx
@@ -9336,7 +9336,7 @@
                 <a:ea typeface="Tajawal" pitchFamily="34" charset="-122"/>
                 <a:cs typeface="Tajawal" pitchFamily="34" charset="-120"/>
               </a:rPr>
-              <a:t>جبة موقع تراث عالمي فيه مئات النقوش، والسائح يقف أمامها لا يعرف ما يرى</a:t>
+              <a:t>في مواقع التراث حول العالم آلاف النقوش الصخرية، والسائح يقف أمامها لا يعرف ما يرى</a:t>
             </a:r>
             <a:endParaRPr lang="en-US" sz="1250" dirty="0"/>
           </a:p>

--- a/athr-aja-submission.pptx
+++ b/athr-aja-submission.pptx
@@ -9336,7 +9336,7 @@
                 <a:ea typeface="Tajawal" pitchFamily="34" charset="-122"/>
                 <a:cs typeface="Tajawal" pitchFamily="34" charset="-120"/>
               </a:rPr>
-              <a:t>في مواقع التراث حول العالم آلاف النقوش الصخرية، والسائح يقف أمامها لا يعرف ما يرى</a:t>
+              <a:t>في مواقع التراث حول العالم آلاف النقوش الصخرية، وغالبا ما يقف السائح أمامها دون أن يعرف ما يرى</a:t>
             </a:r>
             <a:endParaRPr lang="en-US" sz="1250" dirty="0"/>
           </a:p>

--- a/athr-aja-submission.pptx
+++ b/athr-aja-submission.pptx
@@ -3587,7 +3587,7 @@
                 <a:ea typeface="Tajawal" pitchFamily="34" charset="-122"/>
                 <a:cs typeface="Tajawal" pitchFamily="34" charset="-120"/>
               </a:rPr>
-              <a:t>والسائح نفسه: مسحات مجانية، ثم باقات إضافية</a:t>
+              <a:t>والسائح نفسه، والتطبيق مجاني له دائما</a:t>
             </a:r>
             <a:endParaRPr lang="en-US" sz="1250" dirty="0"/>
           </a:p>
@@ -4086,8 +4086,8 @@
         </p:nvSpPr>
         <p:spPr>
           <a:xfrm>
-            <a:off x="5181448" y="5138928"/>
-            <a:ext cx="4166464" cy="1225296"/>
+            <a:off x="777240" y="5138928"/>
+            <a:ext cx="8570671" cy="1225296"/>
           </a:xfrm>
           <a:prstGeom prst="roundRect">
             <a:avLst>
@@ -4113,8 +4113,8 @@
         </p:nvSpPr>
         <p:spPr>
           <a:xfrm>
-            <a:off x="5400904" y="5248656"/>
-            <a:ext cx="3727552" cy="292608"/>
+            <a:off x="996696" y="5248656"/>
+            <a:ext cx="8131759" cy="292608"/>
           </a:xfrm>
           <a:prstGeom prst="rect">
             <a:avLst/>
@@ -4152,8 +4152,8 @@
         </p:nvSpPr>
         <p:spPr>
           <a:xfrm>
-            <a:off x="5400904" y="5559552"/>
-            <a:ext cx="3727552" cy="731520"/>
+            <a:off x="996696" y="5559552"/>
+            <a:ext cx="8131759" cy="731520"/>
           </a:xfrm>
           <a:prstGeom prst="rect">
             <a:avLst/>
@@ -4181,114 +4181,6 @@
                 <a:cs typeface="Tajawal" pitchFamily="34" charset="-120"/>
               </a:rPr>
               <a:t>بعد المسح يقترح التطبيق أقرب شريك، فيحجز السائح منه، ويدفع الشريك عمولة عن كل حجز</a:t>
-            </a:r>
-            <a:endParaRPr lang="en-US" sz="1150" dirty="0"/>
-          </a:p>
-        </p:txBody>
-      </p:sp>
-      <p:sp>
-        <p:nvSpPr>
-          <p:cNvPr id="22" name="Shape 18"/>
-          <p:cNvSpPr/>
-          <p:nvPr/>
-        </p:nvSpPr>
-        <p:spPr>
-          <a:xfrm>
-            <a:off x="777240" y="5138928"/>
-            <a:ext cx="4166464" cy="1225296"/>
-          </a:xfrm>
-          <a:prstGeom prst="roundRect">
-            <a:avLst>
-              <a:gd name="adj" fmla="val 5970"/>
-            </a:avLst>
-          </a:prstGeom>
-          <a:solidFill>
-            <a:srgbClr val="E9E2FB"/>
-          </a:solidFill>
-          <a:ln w="9525">
-            <a:solidFill>
-              <a:srgbClr val="D9E2EC"/>
-            </a:solidFill>
-            <a:prstDash val="solid"/>
-          </a:ln>
-        </p:spPr>
-      </p:sp>
-      <p:sp>
-        <p:nvSpPr>
-          <p:cNvPr id="23" name="Text 19"/>
-          <p:cNvSpPr/>
-          <p:nvPr/>
-        </p:nvSpPr>
-        <p:spPr>
-          <a:xfrm>
-            <a:off x="996696" y="5248656"/>
-            <a:ext cx="3727552" cy="292608"/>
-          </a:xfrm>
-          <a:prstGeom prst="rect">
-            <a:avLst/>
-          </a:prstGeom>
-          <a:noFill/>
-          <a:ln/>
-        </p:spPr>
-        <p:txBody>
-          <a:bodyPr wrap="square" lIns="0" tIns="0" rIns="0" bIns="0" rtlCol="0" anchor="ctr"/>
-          <a:lstStyle/>
-          <a:p>
-            <a:pPr rtl="1" algn="r" indent="0" marL="0">
-              <a:buNone/>
-            </a:pPr>
-            <a:r>
-              <a:rPr lang="en-US" sz="1350" b="1" dirty="0">
-                <a:solidFill>
-                  <a:srgbClr val="4B2E9E"/>
-                </a:solidFill>
-                <a:latin typeface="Tajawal" pitchFamily="34" charset="0"/>
-                <a:ea typeface="Tajawal" pitchFamily="34" charset="-122"/>
-                <a:cs typeface="Tajawal" pitchFamily="34" charset="-120"/>
-              </a:rPr>
-              <a:t>باقات المسح</a:t>
-            </a:r>
-            <a:endParaRPr lang="en-US" sz="1350" dirty="0"/>
-          </a:p>
-        </p:txBody>
-      </p:sp>
-      <p:sp>
-        <p:nvSpPr>
-          <p:cNvPr id="24" name="Text 20"/>
-          <p:cNvSpPr/>
-          <p:nvPr/>
-        </p:nvSpPr>
-        <p:spPr>
-          <a:xfrm>
-            <a:off x="996696" y="5559552"/>
-            <a:ext cx="3727552" cy="731520"/>
-          </a:xfrm>
-          <a:prstGeom prst="rect">
-            <a:avLst/>
-          </a:prstGeom>
-          <a:noFill/>
-          <a:ln/>
-        </p:spPr>
-        <p:txBody>
-          <a:bodyPr wrap="square" lIns="0" tIns="0" rIns="0" bIns="0" rtlCol="0" anchor="t"/>
-          <a:lstStyle/>
-          <a:p>
-            <a:pPr rtl="1" algn="r" indent="0" marL="0">
-              <a:lnSpc>
-                <a:spcPts val="1700"/>
-              </a:lnSpc>
-              <a:buNone/>
-            </a:pPr>
-            <a:r>
-              <a:rPr lang="en-US" sz="1150" dirty="0">
-                <a:solidFill>
-                  <a:srgbClr val="4B5B6E"/>
-                </a:solidFill>
-                <a:latin typeface="Tajawal" pitchFamily="34" charset="0"/>
-                <a:ea typeface="Tajawal" pitchFamily="34" charset="-122"/>
-                <a:cs typeface="Tajawal" pitchFamily="34" charset="-120"/>
-              </a:rPr>
-              <a:t>مسحات مجانية لكل سائح، ثم باقات إضافية من داخل التطبيق، والقصص مجانية دائما</a:t>
             </a:r>
             <a:endParaRPr lang="en-US" sz="1150" dirty="0"/>
           </a:p>

--- a/athr-aja-submission.pptx
+++ b/athr-aja-submission.pptx
@@ -5942,16 +5942,40 @@
           </a:prstGeom>
         </p:spPr>
       </p:pic>
-      <p:sp>
-        <p:nvSpPr>
-          <p:cNvPr id="6" name="Text 1"/>
-          <p:cNvSpPr/>
-          <p:nvPr/>
-        </p:nvSpPr>
-        <p:spPr>
-          <a:xfrm>
-            <a:off x="4579017" y="1463040"/>
-            <a:ext cx="6835438" cy="2286000"/>
+      <p:pic>
+        <p:nvPicPr>
+          <p:cNvPr id="6" name="Image 3" descr="preencoded.png">    </p:cNvPr>
+          <p:cNvPicPr>
+            <a:picLocks noChangeAspect="1"/>
+          </p:cNvPicPr>
+          <p:nvPr/>
+        </p:nvPicPr>
+        <p:blipFill>
+          <a:blip r:embed="rId4"/>
+          <a:stretch>
+            <a:fillRect/>
+          </a:stretch>
+        </p:blipFill>
+        <p:spPr>
+          <a:xfrm>
+            <a:off x="10134295" y="1371600"/>
+            <a:ext cx="1280160" cy="1280160"/>
+          </a:xfrm>
+          <a:prstGeom prst="rect">
+            <a:avLst/>
+          </a:prstGeom>
+        </p:spPr>
+      </p:pic>
+      <p:sp>
+        <p:nvSpPr>
+          <p:cNvPr id="7" name="Text 1"/>
+          <p:cNvSpPr/>
+          <p:nvPr/>
+        </p:nvSpPr>
+        <p:spPr>
+          <a:xfrm>
+            <a:off x="4579017" y="1371600"/>
+            <a:ext cx="5235238" cy="2377440"/>
           </a:xfrm>
           <a:prstGeom prst="rect">
             <a:avLst/>
@@ -6004,7 +6028,7 @@
                 <a:ea typeface="Tajawal" pitchFamily="34" charset="-122"/>
                 <a:cs typeface="Tajawal" pitchFamily="34" charset="-120"/>
               </a:rPr>
-              <a:t>يرسم مسار رحلة السائح كاملا، ومعه ماسح ذكي يعمل بنموذج DINOv3</a:t>
+              <a:t>يرسم مسار الرحلة كاملا، ومعه ماسح ذكي بنموذج DINOv3</a:t>
             </a:r>
             <a:endParaRPr lang="en-US" sz="1500" dirty="0"/>
           </a:p>
@@ -6035,7 +6059,7 @@
       </p:sp>
       <p:sp>
         <p:nvSpPr>
-          <p:cNvPr id="7" name="Shape 2"/>
+          <p:cNvPr id="8" name="Shape 2"/>
           <p:cNvSpPr/>
           <p:nvPr/>
         </p:nvSpPr>
@@ -6062,7 +6086,7 @@
       </p:sp>
       <p:sp>
         <p:nvSpPr>
-          <p:cNvPr id="8" name="Text 3"/>
+          <p:cNvPr id="9" name="Text 3"/>
           <p:cNvSpPr/>
           <p:nvPr/>
         </p:nvSpPr>
@@ -6101,7 +6125,7 @@
       </p:sp>
       <p:sp>
         <p:nvSpPr>
-          <p:cNvPr id="9" name="Text 4"/>
+          <p:cNvPr id="10" name="Text 4"/>
           <p:cNvSpPr/>
           <p:nvPr/>
         </p:nvSpPr>
@@ -6163,7 +6187,7 @@
       </p:sp>
       <p:sp>
         <p:nvSpPr>
-          <p:cNvPr id="10" name="Shape 5"/>
+          <p:cNvPr id="11" name="Shape 5"/>
           <p:cNvSpPr/>
           <p:nvPr/>
         </p:nvSpPr>
@@ -6190,7 +6214,7 @@
       </p:sp>
       <p:sp>
         <p:nvSpPr>
-          <p:cNvPr id="11" name="Text 6"/>
+          <p:cNvPr id="12" name="Text 6"/>
           <p:cNvSpPr/>
           <p:nvPr/>
         </p:nvSpPr>
@@ -6229,7 +6253,7 @@
       </p:sp>
       <p:sp>
         <p:nvSpPr>
-          <p:cNvPr id="12" name="Text 7"/>
+          <p:cNvPr id="13" name="Text 7"/>
           <p:cNvSpPr/>
           <p:nvPr/>
         </p:nvSpPr>
@@ -6291,7 +6315,7 @@
       </p:sp>
       <p:sp>
         <p:nvSpPr>
-          <p:cNvPr id="13" name="Shape 8"/>
+          <p:cNvPr id="14" name="Shape 8"/>
           <p:cNvSpPr/>
           <p:nvPr/>
         </p:nvSpPr>
@@ -6318,7 +6342,7 @@
       </p:sp>
       <p:sp>
         <p:nvSpPr>
-          <p:cNvPr id="14" name="Text 9"/>
+          <p:cNvPr id="15" name="Text 9"/>
           <p:cNvSpPr/>
           <p:nvPr/>
         </p:nvSpPr>
@@ -6357,7 +6381,7 @@
       </p:sp>
       <p:sp>
         <p:nvSpPr>
-          <p:cNvPr id="15" name="Text 10"/>
+          <p:cNvPr id="16" name="Text 10"/>
           <p:cNvSpPr/>
           <p:nvPr/>
         </p:nvSpPr>
@@ -6419,7 +6443,7 @@
       </p:sp>
       <p:sp>
         <p:nvSpPr>
-          <p:cNvPr id="16" name="Shape 11"/>
+          <p:cNvPr id="17" name="Shape 11"/>
           <p:cNvSpPr/>
           <p:nvPr/>
         </p:nvSpPr>
@@ -6446,7 +6470,7 @@
       </p:sp>
       <p:sp>
         <p:nvSpPr>
-          <p:cNvPr id="17" name="Text 12"/>
+          <p:cNvPr id="18" name="Text 12"/>
           <p:cNvSpPr/>
           <p:nvPr/>
         </p:nvSpPr>
@@ -6485,7 +6509,7 @@
       </p:sp>
       <p:sp>
         <p:nvSpPr>
-          <p:cNvPr id="18" name="Text 13"/>
+          <p:cNvPr id="19" name="Text 13"/>
           <p:cNvSpPr/>
           <p:nvPr/>
         </p:nvSpPr>
@@ -6524,7 +6548,7 @@
       </p:sp>
       <p:sp>
         <p:nvSpPr>
-          <p:cNvPr id="19" name="Shape 14"/>
+          <p:cNvPr id="20" name="Shape 14"/>
           <p:cNvSpPr/>
           <p:nvPr/>
         </p:nvSpPr>
@@ -6551,7 +6575,7 @@
       </p:sp>
       <p:sp>
         <p:nvSpPr>
-          <p:cNvPr id="20" name="Text 15"/>
+          <p:cNvPr id="21" name="Text 15"/>
           <p:cNvSpPr/>
           <p:nvPr/>
         </p:nvSpPr>
@@ -6590,7 +6614,7 @@
       </p:sp>
       <p:sp>
         <p:nvSpPr>
-          <p:cNvPr id="21" name="Text 16"/>
+          <p:cNvPr id="22" name="Text 16"/>
           <p:cNvSpPr/>
           <p:nvPr/>
         </p:nvSpPr>

--- a/athr-aja-submission.pptx
+++ b/athr-aja-submission.pptx
@@ -5958,8 +5958,8 @@
         </p:blipFill>
         <p:spPr>
           <a:xfrm>
-            <a:off x="10134295" y="1371600"/>
-            <a:ext cx="1280160" cy="1280160"/>
+            <a:off x="10575223" y="1371600"/>
+            <a:ext cx="839232" cy="1188720"/>
           </a:xfrm>
           <a:prstGeom prst="rect">
             <a:avLst/>
@@ -5975,7 +5975,7 @@
         <p:spPr>
           <a:xfrm>
             <a:off x="4579017" y="1371600"/>
-            <a:ext cx="5235238" cy="2377440"/>
+            <a:ext cx="5676166" cy="2377440"/>
           </a:xfrm>
           <a:prstGeom prst="rect">
             <a:avLst/>

--- a/athr-aja-submission.pptx
+++ b/athr-aja-submission.pptx
@@ -6005,7 +6005,7 @@
                 <a:ea typeface="Tajawal" pitchFamily="34" charset="-122"/>
                 <a:cs typeface="Tajawal" pitchFamily="34" charset="-120"/>
               </a:rPr>
-              <a:t>أثر دليل تراثي ذكي لمنطقة حائل، يعمل دون اتصال بالإنترنت</a:t>
+              <a:t>أثر دليل تراثي ذكي</a:t>
             </a:r>
             <a:endParaRPr lang="en-US" sz="1500" dirty="0"/>
           </a:p>

--- a/athr-aja-submission.pptx
+++ b/athr-aja-submission.pptx
@@ -6028,7 +6028,7 @@
                 <a:ea typeface="Tajawal" pitchFamily="34" charset="-122"/>
                 <a:cs typeface="Tajawal" pitchFamily="34" charset="-120"/>
               </a:rPr>
-              <a:t>يرسم مسار الرحلة كاملا، ومعه ماسح ذكي بنموذج DINOv3</a:t>
+              <a:t>يرسم مسار الرحلة كاملا، ويشمل ماسحا ذكيا بنموذج DINOv3</a:t>
             </a:r>
             <a:endParaRPr lang="en-US" sz="1500" dirty="0"/>
           </a:p>

--- a/athr-aja-submission.pptx
+++ b/athr-aja-submission.pptx
@@ -6645,7 +6645,7 @@
                 <a:ea typeface="Tajawal" pitchFamily="34" charset="-122"/>
                 <a:cs typeface="Tajawal" pitchFamily="34" charset="-120"/>
               </a:rPr>
-              <a:t>مؤرخ</a:t>
+              <a:t>مؤرخ ومرشد سياحي</a:t>
             </a:r>
             <a:endParaRPr lang="en-US" sz="1250" dirty="0"/>
           </a:p>

--- a/athr-aja-submission.pptx
+++ b/athr-aja-submission.pptx
@@ -6540,7 +6540,7 @@
                 <a:ea typeface="Tajawal" pitchFamily="34" charset="-122"/>
                 <a:cs typeface="Tajawal" pitchFamily="34" charset="-120"/>
               </a:rPr>
-              <a:t>قائد الفريق</a:t>
+              <a:t>قائد الفريق ومبرمج</a:t>
             </a:r>
             <a:endParaRPr lang="en-US" sz="1250" dirty="0"/>
           </a:p>

--- a/athr-aja-submission.pptx
+++ b/athr-aja-submission.pptx
@@ -6005,7 +6005,7 @@
                 <a:ea typeface="Tajawal" pitchFamily="34" charset="-122"/>
                 <a:cs typeface="Tajawal" pitchFamily="34" charset="-120"/>
               </a:rPr>
-              <a:t>أثر دليل تراثي ذكي</a:t>
+              <a:t>أثر دليل تراثي ذكي يحول كل نقش صخري إلى قصة يسمعها السائح بلغته</a:t>
             </a:r>
             <a:endParaRPr lang="en-US" sz="1500" dirty="0"/>
           </a:p>
@@ -6028,7 +6028,7 @@
                 <a:ea typeface="Tajawal" pitchFamily="34" charset="-122"/>
                 <a:cs typeface="Tajawal" pitchFamily="34" charset="-120"/>
               </a:rPr>
-              <a:t>يرسم مسار الرحلة كاملا، ويشمل ماسحا ذكيا بنموذج DINOv3</a:t>
+              <a:t>يصور السائح النقش، فيسميه ماسح ذكي بنموذج DINOv3 من بين مئات النقوش، ويروي قصته في 29 لغة</a:t>
             </a:r>
             <a:endParaRPr lang="en-US" sz="1500" dirty="0"/>
           </a:p>
@@ -6051,7 +6051,7 @@
                 <a:ea typeface="Tajawal" pitchFamily="34" charset="-122"/>
                 <a:cs typeface="Tajawal" pitchFamily="34" charset="-120"/>
               </a:rPr>
-              <a:t>يصور السائح النقش، فيسميه الماسح ويروي قصته بلغته</a:t>
+              <a:t>ويرسم له مسار رحلته كاملا، ويعمل في قلب الصحراء دون إنترنت</a:t>
             </a:r>
             <a:endParaRPr lang="en-US" sz="1500" dirty="0"/>
           </a:p>
